--- a/docs/MaskGuard_Final_Deck.pptx
+++ b/docs/MaskGuard_Final_Deck.pptx
@@ -15,9 +15,10 @@
     <p:sldId id="263" r:id="rId9"/>
     <p:sldId id="264" r:id="rId10"/>
     <p:sldId id="265" r:id="rId11"/>
+    <p:sldId id="266" r:id="rId12"/>
   </p:sldIdLst>
   <p:notesMasterIdLst>
-    <p:notesMasterId r:id="rId12"/>
+    <p:notesMasterId r:id="rId13"/>
   </p:notesMasterIdLst>
   <p:sldSz cx="12192000" cy="6858000"/>
   <p:notesSz cx="6858000" cy="12192000"/>
@@ -116,50 +117,51 @@
   <p:extLst>
     <p:ext uri="{521415D9-36F7-43E2-AB2F-B90AF26B5E84}">
       <p14:sectionLst xmlns:p14="http://schemas.microsoft.com/office/powerpoint/2010/main">
-        <p14:section name="Opening" id="{d5554181-d31e-82c7-cb19-0db2ff9c90f9}">
+        <p14:section name="Opening" id="{030a500b-70ff-7e6b-0776-3afb48806a4e}">
           <p14:sldIdLst>
             <p14:sldId id="256"/>
           </p14:sldIdLst>
         </p14:section>
-        <p14:section name="Problem" id="{584d2958-9f9c-5178-42c4-acc1173701a5}">
+        <p14:section name="Problem" id="{68f4963f-480e-6a8c-e047-02c35e59195b}">
           <p14:sldIdLst>
             <p14:sldId id="257"/>
           </p14:sldIdLst>
         </p14:section>
-        <p14:section name="Solution" id="{e9ec87a6-75f3-b8db-df22-03dda84001d1}">
+        <p14:section name="Solution" id="{8a541209-7930-8434-96e1-d3afc8b12c3c}">
           <p14:sldIdLst>
             <p14:sldId id="258"/>
           </p14:sldIdLst>
         </p14:section>
-        <p14:section name="Architecture" id="{9da5b2f5-e1bd-fa22-c4c2-a0f20ca24405}">
+        <p14:section name="Architecture" id="{2d0a4e69-622e-717a-9e11-db31483fafba}">
           <p14:sldIdLst>
             <p14:sldId id="259"/>
           </p14:sldIdLst>
         </p14:section>
-        <p14:section name="Role of AI" id="{4b6e2446-d35d-bf5c-2fb8-05fc16a44b0d}">
+        <p14:section name="Role of AI" id="{005a0e1c-7889-2738-5bb9-ee64eb9db89e}">
           <p14:sldIdLst>
             <p14:sldId id="260"/>
+            <p14:sldId id="261"/>
           </p14:sldIdLst>
         </p14:section>
-        <p14:section name="Demo" id="{f0039598-d1f4-20e6-c62c-3c23162d56c6}">
+        <p14:section name="Demo" id="{0b5701c3-4347-d3f0-e5d4-a65b39924727}">
           <p14:sldIdLst>
-            <p14:sldId id="261"/>
             <p14:sldId id="262"/>
-          </p14:sldIdLst>
-        </p14:section>
-        <p14:section name="Proof" id="{6d5cc329-7e00-5775-2d0f-bf5ed42c735d}">
-          <p14:sldIdLst>
             <p14:sldId id="263"/>
           </p14:sldIdLst>
         </p14:section>
-        <p14:section name="Differentiators" id="{e807eb40-44d0-2480-295b-ef59dca9d0a7}">
+        <p14:section name="Proof" id="{7f175d57-9217-7195-b4cc-03e82e8ec5fe}">
           <p14:sldIdLst>
             <p14:sldId id="264"/>
           </p14:sldIdLst>
         </p14:section>
-        <p14:section name="Close" id="{83796ef7-513b-4b50-948e-5377c29ea5fc}">
+        <p14:section name="Differentiators" id="{6b357692-308f-4279-9565-1c9874bc513c}">
           <p14:sldIdLst>
             <p14:sldId id="265"/>
+          </p14:sldIdLst>
+        </p14:section>
+        <p14:section name="Close" id="{507da476-7332-8028-9571-ae4690552630}">
+          <p14:sldIdLst>
+            <p14:sldId id="266"/>
           </p14:sldIdLst>
         </p14:section>
       </p14:sectionLst>
@@ -654,7 +656,7 @@
           <a:p>
             <a:r>
               <a:rPr lang="en-US" dirty="0"/>
-              <a:t>[12:00–12:30] Close: what works today, the limits we state ourselves, the next 90 days. Last line, slowly: 'Finds it. Hides it. Proves it.' Then: 'Happy to take questions.'</a:t>
+              <a:t>[11:00–12:00] Many teams in this problem use encryption or quantum-safe ideas. Be respectful: that work protects data from outsiders and it matters. But it answers a different question. Once the bank's own app decrypts the data, every employee sees everything. MaskGuard answers 'what should this employee see' — and it works alongside any encryption. Walk the grid by rows: only MaskGuard finds the data by itself, gives each role its own view, stops guess-the-value searches, and never copies the data. Then the market in one breath: $1.47B → $2.6B by 2030, DPDP from May 2027, and our first buyers are the banks that can't pay six figures.</a:t>
             </a:r>
             <a:endParaRPr lang="en-US" dirty="0"/>
           </a:p>
@@ -678,6 +680,94 @@
             <a:fld id="{F7021451-1387-4CA6-816F-3879F97B5CBC}" type="slidenum">
               <a:rPr lang="en-US"/>
               <a:t>10</a:t>
+            </a:fld>
+            <a:endParaRPr lang="en-US"/>
+          </a:p>
+        </p:txBody>
+      </p:sp>
+    </p:spTree>
+    <p:extLst>
+      <p:ext uri="{BB962C8B-B14F-4D97-AF65-F5344CB8AC3E}">
+        <p14:creationId xmlns:p14="http://schemas.microsoft.com/office/powerpoint/2010/main" val="1024086991"/>
+      </p:ext>
+    </p:extLst>
+  </p:cSld>
+  <p:clrMapOvr>
+    <a:masterClrMapping/>
+  </p:clrMapOvr>
+</p:notes>
+</file>
+
+<file path=ppt/notesSlides/notesSlide11.xml><?xml version="1.0" encoding="utf-8"?>
+<p:notes xmlns:a="http://schemas.openxmlformats.org/drawingml/2006/main" xmlns:r="http://schemas.openxmlformats.org/officeDocument/2006/relationships" xmlns:p="http://schemas.openxmlformats.org/presentationml/2006/main">
+  <p:cSld>
+    <p:spTree>
+      <p:nvGrpSpPr>
+        <p:cNvPr id="1" name=""/>
+        <p:cNvGrpSpPr/>
+        <p:nvPr/>
+      </p:nvGrpSpPr>
+      <p:grpSpPr>
+        <a:xfrm>
+          <a:off x="0" y="0"/>
+          <a:ext cx="0" cy="0"/>
+          <a:chOff x="0" y="0"/>
+          <a:chExt cx="0" cy="0"/>
+        </a:xfrm>
+      </p:grpSpPr>
+      <p:sp>
+        <p:nvSpPr>
+          <p:cNvPr id="2" name="Slide Image Placeholder 1"/>
+          <p:cNvSpPr>
+            <a:spLocks noGrp="1" noRot="1" noChangeAspect="1"/>
+          </p:cNvSpPr>
+          <p:nvPr>
+            <p:ph type="sldImg"/>
+          </p:nvPr>
+        </p:nvSpPr>
+        <p:spPr/>
+      </p:sp>
+      <p:sp>
+        <p:nvSpPr>
+          <p:cNvPr id="3" name="Notes Placeholder 2"/>
+          <p:cNvSpPr>
+            <a:spLocks noGrp="1"/>
+          </p:cNvSpPr>
+          <p:nvPr>
+            <p:ph type="body" idx="1"/>
+          </p:nvPr>
+        </p:nvSpPr>
+        <p:spPr/>
+        <p:txBody>
+          <a:bodyPr/>
+          <a:lstStyle/>
+          <a:p>
+            <a:r>
+              <a:rPr lang="en-US" dirty="0"/>
+              <a:t>[12:00–12:30] Close: what works today, the limits we state ourselves, the next 90 days. Last line, slowly: 'Finds it. Hides it. Proves it.' Then: 'Happy to take questions.'</a:t>
+            </a:r>
+            <a:endParaRPr lang="en-US" dirty="0"/>
+          </a:p>
+        </p:txBody>
+      </p:sp>
+      <p:sp>
+        <p:nvSpPr>
+          <p:cNvPr id="4" name="Slide Number Placeholder 3"/>
+          <p:cNvSpPr>
+            <a:spLocks noGrp="1"/>
+          </p:cNvSpPr>
+          <p:nvPr>
+            <p:ph type="sldNum" sz="quarter" idx="10"/>
+          </p:nvPr>
+        </p:nvSpPr>
+        <p:spPr/>
+        <p:txBody>
+          <a:bodyPr/>
+          <a:lstStyle/>
+          <a:p>
+            <a:fld id="{F7021451-1387-4CA6-816F-3879F97B5CBC}" type="slidenum">
+              <a:rPr lang="en-US"/>
+              <a:t>11</a:t>
             </a:fld>
             <a:endParaRPr lang="en-US"/>
           </a:p>
@@ -1094,7 +1184,7 @@
           <a:p>
             <a:r>
               <a:rPr lang="en-US" dirty="0"/>
-              <a:t>[6:00–8:00 · Parameter 5: demo, part 1 — the dashboard] Live: open the Control Room, sign in as support_ravi, run the customer query in the Masking playground; show 'Why each field looks the way it does'. Sign out, sign in as analyst_kavya, run again. If the live demo stalls, this slide is the fallback — it is a real capture. Say the one-liners on the right, nothing more.</a:t>
+              <a:t>[~1 min, right after Role of AI] Say it calmly, never mockingly: 'We looked at LLMs and quantum approaches and chose classic machine learning on purpose. A bank's customer data should never leave the bank to be classified, and the same column must always get the same answer. Our model is a 0.45 MB file, runs on a normal CPU in about 3 milliseconds a column, and scores 0.999 on an external benchmark. On quantum: we're already quantum-safe where it matters — our masking uses only symmetric cryptography, HMAC-SHA-256 and SHA-256, which quantum computers don't break the way they break RSA. And quantum machine learning hasn't beaten classical models on table data in recent benchmarks. We built what works in a bank today.' If asked about HTTPS: the TLS layer is the server's library; it can use post-quantum key exchange as a deployment setting.</a:t>
             </a:r>
             <a:endParaRPr lang="en-US" dirty="0"/>
           </a:p>
@@ -1182,7 +1272,7 @@
           <a:p>
             <a:r>
               <a:rPr lang="en-US" dirty="0"/>
-              <a:t>[8:00–9:30 · Parameter 5: demo, part 2 — the command line] Live: maskguard compare with the same customer query for the three users; then, as support_ravi, search for a real PAN → 0 rows; then try an UPDATE → refused; then maskguard integrity proof. The point: the dashboard and the command line are two doors to the same engine, so the answer never differs.</a:t>
+              <a:t>[6:00–8:00 · Parameter 5: demo, part 1 — the dashboard] Live: open the Control Room, sign in as support_ravi, run the customer query in the Masking playground; show 'Why each field looks the way it does'. Sign out, sign in as analyst_kavya, run again. If the live demo stalls, this slide is the fallback — it is a real capture. Say the one-liners on the right, nothing more.</a:t>
             </a:r>
             <a:endParaRPr lang="en-US" dirty="0"/>
           </a:p>
@@ -1270,7 +1360,7 @@
           <a:p>
             <a:r>
               <a:rPr lang="en-US" dirty="0"/>
-              <a:t>[9:30–11:00 · Parameter 4: completeness — functional, not a prototype] Read the two dark tiles first: 35 of 35 found, 0 leaked. Then the four light ones in one breath. Be open about the first try: 22 of 35 — nothing leaked, unfound columns stay hidden by default — and we fixed general causes (banking abbreviations, IDs that fail their checksums), then checked the external benchmark did not get worse. Full write-up: docs/SAFFRON_VALIDATION.md.</a:t>
+              <a:t>[8:00–9:30 · Parameter 5: demo, part 2 — the command line] Live: maskguard compare with the same customer query for the three users; then, as support_ravi, search for a real PAN → 0 rows; then try an UPDATE → refused; then maskguard integrity proof. The point: the dashboard and the command line are two doors to the same engine, so the answer never differs.</a:t>
             </a:r>
             <a:endParaRPr lang="en-US" dirty="0"/>
           </a:p>
@@ -1358,7 +1448,7 @@
           <a:p>
             <a:r>
               <a:rPr lang="en-US" dirty="0"/>
-              <a:t>[11:00–12:00] Many teams in this problem use encryption or quantum-safe ideas. Be respectful: that work protects data from outsiders and it matters. But it answers a different question. Once the bank's own app decrypts the data, every employee sees everything. MaskGuard answers 'what should this employee see' — and it works alongside any encryption. Walk the grid by rows: only MaskGuard finds the data by itself, gives each role its own view, stops guess-the-value searches, and never copies the data. Then the market in one breath: $1.47B → $2.6B by 2030, DPDP from May 2027, and our first buyers are the banks that can't pay six figures.</a:t>
+              <a:t>[9:30–11:00 · Parameter 4: completeness — functional, not a prototype] Read the two dark tiles first: 35 of 35 found, 0 leaked. Then the four light ones in one breath. Be open about the first try: 22 of 35 — nothing leaked, unfound columns stay hidden by default — and we fixed general causes (banking abbreviations, IDs that fail their checksums), then checked the external benchmark did not get worse. Full write-up: docs/SAFFRON_VALIDATION.md.</a:t>
             </a:r>
             <a:endParaRPr lang="en-US" dirty="0"/>
           </a:p>
@@ -2846,6 +2936,1610 @@
             <a:r>
               <a:rPr lang="en-US" sz="3000" b="1" dirty="0">
                 <a:solidFill>
+                  <a:schemeClr val="tx1"/>
+                </a:solidFill>
+                <a:latin typeface="Cambria" pitchFamily="34" charset="0"/>
+                <a:ea typeface="Cambria" pitchFamily="34" charset="-122"/>
+                <a:cs typeface="Cambria" pitchFamily="34" charset="-120"/>
+              </a:rPr>
+              <a:t>Why MaskGuard: what other approaches miss</a:t>
+            </a:r>
+            <a:endParaRPr lang="en-US" sz="3000" dirty="0"/>
+          </a:p>
+        </p:txBody>
+      </p:sp>
+      <p:sp>
+        <p:nvSpPr>
+          <p:cNvPr id="3" name="maskguard column"/>
+          <p:cNvSpPr/>
+          <p:nvPr/>
+        </p:nvSpPr>
+        <p:spPr>
+          <a:xfrm>
+            <a:off x="4480560" y="1143000"/>
+            <a:ext cx="1783080" cy="2706624"/>
+          </a:xfrm>
+          <a:prstGeom prst="roundRect">
+            <a:avLst>
+              <a:gd name="adj" fmla="val 4103"/>
+            </a:avLst>
+          </a:prstGeom>
+          <a:solidFill>
+            <a:srgbClr val="FDEBD0"/>
+          </a:solidFill>
+          <a:ln w="9525">
+            <a:solidFill>
+              <a:srgbClr val="FDEBD0"/>
+            </a:solidFill>
+            <a:prstDash val="solid"/>
+          </a:ln>
+        </p:spPr>
+      </p:sp>
+      <p:sp>
+        <p:nvSpPr>
+          <p:cNvPr id="4" name="Text 2"/>
+          <p:cNvSpPr txBox="1"/>
+          <p:nvPr/>
+        </p:nvSpPr>
+        <p:spPr>
+          <a:xfrm>
+            <a:off x="4480560" y="1179576"/>
+            <a:ext cx="1783080" cy="566928"/>
+          </a:xfrm>
+          <a:prstGeom prst="rect">
+            <a:avLst/>
+          </a:prstGeom>
+          <a:noFill/>
+          <a:ln/>
+        </p:spPr>
+        <p:txBody>
+          <a:bodyPr wrap="square" lIns="0" tIns="0" rIns="0" bIns="0" rtlCol="0" anchor="ctr"/>
+          <a:lstStyle/>
+          <a:p>
+            <a:pPr algn="ctr" indent="0" marL="0">
+              <a:buNone/>
+            </a:pPr>
+            <a:r>
+              <a:rPr lang="en-US" sz="1700" b="1" dirty="0">
+                <a:solidFill>
+                  <a:srgbClr val="D97706"/>
+                </a:solidFill>
+                <a:latin typeface="Calibri" pitchFamily="34" charset="0"/>
+                <a:ea typeface="Calibri" pitchFamily="34" charset="-122"/>
+                <a:cs typeface="Calibri" pitchFamily="34" charset="-120"/>
+              </a:rPr>
+              <a:t>MaskGuard</a:t>
+            </a:r>
+            <a:endParaRPr lang="en-US" sz="1700" dirty="0"/>
+          </a:p>
+        </p:txBody>
+      </p:sp>
+      <p:sp>
+        <p:nvSpPr>
+          <p:cNvPr id="5" name="Text 3"/>
+          <p:cNvSpPr txBox="1"/>
+          <p:nvPr/>
+        </p:nvSpPr>
+        <p:spPr>
+          <a:xfrm>
+            <a:off x="6263640" y="1179576"/>
+            <a:ext cx="1783080" cy="566928"/>
+          </a:xfrm>
+          <a:prstGeom prst="rect">
+            <a:avLst/>
+          </a:prstGeom>
+          <a:noFill/>
+          <a:ln/>
+        </p:spPr>
+        <p:txBody>
+          <a:bodyPr wrap="square" lIns="0" tIns="0" rIns="0" bIns="0" rtlCol="0" anchor="ctr"/>
+          <a:lstStyle/>
+          <a:p>
+            <a:pPr algn="ctr" indent="0" marL="0">
+              <a:buNone/>
+            </a:pPr>
+            <a:r>
+              <a:rPr lang="en-US" sz="1300" b="1" dirty="0">
+                <a:solidFill>
+                  <a:srgbClr val="1E3A5F"/>
+                </a:solidFill>
+                <a:latin typeface="Calibri" pitchFamily="34" charset="0"/>
+                <a:ea typeface="Calibri" pitchFamily="34" charset="-122"/>
+                <a:cs typeface="Calibri" pitchFamily="34" charset="-120"/>
+              </a:rPr>
+              <a:t>Encryption</a:t>
+            </a:r>
+            <a:endParaRPr lang="en-US" sz="1300" dirty="0"/>
+          </a:p>
+          <a:p>
+            <a:pPr algn="ctr" indent="0" marL="0">
+              <a:buNone/>
+            </a:pPr>
+            <a:r>
+              <a:rPr lang="en-US" sz="1300" b="1" dirty="0">
+                <a:solidFill>
+                  <a:srgbClr val="1E3A5F"/>
+                </a:solidFill>
+                <a:latin typeface="Calibri" pitchFamily="34" charset="0"/>
+                <a:ea typeface="Calibri" pitchFamily="34" charset="-122"/>
+                <a:cs typeface="Calibri" pitchFamily="34" charset="-120"/>
+              </a:rPr>
+              <a:t>(incl. quantum-safe)</a:t>
+            </a:r>
+            <a:endParaRPr lang="en-US" sz="1300" dirty="0"/>
+          </a:p>
+        </p:txBody>
+      </p:sp>
+      <p:sp>
+        <p:nvSpPr>
+          <p:cNvPr id="6" name="Text 4"/>
+          <p:cNvSpPr txBox="1"/>
+          <p:nvPr/>
+        </p:nvSpPr>
+        <p:spPr>
+          <a:xfrm>
+            <a:off x="8046720" y="1179576"/>
+            <a:ext cx="1783080" cy="566928"/>
+          </a:xfrm>
+          <a:prstGeom prst="rect">
+            <a:avLst/>
+          </a:prstGeom>
+          <a:noFill/>
+          <a:ln/>
+        </p:spPr>
+        <p:txBody>
+          <a:bodyPr wrap="square" lIns="0" tIns="0" rIns="0" bIns="0" rtlCol="0" anchor="ctr"/>
+          <a:lstStyle/>
+          <a:p>
+            <a:pPr algn="ctr" indent="0" marL="0">
+              <a:buNone/>
+            </a:pPr>
+            <a:r>
+              <a:rPr lang="en-US" sz="1300" b="1" dirty="0">
+                <a:solidFill>
+                  <a:srgbClr val="1E3A5F"/>
+                </a:solidFill>
+                <a:latin typeface="Calibri" pitchFamily="34" charset="0"/>
+                <a:ea typeface="Calibri" pitchFamily="34" charset="-122"/>
+                <a:cs typeface="Calibri" pitchFamily="34" charset="-120"/>
+              </a:rPr>
+              <a:t>Masked copy</a:t>
+            </a:r>
+            <a:endParaRPr lang="en-US" sz="1300" dirty="0"/>
+          </a:p>
+          <a:p>
+            <a:pPr algn="ctr" indent="0" marL="0">
+              <a:buNone/>
+            </a:pPr>
+            <a:r>
+              <a:rPr lang="en-US" sz="1300" b="1" dirty="0">
+                <a:solidFill>
+                  <a:srgbClr val="1E3A5F"/>
+                </a:solidFill>
+                <a:latin typeface="Calibri" pitchFamily="34" charset="0"/>
+                <a:ea typeface="Calibri" pitchFamily="34" charset="-122"/>
+                <a:cs typeface="Calibri" pitchFamily="34" charset="-120"/>
+              </a:rPr>
+              <a:t>of the database</a:t>
+            </a:r>
+            <a:endParaRPr lang="en-US" sz="1300" dirty="0"/>
+          </a:p>
+        </p:txBody>
+      </p:sp>
+      <p:sp>
+        <p:nvSpPr>
+          <p:cNvPr id="7" name="Text 5"/>
+          <p:cNvSpPr txBox="1"/>
+          <p:nvPr/>
+        </p:nvSpPr>
+        <p:spPr>
+          <a:xfrm>
+            <a:off x="9829800" y="1179576"/>
+            <a:ext cx="1783080" cy="566928"/>
+          </a:xfrm>
+          <a:prstGeom prst="rect">
+            <a:avLst/>
+          </a:prstGeom>
+          <a:noFill/>
+          <a:ln/>
+        </p:spPr>
+        <p:txBody>
+          <a:bodyPr wrap="square" lIns="0" tIns="0" rIns="0" bIns="0" rtlCol="0" anchor="ctr"/>
+          <a:lstStyle/>
+          <a:p>
+            <a:pPr algn="ctr" indent="0" marL="0">
+              <a:buNone/>
+            </a:pPr>
+            <a:r>
+              <a:rPr lang="en-US" sz="1300" b="1" dirty="0">
+                <a:solidFill>
+                  <a:srgbClr val="1E3A5F"/>
+                </a:solidFill>
+                <a:latin typeface="Calibri" pitchFamily="34" charset="0"/>
+                <a:ea typeface="Calibri" pitchFamily="34" charset="-122"/>
+                <a:cs typeface="Calibri" pitchFamily="34" charset="-120"/>
+              </a:rPr>
+              <a:t>Screen-only</a:t>
+            </a:r>
+            <a:endParaRPr lang="en-US" sz="1300" dirty="0"/>
+          </a:p>
+          <a:p>
+            <a:pPr algn="ctr" indent="0" marL="0">
+              <a:buNone/>
+            </a:pPr>
+            <a:r>
+              <a:rPr lang="en-US" sz="1300" b="1" dirty="0">
+                <a:solidFill>
+                  <a:srgbClr val="1E3A5F"/>
+                </a:solidFill>
+                <a:latin typeface="Calibri" pitchFamily="34" charset="0"/>
+                <a:ea typeface="Calibri" pitchFamily="34" charset="-122"/>
+                <a:cs typeface="Calibri" pitchFamily="34" charset="-120"/>
+              </a:rPr>
+              <a:t>masking</a:t>
+            </a:r>
+            <a:endParaRPr lang="en-US" sz="1300" dirty="0"/>
+          </a:p>
+        </p:txBody>
+      </p:sp>
+      <p:sp>
+        <p:nvSpPr>
+          <p:cNvPr id="8" name="row line 0"/>
+          <p:cNvSpPr/>
+          <p:nvPr/>
+        </p:nvSpPr>
+        <p:spPr>
+          <a:xfrm>
+            <a:off x="548640" y="1783080"/>
+            <a:ext cx="11064240" cy="0"/>
+          </a:xfrm>
+          <a:prstGeom prst="line">
+            <a:avLst/>
+          </a:prstGeom>
+          <a:noFill/>
+          <a:ln w="9525">
+            <a:solidFill>
+              <a:srgbClr val="CBD5E1"/>
+            </a:solidFill>
+            <a:prstDash val="solid"/>
+          </a:ln>
+        </p:spPr>
+      </p:sp>
+      <p:sp>
+        <p:nvSpPr>
+          <p:cNvPr id="9" name="Text 7"/>
+          <p:cNvSpPr txBox="1"/>
+          <p:nvPr/>
+        </p:nvSpPr>
+        <p:spPr>
+          <a:xfrm>
+            <a:off x="548640" y="1783080"/>
+            <a:ext cx="3840480" cy="502920"/>
+          </a:xfrm>
+          <a:prstGeom prst="rect">
+            <a:avLst/>
+          </a:prstGeom>
+          <a:noFill/>
+          <a:ln/>
+        </p:spPr>
+        <p:txBody>
+          <a:bodyPr wrap="square" lIns="0" tIns="0" rIns="0" bIns="0" rtlCol="0" anchor="ctr"/>
+          <a:lstStyle/>
+          <a:p>
+            <a:pPr indent="0" marL="0">
+              <a:buNone/>
+            </a:pPr>
+            <a:r>
+              <a:rPr lang="en-US" sz="1500" b="1" dirty="0">
+                <a:solidFill>
+                  <a:srgbClr val="0B1D33"/>
+                </a:solidFill>
+                <a:latin typeface="Calibri" pitchFamily="34" charset="0"/>
+                <a:ea typeface="Calibri" pitchFamily="34" charset="-122"/>
+                <a:cs typeface="Calibri" pitchFamily="34" charset="-120"/>
+              </a:rPr>
+              <a:t>Finds personal data by itself</a:t>
+            </a:r>
+            <a:endParaRPr lang="en-US" sz="1500" dirty="0"/>
+          </a:p>
+        </p:txBody>
+      </p:sp>
+      <p:pic>
+        <p:nvPicPr>
+          <p:cNvPr id="10" name="cell 0 0" descr="MaskGuard: Finds personal data by itself: yes">    </p:cNvPr>
+          <p:cNvPicPr>
+            <a:picLocks noChangeAspect="1"/>
+          </p:cNvPicPr>
+          <p:nvPr/>
+        </p:nvPicPr>
+        <p:blipFill>
+          <a:blip r:embed="rId1"/>
+          <a:stretch>
+            <a:fillRect/>
+          </a:stretch>
+        </p:blipFill>
+        <p:spPr>
+          <a:xfrm>
+            <a:off x="5234940" y="1897380"/>
+            <a:ext cx="274320" cy="274320"/>
+          </a:xfrm>
+          <a:prstGeom prst="rect">
+            <a:avLst/>
+          </a:prstGeom>
+        </p:spPr>
+      </p:pic>
+      <p:pic>
+        <p:nvPicPr>
+          <p:cNvPr id="11" name="cell 0 1" descr="Encryption (incl. quantum-safe): Finds personal data by itself: no">    </p:cNvPr>
+          <p:cNvPicPr>
+            <a:picLocks noChangeAspect="1"/>
+          </p:cNvPicPr>
+          <p:nvPr/>
+        </p:nvPicPr>
+        <p:blipFill>
+          <a:blip r:embed="rId2"/>
+          <a:stretch>
+            <a:fillRect/>
+          </a:stretch>
+        </p:blipFill>
+        <p:spPr>
+          <a:xfrm>
+            <a:off x="7018020" y="1897380"/>
+            <a:ext cx="274320" cy="274320"/>
+          </a:xfrm>
+          <a:prstGeom prst="rect">
+            <a:avLst/>
+          </a:prstGeom>
+        </p:spPr>
+      </p:pic>
+      <p:pic>
+        <p:nvPicPr>
+          <p:cNvPr id="12" name="cell 0 2" descr="Masked copy of the database: Finds personal data by itself: no">    </p:cNvPr>
+          <p:cNvPicPr>
+            <a:picLocks noChangeAspect="1"/>
+          </p:cNvPicPr>
+          <p:nvPr/>
+        </p:nvPicPr>
+        <p:blipFill>
+          <a:blip r:embed="rId3"/>
+          <a:stretch>
+            <a:fillRect/>
+          </a:stretch>
+        </p:blipFill>
+        <p:spPr>
+          <a:xfrm>
+            <a:off x="8801100" y="1897380"/>
+            <a:ext cx="274320" cy="274320"/>
+          </a:xfrm>
+          <a:prstGeom prst="rect">
+            <a:avLst/>
+          </a:prstGeom>
+        </p:spPr>
+      </p:pic>
+      <p:pic>
+        <p:nvPicPr>
+          <p:cNvPr id="13" name="cell 0 3" descr="Screen-only masking: Finds personal data by itself: no">    </p:cNvPr>
+          <p:cNvPicPr>
+            <a:picLocks noChangeAspect="1"/>
+          </p:cNvPicPr>
+          <p:nvPr/>
+        </p:nvPicPr>
+        <p:blipFill>
+          <a:blip r:embed="rId4"/>
+          <a:stretch>
+            <a:fillRect/>
+          </a:stretch>
+        </p:blipFill>
+        <p:spPr>
+          <a:xfrm>
+            <a:off x="10584180" y="1897380"/>
+            <a:ext cx="274320" cy="274320"/>
+          </a:xfrm>
+          <a:prstGeom prst="rect">
+            <a:avLst/>
+          </a:prstGeom>
+        </p:spPr>
+      </p:pic>
+      <p:sp>
+        <p:nvSpPr>
+          <p:cNvPr id="14" name="row line 1"/>
+          <p:cNvSpPr/>
+          <p:nvPr/>
+        </p:nvSpPr>
+        <p:spPr>
+          <a:xfrm>
+            <a:off x="548640" y="2286000"/>
+            <a:ext cx="11064240" cy="0"/>
+          </a:xfrm>
+          <a:prstGeom prst="line">
+            <a:avLst/>
+          </a:prstGeom>
+          <a:noFill/>
+          <a:ln w="9525">
+            <a:solidFill>
+              <a:srgbClr val="CBD5E1"/>
+            </a:solidFill>
+            <a:prstDash val="solid"/>
+          </a:ln>
+        </p:spPr>
+      </p:sp>
+      <p:sp>
+        <p:nvSpPr>
+          <p:cNvPr id="15" name="Text 9"/>
+          <p:cNvSpPr txBox="1"/>
+          <p:nvPr/>
+        </p:nvSpPr>
+        <p:spPr>
+          <a:xfrm>
+            <a:off x="548640" y="2286000"/>
+            <a:ext cx="3840480" cy="502920"/>
+          </a:xfrm>
+          <a:prstGeom prst="rect">
+            <a:avLst/>
+          </a:prstGeom>
+          <a:noFill/>
+          <a:ln/>
+        </p:spPr>
+        <p:txBody>
+          <a:bodyPr wrap="square" lIns="0" tIns="0" rIns="0" bIns="0" rtlCol="0" anchor="ctr"/>
+          <a:lstStyle/>
+          <a:p>
+            <a:pPr indent="0" marL="0">
+              <a:buNone/>
+            </a:pPr>
+            <a:r>
+              <a:rPr lang="en-US" sz="1500" b="1" dirty="0">
+                <a:solidFill>
+                  <a:srgbClr val="0B1D33"/>
+                </a:solidFill>
+                <a:latin typeface="Calibri" pitchFamily="34" charset="0"/>
+                <a:ea typeface="Calibri" pitchFamily="34" charset="-122"/>
+                <a:cs typeface="Calibri" pitchFamily="34" charset="-120"/>
+              </a:rPr>
+              <a:t>A different view for each role</a:t>
+            </a:r>
+            <a:endParaRPr lang="en-US" sz="1500" dirty="0"/>
+          </a:p>
+        </p:txBody>
+      </p:sp>
+      <p:pic>
+        <p:nvPicPr>
+          <p:cNvPr id="16" name="cell 1 0" descr="MaskGuard: A different view for each role: yes">    </p:cNvPr>
+          <p:cNvPicPr>
+            <a:picLocks noChangeAspect="1"/>
+          </p:cNvPicPr>
+          <p:nvPr/>
+        </p:nvPicPr>
+        <p:blipFill>
+          <a:blip r:embed="rId5"/>
+          <a:stretch>
+            <a:fillRect/>
+          </a:stretch>
+        </p:blipFill>
+        <p:spPr>
+          <a:xfrm>
+            <a:off x="5234940" y="2400300"/>
+            <a:ext cx="274320" cy="274320"/>
+          </a:xfrm>
+          <a:prstGeom prst="rect">
+            <a:avLst/>
+          </a:prstGeom>
+        </p:spPr>
+      </p:pic>
+      <p:pic>
+        <p:nvPicPr>
+          <p:cNvPr id="17" name="cell 1 1" descr="Encryption (incl. quantum-safe): A different view for each role: no">    </p:cNvPr>
+          <p:cNvPicPr>
+            <a:picLocks noChangeAspect="1"/>
+          </p:cNvPicPr>
+          <p:nvPr/>
+        </p:nvPicPr>
+        <p:blipFill>
+          <a:blip r:embed="rId6"/>
+          <a:stretch>
+            <a:fillRect/>
+          </a:stretch>
+        </p:blipFill>
+        <p:spPr>
+          <a:xfrm>
+            <a:off x="7018020" y="2400300"/>
+            <a:ext cx="274320" cy="274320"/>
+          </a:xfrm>
+          <a:prstGeom prst="rect">
+            <a:avLst/>
+          </a:prstGeom>
+        </p:spPr>
+      </p:pic>
+      <p:pic>
+        <p:nvPicPr>
+          <p:cNvPr id="18" name="cell 1 2" descr="Masked copy of the database: A different view for each role: no">    </p:cNvPr>
+          <p:cNvPicPr>
+            <a:picLocks noChangeAspect="1"/>
+          </p:cNvPicPr>
+          <p:nvPr/>
+        </p:nvPicPr>
+        <p:blipFill>
+          <a:blip r:embed="rId7"/>
+          <a:stretch>
+            <a:fillRect/>
+          </a:stretch>
+        </p:blipFill>
+        <p:spPr>
+          <a:xfrm>
+            <a:off x="8801100" y="2400300"/>
+            <a:ext cx="274320" cy="274320"/>
+          </a:xfrm>
+          <a:prstGeom prst="rect">
+            <a:avLst/>
+          </a:prstGeom>
+        </p:spPr>
+      </p:pic>
+      <p:pic>
+        <p:nvPicPr>
+          <p:cNvPr id="19" name="cell 1 3" descr="Screen-only masking: A different view for each role: yes">    </p:cNvPr>
+          <p:cNvPicPr>
+            <a:picLocks noChangeAspect="1"/>
+          </p:cNvPicPr>
+          <p:nvPr/>
+        </p:nvPicPr>
+        <p:blipFill>
+          <a:blip r:embed="rId8"/>
+          <a:stretch>
+            <a:fillRect/>
+          </a:stretch>
+        </p:blipFill>
+        <p:spPr>
+          <a:xfrm>
+            <a:off x="10584180" y="2400300"/>
+            <a:ext cx="274320" cy="274320"/>
+          </a:xfrm>
+          <a:prstGeom prst="rect">
+            <a:avLst/>
+          </a:prstGeom>
+        </p:spPr>
+      </p:pic>
+      <p:sp>
+        <p:nvSpPr>
+          <p:cNvPr id="20" name="row line 2"/>
+          <p:cNvSpPr/>
+          <p:nvPr/>
+        </p:nvSpPr>
+        <p:spPr>
+          <a:xfrm>
+            <a:off x="548640" y="2788920"/>
+            <a:ext cx="11064240" cy="0"/>
+          </a:xfrm>
+          <a:prstGeom prst="line">
+            <a:avLst/>
+          </a:prstGeom>
+          <a:noFill/>
+          <a:ln w="9525">
+            <a:solidFill>
+              <a:srgbClr val="CBD5E1"/>
+            </a:solidFill>
+            <a:prstDash val="solid"/>
+          </a:ln>
+        </p:spPr>
+      </p:sp>
+      <p:sp>
+        <p:nvSpPr>
+          <p:cNvPr id="21" name="Text 11"/>
+          <p:cNvSpPr txBox="1"/>
+          <p:nvPr/>
+        </p:nvSpPr>
+        <p:spPr>
+          <a:xfrm>
+            <a:off x="548640" y="2788920"/>
+            <a:ext cx="3840480" cy="502920"/>
+          </a:xfrm>
+          <a:prstGeom prst="rect">
+            <a:avLst/>
+          </a:prstGeom>
+          <a:noFill/>
+          <a:ln/>
+        </p:spPr>
+        <p:txBody>
+          <a:bodyPr wrap="square" lIns="0" tIns="0" rIns="0" bIns="0" rtlCol="0" anchor="ctr"/>
+          <a:lstStyle/>
+          <a:p>
+            <a:pPr indent="0" marL="0">
+              <a:buNone/>
+            </a:pPr>
+            <a:r>
+              <a:rPr lang="en-US" sz="1500" b="1" dirty="0">
+                <a:solidFill>
+                  <a:srgbClr val="0B1D33"/>
+                </a:solidFill>
+                <a:latin typeface="Calibri" pitchFamily="34" charset="0"/>
+                <a:ea typeface="Calibri" pitchFamily="34" charset="-122"/>
+                <a:cs typeface="Calibri" pitchFamily="34" charset="-120"/>
+              </a:rPr>
+              <a:t>Stops guessing a value through a search</a:t>
+            </a:r>
+            <a:endParaRPr lang="en-US" sz="1500" dirty="0"/>
+          </a:p>
+        </p:txBody>
+      </p:sp>
+      <p:pic>
+        <p:nvPicPr>
+          <p:cNvPr id="22" name="cell 2 0" descr="MaskGuard: Stops guessing a value through a search: yes">    </p:cNvPr>
+          <p:cNvPicPr>
+            <a:picLocks noChangeAspect="1"/>
+          </p:cNvPicPr>
+          <p:nvPr/>
+        </p:nvPicPr>
+        <p:blipFill>
+          <a:blip r:embed="rId9"/>
+          <a:stretch>
+            <a:fillRect/>
+          </a:stretch>
+        </p:blipFill>
+        <p:spPr>
+          <a:xfrm>
+            <a:off x="5234940" y="2903220"/>
+            <a:ext cx="274320" cy="274320"/>
+          </a:xfrm>
+          <a:prstGeom prst="rect">
+            <a:avLst/>
+          </a:prstGeom>
+        </p:spPr>
+      </p:pic>
+      <p:pic>
+        <p:nvPicPr>
+          <p:cNvPr id="23" name="cell 2 1" descr="Encryption (incl. quantum-safe): Stops guessing a value through a search: no">    </p:cNvPr>
+          <p:cNvPicPr>
+            <a:picLocks noChangeAspect="1"/>
+          </p:cNvPicPr>
+          <p:nvPr/>
+        </p:nvPicPr>
+        <p:blipFill>
+          <a:blip r:embed="rId10"/>
+          <a:stretch>
+            <a:fillRect/>
+          </a:stretch>
+        </p:blipFill>
+        <p:spPr>
+          <a:xfrm>
+            <a:off x="7018020" y="2903220"/>
+            <a:ext cx="274320" cy="274320"/>
+          </a:xfrm>
+          <a:prstGeom prst="rect">
+            <a:avLst/>
+          </a:prstGeom>
+        </p:spPr>
+      </p:pic>
+      <p:pic>
+        <p:nvPicPr>
+          <p:cNvPr id="24" name="cell 2 2" descr="Masked copy of the database: Stops guessing a value through a search: yes">    </p:cNvPr>
+          <p:cNvPicPr>
+            <a:picLocks noChangeAspect="1"/>
+          </p:cNvPicPr>
+          <p:nvPr/>
+        </p:nvPicPr>
+        <p:blipFill>
+          <a:blip r:embed="rId11"/>
+          <a:stretch>
+            <a:fillRect/>
+          </a:stretch>
+        </p:blipFill>
+        <p:spPr>
+          <a:xfrm>
+            <a:off x="8801100" y="2903220"/>
+            <a:ext cx="274320" cy="274320"/>
+          </a:xfrm>
+          <a:prstGeom prst="rect">
+            <a:avLst/>
+          </a:prstGeom>
+        </p:spPr>
+      </p:pic>
+      <p:pic>
+        <p:nvPicPr>
+          <p:cNvPr id="25" name="cell 2 3" descr="Screen-only masking: Stops guessing a value through a search: no">    </p:cNvPr>
+          <p:cNvPicPr>
+            <a:picLocks noChangeAspect="1"/>
+          </p:cNvPicPr>
+          <p:nvPr/>
+        </p:nvPicPr>
+        <p:blipFill>
+          <a:blip r:embed="rId12"/>
+          <a:stretch>
+            <a:fillRect/>
+          </a:stretch>
+        </p:blipFill>
+        <p:spPr>
+          <a:xfrm>
+            <a:off x="10584180" y="2903220"/>
+            <a:ext cx="274320" cy="274320"/>
+          </a:xfrm>
+          <a:prstGeom prst="rect">
+            <a:avLst/>
+          </a:prstGeom>
+        </p:spPr>
+      </p:pic>
+      <p:sp>
+        <p:nvSpPr>
+          <p:cNvPr id="26" name="row line 3"/>
+          <p:cNvSpPr/>
+          <p:nvPr/>
+        </p:nvSpPr>
+        <p:spPr>
+          <a:xfrm>
+            <a:off x="548640" y="3291840"/>
+            <a:ext cx="11064240" cy="0"/>
+          </a:xfrm>
+          <a:prstGeom prst="line">
+            <a:avLst/>
+          </a:prstGeom>
+          <a:noFill/>
+          <a:ln w="9525">
+            <a:solidFill>
+              <a:srgbClr val="CBD5E1"/>
+            </a:solidFill>
+            <a:prstDash val="solid"/>
+          </a:ln>
+        </p:spPr>
+      </p:sp>
+      <p:sp>
+        <p:nvSpPr>
+          <p:cNvPr id="27" name="Text 13"/>
+          <p:cNvSpPr txBox="1"/>
+          <p:nvPr/>
+        </p:nvSpPr>
+        <p:spPr>
+          <a:xfrm>
+            <a:off x="548640" y="3291840"/>
+            <a:ext cx="3840480" cy="502920"/>
+          </a:xfrm>
+          <a:prstGeom prst="rect">
+            <a:avLst/>
+          </a:prstGeom>
+          <a:noFill/>
+          <a:ln/>
+        </p:spPr>
+        <p:txBody>
+          <a:bodyPr wrap="square" lIns="0" tIns="0" rIns="0" bIns="0" rtlCol="0" anchor="ctr"/>
+          <a:lstStyle/>
+          <a:p>
+            <a:pPr indent="0" marL="0">
+              <a:buNone/>
+            </a:pPr>
+            <a:r>
+              <a:rPr lang="en-US" sz="1500" b="1" dirty="0">
+                <a:solidFill>
+                  <a:srgbClr val="0B1D33"/>
+                </a:solidFill>
+                <a:latin typeface="Calibri" pitchFamily="34" charset="0"/>
+                <a:ea typeface="Calibri" pitchFamily="34" charset="-122"/>
+                <a:cs typeface="Calibri" pitchFamily="34" charset="-120"/>
+              </a:rPr>
+              <a:t>Data stays in place, never copied</a:t>
+            </a:r>
+            <a:endParaRPr lang="en-US" sz="1500" dirty="0"/>
+          </a:p>
+        </p:txBody>
+      </p:sp>
+      <p:pic>
+        <p:nvPicPr>
+          <p:cNvPr id="28" name="cell 3 0" descr="MaskGuard: Data stays in place, never copied: yes">    </p:cNvPr>
+          <p:cNvPicPr>
+            <a:picLocks noChangeAspect="1"/>
+          </p:cNvPicPr>
+          <p:nvPr/>
+        </p:nvPicPr>
+        <p:blipFill>
+          <a:blip r:embed="rId13"/>
+          <a:stretch>
+            <a:fillRect/>
+          </a:stretch>
+        </p:blipFill>
+        <p:spPr>
+          <a:xfrm>
+            <a:off x="5234940" y="3406140"/>
+            <a:ext cx="274320" cy="274320"/>
+          </a:xfrm>
+          <a:prstGeom prst="rect">
+            <a:avLst/>
+          </a:prstGeom>
+        </p:spPr>
+      </p:pic>
+      <p:pic>
+        <p:nvPicPr>
+          <p:cNvPr id="29" name="cell 3 1" descr="Encryption (incl. quantum-safe): Data stays in place, never copied: yes">    </p:cNvPr>
+          <p:cNvPicPr>
+            <a:picLocks noChangeAspect="1"/>
+          </p:cNvPicPr>
+          <p:nvPr/>
+        </p:nvPicPr>
+        <p:blipFill>
+          <a:blip r:embed="rId14"/>
+          <a:stretch>
+            <a:fillRect/>
+          </a:stretch>
+        </p:blipFill>
+        <p:spPr>
+          <a:xfrm>
+            <a:off x="7018020" y="3406140"/>
+            <a:ext cx="274320" cy="274320"/>
+          </a:xfrm>
+          <a:prstGeom prst="rect">
+            <a:avLst/>
+          </a:prstGeom>
+        </p:spPr>
+      </p:pic>
+      <p:pic>
+        <p:nvPicPr>
+          <p:cNvPr id="30" name="cell 3 2" descr="Masked copy of the database: Data stays in place, never copied: no">    </p:cNvPr>
+          <p:cNvPicPr>
+            <a:picLocks noChangeAspect="1"/>
+          </p:cNvPicPr>
+          <p:nvPr/>
+        </p:nvPicPr>
+        <p:blipFill>
+          <a:blip r:embed="rId15"/>
+          <a:stretch>
+            <a:fillRect/>
+          </a:stretch>
+        </p:blipFill>
+        <p:spPr>
+          <a:xfrm>
+            <a:off x="8801100" y="3406140"/>
+            <a:ext cx="274320" cy="274320"/>
+          </a:xfrm>
+          <a:prstGeom prst="rect">
+            <a:avLst/>
+          </a:prstGeom>
+        </p:spPr>
+      </p:pic>
+      <p:pic>
+        <p:nvPicPr>
+          <p:cNvPr id="31" name="cell 3 3" descr="Screen-only masking: Data stays in place, never copied: yes">    </p:cNvPr>
+          <p:cNvPicPr>
+            <a:picLocks noChangeAspect="1"/>
+          </p:cNvPicPr>
+          <p:nvPr/>
+        </p:nvPicPr>
+        <p:blipFill>
+          <a:blip r:embed="rId16"/>
+          <a:stretch>
+            <a:fillRect/>
+          </a:stretch>
+        </p:blipFill>
+        <p:spPr>
+          <a:xfrm>
+            <a:off x="10584180" y="3406140"/>
+            <a:ext cx="274320" cy="274320"/>
+          </a:xfrm>
+          <a:prstGeom prst="rect">
+            <a:avLst/>
+          </a:prstGeom>
+        </p:spPr>
+      </p:pic>
+      <p:sp>
+        <p:nvSpPr>
+          <p:cNvPr id="32" name="key message"/>
+          <p:cNvSpPr/>
+          <p:nvPr/>
+        </p:nvSpPr>
+        <p:spPr>
+          <a:xfrm>
+            <a:off x="548640" y="3931920"/>
+            <a:ext cx="11064240" cy="868680"/>
+          </a:xfrm>
+          <a:prstGeom prst="roundRect">
+            <a:avLst>
+              <a:gd name="adj" fmla="val 8421"/>
+            </a:avLst>
+          </a:prstGeom>
+          <a:solidFill>
+            <a:srgbClr val="0B1D33"/>
+          </a:solidFill>
+          <a:ln w="9525">
+            <a:solidFill>
+              <a:srgbClr val="0B1D33"/>
+            </a:solidFill>
+            <a:prstDash val="solid"/>
+          </a:ln>
+        </p:spPr>
+      </p:sp>
+      <p:sp>
+        <p:nvSpPr>
+          <p:cNvPr id="33" name="lock circle"/>
+          <p:cNvSpPr/>
+          <p:nvPr/>
+        </p:nvSpPr>
+        <p:spPr>
+          <a:xfrm>
+            <a:off x="731520" y="4050792"/>
+            <a:ext cx="621792" cy="621792"/>
+          </a:xfrm>
+          <a:prstGeom prst="ellipse">
+            <a:avLst/>
+          </a:prstGeom>
+          <a:solidFill>
+            <a:srgbClr val="D97706"/>
+          </a:solidFill>
+          <a:ln w="12700">
+            <a:solidFill>
+              <a:srgbClr val="D97706"/>
+            </a:solidFill>
+            <a:prstDash val="solid"/>
+          </a:ln>
+        </p:spPr>
+      </p:sp>
+      <p:pic>
+        <p:nvPicPr>
+          <p:cNvPr id="34" name="lock icon" descr="lock">    </p:cNvPr>
+          <p:cNvPicPr>
+            <a:picLocks noChangeAspect="1"/>
+          </p:cNvPicPr>
+          <p:nvPr/>
+        </p:nvPicPr>
+        <p:blipFill>
+          <a:blip r:embed="rId17"/>
+          <a:stretch>
+            <a:fillRect/>
+          </a:stretch>
+        </p:blipFill>
+        <p:spPr>
+          <a:xfrm>
+            <a:off x="886968" y="4206240"/>
+            <a:ext cx="310896" cy="310896"/>
+          </a:xfrm>
+          <a:prstGeom prst="rect">
+            <a:avLst/>
+          </a:prstGeom>
+        </p:spPr>
+      </p:pic>
+      <p:sp>
+        <p:nvSpPr>
+          <p:cNvPr id="35" name="Text 16"/>
+          <p:cNvSpPr txBox="1"/>
+          <p:nvPr/>
+        </p:nvSpPr>
+        <p:spPr>
+          <a:xfrm>
+            <a:off x="1554480" y="3931920"/>
+            <a:ext cx="9875520" cy="868680"/>
+          </a:xfrm>
+          <a:prstGeom prst="rect">
+            <a:avLst/>
+          </a:prstGeom>
+          <a:noFill/>
+          <a:ln/>
+        </p:spPr>
+        <p:txBody>
+          <a:bodyPr wrap="square" lIns="0" tIns="0" rIns="0" bIns="0" rtlCol="0" anchor="ctr"/>
+          <a:lstStyle/>
+          <a:p>
+            <a:pPr indent="0" marL="0">
+              <a:buNone/>
+            </a:pPr>
+            <a:r>
+              <a:rPr lang="en-US" sz="1500" b="1" dirty="0">
+                <a:solidFill>
+                  <a:srgbClr val="FFFFFF"/>
+                </a:solidFill>
+                <a:latin typeface="Calibri" pitchFamily="34" charset="0"/>
+                <a:ea typeface="Calibri" pitchFamily="34" charset="-122"/>
+                <a:cs typeface="Calibri" pitchFamily="34" charset="-120"/>
+              </a:rPr>
+              <a:t>Encryption — even quantum-safe — keeps outsiders out. </a:t>
+            </a:r>
+            <a:pPr indent="0" marL="0">
+              <a:buNone/>
+            </a:pPr>
+            <a:r>
+              <a:rPr lang="en-US" sz="1500" dirty="0">
+                <a:solidFill>
+                  <a:srgbClr val="CBD5E1"/>
+                </a:solidFill>
+                <a:latin typeface="Calibri" pitchFamily="34" charset="0"/>
+                <a:ea typeface="Calibri" pitchFamily="34" charset="-122"/>
+                <a:cs typeface="Calibri" pitchFamily="34" charset="-120"/>
+              </a:rPr>
+              <a:t>But once the bank's own app decrypts the data, every insider sees all of it. MaskGuard decides what each insider sees, so use both.</a:t>
+            </a:r>
+            <a:endParaRPr lang="en-US" sz="1500" dirty="0"/>
+          </a:p>
+        </p:txBody>
+      </p:sp>
+      <p:sp>
+        <p:nvSpPr>
+          <p:cNvPr id="36" name="Text 17"/>
+          <p:cNvSpPr txBox="1"/>
+          <p:nvPr/>
+        </p:nvSpPr>
+        <p:spPr>
+          <a:xfrm>
+            <a:off x="548640" y="4892040"/>
+            <a:ext cx="2743200" cy="274320"/>
+          </a:xfrm>
+          <a:prstGeom prst="rect">
+            <a:avLst/>
+          </a:prstGeom>
+          <a:noFill/>
+          <a:ln/>
+        </p:spPr>
+        <p:txBody>
+          <a:bodyPr wrap="square" lIns="0" tIns="0" rIns="0" bIns="0" rtlCol="0" anchor="ctr"/>
+          <a:lstStyle/>
+          <a:p>
+            <a:pPr indent="0" marL="0">
+              <a:buNone/>
+            </a:pPr>
+            <a:r>
+              <a:rPr lang="en-US" sz="1500" b="1" dirty="0">
+                <a:solidFill>
+                  <a:srgbClr val="0B1D33"/>
+                </a:solidFill>
+                <a:latin typeface="Cambria" pitchFamily="34" charset="0"/>
+                <a:ea typeface="Cambria" pitchFamily="34" charset="-122"/>
+                <a:cs typeface="Cambria" pitchFamily="34" charset="-120"/>
+              </a:rPr>
+              <a:t>The market</a:t>
+            </a:r>
+            <a:endParaRPr lang="en-US" sz="1500" dirty="0"/>
+          </a:p>
+        </p:txBody>
+      </p:sp>
+      <p:sp>
+        <p:nvSpPr>
+          <p:cNvPr id="37" name="market 0"/>
+          <p:cNvSpPr/>
+          <p:nvPr/>
+        </p:nvSpPr>
+        <p:spPr>
+          <a:xfrm>
+            <a:off x="548640" y="5212080"/>
+            <a:ext cx="2514600" cy="896112"/>
+          </a:xfrm>
+          <a:prstGeom prst="roundRect">
+            <a:avLst>
+              <a:gd name="adj" fmla="val 8163"/>
+            </a:avLst>
+          </a:prstGeom>
+          <a:solidFill>
+            <a:srgbClr val="F1F5F9"/>
+          </a:solidFill>
+          <a:ln w="9525">
+            <a:solidFill>
+              <a:srgbClr val="F1F5F9"/>
+            </a:solidFill>
+            <a:prstDash val="solid"/>
+          </a:ln>
+        </p:spPr>
+      </p:sp>
+      <p:sp>
+        <p:nvSpPr>
+          <p:cNvPr id="38" name="Text 19"/>
+          <p:cNvSpPr txBox="1"/>
+          <p:nvPr/>
+        </p:nvSpPr>
+        <p:spPr>
+          <a:xfrm>
+            <a:off x="713232" y="5266944"/>
+            <a:ext cx="2240280" cy="411480"/>
+          </a:xfrm>
+          <a:prstGeom prst="rect">
+            <a:avLst/>
+          </a:prstGeom>
+          <a:noFill/>
+          <a:ln/>
+        </p:spPr>
+        <p:txBody>
+          <a:bodyPr wrap="square" lIns="0" tIns="0" rIns="0" bIns="0" rtlCol="0" anchor="ctr"/>
+          <a:lstStyle/>
+          <a:p>
+            <a:pPr indent="0" marL="0">
+              <a:buNone/>
+            </a:pPr>
+            <a:r>
+              <a:rPr lang="en-US" sz="1900" b="1" dirty="0">
+                <a:solidFill>
+                  <a:srgbClr val="0B1D33"/>
+                </a:solidFill>
+                <a:latin typeface="Cambria" pitchFamily="34" charset="0"/>
+                <a:ea typeface="Cambria" pitchFamily="34" charset="-122"/>
+                <a:cs typeface="Cambria" pitchFamily="34" charset="-120"/>
+              </a:rPr>
+              <a:t>$1.47 B → $2.6 B</a:t>
+            </a:r>
+            <a:endParaRPr lang="en-US" sz="1900" dirty="0"/>
+          </a:p>
+        </p:txBody>
+      </p:sp>
+      <p:sp>
+        <p:nvSpPr>
+          <p:cNvPr id="39" name="Text 20"/>
+          <p:cNvSpPr txBox="1"/>
+          <p:nvPr/>
+        </p:nvSpPr>
+        <p:spPr>
+          <a:xfrm>
+            <a:off x="713232" y="5669280"/>
+            <a:ext cx="2286000" cy="384048"/>
+          </a:xfrm>
+          <a:prstGeom prst="rect">
+            <a:avLst/>
+          </a:prstGeom>
+          <a:noFill/>
+          <a:ln/>
+        </p:spPr>
+        <p:txBody>
+          <a:bodyPr wrap="square" lIns="0" tIns="0" rIns="0" bIns="0" rtlCol="0" anchor="t"/>
+          <a:lstStyle/>
+          <a:p>
+            <a:pPr indent="0" marL="0">
+              <a:buNone/>
+            </a:pPr>
+            <a:r>
+              <a:rPr lang="en-US" sz="1200" dirty="0">
+                <a:solidFill>
+                  <a:srgbClr val="1E3A5F"/>
+                </a:solidFill>
+                <a:latin typeface="Calibri" pitchFamily="34" charset="0"/>
+                <a:ea typeface="Calibri" pitchFamily="34" charset="-122"/>
+                <a:cs typeface="Calibri" pitchFamily="34" charset="-120"/>
+              </a:rPr>
+              <a:t>data-masking market, 2025 → 2030</a:t>
+            </a:r>
+            <a:endParaRPr lang="en-US" sz="1200" dirty="0"/>
+          </a:p>
+        </p:txBody>
+      </p:sp>
+      <p:sp>
+        <p:nvSpPr>
+          <p:cNvPr id="40" name="market 1"/>
+          <p:cNvSpPr/>
+          <p:nvPr/>
+        </p:nvSpPr>
+        <p:spPr>
+          <a:xfrm>
+            <a:off x="3246120" y="5212080"/>
+            <a:ext cx="2514600" cy="896112"/>
+          </a:xfrm>
+          <a:prstGeom prst="roundRect">
+            <a:avLst>
+              <a:gd name="adj" fmla="val 8163"/>
+            </a:avLst>
+          </a:prstGeom>
+          <a:solidFill>
+            <a:srgbClr val="F1F5F9"/>
+          </a:solidFill>
+          <a:ln w="9525">
+            <a:solidFill>
+              <a:srgbClr val="F1F5F9"/>
+            </a:solidFill>
+            <a:prstDash val="solid"/>
+          </a:ln>
+        </p:spPr>
+      </p:sp>
+      <p:sp>
+        <p:nvSpPr>
+          <p:cNvPr id="41" name="Text 22"/>
+          <p:cNvSpPr txBox="1"/>
+          <p:nvPr/>
+        </p:nvSpPr>
+        <p:spPr>
+          <a:xfrm>
+            <a:off x="3410712" y="5266944"/>
+            <a:ext cx="2240280" cy="411480"/>
+          </a:xfrm>
+          <a:prstGeom prst="rect">
+            <a:avLst/>
+          </a:prstGeom>
+          <a:noFill/>
+          <a:ln/>
+        </p:spPr>
+        <p:txBody>
+          <a:bodyPr wrap="square" lIns="0" tIns="0" rIns="0" bIns="0" rtlCol="0" anchor="ctr"/>
+          <a:lstStyle/>
+          <a:p>
+            <a:pPr indent="0" marL="0">
+              <a:buNone/>
+            </a:pPr>
+            <a:r>
+              <a:rPr lang="en-US" sz="1900" b="1" dirty="0">
+                <a:solidFill>
+                  <a:srgbClr val="0B1D33"/>
+                </a:solidFill>
+                <a:latin typeface="Cambria" pitchFamily="34" charset="0"/>
+                <a:ea typeface="Cambria" pitchFamily="34" charset="-122"/>
+                <a:cs typeface="Cambria" pitchFamily="34" charset="-120"/>
+              </a:rPr>
+              <a:t>May 2027</a:t>
+            </a:r>
+            <a:endParaRPr lang="en-US" sz="1900" dirty="0"/>
+          </a:p>
+        </p:txBody>
+      </p:sp>
+      <p:sp>
+        <p:nvSpPr>
+          <p:cNvPr id="42" name="Text 23"/>
+          <p:cNvSpPr txBox="1"/>
+          <p:nvPr/>
+        </p:nvSpPr>
+        <p:spPr>
+          <a:xfrm>
+            <a:off x="3410712" y="5669280"/>
+            <a:ext cx="2286000" cy="384048"/>
+          </a:xfrm>
+          <a:prstGeom prst="rect">
+            <a:avLst/>
+          </a:prstGeom>
+          <a:noFill/>
+          <a:ln/>
+        </p:spPr>
+        <p:txBody>
+          <a:bodyPr wrap="square" lIns="0" tIns="0" rIns="0" bIns="0" rtlCol="0" anchor="t"/>
+          <a:lstStyle/>
+          <a:p>
+            <a:pPr indent="0" marL="0">
+              <a:buNone/>
+            </a:pPr>
+            <a:r>
+              <a:rPr lang="en-US" sz="1200" dirty="0">
+                <a:solidFill>
+                  <a:srgbClr val="1E3A5F"/>
+                </a:solidFill>
+                <a:latin typeface="Calibri" pitchFamily="34" charset="0"/>
+                <a:ea typeface="Calibri" pitchFamily="34" charset="-122"/>
+                <a:cs typeface="Calibri" pitchFamily="34" charset="-120"/>
+              </a:rPr>
+              <a:t>DPDP rules apply to every bank</a:t>
+            </a:r>
+            <a:endParaRPr lang="en-US" sz="1200" dirty="0"/>
+          </a:p>
+        </p:txBody>
+      </p:sp>
+      <p:sp>
+        <p:nvSpPr>
+          <p:cNvPr id="43" name="market 2"/>
+          <p:cNvSpPr/>
+          <p:nvPr/>
+        </p:nvSpPr>
+        <p:spPr>
+          <a:xfrm>
+            <a:off x="5943600" y="5212080"/>
+            <a:ext cx="2514600" cy="896112"/>
+          </a:xfrm>
+          <a:prstGeom prst="roundRect">
+            <a:avLst>
+              <a:gd name="adj" fmla="val 8163"/>
+            </a:avLst>
+          </a:prstGeom>
+          <a:solidFill>
+            <a:srgbClr val="F1F5F9"/>
+          </a:solidFill>
+          <a:ln w="9525">
+            <a:solidFill>
+              <a:srgbClr val="F1F5F9"/>
+            </a:solidFill>
+            <a:prstDash val="solid"/>
+          </a:ln>
+        </p:spPr>
+      </p:sp>
+      <p:sp>
+        <p:nvSpPr>
+          <p:cNvPr id="44" name="Text 25"/>
+          <p:cNvSpPr txBox="1"/>
+          <p:nvPr/>
+        </p:nvSpPr>
+        <p:spPr>
+          <a:xfrm>
+            <a:off x="6108192" y="5266944"/>
+            <a:ext cx="2240280" cy="411480"/>
+          </a:xfrm>
+          <a:prstGeom prst="rect">
+            <a:avLst/>
+          </a:prstGeom>
+          <a:noFill/>
+          <a:ln/>
+        </p:spPr>
+        <p:txBody>
+          <a:bodyPr wrap="square" lIns="0" tIns="0" rIns="0" bIns="0" rtlCol="0" anchor="ctr"/>
+          <a:lstStyle/>
+          <a:p>
+            <a:pPr indent="0" marL="0">
+              <a:buNone/>
+            </a:pPr>
+            <a:r>
+              <a:rPr lang="en-US" sz="1900" b="1" dirty="0">
+                <a:solidFill>
+                  <a:srgbClr val="0B1D33"/>
+                </a:solidFill>
+                <a:latin typeface="Cambria" pitchFamily="34" charset="0"/>
+                <a:ea typeface="Cambria" pitchFamily="34" charset="-122"/>
+                <a:cs typeface="Cambria" pitchFamily="34" charset="-120"/>
+              </a:rPr>
+              <a:t>Open source</a:t>
+            </a:r>
+            <a:endParaRPr lang="en-US" sz="1900" dirty="0"/>
+          </a:p>
+        </p:txBody>
+      </p:sp>
+      <p:sp>
+        <p:nvSpPr>
+          <p:cNvPr id="45" name="Text 26"/>
+          <p:cNvSpPr txBox="1"/>
+          <p:nvPr/>
+        </p:nvSpPr>
+        <p:spPr>
+          <a:xfrm>
+            <a:off x="6108192" y="5669280"/>
+            <a:ext cx="2286000" cy="384048"/>
+          </a:xfrm>
+          <a:prstGeom prst="rect">
+            <a:avLst/>
+          </a:prstGeom>
+          <a:noFill/>
+          <a:ln/>
+        </p:spPr>
+        <p:txBody>
+          <a:bodyPr wrap="square" lIns="0" tIns="0" rIns="0" bIns="0" rtlCol="0" anchor="t"/>
+          <a:lstStyle/>
+          <a:p>
+            <a:pPr indent="0" marL="0">
+              <a:buNone/>
+            </a:pPr>
+            <a:r>
+              <a:rPr lang="en-US" sz="1200" dirty="0">
+                <a:solidFill>
+                  <a:srgbClr val="1E3A5F"/>
+                </a:solidFill>
+                <a:latin typeface="Calibri" pitchFamily="34" charset="0"/>
+                <a:ea typeface="Calibri" pitchFamily="34" charset="-122"/>
+                <a:cs typeface="Calibri" pitchFamily="34" charset="-120"/>
+              </a:rPr>
+              <a:t>vs platforms at ≈ $100k–370k a year*</a:t>
+            </a:r>
+            <a:endParaRPr lang="en-US" sz="1200" dirty="0"/>
+          </a:p>
+        </p:txBody>
+      </p:sp>
+      <p:sp>
+        <p:nvSpPr>
+          <p:cNvPr id="46" name="buyers"/>
+          <p:cNvSpPr/>
+          <p:nvPr/>
+        </p:nvSpPr>
+        <p:spPr>
+          <a:xfrm>
+            <a:off x="8732520" y="4892040"/>
+            <a:ext cx="2880360" cy="1216152"/>
+          </a:xfrm>
+          <a:prstGeom prst="roundRect">
+            <a:avLst>
+              <a:gd name="adj" fmla="val 6015"/>
+            </a:avLst>
+          </a:prstGeom>
+          <a:solidFill>
+            <a:srgbClr val="FDEBD0"/>
+          </a:solidFill>
+          <a:ln w="9525">
+            <a:solidFill>
+              <a:srgbClr val="FDEBD0"/>
+            </a:solidFill>
+            <a:prstDash val="solid"/>
+          </a:ln>
+        </p:spPr>
+      </p:sp>
+      <p:sp>
+        <p:nvSpPr>
+          <p:cNvPr id="47" name="Text 28"/>
+          <p:cNvSpPr txBox="1"/>
+          <p:nvPr/>
+        </p:nvSpPr>
+        <p:spPr>
+          <a:xfrm>
+            <a:off x="8887968" y="4956048"/>
+            <a:ext cx="2606040" cy="274320"/>
+          </a:xfrm>
+          <a:prstGeom prst="rect">
+            <a:avLst/>
+          </a:prstGeom>
+          <a:noFill/>
+          <a:ln/>
+        </p:spPr>
+        <p:txBody>
+          <a:bodyPr wrap="square" lIns="0" tIns="0" rIns="0" bIns="0" rtlCol="0" anchor="ctr"/>
+          <a:lstStyle/>
+          <a:p>
+            <a:pPr indent="0" marL="0">
+              <a:buNone/>
+            </a:pPr>
+            <a:r>
+              <a:rPr lang="en-US" sz="1400" b="1" dirty="0">
+                <a:solidFill>
+                  <a:srgbClr val="D97706"/>
+                </a:solidFill>
+                <a:latin typeface="Calibri" pitchFamily="34" charset="0"/>
+                <a:ea typeface="Calibri" pitchFamily="34" charset="-122"/>
+                <a:cs typeface="Calibri" pitchFamily="34" charset="-120"/>
+              </a:rPr>
+              <a:t>Who buys first</a:t>
+            </a:r>
+            <a:endParaRPr lang="en-US" sz="1400" dirty="0"/>
+          </a:p>
+        </p:txBody>
+      </p:sp>
+      <p:sp>
+        <p:nvSpPr>
+          <p:cNvPr id="48" name="Text 29"/>
+          <p:cNvSpPr txBox="1"/>
+          <p:nvPr/>
+        </p:nvSpPr>
+        <p:spPr>
+          <a:xfrm>
+            <a:off x="8887968" y="5239512"/>
+            <a:ext cx="2606040" cy="841248"/>
+          </a:xfrm>
+          <a:prstGeom prst="rect">
+            <a:avLst/>
+          </a:prstGeom>
+          <a:noFill/>
+          <a:ln/>
+        </p:spPr>
+        <p:txBody>
+          <a:bodyPr wrap="square" lIns="0" tIns="0" rIns="0" bIns="0" rtlCol="0" anchor="t"/>
+          <a:lstStyle/>
+          <a:p>
+            <a:pPr indent="0" marL="0">
+              <a:buNone/>
+            </a:pPr>
+            <a:r>
+              <a:rPr lang="en-US" sz="1200" dirty="0">
+                <a:solidFill>
+                  <a:srgbClr val="0B1D33"/>
+                </a:solidFill>
+                <a:latin typeface="Calibri" pitchFamily="34" charset="0"/>
+                <a:ea typeface="Calibri" pitchFamily="34" charset="-122"/>
+                <a:cs typeface="Calibri" pitchFamily="34" charset="-120"/>
+              </a:rPr>
+              <a:t>NBFCs, co-op and small finance banks, fintechs, hospitals: DPDP applies, no budget for big platforms.</a:t>
+            </a:r>
+            <a:endParaRPr lang="en-US" sz="1200" dirty="0"/>
+          </a:p>
+        </p:txBody>
+      </p:sp>
+      <p:sp>
+        <p:nvSpPr>
+          <p:cNvPr id="49" name="Text 30"/>
+          <p:cNvSpPr txBox="1"/>
+          <p:nvPr/>
+        </p:nvSpPr>
+        <p:spPr>
+          <a:xfrm>
+            <a:off x="548640" y="6181344"/>
+            <a:ext cx="11064240" cy="237744"/>
+          </a:xfrm>
+          <a:prstGeom prst="rect">
+            <a:avLst/>
+          </a:prstGeom>
+          <a:noFill/>
+          <a:ln/>
+        </p:spPr>
+        <p:txBody>
+          <a:bodyPr wrap="square" lIns="0" tIns="0" rIns="0" bIns="0" rtlCol="0" anchor="ctr"/>
+          <a:lstStyle/>
+          <a:p>
+            <a:pPr indent="0" marL="0">
+              <a:buNone/>
+            </a:pPr>
+            <a:r>
+              <a:rPr lang="en-US" sz="900" i="1" dirty="0">
+                <a:solidFill>
+                  <a:srgbClr val="64748B"/>
+                </a:solidFill>
+                <a:latin typeface="Calibri" pitchFamily="34" charset="0"/>
+                <a:ea typeface="Calibri" pitchFamily="34" charset="-122"/>
+                <a:cs typeface="Calibri" pitchFamily="34" charset="-120"/>
+              </a:rPr>
+              <a:t>* review-site estimates for Immuta / Delphix; vendors don't publish prices. Market: Knowledge Sourcing Intelligence. Other databases' built-in masking (SQL Server DDM) masks results only; Microsoft documents it doesn't stop inference.</a:t>
+            </a:r>
+            <a:endParaRPr lang="en-US" sz="900" dirty="0"/>
+          </a:p>
+        </p:txBody>
+      </p:sp>
+      <p:sp>
+        <p:nvSpPr>
+          <p:cNvPr id="25" name="Slide Number Placeholder 0"/>
+          <p:cNvSpPr>
+            <a:spLocks noGrp="1"/>
+          </p:cNvSpPr>
+          <p:nvPr>
+            <p:ph type="sldNum" sz="quarter" idx="4294967295"/>
+          </p:nvPr>
+        </p:nvSpPr>
+        <p:spPr>
+          <a:xfrm>
+            <a:off x="11109960" y="6446520"/>
+            <a:ext cx="548640" cy="274320"/>
+          </a:xfrm>
+          <a:prstGeom prst="rect">
+            <a:avLst/>
+          </a:prstGeom>
+          <a:extLst>
+            <a:ext uri="{C572A759-6A51-4108-AA02-DFA0A04FC94B}">
+              <ma14:wrappingTextBoxFlag xmlns:ma14="http://schemas.microsoft.com/office/mac/drawingml/2011/main" val="0"/>
+            </a:ext>
+          </a:extLst>
+        </p:spPr>
+        <p:txBody>
+          <a:bodyPr/>
+          <a:lstStyle>
+            <a:lvl1pPr>
+              <a:defRPr sz="1000">
+                <a:solidFill>
+                  <a:srgbClr val="64748B"/>
+                </a:solidFill>
+              </a:defRPr>
+            </a:lvl1pPr>
+          </a:lstStyle>
+          <a:p>
+            <a:pPr algn="r"/>
+            <a:fld id="{F7021451-1387-4CA6-816F-3879F97B5CBC}" type="slidenum">
+              <a:rPr b="0" lang="en-US"/>
+              <a:t>10</a:t>
+            </a:fld>
+            <a:endParaRPr lang="en-US"/>
+          </a:p>
+        </p:txBody>
+      </p:sp>
+    </p:spTree>
+  </p:cSld>
+  <p:clrMapOvr>
+    <a:masterClrMapping/>
+  </p:clrMapOvr>
+</p:sld>
+</file>
+
+<file path=ppt/slides/slide11.xml><?xml version="1.0" encoding="utf-8"?>
+<p:sld xmlns:a="http://schemas.openxmlformats.org/drawingml/2006/main" xmlns:r="http://schemas.openxmlformats.org/officeDocument/2006/relationships" xmlns:p="http://schemas.openxmlformats.org/presentationml/2006/main">
+  <p:cSld name="Slide 11">
+    <p:spTree>
+      <p:nvGrpSpPr>
+        <p:cNvPr id="1" name=""/>
+        <p:cNvGrpSpPr/>
+        <p:nvPr/>
+      </p:nvGrpSpPr>
+      <p:grpSpPr>
+        <a:xfrm>
+          <a:off x="0" y="0"/>
+          <a:ext cx="0" cy="0"/>
+          <a:chOff x="0" y="0"/>
+          <a:chExt cx="0" cy="0"/>
+        </a:xfrm>
+      </p:grpSpPr>
+      <p:sp>
+        <p:nvSpPr>
+          <p:cNvPr id="2" name="Text 0"/>
+          <p:cNvSpPr/>
+          <p:nvPr>
+            <p:ph idx="100" type="title" hasCustomPrompt="1"/>
+          </p:nvPr>
+        </p:nvSpPr>
+        <p:spPr>
+          <a:xfrm>
+            <a:off x="548640" y="274320"/>
+            <a:ext cx="11064240" cy="777240"/>
+          </a:xfrm>
+          <a:prstGeom prst="rect">
+            <a:avLst/>
+          </a:prstGeom>
+          <a:noFill/>
+          <a:ln/>
+        </p:spPr>
+        <p:txBody>
+          <a:bodyPr wrap="square" rtlCol="0" anchor="ctr"/>
+          <a:lstStyle/>
+          <a:p>
+            <a:pPr algn="l" indent="0" marL="0">
+              <a:buNone/>
+            </a:pPr>
+            <a:r>
+              <a:rPr lang="en-US" sz="3000" b="1" dirty="0">
+                <a:solidFill>
                   <a:schemeClr val="bg1"/>
                 </a:solidFill>
                 <a:latin typeface="Cambria" pitchFamily="34" charset="0"/>
@@ -3535,7 +5229,7 @@
             <a:pPr algn="r"/>
             <a:fld id="{F7021451-1387-4CA6-816F-3879F97B5CBC}" type="slidenum">
               <a:rPr b="0" lang="en-US"/>
-              <a:t>10</a:t>
+              <a:t>11</a:t>
             </a:fld>
             <a:endParaRPr lang="en-US"/>
           </a:p>
@@ -9805,15 +11499,272 @@
                 <a:ea typeface="Cambria" pitchFamily="34" charset="-122"/>
                 <a:cs typeface="Cambria" pitchFamily="34" charset="-120"/>
               </a:rPr>
-              <a:t>Dashboard: one query, three organiser users</a:t>
+              <a:t>No LLM, no quantum: classic ML that is quantum-safe</a:t>
             </a:r>
             <a:endParaRPr lang="en-US" sz="3000" dirty="0"/>
+          </a:p>
+        </p:txBody>
+      </p:sp>
+      <p:sp>
+        <p:nvSpPr>
+          <p:cNvPr id="3" name="maskguard column"/>
+          <p:cNvSpPr/>
+          <p:nvPr/>
+        </p:nvSpPr>
+        <p:spPr>
+          <a:xfrm>
+            <a:off x="4297680" y="1188720"/>
+            <a:ext cx="1463040" cy="2770632"/>
+          </a:xfrm>
+          <a:prstGeom prst="roundRect">
+            <a:avLst>
+              <a:gd name="adj" fmla="val 5000"/>
+            </a:avLst>
+          </a:prstGeom>
+          <a:solidFill>
+            <a:srgbClr val="FDEBD0"/>
+          </a:solidFill>
+          <a:ln w="9525">
+            <a:solidFill>
+              <a:srgbClr val="FDEBD0"/>
+            </a:solidFill>
+            <a:prstDash val="solid"/>
+          </a:ln>
+        </p:spPr>
+      </p:sp>
+      <p:sp>
+        <p:nvSpPr>
+          <p:cNvPr id="4" name="Text 2"/>
+          <p:cNvSpPr txBox="1"/>
+          <p:nvPr/>
+        </p:nvSpPr>
+        <p:spPr>
+          <a:xfrm>
+            <a:off x="4297680" y="1225296"/>
+            <a:ext cx="1463040" cy="585216"/>
+          </a:xfrm>
+          <a:prstGeom prst="rect">
+            <a:avLst/>
+          </a:prstGeom>
+          <a:noFill/>
+          <a:ln/>
+        </p:spPr>
+        <p:txBody>
+          <a:bodyPr wrap="square" lIns="0" tIns="0" rIns="0" bIns="0" rtlCol="0" anchor="ctr"/>
+          <a:lstStyle/>
+          <a:p>
+            <a:pPr algn="ctr" indent="0" marL="0">
+              <a:buNone/>
+            </a:pPr>
+            <a:r>
+              <a:rPr lang="en-US" sz="1400" b="1" dirty="0">
+                <a:solidFill>
+                  <a:srgbClr val="D97706"/>
+                </a:solidFill>
+                <a:latin typeface="Calibri" pitchFamily="34" charset="0"/>
+                <a:ea typeface="Calibri" pitchFamily="34" charset="-122"/>
+                <a:cs typeface="Calibri" pitchFamily="34" charset="-120"/>
+              </a:rPr>
+              <a:t>MaskGuard</a:t>
+            </a:r>
+            <a:endParaRPr lang="en-US" sz="1400" dirty="0"/>
+          </a:p>
+          <a:p>
+            <a:pPr algn="ctr" indent="0" marL="0">
+              <a:buNone/>
+            </a:pPr>
+            <a:r>
+              <a:rPr lang="en-US" sz="1400" b="1" dirty="0">
+                <a:solidFill>
+                  <a:srgbClr val="D97706"/>
+                </a:solidFill>
+                <a:latin typeface="Calibri" pitchFamily="34" charset="0"/>
+                <a:ea typeface="Calibri" pitchFamily="34" charset="-122"/>
+                <a:cs typeface="Calibri" pitchFamily="34" charset="-120"/>
+              </a:rPr>
+              <a:t>LightGBM + rules</a:t>
+            </a:r>
+            <a:endParaRPr lang="en-US" sz="1400" dirty="0"/>
+          </a:p>
+        </p:txBody>
+      </p:sp>
+      <p:sp>
+        <p:nvSpPr>
+          <p:cNvPr id="5" name="Text 3"/>
+          <p:cNvSpPr txBox="1"/>
+          <p:nvPr/>
+        </p:nvSpPr>
+        <p:spPr>
+          <a:xfrm>
+            <a:off x="5760720" y="1225296"/>
+            <a:ext cx="1463040" cy="585216"/>
+          </a:xfrm>
+          <a:prstGeom prst="rect">
+            <a:avLst/>
+          </a:prstGeom>
+          <a:noFill/>
+          <a:ln/>
+        </p:spPr>
+        <p:txBody>
+          <a:bodyPr wrap="square" lIns="0" tIns="0" rIns="0" bIns="0" rtlCol="0" anchor="ctr"/>
+          <a:lstStyle/>
+          <a:p>
+            <a:pPr algn="ctr" indent="0" marL="0">
+              <a:buNone/>
+            </a:pPr>
+            <a:r>
+              <a:rPr lang="en-US" sz="1250" b="1" dirty="0">
+                <a:solidFill>
+                  <a:srgbClr val="1E3A5F"/>
+                </a:solidFill>
+                <a:latin typeface="Calibri" pitchFamily="34" charset="0"/>
+                <a:ea typeface="Calibri" pitchFamily="34" charset="-122"/>
+                <a:cs typeface="Calibri" pitchFamily="34" charset="-120"/>
+              </a:rPr>
+              <a:t>LLM-based</a:t>
+            </a:r>
+            <a:endParaRPr lang="en-US" sz="1250" dirty="0"/>
+          </a:p>
+          <a:p>
+            <a:pPr algn="ctr" indent="0" marL="0">
+              <a:buNone/>
+            </a:pPr>
+            <a:r>
+              <a:rPr lang="en-US" sz="1250" b="1" dirty="0">
+                <a:solidFill>
+                  <a:srgbClr val="1E3A5F"/>
+                </a:solidFill>
+                <a:latin typeface="Calibri" pitchFamily="34" charset="0"/>
+                <a:ea typeface="Calibri" pitchFamily="34" charset="-122"/>
+                <a:cs typeface="Calibri" pitchFamily="34" charset="-120"/>
+              </a:rPr>
+              <a:t>detection</a:t>
+            </a:r>
+            <a:endParaRPr lang="en-US" sz="1250" dirty="0"/>
+          </a:p>
+        </p:txBody>
+      </p:sp>
+      <p:sp>
+        <p:nvSpPr>
+          <p:cNvPr id="6" name="Text 4"/>
+          <p:cNvSpPr txBox="1"/>
+          <p:nvPr/>
+        </p:nvSpPr>
+        <p:spPr>
+          <a:xfrm>
+            <a:off x="7223760" y="1225296"/>
+            <a:ext cx="1463040" cy="585216"/>
+          </a:xfrm>
+          <a:prstGeom prst="rect">
+            <a:avLst/>
+          </a:prstGeom>
+          <a:noFill/>
+          <a:ln/>
+        </p:spPr>
+        <p:txBody>
+          <a:bodyPr wrap="square" lIns="0" tIns="0" rIns="0" bIns="0" rtlCol="0" anchor="ctr"/>
+          <a:lstStyle/>
+          <a:p>
+            <a:pPr algn="ctr" indent="0" marL="0">
+              <a:buNone/>
+            </a:pPr>
+            <a:r>
+              <a:rPr lang="en-US" sz="1250" b="1" dirty="0">
+                <a:solidFill>
+                  <a:srgbClr val="1E3A5F"/>
+                </a:solidFill>
+                <a:latin typeface="Calibri" pitchFamily="34" charset="0"/>
+                <a:ea typeface="Calibri" pitchFamily="34" charset="-122"/>
+                <a:cs typeface="Calibri" pitchFamily="34" charset="-120"/>
+              </a:rPr>
+              <a:t>Quantum ML</a:t>
+            </a:r>
+            <a:endParaRPr lang="en-US" sz="1250" dirty="0"/>
+          </a:p>
+          <a:p>
+            <a:pPr algn="ctr" indent="0" marL="0">
+              <a:buNone/>
+            </a:pPr>
+            <a:r>
+              <a:rPr lang="en-US" sz="1250" b="1" dirty="0">
+                <a:solidFill>
+                  <a:srgbClr val="1E3A5F"/>
+                </a:solidFill>
+                <a:latin typeface="Calibri" pitchFamily="34" charset="0"/>
+                <a:ea typeface="Calibri" pitchFamily="34" charset="-122"/>
+                <a:cs typeface="Calibri" pitchFamily="34" charset="-120"/>
+              </a:rPr>
+              <a:t>detection</a:t>
+            </a:r>
+            <a:endParaRPr lang="en-US" sz="1250" dirty="0"/>
+          </a:p>
+        </p:txBody>
+      </p:sp>
+      <p:sp>
+        <p:nvSpPr>
+          <p:cNvPr id="7" name="q row line 0"/>
+          <p:cNvSpPr/>
+          <p:nvPr/>
+        </p:nvSpPr>
+        <p:spPr>
+          <a:xfrm>
+            <a:off x="548640" y="1847088"/>
+            <a:ext cx="8138160" cy="0"/>
+          </a:xfrm>
+          <a:prstGeom prst="line">
+            <a:avLst/>
+          </a:prstGeom>
+          <a:noFill/>
+          <a:ln w="9525">
+            <a:solidFill>
+              <a:srgbClr val="CBD5E1"/>
+            </a:solidFill>
+            <a:prstDash val="solid"/>
+          </a:ln>
+        </p:spPr>
+      </p:sp>
+      <p:sp>
+        <p:nvSpPr>
+          <p:cNvPr id="8" name="Text 6"/>
+          <p:cNvSpPr txBox="1"/>
+          <p:nvPr/>
+        </p:nvSpPr>
+        <p:spPr>
+          <a:xfrm>
+            <a:off x="548640" y="1847088"/>
+            <a:ext cx="3657600" cy="685800"/>
+          </a:xfrm>
+          <a:prstGeom prst="rect">
+            <a:avLst/>
+          </a:prstGeom>
+          <a:noFill/>
+          <a:ln/>
+        </p:spPr>
+        <p:txBody>
+          <a:bodyPr wrap="square" lIns="0" tIns="0" rIns="0" bIns="0" rtlCol="0" anchor="ctr"/>
+          <a:lstStyle/>
+          <a:p>
+            <a:pPr indent="0" marL="0">
+              <a:buNone/>
+            </a:pPr>
+            <a:r>
+              <a:rPr lang="en-US" sz="1500" b="1" dirty="0">
+                <a:solidFill>
+                  <a:srgbClr val="0B1D33"/>
+                </a:solidFill>
+                <a:latin typeface="Calibri" pitchFamily="34" charset="0"/>
+                <a:ea typeface="Calibri" pitchFamily="34" charset="-122"/>
+                <a:cs typeface="Calibri" pitchFamily="34" charset="-120"/>
+              </a:rPr>
+              <a:t>Runs inside the bank, offline, on a normal CPU</a:t>
+            </a:r>
+            <a:endParaRPr lang="en-US" sz="1500" dirty="0"/>
           </a:p>
         </p:txBody>
       </p:sp>
       <p:pic>
         <p:nvPicPr>
-          <p:cNvPr id="3" name="dashboard admin_anita" descr="Control Room masking playground on Saffron Bank as admin_anita: Sees the real data. Every query is still logged.">    </p:cNvPr>
+          <p:cNvPr id="9" name="q cell 0 0" descr="MaskGuard LightGBM + rules: Runs inside the bank, offline, on a normal CPU: yes">    </p:cNvPr>
           <p:cNvPicPr>
             <a:picLocks noChangeAspect="1"/>
           </p:cNvPicPr>
@@ -9827,42 +11778,17 @@
         </p:blipFill>
         <p:spPr>
           <a:xfrm>
-            <a:off x="548640" y="1188720"/>
-            <a:ext cx="7818120" cy="1517030"/>
+            <a:off x="4892040" y="2052828"/>
+            <a:ext cx="274320" cy="274320"/>
           </a:xfrm>
           <a:prstGeom prst="rect">
             <a:avLst/>
           </a:prstGeom>
         </p:spPr>
       </p:pic>
-      <p:sp>
-        <p:nvSpPr>
-          <p:cNvPr id="4" name="admin_anita circle"/>
-          <p:cNvSpPr/>
-          <p:nvPr/>
-        </p:nvSpPr>
-        <p:spPr>
-          <a:xfrm>
-            <a:off x="8595360" y="1280160"/>
-            <a:ext cx="566928" cy="566928"/>
-          </a:xfrm>
-          <a:prstGeom prst="ellipse">
-            <a:avLst/>
-          </a:prstGeom>
-          <a:solidFill>
-            <a:srgbClr val="0B1D33"/>
-          </a:solidFill>
-          <a:ln w="12700">
-            <a:solidFill>
-              <a:srgbClr val="0B1D33"/>
-            </a:solidFill>
-            <a:prstDash val="solid"/>
-          </a:ln>
-        </p:spPr>
-      </p:sp>
       <p:pic>
         <p:nvPicPr>
-          <p:cNvPr id="5" name="admin_anita icon" descr="admin_anita">    </p:cNvPr>
+          <p:cNvPr id="10" name="q cell 0 1" descr="LLM-based detection: Runs inside the bank, offline, on a normal CPU: partly">    </p:cNvPr>
           <p:cNvPicPr>
             <a:picLocks noChangeAspect="1"/>
           </p:cNvPicPr>
@@ -9876,134 +11802,17 @@
         </p:blipFill>
         <p:spPr>
           <a:xfrm>
-            <a:off x="8737092" y="1421892"/>
-            <a:ext cx="283464" cy="283464"/>
+            <a:off x="6355080" y="2052828"/>
+            <a:ext cx="274320" cy="274320"/>
           </a:xfrm>
           <a:prstGeom prst="rect">
             <a:avLst/>
           </a:prstGeom>
         </p:spPr>
       </p:pic>
-      <p:sp>
-        <p:nvSpPr>
-          <p:cNvPr id="6" name="Text 2"/>
-          <p:cNvSpPr txBox="1"/>
-          <p:nvPr/>
-        </p:nvSpPr>
-        <p:spPr>
-          <a:xfrm>
-            <a:off x="9281160" y="1234440"/>
-            <a:ext cx="2377440" cy="329184"/>
-          </a:xfrm>
-          <a:prstGeom prst="rect">
-            <a:avLst/>
-          </a:prstGeom>
-          <a:noFill/>
-          <a:ln/>
-        </p:spPr>
-        <p:txBody>
-          <a:bodyPr wrap="square" lIns="0" tIns="0" rIns="0" bIns="0" rtlCol="0" anchor="ctr"/>
-          <a:lstStyle/>
-          <a:p>
-            <a:pPr indent="0" marL="0">
-              <a:buNone/>
-            </a:pPr>
-            <a:r>
-              <a:rPr lang="en-US" sz="1400" b="1" dirty="0">
-                <a:solidFill>
-                  <a:srgbClr val="0B1D33"/>
-                </a:solidFill>
-                <a:latin typeface="Courier New" pitchFamily="34" charset="0"/>
-                <a:ea typeface="Courier New" pitchFamily="34" charset="-122"/>
-                <a:cs typeface="Courier New" pitchFamily="34" charset="-120"/>
-              </a:rPr>
-              <a:t>admin_anita</a:t>
-            </a:r>
-            <a:endParaRPr lang="en-US" sz="1400" dirty="0"/>
-          </a:p>
-        </p:txBody>
-      </p:sp>
-      <p:sp>
-        <p:nvSpPr>
-          <p:cNvPr id="7" name="Text 3"/>
-          <p:cNvSpPr txBox="1"/>
-          <p:nvPr/>
-        </p:nvSpPr>
-        <p:spPr>
-          <a:xfrm>
-            <a:off x="9281160" y="1572768"/>
-            <a:ext cx="2377440" cy="566928"/>
-          </a:xfrm>
-          <a:prstGeom prst="rect">
-            <a:avLst/>
-          </a:prstGeom>
-          <a:noFill/>
-          <a:ln/>
-        </p:spPr>
-        <p:txBody>
-          <a:bodyPr wrap="square" lIns="0" tIns="0" rIns="0" bIns="0" rtlCol="0" anchor="t"/>
-          <a:lstStyle/>
-          <a:p>
-            <a:pPr indent="0" marL="0">
-              <a:buNone/>
-            </a:pPr>
-            <a:r>
-              <a:rPr lang="en-US" sz="1600" b="1" dirty="0">
-                <a:solidFill>
-                  <a:srgbClr val="0B1D33"/>
-                </a:solidFill>
-                <a:latin typeface="Calibri" pitchFamily="34" charset="0"/>
-                <a:ea typeface="Calibri" pitchFamily="34" charset="-122"/>
-                <a:cs typeface="Calibri" pitchFamily="34" charset="-120"/>
-              </a:rPr>
-              <a:t>Sees the real data.</a:t>
-            </a:r>
-            <a:endParaRPr lang="en-US" sz="1600" dirty="0"/>
-          </a:p>
-        </p:txBody>
-      </p:sp>
-      <p:sp>
-        <p:nvSpPr>
-          <p:cNvPr id="8" name="Text 4"/>
-          <p:cNvSpPr txBox="1"/>
-          <p:nvPr/>
-        </p:nvSpPr>
-        <p:spPr>
-          <a:xfrm>
-            <a:off x="9281160" y="1901952"/>
-            <a:ext cx="2377440" cy="685800"/>
-          </a:xfrm>
-          <a:prstGeom prst="rect">
-            <a:avLst/>
-          </a:prstGeom>
-          <a:noFill/>
-          <a:ln/>
-        </p:spPr>
-        <p:txBody>
-          <a:bodyPr wrap="square" lIns="0" tIns="0" rIns="0" bIns="0" rtlCol="0" anchor="t"/>
-          <a:lstStyle/>
-          <a:p>
-            <a:pPr indent="0" marL="0">
-              <a:buNone/>
-            </a:pPr>
-            <a:r>
-              <a:rPr lang="en-US" sz="1300" dirty="0">
-                <a:solidFill>
-                  <a:srgbClr val="1E3A5F"/>
-                </a:solidFill>
-                <a:latin typeface="Calibri" pitchFamily="34" charset="0"/>
-                <a:ea typeface="Calibri" pitchFamily="34" charset="-122"/>
-                <a:cs typeface="Calibri" pitchFamily="34" charset="-120"/>
-              </a:rPr>
-              <a:t>Every query is still logged.</a:t>
-            </a:r>
-            <a:endParaRPr lang="en-US" sz="1300" dirty="0"/>
-          </a:p>
-        </p:txBody>
-      </p:sp>
       <p:pic>
         <p:nvPicPr>
-          <p:cNvPr id="9" name="dashboard support_ravi" descr="Control Room masking playground on Saffron Bank as support_ravi: Sees only the last digits. Balances rounded down to ₹10,000.">    </p:cNvPr>
+          <p:cNvPr id="11" name="q cell 0 2" descr="Quantum ML detection: Runs inside the bank, offline, on a normal CPU: partly">    </p:cNvPr>
           <p:cNvPicPr>
             <a:picLocks noChangeAspect="1"/>
           </p:cNvPicPr>
@@ -10017,8 +11826,8 @@
         </p:blipFill>
         <p:spPr>
           <a:xfrm>
-            <a:off x="548640" y="2880360"/>
-            <a:ext cx="7818120" cy="1538701"/>
+            <a:off x="7818120" y="2052828"/>
+            <a:ext cx="274320" cy="274320"/>
           </a:xfrm>
           <a:prstGeom prst="rect">
             <a:avLst/>
@@ -10027,13 +11836,762 @@
       </p:pic>
       <p:sp>
         <p:nvSpPr>
-          <p:cNvPr id="10" name="support_ravi circle"/>
+          <p:cNvPr id="12" name="q row line 1"/>
           <p:cNvSpPr/>
           <p:nvPr/>
         </p:nvSpPr>
         <p:spPr>
           <a:xfrm>
-            <a:off x="8595360" y="2971800"/>
+            <a:off x="548640" y="2532888"/>
+            <a:ext cx="8138160" cy="0"/>
+          </a:xfrm>
+          <a:prstGeom prst="line">
+            <a:avLst/>
+          </a:prstGeom>
+          <a:noFill/>
+          <a:ln w="9525">
+            <a:solidFill>
+              <a:srgbClr val="CBD5E1"/>
+            </a:solidFill>
+            <a:prstDash val="solid"/>
+          </a:ln>
+        </p:spPr>
+      </p:sp>
+      <p:sp>
+        <p:nvSpPr>
+          <p:cNvPr id="13" name="Text 8"/>
+          <p:cNvSpPr txBox="1"/>
+          <p:nvPr/>
+        </p:nvSpPr>
+        <p:spPr>
+          <a:xfrm>
+            <a:off x="548640" y="2532888"/>
+            <a:ext cx="3657600" cy="685800"/>
+          </a:xfrm>
+          <a:prstGeom prst="rect">
+            <a:avLst/>
+          </a:prstGeom>
+          <a:noFill/>
+          <a:ln/>
+        </p:spPr>
+        <p:txBody>
+          <a:bodyPr wrap="square" lIns="0" tIns="0" rIns="0" bIns="0" rtlCol="0" anchor="ctr"/>
+          <a:lstStyle/>
+          <a:p>
+            <a:pPr indent="0" marL="0">
+              <a:buNone/>
+            </a:pPr>
+            <a:r>
+              <a:rPr lang="en-US" sz="1500" b="1" dirty="0">
+                <a:solidFill>
+                  <a:srgbClr val="0B1D33"/>
+                </a:solidFill>
+                <a:latin typeface="Calibri" pitchFamily="34" charset="0"/>
+                <a:ea typeface="Calibri" pitchFamily="34" charset="-122"/>
+                <a:cs typeface="Calibri" pitchFamily="34" charset="-120"/>
+              </a:rPr>
+              <a:t>Same input, same answer, every time</a:t>
+            </a:r>
+            <a:endParaRPr lang="en-US" sz="1500" dirty="0"/>
+          </a:p>
+        </p:txBody>
+      </p:sp>
+      <p:pic>
+        <p:nvPicPr>
+          <p:cNvPr id="14" name="q cell 1 0" descr="MaskGuard LightGBM + rules: Same input, same answer, every time: yes">    </p:cNvPr>
+          <p:cNvPicPr>
+            <a:picLocks noChangeAspect="1"/>
+          </p:cNvPicPr>
+          <p:nvPr/>
+        </p:nvPicPr>
+        <p:blipFill>
+          <a:blip r:embed="rId4"/>
+          <a:stretch>
+            <a:fillRect/>
+          </a:stretch>
+        </p:blipFill>
+        <p:spPr>
+          <a:xfrm>
+            <a:off x="4892040" y="2738628"/>
+            <a:ext cx="274320" cy="274320"/>
+          </a:xfrm>
+          <a:prstGeom prst="rect">
+            <a:avLst/>
+          </a:prstGeom>
+        </p:spPr>
+      </p:pic>
+      <p:pic>
+        <p:nvPicPr>
+          <p:cNvPr id="15" name="q cell 1 1" descr="LLM-based detection: Same input, same answer, every time: no">    </p:cNvPr>
+          <p:cNvPicPr>
+            <a:picLocks noChangeAspect="1"/>
+          </p:cNvPicPr>
+          <p:nvPr/>
+        </p:nvPicPr>
+        <p:blipFill>
+          <a:blip r:embed="rId5"/>
+          <a:stretch>
+            <a:fillRect/>
+          </a:stretch>
+        </p:blipFill>
+        <p:spPr>
+          <a:xfrm>
+            <a:off x="6355080" y="2738628"/>
+            <a:ext cx="274320" cy="274320"/>
+          </a:xfrm>
+          <a:prstGeom prst="rect">
+            <a:avLst/>
+          </a:prstGeom>
+        </p:spPr>
+      </p:pic>
+      <p:pic>
+        <p:nvPicPr>
+          <p:cNvPr id="16" name="q cell 1 2" descr="Quantum ML detection: Same input, same answer, every time: partly">    </p:cNvPr>
+          <p:cNvPicPr>
+            <a:picLocks noChangeAspect="1"/>
+          </p:cNvPicPr>
+          <p:nvPr/>
+        </p:nvPicPr>
+        <p:blipFill>
+          <a:blip r:embed="rId6"/>
+          <a:stretch>
+            <a:fillRect/>
+          </a:stretch>
+        </p:blipFill>
+        <p:spPr>
+          <a:xfrm>
+            <a:off x="7818120" y="2738628"/>
+            <a:ext cx="274320" cy="274320"/>
+          </a:xfrm>
+          <a:prstGeom prst="rect">
+            <a:avLst/>
+          </a:prstGeom>
+        </p:spPr>
+      </p:pic>
+      <p:sp>
+        <p:nvSpPr>
+          <p:cNvPr id="17" name="q row line 2"/>
+          <p:cNvSpPr/>
+          <p:nvPr/>
+        </p:nvSpPr>
+        <p:spPr>
+          <a:xfrm>
+            <a:off x="548640" y="3218688"/>
+            <a:ext cx="8138160" cy="0"/>
+          </a:xfrm>
+          <a:prstGeom prst="line">
+            <a:avLst/>
+          </a:prstGeom>
+          <a:noFill/>
+          <a:ln w="9525">
+            <a:solidFill>
+              <a:srgbClr val="CBD5E1"/>
+            </a:solidFill>
+            <a:prstDash val="solid"/>
+          </a:ln>
+        </p:spPr>
+      </p:sp>
+      <p:sp>
+        <p:nvSpPr>
+          <p:cNvPr id="18" name="Text 10"/>
+          <p:cNvSpPr txBox="1"/>
+          <p:nvPr/>
+        </p:nvSpPr>
+        <p:spPr>
+          <a:xfrm>
+            <a:off x="548640" y="3218688"/>
+            <a:ext cx="3657600" cy="685800"/>
+          </a:xfrm>
+          <a:prstGeom prst="rect">
+            <a:avLst/>
+          </a:prstGeom>
+          <a:noFill/>
+          <a:ln/>
+        </p:spPr>
+        <p:txBody>
+          <a:bodyPr wrap="square" lIns="0" tIns="0" rIns="0" bIns="0" rtlCol="0" anchor="ctr"/>
+          <a:lstStyle/>
+          <a:p>
+            <a:pPr indent="0" marL="0">
+              <a:buNone/>
+            </a:pPr>
+            <a:r>
+              <a:rPr lang="en-US" sz="1500" b="1" dirty="0">
+                <a:solidFill>
+                  <a:srgbClr val="0B1D33"/>
+                </a:solidFill>
+                <a:latin typeface="Calibri" pitchFamily="34" charset="0"/>
+                <a:ea typeface="Calibri" pitchFamily="34" charset="-122"/>
+                <a:cs typeface="Calibri" pitchFamily="34" charset="-120"/>
+              </a:rPr>
+              <a:t>Milliseconds per column, no per-call cost</a:t>
+            </a:r>
+            <a:endParaRPr lang="en-US" sz="1500" dirty="0"/>
+          </a:p>
+        </p:txBody>
+      </p:sp>
+      <p:pic>
+        <p:nvPicPr>
+          <p:cNvPr id="19" name="q cell 2 0" descr="MaskGuard LightGBM + rules: Milliseconds per column, no per-call cost: yes">    </p:cNvPr>
+          <p:cNvPicPr>
+            <a:picLocks noChangeAspect="1"/>
+          </p:cNvPicPr>
+          <p:nvPr/>
+        </p:nvPicPr>
+        <p:blipFill>
+          <a:blip r:embed="rId7"/>
+          <a:stretch>
+            <a:fillRect/>
+          </a:stretch>
+        </p:blipFill>
+        <p:spPr>
+          <a:xfrm>
+            <a:off x="4892040" y="3424428"/>
+            <a:ext cx="274320" cy="274320"/>
+          </a:xfrm>
+          <a:prstGeom prst="rect">
+            <a:avLst/>
+          </a:prstGeom>
+        </p:spPr>
+      </p:pic>
+      <p:pic>
+        <p:nvPicPr>
+          <p:cNvPr id="20" name="q cell 2 1" descr="LLM-based detection: Milliseconds per column, no per-call cost: no">    </p:cNvPr>
+          <p:cNvPicPr>
+            <a:picLocks noChangeAspect="1"/>
+          </p:cNvPicPr>
+          <p:nvPr/>
+        </p:nvPicPr>
+        <p:blipFill>
+          <a:blip r:embed="rId8"/>
+          <a:stretch>
+            <a:fillRect/>
+          </a:stretch>
+        </p:blipFill>
+        <p:spPr>
+          <a:xfrm>
+            <a:off x="6355080" y="3424428"/>
+            <a:ext cx="274320" cy="274320"/>
+          </a:xfrm>
+          <a:prstGeom prst="rect">
+            <a:avLst/>
+          </a:prstGeom>
+        </p:spPr>
+      </p:pic>
+      <p:pic>
+        <p:nvPicPr>
+          <p:cNvPr id="21" name="q cell 2 2" descr="Quantum ML detection: Milliseconds per column, no per-call cost: no">    </p:cNvPr>
+          <p:cNvPicPr>
+            <a:picLocks noChangeAspect="1"/>
+          </p:cNvPicPr>
+          <p:nvPr/>
+        </p:nvPicPr>
+        <p:blipFill>
+          <a:blip r:embed="rId9"/>
+          <a:stretch>
+            <a:fillRect/>
+          </a:stretch>
+        </p:blipFill>
+        <p:spPr>
+          <a:xfrm>
+            <a:off x="7818120" y="3424428"/>
+            <a:ext cx="274320" cy="274320"/>
+          </a:xfrm>
+          <a:prstGeom prst="rect">
+            <a:avLst/>
+          </a:prstGeom>
+        </p:spPr>
+      </p:pic>
+      <p:sp>
+        <p:nvSpPr>
+          <p:cNvPr id="22" name="Text 11"/>
+          <p:cNvSpPr txBox="1"/>
+          <p:nvPr/>
+        </p:nvSpPr>
+        <p:spPr>
+          <a:xfrm>
+            <a:off x="548640" y="4014216"/>
+            <a:ext cx="8046720" cy="457200"/>
+          </a:xfrm>
+          <a:prstGeom prst="rect">
+            <a:avLst/>
+          </a:prstGeom>
+          <a:noFill/>
+          <a:ln/>
+        </p:spPr>
+        <p:txBody>
+          <a:bodyPr wrap="square" lIns="0" tIns="0" rIns="0" bIns="0" rtlCol="0" anchor="t"/>
+          <a:lstStyle/>
+          <a:p>
+            <a:pPr indent="0" marL="0">
+              <a:buNone/>
+            </a:pPr>
+            <a:r>
+              <a:rPr lang="en-US" sz="1050" i="1" dirty="0">
+                <a:solidFill>
+                  <a:srgbClr val="64748B"/>
+                </a:solidFill>
+                <a:latin typeface="Calibri" pitchFamily="34" charset="0"/>
+                <a:ea typeface="Calibri" pitchFamily="34" charset="-122"/>
+                <a:cs typeface="Calibri" pitchFamily="34" charset="-120"/>
+              </a:rPr>
+              <a:t>— = partly. LLMs: only if self-hosted on the bank's own GPUs. Quantum: only as a simulation on ordinary computers (slow, and not quantum), otherwise on cloud quantum hardware with probabilistic results.</a:t>
+            </a:r>
+            <a:endParaRPr lang="en-US" sz="1050" dirty="0"/>
+          </a:p>
+        </p:txBody>
+      </p:sp>
+      <p:sp>
+        <p:nvSpPr>
+          <p:cNvPr id="23" name="ml numbers"/>
+          <p:cNvSpPr/>
+          <p:nvPr/>
+        </p:nvSpPr>
+        <p:spPr>
+          <a:xfrm>
+            <a:off x="8823960" y="1188720"/>
+            <a:ext cx="2788920" cy="3108960"/>
+          </a:xfrm>
+          <a:prstGeom prst="roundRect">
+            <a:avLst>
+              <a:gd name="adj" fmla="val 2623"/>
+            </a:avLst>
+          </a:prstGeom>
+          <a:solidFill>
+            <a:srgbClr val="0B1D33"/>
+          </a:solidFill>
+          <a:ln w="9525">
+            <a:solidFill>
+              <a:srgbClr val="0B1D33"/>
+            </a:solidFill>
+            <a:prstDash val="solid"/>
+          </a:ln>
+        </p:spPr>
+      </p:sp>
+      <p:sp>
+        <p:nvSpPr>
+          <p:cNvPr id="24" name="Text 13"/>
+          <p:cNvSpPr txBox="1"/>
+          <p:nvPr/>
+        </p:nvSpPr>
+        <p:spPr>
+          <a:xfrm>
+            <a:off x="9052560" y="1325880"/>
+            <a:ext cx="2423160" cy="457200"/>
+          </a:xfrm>
+          <a:prstGeom prst="rect">
+            <a:avLst/>
+          </a:prstGeom>
+          <a:noFill/>
+          <a:ln/>
+        </p:spPr>
+        <p:txBody>
+          <a:bodyPr wrap="square" lIns="0" tIns="0" rIns="0" bIns="0" rtlCol="0" anchor="ctr"/>
+          <a:lstStyle/>
+          <a:p>
+            <a:pPr indent="0" marL="0">
+              <a:buNone/>
+            </a:pPr>
+            <a:r>
+              <a:rPr lang="en-US" sz="2600" b="1" dirty="0">
+                <a:solidFill>
+                  <a:srgbClr val="D97706"/>
+                </a:solidFill>
+                <a:latin typeface="Cambria" pitchFamily="34" charset="0"/>
+                <a:ea typeface="Cambria" pitchFamily="34" charset="-122"/>
+                <a:cs typeface="Cambria" pitchFamily="34" charset="-120"/>
+              </a:rPr>
+              <a:t>0.999</a:t>
+            </a:r>
+            <a:endParaRPr lang="en-US" sz="2600" dirty="0"/>
+          </a:p>
+        </p:txBody>
+      </p:sp>
+      <p:sp>
+        <p:nvSpPr>
+          <p:cNvPr id="25" name="Text 14"/>
+          <p:cNvSpPr txBox="1"/>
+          <p:nvPr/>
+        </p:nvSpPr>
+        <p:spPr>
+          <a:xfrm>
+            <a:off x="9052560" y="1783080"/>
+            <a:ext cx="2423160" cy="457200"/>
+          </a:xfrm>
+          <a:prstGeom prst="rect">
+            <a:avLst/>
+          </a:prstGeom>
+          <a:noFill/>
+          <a:ln/>
+        </p:spPr>
+        <p:txBody>
+          <a:bodyPr wrap="square" lIns="0" tIns="0" rIns="0" bIns="0" rtlCol="0" anchor="t"/>
+          <a:lstStyle/>
+          <a:p>
+            <a:pPr indent="0" marL="0">
+              <a:buNone/>
+            </a:pPr>
+            <a:r>
+              <a:rPr lang="en-US" sz="1200" dirty="0">
+                <a:solidFill>
+                  <a:srgbClr val="CBD5E1"/>
+                </a:solidFill>
+                <a:latin typeface="Calibri" pitchFamily="34" charset="0"/>
+                <a:ea typeface="Calibri" pitchFamily="34" charset="-122"/>
+                <a:cs typeface="Calibri" pitchFamily="34" charset="-120"/>
+              </a:rPr>
+              <a:t>accuracy (F1) on an external benchmark, misleading names</a:t>
+            </a:r>
+            <a:endParaRPr lang="en-US" sz="1200" dirty="0"/>
+          </a:p>
+        </p:txBody>
+      </p:sp>
+      <p:sp>
+        <p:nvSpPr>
+          <p:cNvPr id="26" name="Text 15"/>
+          <p:cNvSpPr txBox="1"/>
+          <p:nvPr/>
+        </p:nvSpPr>
+        <p:spPr>
+          <a:xfrm>
+            <a:off x="9052560" y="2313432"/>
+            <a:ext cx="2423160" cy="457200"/>
+          </a:xfrm>
+          <a:prstGeom prst="rect">
+            <a:avLst/>
+          </a:prstGeom>
+          <a:noFill/>
+          <a:ln/>
+        </p:spPr>
+        <p:txBody>
+          <a:bodyPr wrap="square" lIns="0" tIns="0" rIns="0" bIns="0" rtlCol="0" anchor="ctr"/>
+          <a:lstStyle/>
+          <a:p>
+            <a:pPr indent="0" marL="0">
+              <a:buNone/>
+            </a:pPr>
+            <a:r>
+              <a:rPr lang="en-US" sz="2600" b="1" dirty="0">
+                <a:solidFill>
+                  <a:srgbClr val="FFFFFF"/>
+                </a:solidFill>
+                <a:latin typeface="Cambria" pitchFamily="34" charset="0"/>
+                <a:ea typeface="Cambria" pitchFamily="34" charset="-122"/>
+                <a:cs typeface="Cambria" pitchFamily="34" charset="-120"/>
+              </a:rPr>
+              <a:t>≈ 3 ms</a:t>
+            </a:r>
+            <a:endParaRPr lang="en-US" sz="2600" dirty="0"/>
+          </a:p>
+        </p:txBody>
+      </p:sp>
+      <p:sp>
+        <p:nvSpPr>
+          <p:cNvPr id="27" name="Text 16"/>
+          <p:cNvSpPr txBox="1"/>
+          <p:nvPr/>
+        </p:nvSpPr>
+        <p:spPr>
+          <a:xfrm>
+            <a:off x="9052560" y="2770632"/>
+            <a:ext cx="2423160" cy="457200"/>
+          </a:xfrm>
+          <a:prstGeom prst="rect">
+            <a:avLst/>
+          </a:prstGeom>
+          <a:noFill/>
+          <a:ln/>
+        </p:spPr>
+        <p:txBody>
+          <a:bodyPr wrap="square" lIns="0" tIns="0" rIns="0" bIns="0" rtlCol="0" anchor="t"/>
+          <a:lstStyle/>
+          <a:p>
+            <a:pPr indent="0" marL="0">
+              <a:buNone/>
+            </a:pPr>
+            <a:r>
+              <a:rPr lang="en-US" sz="1200" dirty="0">
+                <a:solidFill>
+                  <a:srgbClr val="CBD5E1"/>
+                </a:solidFill>
+                <a:latin typeface="Calibri" pitchFamily="34" charset="0"/>
+                <a:ea typeface="Calibri" pitchFamily="34" charset="-122"/>
+                <a:cs typeface="Calibri" pitchFamily="34" charset="-120"/>
+              </a:rPr>
+              <a:t>per column on a normal CPU (20 values)</a:t>
+            </a:r>
+            <a:endParaRPr lang="en-US" sz="1200" dirty="0"/>
+          </a:p>
+        </p:txBody>
+      </p:sp>
+      <p:sp>
+        <p:nvSpPr>
+          <p:cNvPr id="28" name="Text 17"/>
+          <p:cNvSpPr txBox="1"/>
+          <p:nvPr/>
+        </p:nvSpPr>
+        <p:spPr>
+          <a:xfrm>
+            <a:off x="9052560" y="3300984"/>
+            <a:ext cx="2423160" cy="457200"/>
+          </a:xfrm>
+          <a:prstGeom prst="rect">
+            <a:avLst/>
+          </a:prstGeom>
+          <a:noFill/>
+          <a:ln/>
+        </p:spPr>
+        <p:txBody>
+          <a:bodyPr wrap="square" lIns="0" tIns="0" rIns="0" bIns="0" rtlCol="0" anchor="ctr"/>
+          <a:lstStyle/>
+          <a:p>
+            <a:pPr indent="0" marL="0">
+              <a:buNone/>
+            </a:pPr>
+            <a:r>
+              <a:rPr lang="en-US" sz="2600" b="1" dirty="0">
+                <a:solidFill>
+                  <a:srgbClr val="FFFFFF"/>
+                </a:solidFill>
+                <a:latin typeface="Cambria" pitchFamily="34" charset="0"/>
+                <a:ea typeface="Cambria" pitchFamily="34" charset="-122"/>
+                <a:cs typeface="Cambria" pitchFamily="34" charset="-120"/>
+              </a:rPr>
+              <a:t>0.45 MB</a:t>
+            </a:r>
+            <a:endParaRPr lang="en-US" sz="2600" dirty="0"/>
+          </a:p>
+        </p:txBody>
+      </p:sp>
+      <p:sp>
+        <p:nvSpPr>
+          <p:cNvPr id="29" name="Text 18"/>
+          <p:cNvSpPr txBox="1"/>
+          <p:nvPr/>
+        </p:nvSpPr>
+        <p:spPr>
+          <a:xfrm>
+            <a:off x="9052560" y="3758184"/>
+            <a:ext cx="2423160" cy="457200"/>
+          </a:xfrm>
+          <a:prstGeom prst="rect">
+            <a:avLst/>
+          </a:prstGeom>
+          <a:noFill/>
+          <a:ln/>
+        </p:spPr>
+        <p:txBody>
+          <a:bodyPr wrap="square" lIns="0" tIns="0" rIns="0" bIns="0" rtlCol="0" anchor="t"/>
+          <a:lstStyle/>
+          <a:p>
+            <a:pPr indent="0" marL="0">
+              <a:buNone/>
+            </a:pPr>
+            <a:r>
+              <a:rPr lang="en-US" sz="1200" dirty="0">
+                <a:solidFill>
+                  <a:srgbClr val="CBD5E1"/>
+                </a:solidFill>
+                <a:latin typeface="Calibri" pitchFamily="34" charset="0"/>
+                <a:ea typeface="Calibri" pitchFamily="34" charset="-122"/>
+                <a:cs typeface="Calibri" pitchFamily="34" charset="-120"/>
+              </a:rPr>
+              <a:t>model file; no GPU, no internet</a:t>
+            </a:r>
+            <a:endParaRPr lang="en-US" sz="1200" dirty="0"/>
+          </a:p>
+        </p:txBody>
+      </p:sp>
+      <p:sp>
+        <p:nvSpPr>
+          <p:cNvPr id="30" name="quantum safe card"/>
+          <p:cNvSpPr/>
+          <p:nvPr/>
+        </p:nvSpPr>
+        <p:spPr>
+          <a:xfrm>
+            <a:off x="548640" y="4526280"/>
+            <a:ext cx="5486400" cy="1691640"/>
+          </a:xfrm>
+          <a:prstGeom prst="roundRect">
+            <a:avLst>
+              <a:gd name="adj" fmla="val 4324"/>
+            </a:avLst>
+          </a:prstGeom>
+          <a:solidFill>
+            <a:srgbClr val="E6F4F1"/>
+          </a:solidFill>
+          <a:ln w="9525">
+            <a:solidFill>
+              <a:srgbClr val="E6F4F1"/>
+            </a:solidFill>
+            <a:prstDash val="solid"/>
+          </a:ln>
+        </p:spPr>
+      </p:sp>
+      <p:sp>
+        <p:nvSpPr>
+          <p:cNvPr id="31" name="quantum-safe circle"/>
+          <p:cNvSpPr/>
+          <p:nvPr/>
+        </p:nvSpPr>
+        <p:spPr>
+          <a:xfrm>
+            <a:off x="731520" y="4681728"/>
+            <a:ext cx="566928" cy="566928"/>
+          </a:xfrm>
+          <a:prstGeom prst="ellipse">
+            <a:avLst/>
+          </a:prstGeom>
+          <a:solidFill>
+            <a:srgbClr val="0F766E"/>
+          </a:solidFill>
+          <a:ln w="12700">
+            <a:solidFill>
+              <a:srgbClr val="0F766E"/>
+            </a:solidFill>
+            <a:prstDash val="solid"/>
+          </a:ln>
+        </p:spPr>
+      </p:sp>
+      <p:pic>
+        <p:nvPicPr>
+          <p:cNvPr id="32" name="quantum-safe icon" descr="quantum-safe">    </p:cNvPr>
+          <p:cNvPicPr>
+            <a:picLocks noChangeAspect="1"/>
+          </p:cNvPicPr>
+          <p:nvPr/>
+        </p:nvPicPr>
+        <p:blipFill>
+          <a:blip r:embed="rId10"/>
+          <a:stretch>
+            <a:fillRect/>
+          </a:stretch>
+        </p:blipFill>
+        <p:spPr>
+          <a:xfrm>
+            <a:off x="873252" y="4823460"/>
+            <a:ext cx="283464" cy="283464"/>
+          </a:xfrm>
+          <a:prstGeom prst="rect">
+            <a:avLst/>
+          </a:prstGeom>
+        </p:spPr>
+      </p:pic>
+      <p:sp>
+        <p:nvSpPr>
+          <p:cNvPr id="33" name="Text 21"/>
+          <p:cNvSpPr txBox="1"/>
+          <p:nvPr/>
+        </p:nvSpPr>
+        <p:spPr>
+          <a:xfrm>
+            <a:off x="1417320" y="4681728"/>
+            <a:ext cx="4480560" cy="457200"/>
+          </a:xfrm>
+          <a:prstGeom prst="rect">
+            <a:avLst/>
+          </a:prstGeom>
+          <a:noFill/>
+          <a:ln/>
+        </p:spPr>
+        <p:txBody>
+          <a:bodyPr wrap="square" lIns="0" tIns="0" rIns="0" bIns="0" rtlCol="0" anchor="ctr"/>
+          <a:lstStyle/>
+          <a:p>
+            <a:pPr indent="0" marL="0">
+              <a:buNone/>
+            </a:pPr>
+            <a:r>
+              <a:rPr lang="en-US" sz="1800" b="1" dirty="0">
+                <a:solidFill>
+                  <a:srgbClr val="0B1D33"/>
+                </a:solidFill>
+                <a:latin typeface="Cambria" pitchFamily="34" charset="0"/>
+                <a:ea typeface="Cambria" pitchFamily="34" charset="-122"/>
+                <a:cs typeface="Cambria" pitchFamily="34" charset="-120"/>
+              </a:rPr>
+              <a:t>Quantum-safe? Already.</a:t>
+            </a:r>
+            <a:endParaRPr lang="en-US" sz="1800" dirty="0"/>
+          </a:p>
+        </p:txBody>
+      </p:sp>
+      <p:sp>
+        <p:nvSpPr>
+          <p:cNvPr id="34" name="Text 22"/>
+          <p:cNvSpPr txBox="1"/>
+          <p:nvPr/>
+        </p:nvSpPr>
+        <p:spPr>
+          <a:xfrm>
+            <a:off x="731520" y="5257800"/>
+            <a:ext cx="5166360" cy="914400"/>
+          </a:xfrm>
+          <a:prstGeom prst="rect">
+            <a:avLst/>
+          </a:prstGeom>
+          <a:noFill/>
+          <a:ln/>
+        </p:spPr>
+        <p:txBody>
+          <a:bodyPr wrap="square" lIns="0" tIns="0" rIns="0" bIns="0" rtlCol="0" anchor="t"/>
+          <a:lstStyle/>
+          <a:p>
+            <a:pPr indent="0" marL="0">
+              <a:buNone/>
+            </a:pPr>
+            <a:r>
+              <a:rPr lang="en-US" sz="1250" dirty="0">
+                <a:solidFill>
+                  <a:srgbClr val="1E3A5F"/>
+                </a:solidFill>
+                <a:latin typeface="Calibri" pitchFamily="34" charset="0"/>
+                <a:ea typeface="Calibri" pitchFamily="34" charset="-122"/>
+                <a:cs typeface="Calibri" pitchFamily="34" charset="-120"/>
+              </a:rPr>
+              <a:t>Quantum computers break RSA and elliptic-curve keys. MaskGuard's masking uses none: codes are HMAC-SHA-256 with 256-bit keys, the audit chain is SHA-256 — symmetric primitives NIST does not schedule for retirement.</a:t>
+            </a:r>
+            <a:endParaRPr lang="en-US" sz="1250" dirty="0"/>
+          </a:p>
+        </p:txBody>
+      </p:sp>
+      <p:sp>
+        <p:nvSpPr>
+          <p:cNvPr id="35" name="quantum ml card"/>
+          <p:cNvSpPr/>
+          <p:nvPr/>
+        </p:nvSpPr>
+        <p:spPr>
+          <a:xfrm>
+            <a:off x="6263640" y="4526280"/>
+            <a:ext cx="5349240" cy="1691640"/>
+          </a:xfrm>
+          <a:prstGeom prst="roundRect">
+            <a:avLst>
+              <a:gd name="adj" fmla="val 4324"/>
+            </a:avLst>
+          </a:prstGeom>
+          <a:solidFill>
+            <a:srgbClr val="FDEBD0"/>
+          </a:solidFill>
+          <a:ln w="9525">
+            <a:solidFill>
+              <a:srgbClr val="FDEBD0"/>
+            </a:solidFill>
+            <a:prstDash val="solid"/>
+          </a:ln>
+        </p:spPr>
+      </p:sp>
+      <p:sp>
+        <p:nvSpPr>
+          <p:cNvPr id="36" name="quantum ml circle"/>
+          <p:cNvSpPr/>
+          <p:nvPr/>
+        </p:nvSpPr>
+        <p:spPr>
+          <a:xfrm>
+            <a:off x="6446520" y="4681728"/>
             <a:ext cx="566928" cy="566928"/>
           </a:xfrm>
           <a:prstGeom prst="ellipse">
@@ -10052,21 +12610,21 @@
       </p:sp>
       <p:pic>
         <p:nvPicPr>
-          <p:cNvPr id="11" name="support_ravi icon" descr="support_ravi">    </p:cNvPr>
+          <p:cNvPr id="37" name="quantum ml icon" descr="quantum ml">    </p:cNvPr>
           <p:cNvPicPr>
             <a:picLocks noChangeAspect="1"/>
           </p:cNvPicPr>
           <p:nvPr/>
         </p:nvPicPr>
         <p:blipFill>
-          <a:blip r:embed="rId4"/>
+          <a:blip r:embed="rId11"/>
           <a:stretch>
             <a:fillRect/>
           </a:stretch>
         </p:blipFill>
         <p:spPr>
           <a:xfrm>
-            <a:off x="8737092" y="3113532"/>
+            <a:off x="6588252" y="4823460"/>
             <a:ext cx="283464" cy="283464"/>
           </a:xfrm>
           <a:prstGeom prst="rect">
@@ -10076,14 +12634,14 @@
       </p:pic>
       <p:sp>
         <p:nvSpPr>
-          <p:cNvPr id="12" name="Text 6"/>
-          <p:cNvSpPr txBox="1"/>
-          <p:nvPr/>
-        </p:nvSpPr>
-        <p:spPr>
-          <a:xfrm>
-            <a:off x="9281160" y="2926080"/>
-            <a:ext cx="2377440" cy="329184"/>
+          <p:cNvPr id="38" name="Text 25"/>
+          <p:cNvSpPr txBox="1"/>
+          <p:nvPr/>
+        </p:nvSpPr>
+        <p:spPr>
+          <a:xfrm>
+            <a:off x="7132320" y="4681728"/>
+            <a:ext cx="4389120" cy="457200"/>
           </a:xfrm>
           <a:prstGeom prst="rect">
             <a:avLst/>
@@ -10099,30 +12657,30 @@
               <a:buNone/>
             </a:pPr>
             <a:r>
-              <a:rPr lang="en-US" sz="1400" b="1" dirty="0">
-                <a:solidFill>
-                  <a:srgbClr val="D97706"/>
-                </a:solidFill>
-                <a:latin typeface="Courier New" pitchFamily="34" charset="0"/>
-                <a:ea typeface="Courier New" pitchFamily="34" charset="-122"/>
-                <a:cs typeface="Courier New" pitchFamily="34" charset="-120"/>
-              </a:rPr>
-              <a:t>support_ravi</a:t>
-            </a:r>
-            <a:endParaRPr lang="en-US" sz="1400" dirty="0"/>
-          </a:p>
-        </p:txBody>
-      </p:sp>
-      <p:sp>
-        <p:nvSpPr>
-          <p:cNvPr id="13" name="Text 7"/>
-          <p:cNvSpPr txBox="1"/>
-          <p:nvPr/>
-        </p:nvSpPr>
-        <p:spPr>
-          <a:xfrm>
-            <a:off x="9281160" y="3264408"/>
-            <a:ext cx="2377440" cy="566928"/>
+              <a:rPr lang="en-US" sz="1800" b="1" dirty="0">
+                <a:solidFill>
+                  <a:srgbClr val="0B1D33"/>
+                </a:solidFill>
+                <a:latin typeface="Cambria" pitchFamily="34" charset="0"/>
+                <a:ea typeface="Cambria" pitchFamily="34" charset="-122"/>
+                <a:cs typeface="Cambria" pitchFamily="34" charset="-120"/>
+              </a:rPr>
+              <a:t>Quantum ML? Not better here, yet.</a:t>
+            </a:r>
+            <a:endParaRPr lang="en-US" sz="1800" dirty="0"/>
+          </a:p>
+        </p:txBody>
+      </p:sp>
+      <p:sp>
+        <p:nvSpPr>
+          <p:cNvPr id="39" name="Text 26"/>
+          <p:cNvSpPr txBox="1"/>
+          <p:nvPr/>
+        </p:nvSpPr>
+        <p:spPr>
+          <a:xfrm>
+            <a:off x="6446520" y="5257800"/>
+            <a:ext cx="5029200" cy="914400"/>
           </a:xfrm>
           <a:prstGeom prst="rect">
             <a:avLst/>
@@ -10138,275 +12696,46 @@
               <a:buNone/>
             </a:pPr>
             <a:r>
-              <a:rPr lang="en-US" sz="1600" b="1" dirty="0">
-                <a:solidFill>
-                  <a:srgbClr val="0B1D33"/>
-                </a:solidFill>
-                <a:latin typeface="Calibri" pitchFamily="34" charset="0"/>
-                <a:ea typeface="Calibri" pitchFamily="34" charset="-122"/>
-                <a:cs typeface="Calibri" pitchFamily="34" charset="-120"/>
-              </a:rPr>
-              <a:t>Sees only the last digits.</a:t>
-            </a:r>
-            <a:endParaRPr lang="en-US" sz="1600" dirty="0"/>
-          </a:p>
-        </p:txBody>
-      </p:sp>
-      <p:sp>
-        <p:nvSpPr>
-          <p:cNvPr id="14" name="Text 8"/>
-          <p:cNvSpPr txBox="1"/>
-          <p:nvPr/>
-        </p:nvSpPr>
-        <p:spPr>
-          <a:xfrm>
-            <a:off x="9281160" y="3593592"/>
-            <a:ext cx="2377440" cy="685800"/>
-          </a:xfrm>
-          <a:prstGeom prst="rect">
-            <a:avLst/>
-          </a:prstGeom>
-          <a:noFill/>
-          <a:ln/>
-        </p:spPr>
-        <p:txBody>
-          <a:bodyPr wrap="square" lIns="0" tIns="0" rIns="0" bIns="0" rtlCol="0" anchor="t"/>
+              <a:rPr lang="en-US" sz="1250" dirty="0">
+                <a:solidFill>
+                  <a:srgbClr val="1E3A5F"/>
+                </a:solidFill>
+                <a:latin typeface="Calibri" pitchFamily="34" charset="0"/>
+                <a:ea typeface="Calibri" pitchFamily="34" charset="-122"/>
+                <a:cs typeface="Calibri" pitchFamily="34" charset="-120"/>
+              </a:rPr>
+              <a:t>Recent benchmarks find quantum classifiers do not beat tuned classical models on table data, and they run on simulators or cloud hardware. We picked what works today, on the bank's own servers.</a:t>
+            </a:r>
+            <a:endParaRPr lang="en-US" sz="1250" dirty="0"/>
+          </a:p>
+        </p:txBody>
+      </p:sp>
+      <p:sp>
+        <p:nvSpPr>
+          <p:cNvPr id="40" name="Text 27"/>
+          <p:cNvSpPr txBox="1"/>
+          <p:nvPr/>
+        </p:nvSpPr>
+        <p:spPr>
+          <a:xfrm>
+            <a:off x="548640" y="6254496"/>
+            <a:ext cx="11064240" cy="182880"/>
+          </a:xfrm>
+          <a:prstGeom prst="rect">
+            <a:avLst/>
+          </a:prstGeom>
+          <a:noFill/>
+          <a:ln/>
+        </p:spPr>
+        <p:txBody>
+          <a:bodyPr wrap="square" lIns="0" tIns="0" rIns="0" bIns="0" rtlCol="0" anchor="ctr"/>
           <a:lstStyle/>
           <a:p>
             <a:pPr indent="0" marL="0">
               <a:buNone/>
             </a:pPr>
             <a:r>
-              <a:rPr lang="en-US" sz="1300" dirty="0">
-                <a:solidFill>
-                  <a:srgbClr val="1E3A5F"/>
-                </a:solidFill>
-                <a:latin typeface="Calibri" pitchFamily="34" charset="0"/>
-                <a:ea typeface="Calibri" pitchFamily="34" charset="-122"/>
-                <a:cs typeface="Calibri" pitchFamily="34" charset="-120"/>
-              </a:rPr>
-              <a:t>Balances rounded down to ₹10,000.</a:t>
-            </a:r>
-            <a:endParaRPr lang="en-US" sz="1300" dirty="0"/>
-          </a:p>
-        </p:txBody>
-      </p:sp>
-      <p:pic>
-        <p:nvPicPr>
-          <p:cNvPr id="15" name="dashboard analyst_kavya" descr="Control Room masking playground on Saffron Bank as analyst_kavya: Sees codes, not people. Same customer → same code, so analysis still works.">    </p:cNvPr>
-          <p:cNvPicPr>
-            <a:picLocks noChangeAspect="1"/>
-          </p:cNvPicPr>
-          <p:nvPr/>
-        </p:nvPicPr>
-        <p:blipFill>
-          <a:blip r:embed="rId5"/>
-          <a:stretch>
-            <a:fillRect/>
-          </a:stretch>
-        </p:blipFill>
-        <p:spPr>
-          <a:xfrm>
-            <a:off x="548640" y="4572000"/>
-            <a:ext cx="7818120" cy="1538701"/>
-          </a:xfrm>
-          <a:prstGeom prst="rect">
-            <a:avLst/>
-          </a:prstGeom>
-        </p:spPr>
-      </p:pic>
-      <p:sp>
-        <p:nvSpPr>
-          <p:cNvPr id="16" name="analyst_kavya circle"/>
-          <p:cNvSpPr/>
-          <p:nvPr/>
-        </p:nvSpPr>
-        <p:spPr>
-          <a:xfrm>
-            <a:off x="8595360" y="4663440"/>
-            <a:ext cx="566928" cy="566928"/>
-          </a:xfrm>
-          <a:prstGeom prst="ellipse">
-            <a:avLst/>
-          </a:prstGeom>
-          <a:solidFill>
-            <a:srgbClr val="0F766E"/>
-          </a:solidFill>
-          <a:ln w="12700">
-            <a:solidFill>
-              <a:srgbClr val="0F766E"/>
-            </a:solidFill>
-            <a:prstDash val="solid"/>
-          </a:ln>
-        </p:spPr>
-      </p:sp>
-      <p:pic>
-        <p:nvPicPr>
-          <p:cNvPr id="17" name="analyst_kavya icon" descr="analyst_kavya">    </p:cNvPr>
-          <p:cNvPicPr>
-            <a:picLocks noChangeAspect="1"/>
-          </p:cNvPicPr>
-          <p:nvPr/>
-        </p:nvPicPr>
-        <p:blipFill>
-          <a:blip r:embed="rId6"/>
-          <a:stretch>
-            <a:fillRect/>
-          </a:stretch>
-        </p:blipFill>
-        <p:spPr>
-          <a:xfrm>
-            <a:off x="8737092" y="4805172"/>
-            <a:ext cx="283464" cy="283464"/>
-          </a:xfrm>
-          <a:prstGeom prst="rect">
-            <a:avLst/>
-          </a:prstGeom>
-        </p:spPr>
-      </p:pic>
-      <p:sp>
-        <p:nvSpPr>
-          <p:cNvPr id="18" name="Text 10"/>
-          <p:cNvSpPr txBox="1"/>
-          <p:nvPr/>
-        </p:nvSpPr>
-        <p:spPr>
-          <a:xfrm>
-            <a:off x="9281160" y="4617720"/>
-            <a:ext cx="2377440" cy="329184"/>
-          </a:xfrm>
-          <a:prstGeom prst="rect">
-            <a:avLst/>
-          </a:prstGeom>
-          <a:noFill/>
-          <a:ln/>
-        </p:spPr>
-        <p:txBody>
-          <a:bodyPr wrap="square" lIns="0" tIns="0" rIns="0" bIns="0" rtlCol="0" anchor="ctr"/>
-          <a:lstStyle/>
-          <a:p>
-            <a:pPr indent="0" marL="0">
-              <a:buNone/>
-            </a:pPr>
-            <a:r>
-              <a:rPr lang="en-US" sz="1400" b="1" dirty="0">
-                <a:solidFill>
-                  <a:srgbClr val="0F766E"/>
-                </a:solidFill>
-                <a:latin typeface="Courier New" pitchFamily="34" charset="0"/>
-                <a:ea typeface="Courier New" pitchFamily="34" charset="-122"/>
-                <a:cs typeface="Courier New" pitchFamily="34" charset="-120"/>
-              </a:rPr>
-              <a:t>analyst_kavya</a:t>
-            </a:r>
-            <a:endParaRPr lang="en-US" sz="1400" dirty="0"/>
-          </a:p>
-        </p:txBody>
-      </p:sp>
-      <p:sp>
-        <p:nvSpPr>
-          <p:cNvPr id="19" name="Text 11"/>
-          <p:cNvSpPr txBox="1"/>
-          <p:nvPr/>
-        </p:nvSpPr>
-        <p:spPr>
-          <a:xfrm>
-            <a:off x="9281160" y="4956048"/>
-            <a:ext cx="2377440" cy="566928"/>
-          </a:xfrm>
-          <a:prstGeom prst="rect">
-            <a:avLst/>
-          </a:prstGeom>
-          <a:noFill/>
-          <a:ln/>
-        </p:spPr>
-        <p:txBody>
-          <a:bodyPr wrap="square" lIns="0" tIns="0" rIns="0" bIns="0" rtlCol="0" anchor="t"/>
-          <a:lstStyle/>
-          <a:p>
-            <a:pPr indent="0" marL="0">
-              <a:buNone/>
-            </a:pPr>
-            <a:r>
-              <a:rPr lang="en-US" sz="1600" b="1" dirty="0">
-                <a:solidFill>
-                  <a:srgbClr val="0B1D33"/>
-                </a:solidFill>
-                <a:latin typeface="Calibri" pitchFamily="34" charset="0"/>
-                <a:ea typeface="Calibri" pitchFamily="34" charset="-122"/>
-                <a:cs typeface="Calibri" pitchFamily="34" charset="-120"/>
-              </a:rPr>
-              <a:t>Sees codes, not people.</a:t>
-            </a:r>
-            <a:endParaRPr lang="en-US" sz="1600" dirty="0"/>
-          </a:p>
-        </p:txBody>
-      </p:sp>
-      <p:sp>
-        <p:nvSpPr>
-          <p:cNvPr id="20" name="Text 12"/>
-          <p:cNvSpPr txBox="1"/>
-          <p:nvPr/>
-        </p:nvSpPr>
-        <p:spPr>
-          <a:xfrm>
-            <a:off x="9281160" y="5285232"/>
-            <a:ext cx="2377440" cy="685800"/>
-          </a:xfrm>
-          <a:prstGeom prst="rect">
-            <a:avLst/>
-          </a:prstGeom>
-          <a:noFill/>
-          <a:ln/>
-        </p:spPr>
-        <p:txBody>
-          <a:bodyPr wrap="square" lIns="0" tIns="0" rIns="0" bIns="0" rtlCol="0" anchor="t"/>
-          <a:lstStyle/>
-          <a:p>
-            <a:pPr indent="0" marL="0">
-              <a:buNone/>
-            </a:pPr>
-            <a:r>
-              <a:rPr lang="en-US" sz="1300" dirty="0">
-                <a:solidFill>
-                  <a:srgbClr val="1E3A5F"/>
-                </a:solidFill>
-                <a:latin typeface="Calibri" pitchFamily="34" charset="0"/>
-                <a:ea typeface="Calibri" pitchFamily="34" charset="-122"/>
-                <a:cs typeface="Calibri" pitchFamily="34" charset="-120"/>
-              </a:rPr>
-              <a:t>Same customer → same code, so analysis still works.</a:t>
-            </a:r>
-            <a:endParaRPr lang="en-US" sz="1300" dirty="0"/>
-          </a:p>
-        </p:txBody>
-      </p:sp>
-      <p:sp>
-        <p:nvSpPr>
-          <p:cNvPr id="21" name="Text 13"/>
-          <p:cNvSpPr txBox="1"/>
-          <p:nvPr/>
-        </p:nvSpPr>
-        <p:spPr>
-          <a:xfrm>
-            <a:off x="548640" y="6199632"/>
-            <a:ext cx="11064240" cy="201168"/>
-          </a:xfrm>
-          <a:prstGeom prst="rect">
-            <a:avLst/>
-          </a:prstGeom>
-          <a:noFill/>
-          <a:ln/>
-        </p:spPr>
-        <p:txBody>
-          <a:bodyPr wrap="square" lIns="0" tIns="0" rIns="0" bIns="0" rtlCol="0" anchor="ctr"/>
-          <a:lstStyle/>
-          <a:p>
-            <a:pPr indent="0" marL="0">
-              <a:buNone/>
-            </a:pPr>
-            <a:r>
-              <a:rPr lang="en-US" sz="1000" i="1" dirty="0">
+              <a:rPr lang="en-US" sz="900" i="1" dirty="0">
                 <a:solidFill>
                   <a:srgbClr val="64748B"/>
                 </a:solidFill>
@@ -10414,9 +12743,9 @@
                 <a:ea typeface="Calibri" pitchFamily="34" charset="-122"/>
                 <a:cs typeface="Calibri" pitchFamily="34" charset="-120"/>
               </a:rPr>
-              <a:t>Real screenshots of the MaskGuard Control Room on the organisers' Saffron Bank data, logged in as users from their users.csv.</a:t>
-            </a:r>
-            <a:endParaRPr lang="en-US" sz="1000" dirty="0"/>
+              <a:t>Sources: NIST IR 8547 (draft) transition plan covers public-key algorithms; Bowles, Ahmed &amp; Schuld 2024, "Better than classical?"; QSVM tabular benchmark, arXiv 2604.18837. Our numbers: docs/EVALUATION.md.</a:t>
+            </a:r>
+            <a:endParaRPr lang="en-US" sz="900" dirty="0"/>
           </a:p>
         </p:txBody>
       </p:sp>
@@ -10525,7 +12854,7 @@
                 <a:ea typeface="Cambria" pitchFamily="34" charset="-122"/>
                 <a:cs typeface="Cambria" pitchFamily="34" charset="-120"/>
               </a:rPr>
-              <a:t>Command line: the same engine, for IT teams and automation</a:t>
+              <a:t>Dashboard: one query, three organiser users</a:t>
             </a:r>
             <a:endParaRPr lang="en-US" sz="3000" dirty="0"/>
           </a:p>
@@ -10533,7 +12862,7 @@
       </p:sp>
       <p:pic>
         <p:nvPicPr>
-          <p:cNvPr id="3" name="cli roles screenshot" descr="Real MaskGuard CLI on Saffron Bank: the same query as admin_anita, support_ravi and analyst_kavya.">    </p:cNvPr>
+          <p:cNvPr id="3" name="dashboard admin_anita" descr="Control Room masking playground on Saffron Bank as admin_anita: Sees the real data. Every query is still logged.">    </p:cNvPr>
           <p:cNvPicPr>
             <a:picLocks noChangeAspect="1"/>
           </p:cNvPicPr>
@@ -10548,7 +12877,7 @@
         <p:spPr>
           <a:xfrm>
             <a:off x="548640" y="1188720"/>
-            <a:ext cx="6766560" cy="4644350"/>
+            <a:ext cx="7818120" cy="1517030"/>
           </a:xfrm>
           <a:prstGeom prst="rect">
             <a:avLst/>
@@ -10557,24 +12886,22 @@
       </p:pic>
       <p:sp>
         <p:nvSpPr>
-          <p:cNvPr id="4" name="commands card"/>
+          <p:cNvPr id="4" name="admin_anita circle"/>
           <p:cNvSpPr/>
           <p:nvPr/>
         </p:nvSpPr>
         <p:spPr>
           <a:xfrm>
-            <a:off x="7589520" y="1188720"/>
-            <a:ext cx="4023360" cy="4644350"/>
-          </a:xfrm>
-          <a:prstGeom prst="roundRect">
-            <a:avLst>
-              <a:gd name="adj" fmla="val 1818"/>
-            </a:avLst>
+            <a:off x="8595360" y="1280160"/>
+            <a:ext cx="566928" cy="566928"/>
+          </a:xfrm>
+          <a:prstGeom prst="ellipse">
+            <a:avLst/>
           </a:prstGeom>
           <a:solidFill>
             <a:srgbClr val="0B1D33"/>
           </a:solidFill>
-          <a:ln w="9525">
+          <a:ln w="12700">
             <a:solidFill>
               <a:srgbClr val="0B1D33"/>
             </a:solidFill>
@@ -10582,16 +12909,40 @@
           </a:ln>
         </p:spPr>
       </p:sp>
-      <p:sp>
-        <p:nvSpPr>
-          <p:cNvPr id="5" name="Text 2"/>
-          <p:cNvSpPr txBox="1"/>
-          <p:nvPr/>
-        </p:nvSpPr>
-        <p:spPr>
-          <a:xfrm>
-            <a:off x="7818120" y="1325880"/>
-            <a:ext cx="3566160" cy="365760"/>
+      <p:pic>
+        <p:nvPicPr>
+          <p:cNvPr id="5" name="admin_anita icon" descr="admin_anita">    </p:cNvPr>
+          <p:cNvPicPr>
+            <a:picLocks noChangeAspect="1"/>
+          </p:cNvPicPr>
+          <p:nvPr/>
+        </p:nvPicPr>
+        <p:blipFill>
+          <a:blip r:embed="rId2"/>
+          <a:stretch>
+            <a:fillRect/>
+          </a:stretch>
+        </p:blipFill>
+        <p:spPr>
+          <a:xfrm>
+            <a:off x="8737092" y="1421892"/>
+            <a:ext cx="283464" cy="283464"/>
+          </a:xfrm>
+          <a:prstGeom prst="rect">
+            <a:avLst/>
+          </a:prstGeom>
+        </p:spPr>
+      </p:pic>
+      <p:sp>
+        <p:nvSpPr>
+          <p:cNvPr id="6" name="Text 2"/>
+          <p:cNvSpPr txBox="1"/>
+          <p:nvPr/>
+        </p:nvSpPr>
+        <p:spPr>
+          <a:xfrm>
+            <a:off x="9281160" y="1234440"/>
+            <a:ext cx="2377440" cy="329184"/>
           </a:xfrm>
           <a:prstGeom prst="rect">
             <a:avLst/>
@@ -10607,69 +12958,181 @@
               <a:buNone/>
             </a:pPr>
             <a:r>
-              <a:rPr lang="en-US" sz="1600" b="1" dirty="0">
-                <a:solidFill>
-                  <a:srgbClr val="D97706"/>
-                </a:solidFill>
-                <a:latin typeface="Calibri" pitchFamily="34" charset="0"/>
-                <a:ea typeface="Calibri" pitchFamily="34" charset="-122"/>
-                <a:cs typeface="Calibri" pitchFamily="34" charset="-120"/>
-              </a:rPr>
-              <a:t>Five commands, start to finish</a:t>
-            </a:r>
-            <a:endParaRPr lang="en-US" sz="1600" dirty="0"/>
-          </a:p>
-        </p:txBody>
-      </p:sp>
-      <p:sp>
-        <p:nvSpPr>
-          <p:cNvPr id="6" name="Text 3"/>
-          <p:cNvSpPr txBox="1"/>
-          <p:nvPr/>
-        </p:nvSpPr>
-        <p:spPr>
-          <a:xfrm>
-            <a:off x="7818120" y="1828800"/>
-            <a:ext cx="3657600" cy="329184"/>
-          </a:xfrm>
-          <a:prstGeom prst="rect">
-            <a:avLst/>
-          </a:prstGeom>
-          <a:noFill/>
-          <a:ln/>
-        </p:spPr>
-        <p:txBody>
-          <a:bodyPr wrap="square" lIns="0" tIns="0" rIns="0" bIns="0" rtlCol="0" anchor="ctr"/>
-          <a:lstStyle/>
-          <a:p>
-            <a:pPr indent="0" marL="0">
-              <a:buNone/>
-            </a:pPr>
-            <a:r>
-              <a:rPr lang="en-US" sz="1450" b="1" dirty="0">
-                <a:solidFill>
-                  <a:srgbClr val="FFFFFF"/>
+              <a:rPr lang="en-US" sz="1400" b="1" dirty="0">
+                <a:solidFill>
+                  <a:srgbClr val="0B1D33"/>
                 </a:solidFill>
                 <a:latin typeface="Courier New" pitchFamily="34" charset="0"/>
                 <a:ea typeface="Courier New" pitchFamily="34" charset="-122"/>
                 <a:cs typeface="Courier New" pitchFamily="34" charset="-120"/>
               </a:rPr>
-              <a:t>maskguard connect</a:t>
-            </a:r>
-            <a:endParaRPr lang="en-US" sz="1450" dirty="0"/>
-          </a:p>
-        </p:txBody>
-      </p:sp>
-      <p:sp>
-        <p:nvSpPr>
-          <p:cNvPr id="7" name="Text 4"/>
-          <p:cNvSpPr txBox="1"/>
-          <p:nvPr/>
-        </p:nvSpPr>
-        <p:spPr>
-          <a:xfrm>
-            <a:off x="7818120" y="2157984"/>
-            <a:ext cx="3657600" cy="329184"/>
+              <a:t>admin_anita</a:t>
+            </a:r>
+            <a:endParaRPr lang="en-US" sz="1400" dirty="0"/>
+          </a:p>
+        </p:txBody>
+      </p:sp>
+      <p:sp>
+        <p:nvSpPr>
+          <p:cNvPr id="7" name="Text 3"/>
+          <p:cNvSpPr txBox="1"/>
+          <p:nvPr/>
+        </p:nvSpPr>
+        <p:spPr>
+          <a:xfrm>
+            <a:off x="9281160" y="1572768"/>
+            <a:ext cx="2377440" cy="566928"/>
+          </a:xfrm>
+          <a:prstGeom prst="rect">
+            <a:avLst/>
+          </a:prstGeom>
+          <a:noFill/>
+          <a:ln/>
+        </p:spPr>
+        <p:txBody>
+          <a:bodyPr wrap="square" lIns="0" tIns="0" rIns="0" bIns="0" rtlCol="0" anchor="t"/>
+          <a:lstStyle/>
+          <a:p>
+            <a:pPr indent="0" marL="0">
+              <a:buNone/>
+            </a:pPr>
+            <a:r>
+              <a:rPr lang="en-US" sz="1600" b="1" dirty="0">
+                <a:solidFill>
+                  <a:srgbClr val="0B1D33"/>
+                </a:solidFill>
+                <a:latin typeface="Calibri" pitchFamily="34" charset="0"/>
+                <a:ea typeface="Calibri" pitchFamily="34" charset="-122"/>
+                <a:cs typeface="Calibri" pitchFamily="34" charset="-120"/>
+              </a:rPr>
+              <a:t>Sees the real data.</a:t>
+            </a:r>
+            <a:endParaRPr lang="en-US" sz="1600" dirty="0"/>
+          </a:p>
+        </p:txBody>
+      </p:sp>
+      <p:sp>
+        <p:nvSpPr>
+          <p:cNvPr id="8" name="Text 4"/>
+          <p:cNvSpPr txBox="1"/>
+          <p:nvPr/>
+        </p:nvSpPr>
+        <p:spPr>
+          <a:xfrm>
+            <a:off x="9281160" y="1901952"/>
+            <a:ext cx="2377440" cy="685800"/>
+          </a:xfrm>
+          <a:prstGeom prst="rect">
+            <a:avLst/>
+          </a:prstGeom>
+          <a:noFill/>
+          <a:ln/>
+        </p:spPr>
+        <p:txBody>
+          <a:bodyPr wrap="square" lIns="0" tIns="0" rIns="0" bIns="0" rtlCol="0" anchor="t"/>
+          <a:lstStyle/>
+          <a:p>
+            <a:pPr indent="0" marL="0">
+              <a:buNone/>
+            </a:pPr>
+            <a:r>
+              <a:rPr lang="en-US" sz="1300" dirty="0">
+                <a:solidFill>
+                  <a:srgbClr val="1E3A5F"/>
+                </a:solidFill>
+                <a:latin typeface="Calibri" pitchFamily="34" charset="0"/>
+                <a:ea typeface="Calibri" pitchFamily="34" charset="-122"/>
+                <a:cs typeface="Calibri" pitchFamily="34" charset="-120"/>
+              </a:rPr>
+              <a:t>Every query is still logged.</a:t>
+            </a:r>
+            <a:endParaRPr lang="en-US" sz="1300" dirty="0"/>
+          </a:p>
+        </p:txBody>
+      </p:sp>
+      <p:pic>
+        <p:nvPicPr>
+          <p:cNvPr id="9" name="dashboard support_ravi" descr="Control Room masking playground on Saffron Bank as support_ravi: Sees only the last digits. Balances rounded down to ₹10,000.">    </p:cNvPr>
+          <p:cNvPicPr>
+            <a:picLocks noChangeAspect="1"/>
+          </p:cNvPicPr>
+          <p:nvPr/>
+        </p:nvPicPr>
+        <p:blipFill>
+          <a:blip r:embed="rId3"/>
+          <a:stretch>
+            <a:fillRect/>
+          </a:stretch>
+        </p:blipFill>
+        <p:spPr>
+          <a:xfrm>
+            <a:off x="548640" y="2880360"/>
+            <a:ext cx="7818120" cy="1538701"/>
+          </a:xfrm>
+          <a:prstGeom prst="rect">
+            <a:avLst/>
+          </a:prstGeom>
+        </p:spPr>
+      </p:pic>
+      <p:sp>
+        <p:nvSpPr>
+          <p:cNvPr id="10" name="support_ravi circle"/>
+          <p:cNvSpPr/>
+          <p:nvPr/>
+        </p:nvSpPr>
+        <p:spPr>
+          <a:xfrm>
+            <a:off x="8595360" y="2971800"/>
+            <a:ext cx="566928" cy="566928"/>
+          </a:xfrm>
+          <a:prstGeom prst="ellipse">
+            <a:avLst/>
+          </a:prstGeom>
+          <a:solidFill>
+            <a:srgbClr val="D97706"/>
+          </a:solidFill>
+          <a:ln w="12700">
+            <a:solidFill>
+              <a:srgbClr val="D97706"/>
+            </a:solidFill>
+            <a:prstDash val="solid"/>
+          </a:ln>
+        </p:spPr>
+      </p:sp>
+      <p:pic>
+        <p:nvPicPr>
+          <p:cNvPr id="11" name="support_ravi icon" descr="support_ravi">    </p:cNvPr>
+          <p:cNvPicPr>
+            <a:picLocks noChangeAspect="1"/>
+          </p:cNvPicPr>
+          <p:nvPr/>
+        </p:nvPicPr>
+        <p:blipFill>
+          <a:blip r:embed="rId4"/>
+          <a:stretch>
+            <a:fillRect/>
+          </a:stretch>
+        </p:blipFill>
+        <p:spPr>
+          <a:xfrm>
+            <a:off x="8737092" y="3113532"/>
+            <a:ext cx="283464" cy="283464"/>
+          </a:xfrm>
+          <a:prstGeom prst="rect">
+            <a:avLst/>
+          </a:prstGeom>
+        </p:spPr>
+      </p:pic>
+      <p:sp>
+        <p:nvSpPr>
+          <p:cNvPr id="12" name="Text 6"/>
+          <p:cNvSpPr txBox="1"/>
+          <p:nvPr/>
+        </p:nvSpPr>
+        <p:spPr>
+          <a:xfrm>
+            <a:off x="9281160" y="2926080"/>
+            <a:ext cx="2377440" cy="329184"/>
           </a:xfrm>
           <a:prstGeom prst="rect">
             <a:avLst/>
@@ -10685,69 +13148,181 @@
               <a:buNone/>
             </a:pPr>
             <a:r>
-              <a:rPr lang="en-US" sz="1300" dirty="0">
-                <a:solidFill>
-                  <a:srgbClr val="CBD5E1"/>
-                </a:solidFill>
-                <a:latin typeface="Calibri" pitchFamily="34" charset="0"/>
-                <a:ea typeface="Calibri" pitchFamily="34" charset="-122"/>
-                <a:cs typeface="Calibri" pitchFamily="34" charset="-120"/>
-              </a:rPr>
-              <a:t>connect a database; it scans it</a:t>
-            </a:r>
-            <a:endParaRPr lang="en-US" sz="1300" dirty="0"/>
-          </a:p>
-        </p:txBody>
-      </p:sp>
-      <p:sp>
-        <p:nvSpPr>
-          <p:cNvPr id="8" name="Text 5"/>
-          <p:cNvSpPr txBox="1"/>
-          <p:nvPr/>
-        </p:nvSpPr>
-        <p:spPr>
-          <a:xfrm>
-            <a:off x="7818120" y="2606040"/>
-            <a:ext cx="3657600" cy="329184"/>
-          </a:xfrm>
-          <a:prstGeom prst="rect">
-            <a:avLst/>
-          </a:prstGeom>
-          <a:noFill/>
-          <a:ln/>
-        </p:spPr>
-        <p:txBody>
-          <a:bodyPr wrap="square" lIns="0" tIns="0" rIns="0" bIns="0" rtlCol="0" anchor="ctr"/>
-          <a:lstStyle/>
-          <a:p>
-            <a:pPr indent="0" marL="0">
-              <a:buNone/>
-            </a:pPr>
-            <a:r>
-              <a:rPr lang="en-US" sz="1450" b="1" dirty="0">
-                <a:solidFill>
-                  <a:srgbClr val="FFFFFF"/>
+              <a:rPr lang="en-US" sz="1400" b="1" dirty="0">
+                <a:solidFill>
+                  <a:srgbClr val="D97706"/>
                 </a:solidFill>
                 <a:latin typeface="Courier New" pitchFamily="34" charset="0"/>
                 <a:ea typeface="Courier New" pitchFamily="34" charset="-122"/>
                 <a:cs typeface="Courier New" pitchFamily="34" charset="-120"/>
               </a:rPr>
-              <a:t>maskguard pii approve</a:t>
-            </a:r>
-            <a:endParaRPr lang="en-US" sz="1450" dirty="0"/>
-          </a:p>
-        </p:txBody>
-      </p:sp>
-      <p:sp>
-        <p:nvSpPr>
-          <p:cNvPr id="9" name="Text 6"/>
-          <p:cNvSpPr txBox="1"/>
-          <p:nvPr/>
-        </p:nvSpPr>
-        <p:spPr>
-          <a:xfrm>
-            <a:off x="7818120" y="2935224"/>
-            <a:ext cx="3657600" cy="329184"/>
+              <a:t>support_ravi</a:t>
+            </a:r>
+            <a:endParaRPr lang="en-US" sz="1400" dirty="0"/>
+          </a:p>
+        </p:txBody>
+      </p:sp>
+      <p:sp>
+        <p:nvSpPr>
+          <p:cNvPr id="13" name="Text 7"/>
+          <p:cNvSpPr txBox="1"/>
+          <p:nvPr/>
+        </p:nvSpPr>
+        <p:spPr>
+          <a:xfrm>
+            <a:off x="9281160" y="3264408"/>
+            <a:ext cx="2377440" cy="566928"/>
+          </a:xfrm>
+          <a:prstGeom prst="rect">
+            <a:avLst/>
+          </a:prstGeom>
+          <a:noFill/>
+          <a:ln/>
+        </p:spPr>
+        <p:txBody>
+          <a:bodyPr wrap="square" lIns="0" tIns="0" rIns="0" bIns="0" rtlCol="0" anchor="t"/>
+          <a:lstStyle/>
+          <a:p>
+            <a:pPr indent="0" marL="0">
+              <a:buNone/>
+            </a:pPr>
+            <a:r>
+              <a:rPr lang="en-US" sz="1600" b="1" dirty="0">
+                <a:solidFill>
+                  <a:srgbClr val="0B1D33"/>
+                </a:solidFill>
+                <a:latin typeface="Calibri" pitchFamily="34" charset="0"/>
+                <a:ea typeface="Calibri" pitchFamily="34" charset="-122"/>
+                <a:cs typeface="Calibri" pitchFamily="34" charset="-120"/>
+              </a:rPr>
+              <a:t>Sees only the last digits.</a:t>
+            </a:r>
+            <a:endParaRPr lang="en-US" sz="1600" dirty="0"/>
+          </a:p>
+        </p:txBody>
+      </p:sp>
+      <p:sp>
+        <p:nvSpPr>
+          <p:cNvPr id="14" name="Text 8"/>
+          <p:cNvSpPr txBox="1"/>
+          <p:nvPr/>
+        </p:nvSpPr>
+        <p:spPr>
+          <a:xfrm>
+            <a:off x="9281160" y="3593592"/>
+            <a:ext cx="2377440" cy="685800"/>
+          </a:xfrm>
+          <a:prstGeom prst="rect">
+            <a:avLst/>
+          </a:prstGeom>
+          <a:noFill/>
+          <a:ln/>
+        </p:spPr>
+        <p:txBody>
+          <a:bodyPr wrap="square" lIns="0" tIns="0" rIns="0" bIns="0" rtlCol="0" anchor="t"/>
+          <a:lstStyle/>
+          <a:p>
+            <a:pPr indent="0" marL="0">
+              <a:buNone/>
+            </a:pPr>
+            <a:r>
+              <a:rPr lang="en-US" sz="1300" dirty="0">
+                <a:solidFill>
+                  <a:srgbClr val="1E3A5F"/>
+                </a:solidFill>
+                <a:latin typeface="Calibri" pitchFamily="34" charset="0"/>
+                <a:ea typeface="Calibri" pitchFamily="34" charset="-122"/>
+                <a:cs typeface="Calibri" pitchFamily="34" charset="-120"/>
+              </a:rPr>
+              <a:t>Balances rounded down to ₹10,000.</a:t>
+            </a:r>
+            <a:endParaRPr lang="en-US" sz="1300" dirty="0"/>
+          </a:p>
+        </p:txBody>
+      </p:sp>
+      <p:pic>
+        <p:nvPicPr>
+          <p:cNvPr id="15" name="dashboard analyst_kavya" descr="Control Room masking playground on Saffron Bank as analyst_kavya: Sees codes, not people. Same customer → same code, so analysis still works.">    </p:cNvPr>
+          <p:cNvPicPr>
+            <a:picLocks noChangeAspect="1"/>
+          </p:cNvPicPr>
+          <p:nvPr/>
+        </p:nvPicPr>
+        <p:blipFill>
+          <a:blip r:embed="rId5"/>
+          <a:stretch>
+            <a:fillRect/>
+          </a:stretch>
+        </p:blipFill>
+        <p:spPr>
+          <a:xfrm>
+            <a:off x="548640" y="4572000"/>
+            <a:ext cx="7818120" cy="1538701"/>
+          </a:xfrm>
+          <a:prstGeom prst="rect">
+            <a:avLst/>
+          </a:prstGeom>
+        </p:spPr>
+      </p:pic>
+      <p:sp>
+        <p:nvSpPr>
+          <p:cNvPr id="16" name="analyst_kavya circle"/>
+          <p:cNvSpPr/>
+          <p:nvPr/>
+        </p:nvSpPr>
+        <p:spPr>
+          <a:xfrm>
+            <a:off x="8595360" y="4663440"/>
+            <a:ext cx="566928" cy="566928"/>
+          </a:xfrm>
+          <a:prstGeom prst="ellipse">
+            <a:avLst/>
+          </a:prstGeom>
+          <a:solidFill>
+            <a:srgbClr val="0F766E"/>
+          </a:solidFill>
+          <a:ln w="12700">
+            <a:solidFill>
+              <a:srgbClr val="0F766E"/>
+            </a:solidFill>
+            <a:prstDash val="solid"/>
+          </a:ln>
+        </p:spPr>
+      </p:sp>
+      <p:pic>
+        <p:nvPicPr>
+          <p:cNvPr id="17" name="analyst_kavya icon" descr="analyst_kavya">    </p:cNvPr>
+          <p:cNvPicPr>
+            <a:picLocks noChangeAspect="1"/>
+          </p:cNvPicPr>
+          <p:nvPr/>
+        </p:nvPicPr>
+        <p:blipFill>
+          <a:blip r:embed="rId6"/>
+          <a:stretch>
+            <a:fillRect/>
+          </a:stretch>
+        </p:blipFill>
+        <p:spPr>
+          <a:xfrm>
+            <a:off x="8737092" y="4805172"/>
+            <a:ext cx="283464" cy="283464"/>
+          </a:xfrm>
+          <a:prstGeom prst="rect">
+            <a:avLst/>
+          </a:prstGeom>
+        </p:spPr>
+      </p:pic>
+      <p:sp>
+        <p:nvSpPr>
+          <p:cNvPr id="18" name="Text 10"/>
+          <p:cNvSpPr txBox="1"/>
+          <p:nvPr/>
+        </p:nvSpPr>
+        <p:spPr>
+          <a:xfrm>
+            <a:off x="9281160" y="4617720"/>
+            <a:ext cx="2377440" cy="329184"/>
           </a:xfrm>
           <a:prstGeom prst="rect">
             <a:avLst/>
@@ -10763,69 +13338,108 @@
               <a:buNone/>
             </a:pPr>
             <a:r>
-              <a:rPr lang="en-US" sz="1300" dirty="0">
-                <a:solidFill>
-                  <a:srgbClr val="CBD5E1"/>
-                </a:solidFill>
-                <a:latin typeface="Calibri" pitchFamily="34" charset="0"/>
-                <a:ea typeface="Calibri" pitchFamily="34" charset="-122"/>
-                <a:cs typeface="Calibri" pitchFamily="34" charset="-120"/>
-              </a:rPr>
-              <a:t>a person confirms the labels</a:t>
-            </a:r>
-            <a:endParaRPr lang="en-US" sz="1300" dirty="0"/>
-          </a:p>
-        </p:txBody>
-      </p:sp>
-      <p:sp>
-        <p:nvSpPr>
-          <p:cNvPr id="10" name="Text 7"/>
-          <p:cNvSpPr txBox="1"/>
-          <p:nvPr/>
-        </p:nvSpPr>
-        <p:spPr>
-          <a:xfrm>
-            <a:off x="7818120" y="3383280"/>
-            <a:ext cx="3657600" cy="329184"/>
-          </a:xfrm>
-          <a:prstGeom prst="rect">
-            <a:avLst/>
-          </a:prstGeom>
-          <a:noFill/>
-          <a:ln/>
-        </p:spPr>
-        <p:txBody>
-          <a:bodyPr wrap="square" lIns="0" tIns="0" rIns="0" bIns="0" rtlCol="0" anchor="ctr"/>
-          <a:lstStyle/>
-          <a:p>
-            <a:pPr indent="0" marL="0">
-              <a:buNone/>
-            </a:pPr>
-            <a:r>
-              <a:rPr lang="en-US" sz="1450" b="1" dirty="0">
-                <a:solidFill>
-                  <a:srgbClr val="FFFFFF"/>
+              <a:rPr lang="en-US" sz="1400" b="1" dirty="0">
+                <a:solidFill>
+                  <a:srgbClr val="0F766E"/>
                 </a:solidFill>
                 <a:latin typeface="Courier New" pitchFamily="34" charset="0"/>
                 <a:ea typeface="Courier New" pitchFamily="34" charset="-122"/>
                 <a:cs typeface="Courier New" pitchFamily="34" charset="-120"/>
               </a:rPr>
-              <a:t>maskguard compare</a:t>
-            </a:r>
-            <a:endParaRPr lang="en-US" sz="1450" dirty="0"/>
-          </a:p>
-        </p:txBody>
-      </p:sp>
-      <p:sp>
-        <p:nvSpPr>
-          <p:cNvPr id="11" name="Text 8"/>
-          <p:cNvSpPr txBox="1"/>
-          <p:nvPr/>
-        </p:nvSpPr>
-        <p:spPr>
-          <a:xfrm>
-            <a:off x="7818120" y="3712464"/>
-            <a:ext cx="3657600" cy="329184"/>
+              <a:t>analyst_kavya</a:t>
+            </a:r>
+            <a:endParaRPr lang="en-US" sz="1400" dirty="0"/>
+          </a:p>
+        </p:txBody>
+      </p:sp>
+      <p:sp>
+        <p:nvSpPr>
+          <p:cNvPr id="19" name="Text 11"/>
+          <p:cNvSpPr txBox="1"/>
+          <p:nvPr/>
+        </p:nvSpPr>
+        <p:spPr>
+          <a:xfrm>
+            <a:off x="9281160" y="4956048"/>
+            <a:ext cx="2377440" cy="566928"/>
+          </a:xfrm>
+          <a:prstGeom prst="rect">
+            <a:avLst/>
+          </a:prstGeom>
+          <a:noFill/>
+          <a:ln/>
+        </p:spPr>
+        <p:txBody>
+          <a:bodyPr wrap="square" lIns="0" tIns="0" rIns="0" bIns="0" rtlCol="0" anchor="t"/>
+          <a:lstStyle/>
+          <a:p>
+            <a:pPr indent="0" marL="0">
+              <a:buNone/>
+            </a:pPr>
+            <a:r>
+              <a:rPr lang="en-US" sz="1600" b="1" dirty="0">
+                <a:solidFill>
+                  <a:srgbClr val="0B1D33"/>
+                </a:solidFill>
+                <a:latin typeface="Calibri" pitchFamily="34" charset="0"/>
+                <a:ea typeface="Calibri" pitchFamily="34" charset="-122"/>
+                <a:cs typeface="Calibri" pitchFamily="34" charset="-120"/>
+              </a:rPr>
+              <a:t>Sees codes, not people.</a:t>
+            </a:r>
+            <a:endParaRPr lang="en-US" sz="1600" dirty="0"/>
+          </a:p>
+        </p:txBody>
+      </p:sp>
+      <p:sp>
+        <p:nvSpPr>
+          <p:cNvPr id="20" name="Text 12"/>
+          <p:cNvSpPr txBox="1"/>
+          <p:nvPr/>
+        </p:nvSpPr>
+        <p:spPr>
+          <a:xfrm>
+            <a:off x="9281160" y="5285232"/>
+            <a:ext cx="2377440" cy="685800"/>
+          </a:xfrm>
+          <a:prstGeom prst="rect">
+            <a:avLst/>
+          </a:prstGeom>
+          <a:noFill/>
+          <a:ln/>
+        </p:spPr>
+        <p:txBody>
+          <a:bodyPr wrap="square" lIns="0" tIns="0" rIns="0" bIns="0" rtlCol="0" anchor="t"/>
+          <a:lstStyle/>
+          <a:p>
+            <a:pPr indent="0" marL="0">
+              <a:buNone/>
+            </a:pPr>
+            <a:r>
+              <a:rPr lang="en-US" sz="1300" dirty="0">
+                <a:solidFill>
+                  <a:srgbClr val="1E3A5F"/>
+                </a:solidFill>
+                <a:latin typeface="Calibri" pitchFamily="34" charset="0"/>
+                <a:ea typeface="Calibri" pitchFamily="34" charset="-122"/>
+                <a:cs typeface="Calibri" pitchFamily="34" charset="-120"/>
+              </a:rPr>
+              <a:t>Same customer → same code, so analysis still works.</a:t>
+            </a:r>
+            <a:endParaRPr lang="en-US" sz="1300" dirty="0"/>
+          </a:p>
+        </p:txBody>
+      </p:sp>
+      <p:sp>
+        <p:nvSpPr>
+          <p:cNvPr id="21" name="Text 13"/>
+          <p:cNvSpPr txBox="1"/>
+          <p:nvPr/>
+        </p:nvSpPr>
+        <p:spPr>
+          <a:xfrm>
+            <a:off x="548640" y="6199632"/>
+            <a:ext cx="11064240" cy="201168"/>
           </a:xfrm>
           <a:prstGeom prst="rect">
             <a:avLst/>
@@ -10841,226 +13455,17 @@
               <a:buNone/>
             </a:pPr>
             <a:r>
-              <a:rPr lang="en-US" sz="1300" dirty="0">
-                <a:solidFill>
-                  <a:srgbClr val="CBD5E1"/>
-                </a:solidFill>
-                <a:latin typeface="Calibri" pitchFamily="34" charset="0"/>
-                <a:ea typeface="Calibri" pitchFamily="34" charset="-122"/>
-                <a:cs typeface="Calibri" pitchFamily="34" charset="-120"/>
-              </a:rPr>
-              <a:t>same query, roles side by side</a:t>
-            </a:r>
-            <a:endParaRPr lang="en-US" sz="1300" dirty="0"/>
-          </a:p>
-        </p:txBody>
-      </p:sp>
-      <p:sp>
-        <p:nvSpPr>
-          <p:cNvPr id="12" name="Text 9"/>
-          <p:cNvSpPr txBox="1"/>
-          <p:nvPr/>
-        </p:nvSpPr>
-        <p:spPr>
-          <a:xfrm>
-            <a:off x="7818120" y="4160520"/>
-            <a:ext cx="3657600" cy="329184"/>
-          </a:xfrm>
-          <a:prstGeom prst="rect">
-            <a:avLst/>
-          </a:prstGeom>
-          <a:noFill/>
-          <a:ln/>
-        </p:spPr>
-        <p:txBody>
-          <a:bodyPr wrap="square" lIns="0" tIns="0" rIns="0" bIns="0" rtlCol="0" anchor="ctr"/>
-          <a:lstStyle/>
-          <a:p>
-            <a:pPr indent="0" marL="0">
-              <a:buNone/>
-            </a:pPr>
-            <a:r>
-              <a:rPr lang="en-US" sz="1450" b="1" dirty="0">
-                <a:solidFill>
-                  <a:srgbClr val="FFFFFF"/>
-                </a:solidFill>
-                <a:latin typeface="Courier New" pitchFamily="34" charset="0"/>
-                <a:ea typeface="Courier New" pitchFamily="34" charset="-122"/>
-                <a:cs typeface="Courier New" pitchFamily="34" charset="-120"/>
-              </a:rPr>
-              <a:t>maskguard attack</a:t>
-            </a:r>
-            <a:endParaRPr lang="en-US" sz="1450" dirty="0"/>
-          </a:p>
-        </p:txBody>
-      </p:sp>
-      <p:sp>
-        <p:nvSpPr>
-          <p:cNvPr id="13" name="Text 10"/>
-          <p:cNvSpPr txBox="1"/>
-          <p:nvPr/>
-        </p:nvSpPr>
-        <p:spPr>
-          <a:xfrm>
-            <a:off x="7818120" y="4489704"/>
-            <a:ext cx="3657600" cy="329184"/>
-          </a:xfrm>
-          <a:prstGeom prst="rect">
-            <a:avLst/>
-          </a:prstGeom>
-          <a:noFill/>
-          <a:ln/>
-        </p:spPr>
-        <p:txBody>
-          <a:bodyPr wrap="square" lIns="0" tIns="0" rIns="0" bIns="0" rtlCol="0" anchor="ctr"/>
-          <a:lstStyle/>
-          <a:p>
-            <a:pPr indent="0" marL="0">
-              <a:buNone/>
-            </a:pPr>
-            <a:r>
-              <a:rPr lang="en-US" sz="1300" dirty="0">
-                <a:solidFill>
-                  <a:srgbClr val="CBD5E1"/>
-                </a:solidFill>
-                <a:latin typeface="Calibri" pitchFamily="34" charset="0"/>
-                <a:ea typeface="Calibri" pitchFamily="34" charset="-122"/>
-                <a:cs typeface="Calibri" pitchFamily="34" charset="-120"/>
-              </a:rPr>
-              <a:t>17 known attacks: 0 leak</a:t>
-            </a:r>
-            <a:endParaRPr lang="en-US" sz="1300" dirty="0"/>
-          </a:p>
-        </p:txBody>
-      </p:sp>
-      <p:sp>
-        <p:nvSpPr>
-          <p:cNvPr id="14" name="Text 11"/>
-          <p:cNvSpPr txBox="1"/>
-          <p:nvPr/>
-        </p:nvSpPr>
-        <p:spPr>
-          <a:xfrm>
-            <a:off x="7818120" y="4937760"/>
-            <a:ext cx="3657600" cy="329184"/>
-          </a:xfrm>
-          <a:prstGeom prst="rect">
-            <a:avLst/>
-          </a:prstGeom>
-          <a:noFill/>
-          <a:ln/>
-        </p:spPr>
-        <p:txBody>
-          <a:bodyPr wrap="square" lIns="0" tIns="0" rIns="0" bIns="0" rtlCol="0" anchor="ctr"/>
-          <a:lstStyle/>
-          <a:p>
-            <a:pPr indent="0" marL="0">
-              <a:buNone/>
-            </a:pPr>
-            <a:r>
-              <a:rPr lang="en-US" sz="1450" b="1" dirty="0">
-                <a:solidFill>
-                  <a:srgbClr val="FFFFFF"/>
-                </a:solidFill>
-                <a:latin typeface="Courier New" pitchFamily="34" charset="0"/>
-                <a:ea typeface="Courier New" pitchFamily="34" charset="-122"/>
-                <a:cs typeface="Courier New" pitchFamily="34" charset="-120"/>
-              </a:rPr>
-              <a:t>maskguard integrity proof</a:t>
-            </a:r>
-            <a:endParaRPr lang="en-US" sz="1450" dirty="0"/>
-          </a:p>
-        </p:txBody>
-      </p:sp>
-      <p:sp>
-        <p:nvSpPr>
-          <p:cNvPr id="15" name="Text 12"/>
-          <p:cNvSpPr txBox="1"/>
-          <p:nvPr/>
-        </p:nvSpPr>
-        <p:spPr>
-          <a:xfrm>
-            <a:off x="7818120" y="5266944"/>
-            <a:ext cx="3657600" cy="329184"/>
-          </a:xfrm>
-          <a:prstGeom prst="rect">
-            <a:avLst/>
-          </a:prstGeom>
-          <a:noFill/>
-          <a:ln/>
-        </p:spPr>
-        <p:txBody>
-          <a:bodyPr wrap="square" lIns="0" tIns="0" rIns="0" bIns="0" rtlCol="0" anchor="ctr"/>
-          <a:lstStyle/>
-          <a:p>
-            <a:pPr indent="0" marL="0">
-              <a:buNone/>
-            </a:pPr>
-            <a:r>
-              <a:rPr lang="en-US" sz="1300" dirty="0">
-                <a:solidFill>
-                  <a:srgbClr val="CBD5E1"/>
-                </a:solidFill>
-                <a:latin typeface="Calibri" pitchFamily="34" charset="0"/>
-                <a:ea typeface="Calibri" pitchFamily="34" charset="-122"/>
-                <a:cs typeface="Calibri" pitchFamily="34" charset="-120"/>
-              </a:rPr>
-              <a:t>data unchanged, audit intact</a:t>
-            </a:r>
-            <a:endParaRPr lang="en-US" sz="1300" dirty="0"/>
-          </a:p>
-        </p:txBody>
-      </p:sp>
-      <p:sp>
-        <p:nvSpPr>
-          <p:cNvPr id="16" name="Text 13"/>
-          <p:cNvSpPr txBox="1"/>
-          <p:nvPr/>
-        </p:nvSpPr>
-        <p:spPr>
-          <a:xfrm>
-            <a:off x="548640" y="5970230"/>
-            <a:ext cx="11064240" cy="365760"/>
-          </a:xfrm>
-          <a:prstGeom prst="rect">
-            <a:avLst/>
-          </a:prstGeom>
-          <a:noFill/>
-          <a:ln/>
-        </p:spPr>
-        <p:txBody>
-          <a:bodyPr wrap="square" lIns="0" tIns="0" rIns="0" bIns="0" rtlCol="0" anchor="ctr"/>
-          <a:lstStyle/>
-          <a:p>
-            <a:pPr indent="0" marL="0">
-              <a:buNone/>
-            </a:pPr>
-            <a:r>
-              <a:rPr lang="en-US" sz="1400" b="1" dirty="0">
-                <a:solidFill>
-                  <a:srgbClr val="0B1D33"/>
-                </a:solidFill>
-                <a:latin typeface="Calibri" pitchFamily="34" charset="0"/>
-                <a:ea typeface="Calibri" pitchFamily="34" charset="-122"/>
-                <a:cs typeface="Calibri" pitchFamily="34" charset="-120"/>
-              </a:rPr>
-              <a:t>Also: </a:t>
-            </a:r>
-            <a:pPr indent="0" marL="0">
-              <a:buNone/>
-            </a:pPr>
-            <a:r>
-              <a:rPr lang="en-US" sz="1400" dirty="0">
-                <a:solidFill>
-                  <a:srgbClr val="1E3A5F"/>
-                </a:solidFill>
-                <a:latin typeface="Calibri" pitchFamily="34" charset="0"/>
-                <a:ea typeface="Calibri" pitchFamily="34" charset="-122"/>
-                <a:cs typeface="Calibri" pitchFamily="34" charset="-120"/>
-              </a:rPr>
-              <a:t>writes are refused for every role (exit code 3) · JSON output for scripts and CI · pip install maskguard</a:t>
-            </a:r>
-            <a:endParaRPr lang="en-US" sz="1400" dirty="0"/>
+              <a:rPr lang="en-US" sz="1000" i="1" dirty="0">
+                <a:solidFill>
+                  <a:srgbClr val="64748B"/>
+                </a:solidFill>
+                <a:latin typeface="Calibri" pitchFamily="34" charset="0"/>
+                <a:ea typeface="Calibri" pitchFamily="34" charset="-122"/>
+                <a:cs typeface="Calibri" pitchFamily="34" charset="-120"/>
+              </a:rPr>
+              <a:t>Real screenshots of the MaskGuard Control Room on the organisers' Saffron Bank data, logged in as users from their users.csv.</a:t>
+            </a:r>
+            <a:endParaRPr lang="en-US" sz="1000" dirty="0"/>
           </a:p>
         </p:txBody>
       </p:sp>
@@ -11169,26 +13574,50 @@
                 <a:ea typeface="Cambria" pitchFamily="34" charset="-122"/>
                 <a:cs typeface="Cambria" pitchFamily="34" charset="-120"/>
               </a:rPr>
-              <a:t>Proof on the organisers' own data — on all 3 databases</a:t>
+              <a:t>Command line: the same engine, for IT teams and automation</a:t>
             </a:r>
             <a:endParaRPr lang="en-US" sz="3000" dirty="0"/>
           </a:p>
         </p:txBody>
       </p:sp>
-      <p:sp>
-        <p:nvSpPr>
-          <p:cNvPr id="3" name="proof 1"/>
+      <p:pic>
+        <p:nvPicPr>
+          <p:cNvPr id="3" name="cli roles screenshot" descr="Real MaskGuard CLI on Saffron Bank: the same query as admin_anita, support_ravi and analyst_kavya.">    </p:cNvPr>
+          <p:cNvPicPr>
+            <a:picLocks noChangeAspect="1"/>
+          </p:cNvPicPr>
+          <p:nvPr/>
+        </p:nvPicPr>
+        <p:blipFill>
+          <a:blip r:embed="rId1"/>
+          <a:stretch>
+            <a:fillRect/>
+          </a:stretch>
+        </p:blipFill>
+        <p:spPr>
+          <a:xfrm>
+            <a:off x="548640" y="1188720"/>
+            <a:ext cx="6766560" cy="4644350"/>
+          </a:xfrm>
+          <a:prstGeom prst="rect">
+            <a:avLst/>
+          </a:prstGeom>
+        </p:spPr>
+      </p:pic>
+      <p:sp>
+        <p:nvSpPr>
+          <p:cNvPr id="4" name="commands card"/>
           <p:cNvSpPr/>
           <p:nvPr/>
         </p:nvSpPr>
         <p:spPr>
           <a:xfrm>
-            <a:off x="548640" y="1234440"/>
-            <a:ext cx="3520440" cy="1965960"/>
+            <a:off x="7589520" y="1188720"/>
+            <a:ext cx="4023360" cy="4644350"/>
           </a:xfrm>
           <a:prstGeom prst="roundRect">
             <a:avLst>
-              <a:gd name="adj" fmla="val 3721"/>
+              <a:gd name="adj" fmla="val 1818"/>
             </a:avLst>
           </a:prstGeom>
           <a:solidFill>
@@ -11204,14 +13633,14 @@
       </p:sp>
       <p:sp>
         <p:nvSpPr>
-          <p:cNvPr id="4" name="Text 2"/>
-          <p:cNvSpPr txBox="1"/>
-          <p:nvPr/>
-        </p:nvSpPr>
-        <p:spPr>
-          <a:xfrm>
-            <a:off x="822960" y="1399032"/>
-            <a:ext cx="3017520" cy="731520"/>
+          <p:cNvPr id="5" name="Text 2"/>
+          <p:cNvSpPr txBox="1"/>
+          <p:nvPr/>
+        </p:nvSpPr>
+        <p:spPr>
+          <a:xfrm>
+            <a:off x="7818120" y="1325880"/>
+            <a:ext cx="3566160" cy="365760"/>
           </a:xfrm>
           <a:prstGeom prst="rect">
             <a:avLst/>
@@ -11227,30 +13656,30 @@
               <a:buNone/>
             </a:pPr>
             <a:r>
-              <a:rPr lang="en-US" sz="4000" b="1" dirty="0">
+              <a:rPr lang="en-US" sz="1600" b="1" dirty="0">
                 <a:solidFill>
                   <a:srgbClr val="D97706"/>
                 </a:solidFill>
-                <a:latin typeface="Cambria" pitchFamily="34" charset="0"/>
-                <a:ea typeface="Cambria" pitchFamily="34" charset="-122"/>
-                <a:cs typeface="Cambria" pitchFamily="34" charset="-120"/>
-              </a:rPr>
-              <a:t>35 / 35</a:t>
-            </a:r>
-            <a:endParaRPr lang="en-US" sz="4000" dirty="0"/>
-          </a:p>
-        </p:txBody>
-      </p:sp>
-      <p:sp>
-        <p:nvSpPr>
-          <p:cNvPr id="5" name="Text 3"/>
-          <p:cNvSpPr txBox="1"/>
-          <p:nvPr/>
-        </p:nvSpPr>
-        <p:spPr>
-          <a:xfrm>
-            <a:off x="822960" y="2148840"/>
-            <a:ext cx="3063240" cy="365760"/>
+                <a:latin typeface="Calibri" pitchFamily="34" charset="0"/>
+                <a:ea typeface="Calibri" pitchFamily="34" charset="-122"/>
+                <a:cs typeface="Calibri" pitchFamily="34" charset="-120"/>
+              </a:rPr>
+              <a:t>Five commands, start to finish</a:t>
+            </a:r>
+            <a:endParaRPr lang="en-US" sz="1600" dirty="0"/>
+          </a:p>
+        </p:txBody>
+      </p:sp>
+      <p:sp>
+        <p:nvSpPr>
+          <p:cNvPr id="6" name="Text 3"/>
+          <p:cNvSpPr txBox="1"/>
+          <p:nvPr/>
+        </p:nvSpPr>
+        <p:spPr>
+          <a:xfrm>
+            <a:off x="7818120" y="1828800"/>
+            <a:ext cx="3657600" cy="329184"/>
           </a:xfrm>
           <a:prstGeom prst="rect">
             <a:avLst/>
@@ -11266,39 +13695,39 @@
               <a:buNone/>
             </a:pPr>
             <a:r>
-              <a:rPr lang="en-US" sz="1700" b="1" dirty="0">
+              <a:rPr lang="en-US" sz="1450" b="1" dirty="0">
                 <a:solidFill>
                   <a:srgbClr val="FFFFFF"/>
                 </a:solidFill>
-                <a:latin typeface="Calibri" pitchFamily="34" charset="0"/>
-                <a:ea typeface="Calibri" pitchFamily="34" charset="-122"/>
-                <a:cs typeface="Calibri" pitchFamily="34" charset="-120"/>
-              </a:rPr>
-              <a:t>sensitive columns found</a:t>
-            </a:r>
-            <a:endParaRPr lang="en-US" sz="1700" dirty="0"/>
-          </a:p>
-        </p:txBody>
-      </p:sp>
-      <p:sp>
-        <p:nvSpPr>
-          <p:cNvPr id="6" name="Text 4"/>
-          <p:cNvSpPr txBox="1"/>
-          <p:nvPr/>
-        </p:nvSpPr>
-        <p:spPr>
-          <a:xfrm>
-            <a:off x="822960" y="2532888"/>
-            <a:ext cx="3063240" cy="594360"/>
-          </a:xfrm>
-          <a:prstGeom prst="rect">
-            <a:avLst/>
-          </a:prstGeom>
-          <a:noFill/>
-          <a:ln/>
-        </p:spPr>
-        <p:txBody>
-          <a:bodyPr wrap="square" lIns="0" tIns="0" rIns="0" bIns="0" rtlCol="0" anchor="t"/>
+                <a:latin typeface="Courier New" pitchFamily="34" charset="0"/>
+                <a:ea typeface="Courier New" pitchFamily="34" charset="-122"/>
+                <a:cs typeface="Courier New" pitchFamily="34" charset="-120"/>
+              </a:rPr>
+              <a:t>maskguard connect</a:t>
+            </a:r>
+            <a:endParaRPr lang="en-US" sz="1450" dirty="0"/>
+          </a:p>
+        </p:txBody>
+      </p:sp>
+      <p:sp>
+        <p:nvSpPr>
+          <p:cNvPr id="7" name="Text 4"/>
+          <p:cNvSpPr txBox="1"/>
+          <p:nvPr/>
+        </p:nvSpPr>
+        <p:spPr>
+          <a:xfrm>
+            <a:off x="7818120" y="2157984"/>
+            <a:ext cx="3657600" cy="329184"/>
+          </a:xfrm>
+          <a:prstGeom prst="rect">
+            <a:avLst/>
+          </a:prstGeom>
+          <a:noFill/>
+          <a:ln/>
+        </p:spPr>
+        <p:txBody>
+          <a:bodyPr wrap="square" lIns="0" tIns="0" rIns="0" bIns="0" rtlCol="0" anchor="ctr"/>
           <a:lstStyle/>
           <a:p>
             <a:pPr indent="0" marL="0">
@@ -11313,7 +13742,7 @@
                 <a:ea typeface="Calibri" pitchFamily="34" charset="-122"/>
                 <a:cs typeface="Calibri" pitchFamily="34" charset="-120"/>
               </a:rPr>
-              <a:t>first try 22; we fixed the general causes, not the dataset</a:t>
+              <a:t>connect a database; it scans it</a:t>
             </a:r>
             <a:endParaRPr lang="en-US" sz="1300" dirty="0"/>
           </a:p>
@@ -11321,41 +13750,14 @@
       </p:sp>
       <p:sp>
         <p:nvSpPr>
-          <p:cNvPr id="7" name="proof 2"/>
-          <p:cNvSpPr/>
-          <p:nvPr/>
-        </p:nvSpPr>
-        <p:spPr>
-          <a:xfrm>
-            <a:off x="4297680" y="1234440"/>
-            <a:ext cx="3520440" cy="1965960"/>
-          </a:xfrm>
-          <a:prstGeom prst="roundRect">
-            <a:avLst>
-              <a:gd name="adj" fmla="val 3721"/>
-            </a:avLst>
-          </a:prstGeom>
-          <a:solidFill>
-            <a:srgbClr val="0B1D33"/>
-          </a:solidFill>
-          <a:ln w="9525">
-            <a:solidFill>
-              <a:srgbClr val="0B1D33"/>
-            </a:solidFill>
-            <a:prstDash val="solid"/>
-          </a:ln>
-        </p:spPr>
-      </p:sp>
-      <p:sp>
-        <p:nvSpPr>
-          <p:cNvPr id="8" name="Text 6"/>
-          <p:cNvSpPr txBox="1"/>
-          <p:nvPr/>
-        </p:nvSpPr>
-        <p:spPr>
-          <a:xfrm>
-            <a:off x="4572000" y="1399032"/>
-            <a:ext cx="3017520" cy="731520"/>
+          <p:cNvPr id="8" name="Text 5"/>
+          <p:cNvSpPr txBox="1"/>
+          <p:nvPr/>
+        </p:nvSpPr>
+        <p:spPr>
+          <a:xfrm>
+            <a:off x="7818120" y="2606040"/>
+            <a:ext cx="3657600" cy="329184"/>
           </a:xfrm>
           <a:prstGeom prst="rect">
             <a:avLst/>
@@ -11371,30 +13773,30 @@
               <a:buNone/>
             </a:pPr>
             <a:r>
-              <a:rPr lang="en-US" sz="4000" b="1" dirty="0">
-                <a:solidFill>
-                  <a:srgbClr val="D97706"/>
-                </a:solidFill>
-                <a:latin typeface="Cambria" pitchFamily="34" charset="0"/>
-                <a:ea typeface="Cambria" pitchFamily="34" charset="-122"/>
-                <a:cs typeface="Cambria" pitchFamily="34" charset="-120"/>
-              </a:rPr>
-              <a:t>0</a:t>
-            </a:r>
-            <a:endParaRPr lang="en-US" sz="4000" dirty="0"/>
-          </a:p>
-        </p:txBody>
-      </p:sp>
-      <p:sp>
-        <p:nvSpPr>
-          <p:cNvPr id="9" name="Text 7"/>
-          <p:cNvSpPr txBox="1"/>
-          <p:nvPr/>
-        </p:nvSpPr>
-        <p:spPr>
-          <a:xfrm>
-            <a:off x="4572000" y="2148840"/>
-            <a:ext cx="3063240" cy="365760"/>
+              <a:rPr lang="en-US" sz="1450" b="1" dirty="0">
+                <a:solidFill>
+                  <a:srgbClr val="FFFFFF"/>
+                </a:solidFill>
+                <a:latin typeface="Courier New" pitchFamily="34" charset="0"/>
+                <a:ea typeface="Courier New" pitchFamily="34" charset="-122"/>
+                <a:cs typeface="Courier New" pitchFamily="34" charset="-120"/>
+              </a:rPr>
+              <a:t>maskguard pii approve</a:t>
+            </a:r>
+            <a:endParaRPr lang="en-US" sz="1450" dirty="0"/>
+          </a:p>
+        </p:txBody>
+      </p:sp>
+      <p:sp>
+        <p:nvSpPr>
+          <p:cNvPr id="9" name="Text 6"/>
+          <p:cNvSpPr txBox="1"/>
+          <p:nvPr/>
+        </p:nvSpPr>
+        <p:spPr>
+          <a:xfrm>
+            <a:off x="7818120" y="2935224"/>
+            <a:ext cx="3657600" cy="329184"/>
           </a:xfrm>
           <a:prstGeom prst="rect">
             <a:avLst/>
@@ -11410,39 +13812,78 @@
               <a:buNone/>
             </a:pPr>
             <a:r>
-              <a:rPr lang="en-US" sz="1700" b="1" dirty="0">
+              <a:rPr lang="en-US" sz="1300" dirty="0">
+                <a:solidFill>
+                  <a:srgbClr val="CBD5E1"/>
+                </a:solidFill>
+                <a:latin typeface="Calibri" pitchFamily="34" charset="0"/>
+                <a:ea typeface="Calibri" pitchFamily="34" charset="-122"/>
+                <a:cs typeface="Calibri" pitchFamily="34" charset="-120"/>
+              </a:rPr>
+              <a:t>a person confirms the labels</a:t>
+            </a:r>
+            <a:endParaRPr lang="en-US" sz="1300" dirty="0"/>
+          </a:p>
+        </p:txBody>
+      </p:sp>
+      <p:sp>
+        <p:nvSpPr>
+          <p:cNvPr id="10" name="Text 7"/>
+          <p:cNvSpPr txBox="1"/>
+          <p:nvPr/>
+        </p:nvSpPr>
+        <p:spPr>
+          <a:xfrm>
+            <a:off x="7818120" y="3383280"/>
+            <a:ext cx="3657600" cy="329184"/>
+          </a:xfrm>
+          <a:prstGeom prst="rect">
+            <a:avLst/>
+          </a:prstGeom>
+          <a:noFill/>
+          <a:ln/>
+        </p:spPr>
+        <p:txBody>
+          <a:bodyPr wrap="square" lIns="0" tIns="0" rIns="0" bIns="0" rtlCol="0" anchor="ctr"/>
+          <a:lstStyle/>
+          <a:p>
+            <a:pPr indent="0" marL="0">
+              <a:buNone/>
+            </a:pPr>
+            <a:r>
+              <a:rPr lang="en-US" sz="1450" b="1" dirty="0">
                 <a:solidFill>
                   <a:srgbClr val="FFFFFF"/>
                 </a:solidFill>
-                <a:latin typeface="Calibri" pitchFamily="34" charset="0"/>
-                <a:ea typeface="Calibri" pitchFamily="34" charset="-122"/>
-                <a:cs typeface="Calibri" pitchFamily="34" charset="-120"/>
-              </a:rPr>
-              <a:t>real values leaked</a:t>
-            </a:r>
-            <a:endParaRPr lang="en-US" sz="1700" dirty="0"/>
-          </a:p>
-        </p:txBody>
-      </p:sp>
-      <p:sp>
-        <p:nvSpPr>
-          <p:cNvPr id="10" name="Text 8"/>
-          <p:cNvSpPr txBox="1"/>
-          <p:nvPr/>
-        </p:nvSpPr>
-        <p:spPr>
-          <a:xfrm>
-            <a:off x="4572000" y="2532888"/>
-            <a:ext cx="3063240" cy="594360"/>
-          </a:xfrm>
-          <a:prstGeom prst="rect">
-            <a:avLst/>
-          </a:prstGeom>
-          <a:noFill/>
-          <a:ln/>
-        </p:spPr>
-        <p:txBody>
-          <a:bodyPr wrap="square" lIns="0" tIns="0" rIns="0" bIns="0" rtlCol="0" anchor="t"/>
+                <a:latin typeface="Courier New" pitchFamily="34" charset="0"/>
+                <a:ea typeface="Courier New" pitchFamily="34" charset="-122"/>
+                <a:cs typeface="Courier New" pitchFamily="34" charset="-120"/>
+              </a:rPr>
+              <a:t>maskguard compare</a:t>
+            </a:r>
+            <a:endParaRPr lang="en-US" sz="1450" dirty="0"/>
+          </a:p>
+        </p:txBody>
+      </p:sp>
+      <p:sp>
+        <p:nvSpPr>
+          <p:cNvPr id="11" name="Text 8"/>
+          <p:cNvSpPr txBox="1"/>
+          <p:nvPr/>
+        </p:nvSpPr>
+        <p:spPr>
+          <a:xfrm>
+            <a:off x="7818120" y="3712464"/>
+            <a:ext cx="3657600" cy="329184"/>
+          </a:xfrm>
+          <a:prstGeom prst="rect">
+            <a:avLst/>
+          </a:prstGeom>
+          <a:noFill/>
+          <a:ln/>
+        </p:spPr>
+        <p:txBody>
+          <a:bodyPr wrap="square" lIns="0" tIns="0" rIns="0" bIns="0" rtlCol="0" anchor="ctr"/>
           <a:lstStyle/>
           <a:p>
             <a:pPr indent="0" marL="0">
@@ -11457,7 +13898,7 @@
                 <a:ea typeface="Calibri" pitchFamily="34" charset="-122"/>
                 <a:cs typeface="Calibri" pitchFamily="34" charset="-120"/>
               </a:rPr>
-              <a:t>in 13,700 masked cells, per database</a:t>
+              <a:t>same query, roles side by side</a:t>
             </a:r>
             <a:endParaRPr lang="en-US" sz="1300" dirty="0"/>
           </a:p>
@@ -11465,41 +13906,14 @@
       </p:sp>
       <p:sp>
         <p:nvSpPr>
-          <p:cNvPr id="11" name="proof 3"/>
-          <p:cNvSpPr/>
-          <p:nvPr/>
-        </p:nvSpPr>
-        <p:spPr>
-          <a:xfrm>
-            <a:off x="8046720" y="1234440"/>
-            <a:ext cx="3520440" cy="1965960"/>
-          </a:xfrm>
-          <a:prstGeom prst="roundRect">
-            <a:avLst>
-              <a:gd name="adj" fmla="val 3721"/>
-            </a:avLst>
-          </a:prstGeom>
-          <a:solidFill>
-            <a:srgbClr val="F1F5F9"/>
-          </a:solidFill>
-          <a:ln w="9525">
-            <a:solidFill>
-              <a:srgbClr val="F1F5F9"/>
-            </a:solidFill>
-            <a:prstDash val="solid"/>
-          </a:ln>
-        </p:spPr>
-      </p:sp>
-      <p:sp>
-        <p:nvSpPr>
-          <p:cNvPr id="12" name="Text 10"/>
-          <p:cNvSpPr txBox="1"/>
-          <p:nvPr/>
-        </p:nvSpPr>
-        <p:spPr>
-          <a:xfrm>
-            <a:off x="8321040" y="1399032"/>
-            <a:ext cx="3017520" cy="731520"/>
+          <p:cNvPr id="12" name="Text 9"/>
+          <p:cNvSpPr txBox="1"/>
+          <p:nvPr/>
+        </p:nvSpPr>
+        <p:spPr>
+          <a:xfrm>
+            <a:off x="7818120" y="4160520"/>
+            <a:ext cx="3657600" cy="329184"/>
           </a:xfrm>
           <a:prstGeom prst="rect">
             <a:avLst/>
@@ -11515,569 +13929,176 @@
               <a:buNone/>
             </a:pPr>
             <a:r>
-              <a:rPr lang="en-US" sz="4000" b="1" dirty="0">
+              <a:rPr lang="en-US" sz="1450" b="1" dirty="0">
+                <a:solidFill>
+                  <a:srgbClr val="FFFFFF"/>
+                </a:solidFill>
+                <a:latin typeface="Courier New" pitchFamily="34" charset="0"/>
+                <a:ea typeface="Courier New" pitchFamily="34" charset="-122"/>
+                <a:cs typeface="Courier New" pitchFamily="34" charset="-120"/>
+              </a:rPr>
+              <a:t>maskguard attack</a:t>
+            </a:r>
+            <a:endParaRPr lang="en-US" sz="1450" dirty="0"/>
+          </a:p>
+        </p:txBody>
+      </p:sp>
+      <p:sp>
+        <p:nvSpPr>
+          <p:cNvPr id="13" name="Text 10"/>
+          <p:cNvSpPr txBox="1"/>
+          <p:nvPr/>
+        </p:nvSpPr>
+        <p:spPr>
+          <a:xfrm>
+            <a:off x="7818120" y="4489704"/>
+            <a:ext cx="3657600" cy="329184"/>
+          </a:xfrm>
+          <a:prstGeom prst="rect">
+            <a:avLst/>
+          </a:prstGeom>
+          <a:noFill/>
+          <a:ln/>
+        </p:spPr>
+        <p:txBody>
+          <a:bodyPr wrap="square" lIns="0" tIns="0" rIns="0" bIns="0" rtlCol="0" anchor="ctr"/>
+          <a:lstStyle/>
+          <a:p>
+            <a:pPr indent="0" marL="0">
+              <a:buNone/>
+            </a:pPr>
+            <a:r>
+              <a:rPr lang="en-US" sz="1300" dirty="0">
+                <a:solidFill>
+                  <a:srgbClr val="CBD5E1"/>
+                </a:solidFill>
+                <a:latin typeface="Calibri" pitchFamily="34" charset="0"/>
+                <a:ea typeface="Calibri" pitchFamily="34" charset="-122"/>
+                <a:cs typeface="Calibri" pitchFamily="34" charset="-120"/>
+              </a:rPr>
+              <a:t>17 known attacks: 0 leak</a:t>
+            </a:r>
+            <a:endParaRPr lang="en-US" sz="1300" dirty="0"/>
+          </a:p>
+        </p:txBody>
+      </p:sp>
+      <p:sp>
+        <p:nvSpPr>
+          <p:cNvPr id="14" name="Text 11"/>
+          <p:cNvSpPr txBox="1"/>
+          <p:nvPr/>
+        </p:nvSpPr>
+        <p:spPr>
+          <a:xfrm>
+            <a:off x="7818120" y="4937760"/>
+            <a:ext cx="3657600" cy="329184"/>
+          </a:xfrm>
+          <a:prstGeom prst="rect">
+            <a:avLst/>
+          </a:prstGeom>
+          <a:noFill/>
+          <a:ln/>
+        </p:spPr>
+        <p:txBody>
+          <a:bodyPr wrap="square" lIns="0" tIns="0" rIns="0" bIns="0" rtlCol="0" anchor="ctr"/>
+          <a:lstStyle/>
+          <a:p>
+            <a:pPr indent="0" marL="0">
+              <a:buNone/>
+            </a:pPr>
+            <a:r>
+              <a:rPr lang="en-US" sz="1450" b="1" dirty="0">
+                <a:solidFill>
+                  <a:srgbClr val="FFFFFF"/>
+                </a:solidFill>
+                <a:latin typeface="Courier New" pitchFamily="34" charset="0"/>
+                <a:ea typeface="Courier New" pitchFamily="34" charset="-122"/>
+                <a:cs typeface="Courier New" pitchFamily="34" charset="-120"/>
+              </a:rPr>
+              <a:t>maskguard integrity proof</a:t>
+            </a:r>
+            <a:endParaRPr lang="en-US" sz="1450" dirty="0"/>
+          </a:p>
+        </p:txBody>
+      </p:sp>
+      <p:sp>
+        <p:nvSpPr>
+          <p:cNvPr id="15" name="Text 12"/>
+          <p:cNvSpPr txBox="1"/>
+          <p:nvPr/>
+        </p:nvSpPr>
+        <p:spPr>
+          <a:xfrm>
+            <a:off x="7818120" y="5266944"/>
+            <a:ext cx="3657600" cy="329184"/>
+          </a:xfrm>
+          <a:prstGeom prst="rect">
+            <a:avLst/>
+          </a:prstGeom>
+          <a:noFill/>
+          <a:ln/>
+        </p:spPr>
+        <p:txBody>
+          <a:bodyPr wrap="square" lIns="0" tIns="0" rIns="0" bIns="0" rtlCol="0" anchor="ctr"/>
+          <a:lstStyle/>
+          <a:p>
+            <a:pPr indent="0" marL="0">
+              <a:buNone/>
+            </a:pPr>
+            <a:r>
+              <a:rPr lang="en-US" sz="1300" dirty="0">
+                <a:solidFill>
+                  <a:srgbClr val="CBD5E1"/>
+                </a:solidFill>
+                <a:latin typeface="Calibri" pitchFamily="34" charset="0"/>
+                <a:ea typeface="Calibri" pitchFamily="34" charset="-122"/>
+                <a:cs typeface="Calibri" pitchFamily="34" charset="-120"/>
+              </a:rPr>
+              <a:t>data unchanged, audit intact</a:t>
+            </a:r>
+            <a:endParaRPr lang="en-US" sz="1300" dirty="0"/>
+          </a:p>
+        </p:txBody>
+      </p:sp>
+      <p:sp>
+        <p:nvSpPr>
+          <p:cNvPr id="16" name="Text 13"/>
+          <p:cNvSpPr txBox="1"/>
+          <p:nvPr/>
+        </p:nvSpPr>
+        <p:spPr>
+          <a:xfrm>
+            <a:off x="548640" y="5970230"/>
+            <a:ext cx="11064240" cy="365760"/>
+          </a:xfrm>
+          <a:prstGeom prst="rect">
+            <a:avLst/>
+          </a:prstGeom>
+          <a:noFill/>
+          <a:ln/>
+        </p:spPr>
+        <p:txBody>
+          <a:bodyPr wrap="square" lIns="0" tIns="0" rIns="0" bIns="0" rtlCol="0" anchor="ctr"/>
+          <a:lstStyle/>
+          <a:p>
+            <a:pPr indent="0" marL="0">
+              <a:buNone/>
+            </a:pPr>
+            <a:r>
+              <a:rPr lang="en-US" sz="1400" b="1" dirty="0">
                 <a:solidFill>
                   <a:srgbClr val="0B1D33"/>
                 </a:solidFill>
-                <a:latin typeface="Cambria" pitchFamily="34" charset="0"/>
-                <a:ea typeface="Cambria" pitchFamily="34" charset="-122"/>
-                <a:cs typeface="Cambria" pitchFamily="34" charset="-120"/>
-              </a:rPr>
-              <a:t>0 rows</a:t>
-            </a:r>
-            <a:endParaRPr lang="en-US" sz="4000" dirty="0"/>
-          </a:p>
-        </p:txBody>
-      </p:sp>
-      <p:sp>
-        <p:nvSpPr>
-          <p:cNvPr id="13" name="Text 11"/>
-          <p:cNvSpPr txBox="1"/>
-          <p:nvPr/>
-        </p:nvSpPr>
-        <p:spPr>
-          <a:xfrm>
-            <a:off x="8321040" y="2148840"/>
-            <a:ext cx="3063240" cy="365760"/>
-          </a:xfrm>
-          <a:prstGeom prst="rect">
-            <a:avLst/>
-          </a:prstGeom>
-          <a:noFill/>
-          <a:ln/>
-        </p:spPr>
-        <p:txBody>
-          <a:bodyPr wrap="square" lIns="0" tIns="0" rIns="0" bIns="0" rtlCol="0" anchor="ctr"/>
-          <a:lstStyle/>
-          <a:p>
+                <a:latin typeface="Calibri" pitchFamily="34" charset="0"/>
+                <a:ea typeface="Calibri" pitchFamily="34" charset="-122"/>
+                <a:cs typeface="Calibri" pitchFamily="34" charset="-120"/>
+              </a:rPr>
+              <a:t>Also: </a:t>
+            </a:r>
             <a:pPr indent="0" marL="0">
               <a:buNone/>
             </a:pPr>
             <a:r>
-              <a:rPr lang="en-US" sz="1700" b="1" dirty="0">
-                <a:solidFill>
-                  <a:srgbClr val="0B1D33"/>
-                </a:solidFill>
-                <a:latin typeface="Calibri" pitchFamily="34" charset="0"/>
-                <a:ea typeface="Calibri" pitchFamily="34" charset="-122"/>
-                <a:cs typeface="Calibri" pitchFamily="34" charset="-120"/>
-              </a:rPr>
-              <a:t>for a guessed real PAN</a:t>
-            </a:r>
-            <a:endParaRPr lang="en-US" sz="1700" dirty="0"/>
-          </a:p>
-        </p:txBody>
-      </p:sp>
-      <p:sp>
-        <p:nvSpPr>
-          <p:cNvPr id="14" name="Text 12"/>
-          <p:cNvSpPr txBox="1"/>
-          <p:nvPr/>
-        </p:nvSpPr>
-        <p:spPr>
-          <a:xfrm>
-            <a:off x="8321040" y="2532888"/>
-            <a:ext cx="3063240" cy="594360"/>
-          </a:xfrm>
-          <a:prstGeom prst="rect">
-            <a:avLst/>
-          </a:prstGeom>
-          <a:noFill/>
-          <a:ln/>
-        </p:spPr>
-        <p:txBody>
-          <a:bodyPr wrap="square" lIns="0" tIns="0" rIns="0" bIns="0" rtlCol="0" anchor="t"/>
-          <a:lstStyle/>
-          <a:p>
-            <a:pPr indent="0" marL="0">
-              <a:buNone/>
-            </a:pPr>
-            <a:r>
-              <a:rPr lang="en-US" sz="1300" dirty="0">
-                <a:solidFill>
-                  <a:srgbClr val="64748B"/>
-                </a:solidFill>
-                <a:latin typeface="Calibri" pitchFamily="34" charset="0"/>
-                <a:ea typeface="Calibri" pitchFamily="34" charset="-122"/>
-                <a:cs typeface="Calibri" pitchFamily="34" charset="-120"/>
-              </a:rPr>
-              <a:t>Admin finds 1 row; Support and Analyst find 0</a:t>
-            </a:r>
-            <a:endParaRPr lang="en-US" sz="1300" dirty="0"/>
-          </a:p>
-        </p:txBody>
-      </p:sp>
-      <p:sp>
-        <p:nvSpPr>
-          <p:cNvPr id="15" name="proof 4"/>
-          <p:cNvSpPr/>
-          <p:nvPr/>
-        </p:nvSpPr>
-        <p:spPr>
-          <a:xfrm>
-            <a:off x="548640" y="3383280"/>
-            <a:ext cx="3520440" cy="1965960"/>
-          </a:xfrm>
-          <a:prstGeom prst="roundRect">
-            <a:avLst>
-              <a:gd name="adj" fmla="val 3721"/>
-            </a:avLst>
-          </a:prstGeom>
-          <a:solidFill>
-            <a:srgbClr val="F1F5F9"/>
-          </a:solidFill>
-          <a:ln w="9525">
-            <a:solidFill>
-              <a:srgbClr val="F1F5F9"/>
-            </a:solidFill>
-            <a:prstDash val="solid"/>
-          </a:ln>
-        </p:spPr>
-      </p:sp>
-      <p:sp>
-        <p:nvSpPr>
-          <p:cNvPr id="16" name="Text 14"/>
-          <p:cNvSpPr txBox="1"/>
-          <p:nvPr/>
-        </p:nvSpPr>
-        <p:spPr>
-          <a:xfrm>
-            <a:off x="822960" y="3547872"/>
-            <a:ext cx="3017520" cy="731520"/>
-          </a:xfrm>
-          <a:prstGeom prst="rect">
-            <a:avLst/>
-          </a:prstGeom>
-          <a:noFill/>
-          <a:ln/>
-        </p:spPr>
-        <p:txBody>
-          <a:bodyPr wrap="square" lIns="0" tIns="0" rIns="0" bIns="0" rtlCol="0" anchor="ctr"/>
-          <a:lstStyle/>
-          <a:p>
-            <a:pPr indent="0" marL="0">
-              <a:buNone/>
-            </a:pPr>
-            <a:r>
-              <a:rPr lang="en-US" sz="4000" b="1" dirty="0">
-                <a:solidFill>
-                  <a:srgbClr val="0B1D33"/>
-                </a:solidFill>
-                <a:latin typeface="Cambria" pitchFamily="34" charset="0"/>
-                <a:ea typeface="Cambria" pitchFamily="34" charset="-122"/>
-                <a:cs typeface="Cambria" pitchFamily="34" charset="-120"/>
-              </a:rPr>
-              <a:t>4 / 4</a:t>
-            </a:r>
-            <a:endParaRPr lang="en-US" sz="4000" dirty="0"/>
-          </a:p>
-        </p:txBody>
-      </p:sp>
-      <p:sp>
-        <p:nvSpPr>
-          <p:cNvPr id="17" name="Text 15"/>
-          <p:cNvSpPr txBox="1"/>
-          <p:nvPr/>
-        </p:nvSpPr>
-        <p:spPr>
-          <a:xfrm>
-            <a:off x="822960" y="4297680"/>
-            <a:ext cx="3063240" cy="365760"/>
-          </a:xfrm>
-          <a:prstGeom prst="rect">
-            <a:avLst/>
-          </a:prstGeom>
-          <a:noFill/>
-          <a:ln/>
-        </p:spPr>
-        <p:txBody>
-          <a:bodyPr wrap="square" lIns="0" tIns="0" rIns="0" bIns="0" rtlCol="0" anchor="ctr"/>
-          <a:lstStyle/>
-          <a:p>
-            <a:pPr indent="0" marL="0">
-              <a:buNone/>
-            </a:pPr>
-            <a:r>
-              <a:rPr lang="en-US" sz="1700" b="1" dirty="0">
-                <a:solidFill>
-                  <a:srgbClr val="0B1D33"/>
-                </a:solidFill>
-                <a:latin typeface="Calibri" pitchFamily="34" charset="0"/>
-                <a:ea typeface="Calibri" pitchFamily="34" charset="-122"/>
-                <a:cs typeface="Calibri" pitchFamily="34" charset="-120"/>
-              </a:rPr>
-              <a:t>data changes refused</a:t>
-            </a:r>
-            <a:endParaRPr lang="en-US" sz="1700" dirty="0"/>
-          </a:p>
-        </p:txBody>
-      </p:sp>
-      <p:sp>
-        <p:nvSpPr>
-          <p:cNvPr id="18" name="Text 16"/>
-          <p:cNvSpPr txBox="1"/>
-          <p:nvPr/>
-        </p:nvSpPr>
-        <p:spPr>
-          <a:xfrm>
-            <a:off x="822960" y="4681728"/>
-            <a:ext cx="3063240" cy="594360"/>
-          </a:xfrm>
-          <a:prstGeom prst="rect">
-            <a:avLst/>
-          </a:prstGeom>
-          <a:noFill/>
-          <a:ln/>
-        </p:spPr>
-        <p:txBody>
-          <a:bodyPr wrap="square" lIns="0" tIns="0" rIns="0" bIns="0" rtlCol="0" anchor="t"/>
-          <a:lstStyle/>
-          <a:p>
-            <a:pPr indent="0" marL="0">
-              <a:buNone/>
-            </a:pPr>
-            <a:r>
-              <a:rPr lang="en-US" sz="1300" dirty="0">
-                <a:solidFill>
-                  <a:srgbClr val="64748B"/>
-                </a:solidFill>
-                <a:latin typeface="Calibri" pitchFamily="34" charset="0"/>
-                <a:ea typeface="Calibri" pitchFamily="34" charset="-122"/>
-                <a:cs typeface="Calibri" pitchFamily="34" charset="-120"/>
-              </a:rPr>
-              <a:t>UPDATE, DELETE, DROP, INSERT — for every role</a:t>
-            </a:r>
-            <a:endParaRPr lang="en-US" sz="1300" dirty="0"/>
-          </a:p>
-        </p:txBody>
-      </p:sp>
-      <p:sp>
-        <p:nvSpPr>
-          <p:cNvPr id="19" name="proof 5"/>
-          <p:cNvSpPr/>
-          <p:nvPr/>
-        </p:nvSpPr>
-        <p:spPr>
-          <a:xfrm>
-            <a:off x="4297680" y="3383280"/>
-            <a:ext cx="3520440" cy="1965960"/>
-          </a:xfrm>
-          <a:prstGeom prst="roundRect">
-            <a:avLst>
-              <a:gd name="adj" fmla="val 3721"/>
-            </a:avLst>
-          </a:prstGeom>
-          <a:solidFill>
-            <a:srgbClr val="F1F5F9"/>
-          </a:solidFill>
-          <a:ln w="9525">
-            <a:solidFill>
-              <a:srgbClr val="F1F5F9"/>
-            </a:solidFill>
-            <a:prstDash val="solid"/>
-          </a:ln>
-        </p:spPr>
-      </p:sp>
-      <p:sp>
-        <p:nvSpPr>
-          <p:cNvPr id="20" name="Text 18"/>
-          <p:cNvSpPr txBox="1"/>
-          <p:nvPr/>
-        </p:nvSpPr>
-        <p:spPr>
-          <a:xfrm>
-            <a:off x="4572000" y="3547872"/>
-            <a:ext cx="3017520" cy="731520"/>
-          </a:xfrm>
-          <a:prstGeom prst="rect">
-            <a:avLst/>
-          </a:prstGeom>
-          <a:noFill/>
-          <a:ln/>
-        </p:spPr>
-        <p:txBody>
-          <a:bodyPr wrap="square" lIns="0" tIns="0" rIns="0" bIns="0" rtlCol="0" anchor="ctr"/>
-          <a:lstStyle/>
-          <a:p>
-            <a:pPr indent="0" marL="0">
-              <a:buNone/>
-            </a:pPr>
-            <a:r>
-              <a:rPr lang="en-US" sz="4000" b="1" dirty="0">
-                <a:solidFill>
-                  <a:srgbClr val="0B1D33"/>
-                </a:solidFill>
-                <a:latin typeface="Cambria" pitchFamily="34" charset="0"/>
-                <a:ea typeface="Cambria" pitchFamily="34" charset="-122"/>
-                <a:cs typeface="Cambria" pitchFamily="34" charset="-120"/>
-              </a:rPr>
-              <a:t>0 / 17</a:t>
-            </a:r>
-            <a:endParaRPr lang="en-US" sz="4000" dirty="0"/>
-          </a:p>
-        </p:txBody>
-      </p:sp>
-      <p:sp>
-        <p:nvSpPr>
-          <p:cNvPr id="21" name="Text 19"/>
-          <p:cNvSpPr txBox="1"/>
-          <p:nvPr/>
-        </p:nvSpPr>
-        <p:spPr>
-          <a:xfrm>
-            <a:off x="4572000" y="4297680"/>
-            <a:ext cx="3063240" cy="365760"/>
-          </a:xfrm>
-          <a:prstGeom prst="rect">
-            <a:avLst/>
-          </a:prstGeom>
-          <a:noFill/>
-          <a:ln/>
-        </p:spPr>
-        <p:txBody>
-          <a:bodyPr wrap="square" lIns="0" tIns="0" rIns="0" bIns="0" rtlCol="0" anchor="ctr"/>
-          <a:lstStyle/>
-          <a:p>
-            <a:pPr indent="0" marL="0">
-              <a:buNone/>
-            </a:pPr>
-            <a:r>
-              <a:rPr lang="en-US" sz="1700" b="1" dirty="0">
-                <a:solidFill>
-                  <a:srgbClr val="0B1D33"/>
-                </a:solidFill>
-                <a:latin typeface="Calibri" pitchFamily="34" charset="0"/>
-                <a:ea typeface="Calibri" pitchFamily="34" charset="-122"/>
-                <a:cs typeface="Calibri" pitchFamily="34" charset="-120"/>
-              </a:rPr>
-              <a:t>known attacks leak</a:t>
-            </a:r>
-            <a:endParaRPr lang="en-US" sz="1700" dirty="0"/>
-          </a:p>
-        </p:txBody>
-      </p:sp>
-      <p:sp>
-        <p:nvSpPr>
-          <p:cNvPr id="22" name="Text 20"/>
-          <p:cNvSpPr txBox="1"/>
-          <p:nvPr/>
-        </p:nvSpPr>
-        <p:spPr>
-          <a:xfrm>
-            <a:off x="4572000" y="4681728"/>
-            <a:ext cx="3063240" cy="594360"/>
-          </a:xfrm>
-          <a:prstGeom prst="rect">
-            <a:avLst/>
-          </a:prstGeom>
-          <a:noFill/>
-          <a:ln/>
-        </p:spPr>
-        <p:txBody>
-          <a:bodyPr wrap="square" lIns="0" tIns="0" rIns="0" bIns="0" rtlCol="0" anchor="t"/>
-          <a:lstStyle/>
-          <a:p>
-            <a:pPr indent="0" marL="0">
-              <a:buNone/>
-            </a:pPr>
-            <a:r>
-              <a:rPr lang="en-US" sz="1300" dirty="0">
-                <a:solidFill>
-                  <a:srgbClr val="64748B"/>
-                </a:solidFill>
-                <a:latin typeface="Calibri" pitchFamily="34" charset="0"/>
-                <a:ea typeface="Calibri" pitchFamily="34" charset="-122"/>
-                <a:cs typeface="Calibri" pitchFamily="34" charset="-120"/>
-              </a:rPr>
-              <a:t>simple screen masking leaks 14 of the same 17</a:t>
-            </a:r>
-            <a:endParaRPr lang="en-US" sz="1300" dirty="0"/>
-          </a:p>
-        </p:txBody>
-      </p:sp>
-      <p:sp>
-        <p:nvSpPr>
-          <p:cNvPr id="23" name="proof 6"/>
-          <p:cNvSpPr/>
-          <p:nvPr/>
-        </p:nvSpPr>
-        <p:spPr>
-          <a:xfrm>
-            <a:off x="8046720" y="3383280"/>
-            <a:ext cx="3520440" cy="1965960"/>
-          </a:xfrm>
-          <a:prstGeom prst="roundRect">
-            <a:avLst>
-              <a:gd name="adj" fmla="val 3721"/>
-            </a:avLst>
-          </a:prstGeom>
-          <a:solidFill>
-            <a:srgbClr val="F1F5F9"/>
-          </a:solidFill>
-          <a:ln w="9525">
-            <a:solidFill>
-              <a:srgbClr val="F1F5F9"/>
-            </a:solidFill>
-            <a:prstDash val="solid"/>
-          </a:ln>
-        </p:spPr>
-      </p:sp>
-      <p:sp>
-        <p:nvSpPr>
-          <p:cNvPr id="24" name="Text 22"/>
-          <p:cNvSpPr txBox="1"/>
-          <p:nvPr/>
-        </p:nvSpPr>
-        <p:spPr>
-          <a:xfrm>
-            <a:off x="8321040" y="3547872"/>
-            <a:ext cx="3017520" cy="731520"/>
-          </a:xfrm>
-          <a:prstGeom prst="rect">
-            <a:avLst/>
-          </a:prstGeom>
-          <a:noFill/>
-          <a:ln/>
-        </p:spPr>
-        <p:txBody>
-          <a:bodyPr wrap="square" lIns="0" tIns="0" rIns="0" bIns="0" rtlCol="0" anchor="ctr"/>
-          <a:lstStyle/>
-          <a:p>
-            <a:pPr indent="0" marL="0">
-              <a:buNone/>
-            </a:pPr>
-            <a:r>
-              <a:rPr lang="en-US" sz="4000" b="1" dirty="0">
-                <a:solidFill>
-                  <a:srgbClr val="0B1D33"/>
-                </a:solidFill>
-                <a:latin typeface="Cambria" pitchFamily="34" charset="0"/>
-                <a:ea typeface="Cambria" pitchFamily="34" charset="-122"/>
-                <a:cs typeface="Cambria" pitchFamily="34" charset="-120"/>
-              </a:rPr>
-              <a:t>4–8 ms</a:t>
-            </a:r>
-            <a:endParaRPr lang="en-US" sz="4000" dirty="0"/>
-          </a:p>
-        </p:txBody>
-      </p:sp>
-      <p:sp>
-        <p:nvSpPr>
-          <p:cNvPr id="25" name="Text 23"/>
-          <p:cNvSpPr txBox="1"/>
-          <p:nvPr/>
-        </p:nvSpPr>
-        <p:spPr>
-          <a:xfrm>
-            <a:off x="8321040" y="4297680"/>
-            <a:ext cx="3063240" cy="365760"/>
-          </a:xfrm>
-          <a:prstGeom prst="rect">
-            <a:avLst/>
-          </a:prstGeom>
-          <a:noFill/>
-          <a:ln/>
-        </p:spPr>
-        <p:txBody>
-          <a:bodyPr wrap="square" lIns="0" tIns="0" rIns="0" bIns="0" rtlCol="0" anchor="ctr"/>
-          <a:lstStyle/>
-          <a:p>
-            <a:pPr indent="0" marL="0">
-              <a:buNone/>
-            </a:pPr>
-            <a:r>
-              <a:rPr lang="en-US" sz="1700" b="1" dirty="0">
-                <a:solidFill>
-                  <a:srgbClr val="0B1D33"/>
-                </a:solidFill>
-                <a:latin typeface="Calibri" pitchFamily="34" charset="0"/>
-                <a:ea typeface="Calibri" pitchFamily="34" charset="-122"/>
-                <a:cs typeface="Calibri" pitchFamily="34" charset="-120"/>
-              </a:rPr>
-              <a:t>extra time per query</a:t>
-            </a:r>
-            <a:endParaRPr lang="en-US" sz="1700" dirty="0"/>
-          </a:p>
-        </p:txBody>
-      </p:sp>
-      <p:sp>
-        <p:nvSpPr>
-          <p:cNvPr id="26" name="Text 24"/>
-          <p:cNvSpPr txBox="1"/>
-          <p:nvPr/>
-        </p:nvSpPr>
-        <p:spPr>
-          <a:xfrm>
-            <a:off x="8321040" y="4681728"/>
-            <a:ext cx="3063240" cy="594360"/>
-          </a:xfrm>
-          <a:prstGeom prst="rect">
-            <a:avLst/>
-          </a:prstGeom>
-          <a:noFill/>
-          <a:ln/>
-        </p:spPr>
-        <p:txBody>
-          <a:bodyPr wrap="square" lIns="0" tIns="0" rIns="0" bIns="0" rtlCol="0" anchor="t"/>
-          <a:lstStyle/>
-          <a:p>
-            <a:pPr indent="0" marL="0">
-              <a:buNone/>
-            </a:pPr>
-            <a:r>
-              <a:rPr lang="en-US" sz="1300" dirty="0">
-                <a:solidFill>
-                  <a:srgbClr val="64748B"/>
-                </a:solidFill>
-                <a:latin typeface="Calibri" pitchFamily="34" charset="0"/>
-                <a:ea typeface="Calibri" pitchFamily="34" charset="-122"/>
-                <a:cs typeface="Calibri" pitchFamily="34" charset="-120"/>
-              </a:rPr>
-              <a:t>from 300 to 100,000 rows (MySQL 6–22 ms)</a:t>
-            </a:r>
-            <a:endParaRPr lang="en-US" sz="1300" dirty="0"/>
-          </a:p>
-        </p:txBody>
-      </p:sp>
-      <p:sp>
-        <p:nvSpPr>
-          <p:cNvPr id="27" name="Text 25"/>
-          <p:cNvSpPr txBox="1"/>
-          <p:nvPr/>
-        </p:nvSpPr>
-        <p:spPr>
-          <a:xfrm>
-            <a:off x="548640" y="5623560"/>
-            <a:ext cx="11064240" cy="548640"/>
-          </a:xfrm>
-          <a:prstGeom prst="rect">
-            <a:avLst/>
-          </a:prstGeom>
-          <a:noFill/>
-          <a:ln/>
-        </p:spPr>
-        <p:txBody>
-          <a:bodyPr wrap="square" lIns="0" tIns="0" rIns="0" bIns="0" rtlCol="0" anchor="ctr"/>
-          <a:lstStyle/>
-          <a:p>
-            <a:pPr indent="0" marL="0">
-              <a:buNone/>
-            </a:pPr>
-            <a:r>
-              <a:rPr lang="en-US" sz="1400" b="1" dirty="0">
-                <a:solidFill>
-                  <a:srgbClr val="0B1D33"/>
-                </a:solidFill>
-                <a:latin typeface="Calibri" pitchFamily="34" charset="0"/>
-                <a:ea typeface="Calibri" pitchFamily="34" charset="-122"/>
-                <a:cs typeface="Calibri" pitchFamily="34" charset="-120"/>
-              </a:rPr>
-              <a:t>Same results on SQLite, PostgreSQL 16 and MySQL 8.4</a:t>
-            </a:r>
-            <a:pPr indent="0" marL="0">
-              <a:buNone/>
-            </a:pPr>
-            <a:r>
               <a:rPr lang="en-US" sz="1400" dirty="0">
                 <a:solidFill>
                   <a:srgbClr val="1E3A5F"/>
@@ -12086,7 +14107,7 @@
                 <a:ea typeface="Calibri" pitchFamily="34" charset="-122"/>
                 <a:cs typeface="Calibri" pitchFamily="34" charset="-120"/>
               </a:rPr>
-              <a:t>  ·  9 organiser users  ·  129,260 rows checked identical across all copies  ·  1,235 automated tests on every change</a:t>
+              <a:t>writes are refused for every role (exit code 3) · JSON output for scripts and CI · pip install maskguard</a:t>
             </a:r>
             <a:endParaRPr lang="en-US" sz="1400" dirty="0"/>
           </a:p>
@@ -12197,7 +14218,7 @@
                 <a:ea typeface="Cambria" pitchFamily="34" charset="-122"/>
                 <a:cs typeface="Cambria" pitchFamily="34" charset="-120"/>
               </a:rPr>
-              <a:t>Why MaskGuard: what other approaches miss</a:t>
+              <a:t>Proof on the organisers' own data — on all 3 databases</a:t>
             </a:r>
             <a:endParaRPr lang="en-US" sz="3000" dirty="0"/>
           </a:p>
@@ -12205,884 +14226,18 @@
       </p:sp>
       <p:sp>
         <p:nvSpPr>
-          <p:cNvPr id="3" name="maskguard column"/>
+          <p:cNvPr id="3" name="proof 1"/>
           <p:cNvSpPr/>
           <p:nvPr/>
         </p:nvSpPr>
         <p:spPr>
           <a:xfrm>
-            <a:off x="4480560" y="1143000"/>
-            <a:ext cx="1783080" cy="2706624"/>
+            <a:off x="548640" y="1234440"/>
+            <a:ext cx="3520440" cy="1965960"/>
           </a:xfrm>
           <a:prstGeom prst="roundRect">
             <a:avLst>
-              <a:gd name="adj" fmla="val 4103"/>
-            </a:avLst>
-          </a:prstGeom>
-          <a:solidFill>
-            <a:srgbClr val="FDEBD0"/>
-          </a:solidFill>
-          <a:ln w="9525">
-            <a:solidFill>
-              <a:srgbClr val="FDEBD0"/>
-            </a:solidFill>
-            <a:prstDash val="solid"/>
-          </a:ln>
-        </p:spPr>
-      </p:sp>
-      <p:sp>
-        <p:nvSpPr>
-          <p:cNvPr id="4" name="Text 2"/>
-          <p:cNvSpPr txBox="1"/>
-          <p:nvPr/>
-        </p:nvSpPr>
-        <p:spPr>
-          <a:xfrm>
-            <a:off x="4480560" y="1179576"/>
-            <a:ext cx="1783080" cy="566928"/>
-          </a:xfrm>
-          <a:prstGeom prst="rect">
-            <a:avLst/>
-          </a:prstGeom>
-          <a:noFill/>
-          <a:ln/>
-        </p:spPr>
-        <p:txBody>
-          <a:bodyPr wrap="square" lIns="0" tIns="0" rIns="0" bIns="0" rtlCol="0" anchor="ctr"/>
-          <a:lstStyle/>
-          <a:p>
-            <a:pPr algn="ctr" indent="0" marL="0">
-              <a:buNone/>
-            </a:pPr>
-            <a:r>
-              <a:rPr lang="en-US" sz="1700" b="1" dirty="0">
-                <a:solidFill>
-                  <a:srgbClr val="D97706"/>
-                </a:solidFill>
-                <a:latin typeface="Calibri" pitchFamily="34" charset="0"/>
-                <a:ea typeface="Calibri" pitchFamily="34" charset="-122"/>
-                <a:cs typeface="Calibri" pitchFamily="34" charset="-120"/>
-              </a:rPr>
-              <a:t>MaskGuard</a:t>
-            </a:r>
-            <a:endParaRPr lang="en-US" sz="1700" dirty="0"/>
-          </a:p>
-        </p:txBody>
-      </p:sp>
-      <p:sp>
-        <p:nvSpPr>
-          <p:cNvPr id="5" name="Text 3"/>
-          <p:cNvSpPr txBox="1"/>
-          <p:nvPr/>
-        </p:nvSpPr>
-        <p:spPr>
-          <a:xfrm>
-            <a:off x="6263640" y="1179576"/>
-            <a:ext cx="1783080" cy="566928"/>
-          </a:xfrm>
-          <a:prstGeom prst="rect">
-            <a:avLst/>
-          </a:prstGeom>
-          <a:noFill/>
-          <a:ln/>
-        </p:spPr>
-        <p:txBody>
-          <a:bodyPr wrap="square" lIns="0" tIns="0" rIns="0" bIns="0" rtlCol="0" anchor="ctr"/>
-          <a:lstStyle/>
-          <a:p>
-            <a:pPr algn="ctr" indent="0" marL="0">
-              <a:buNone/>
-            </a:pPr>
-            <a:r>
-              <a:rPr lang="en-US" sz="1300" b="1" dirty="0">
-                <a:solidFill>
-                  <a:srgbClr val="1E3A5F"/>
-                </a:solidFill>
-                <a:latin typeface="Calibri" pitchFamily="34" charset="0"/>
-                <a:ea typeface="Calibri" pitchFamily="34" charset="-122"/>
-                <a:cs typeface="Calibri" pitchFamily="34" charset="-120"/>
-              </a:rPr>
-              <a:t>Encryption</a:t>
-            </a:r>
-            <a:endParaRPr lang="en-US" sz="1300" dirty="0"/>
-          </a:p>
-          <a:p>
-            <a:pPr algn="ctr" indent="0" marL="0">
-              <a:buNone/>
-            </a:pPr>
-            <a:r>
-              <a:rPr lang="en-US" sz="1300" b="1" dirty="0">
-                <a:solidFill>
-                  <a:srgbClr val="1E3A5F"/>
-                </a:solidFill>
-                <a:latin typeface="Calibri" pitchFamily="34" charset="0"/>
-                <a:ea typeface="Calibri" pitchFamily="34" charset="-122"/>
-                <a:cs typeface="Calibri" pitchFamily="34" charset="-120"/>
-              </a:rPr>
-              <a:t>(incl. quantum-safe)</a:t>
-            </a:r>
-            <a:endParaRPr lang="en-US" sz="1300" dirty="0"/>
-          </a:p>
-        </p:txBody>
-      </p:sp>
-      <p:sp>
-        <p:nvSpPr>
-          <p:cNvPr id="6" name="Text 4"/>
-          <p:cNvSpPr txBox="1"/>
-          <p:nvPr/>
-        </p:nvSpPr>
-        <p:spPr>
-          <a:xfrm>
-            <a:off x="8046720" y="1179576"/>
-            <a:ext cx="1783080" cy="566928"/>
-          </a:xfrm>
-          <a:prstGeom prst="rect">
-            <a:avLst/>
-          </a:prstGeom>
-          <a:noFill/>
-          <a:ln/>
-        </p:spPr>
-        <p:txBody>
-          <a:bodyPr wrap="square" lIns="0" tIns="0" rIns="0" bIns="0" rtlCol="0" anchor="ctr"/>
-          <a:lstStyle/>
-          <a:p>
-            <a:pPr algn="ctr" indent="0" marL="0">
-              <a:buNone/>
-            </a:pPr>
-            <a:r>
-              <a:rPr lang="en-US" sz="1300" b="1" dirty="0">
-                <a:solidFill>
-                  <a:srgbClr val="1E3A5F"/>
-                </a:solidFill>
-                <a:latin typeface="Calibri" pitchFamily="34" charset="0"/>
-                <a:ea typeface="Calibri" pitchFamily="34" charset="-122"/>
-                <a:cs typeface="Calibri" pitchFamily="34" charset="-120"/>
-              </a:rPr>
-              <a:t>Masked copy</a:t>
-            </a:r>
-            <a:endParaRPr lang="en-US" sz="1300" dirty="0"/>
-          </a:p>
-          <a:p>
-            <a:pPr algn="ctr" indent="0" marL="0">
-              <a:buNone/>
-            </a:pPr>
-            <a:r>
-              <a:rPr lang="en-US" sz="1300" b="1" dirty="0">
-                <a:solidFill>
-                  <a:srgbClr val="1E3A5F"/>
-                </a:solidFill>
-                <a:latin typeface="Calibri" pitchFamily="34" charset="0"/>
-                <a:ea typeface="Calibri" pitchFamily="34" charset="-122"/>
-                <a:cs typeface="Calibri" pitchFamily="34" charset="-120"/>
-              </a:rPr>
-              <a:t>of the database</a:t>
-            </a:r>
-            <a:endParaRPr lang="en-US" sz="1300" dirty="0"/>
-          </a:p>
-        </p:txBody>
-      </p:sp>
-      <p:sp>
-        <p:nvSpPr>
-          <p:cNvPr id="7" name="Text 5"/>
-          <p:cNvSpPr txBox="1"/>
-          <p:nvPr/>
-        </p:nvSpPr>
-        <p:spPr>
-          <a:xfrm>
-            <a:off x="9829800" y="1179576"/>
-            <a:ext cx="1783080" cy="566928"/>
-          </a:xfrm>
-          <a:prstGeom prst="rect">
-            <a:avLst/>
-          </a:prstGeom>
-          <a:noFill/>
-          <a:ln/>
-        </p:spPr>
-        <p:txBody>
-          <a:bodyPr wrap="square" lIns="0" tIns="0" rIns="0" bIns="0" rtlCol="0" anchor="ctr"/>
-          <a:lstStyle/>
-          <a:p>
-            <a:pPr algn="ctr" indent="0" marL="0">
-              <a:buNone/>
-            </a:pPr>
-            <a:r>
-              <a:rPr lang="en-US" sz="1300" b="1" dirty="0">
-                <a:solidFill>
-                  <a:srgbClr val="1E3A5F"/>
-                </a:solidFill>
-                <a:latin typeface="Calibri" pitchFamily="34" charset="0"/>
-                <a:ea typeface="Calibri" pitchFamily="34" charset="-122"/>
-                <a:cs typeface="Calibri" pitchFamily="34" charset="-120"/>
-              </a:rPr>
-              <a:t>Screen-only</a:t>
-            </a:r>
-            <a:endParaRPr lang="en-US" sz="1300" dirty="0"/>
-          </a:p>
-          <a:p>
-            <a:pPr algn="ctr" indent="0" marL="0">
-              <a:buNone/>
-            </a:pPr>
-            <a:r>
-              <a:rPr lang="en-US" sz="1300" b="1" dirty="0">
-                <a:solidFill>
-                  <a:srgbClr val="1E3A5F"/>
-                </a:solidFill>
-                <a:latin typeface="Calibri" pitchFamily="34" charset="0"/>
-                <a:ea typeface="Calibri" pitchFamily="34" charset="-122"/>
-                <a:cs typeface="Calibri" pitchFamily="34" charset="-120"/>
-              </a:rPr>
-              <a:t>masking</a:t>
-            </a:r>
-            <a:endParaRPr lang="en-US" sz="1300" dirty="0"/>
-          </a:p>
-        </p:txBody>
-      </p:sp>
-      <p:sp>
-        <p:nvSpPr>
-          <p:cNvPr id="8" name="row line 0"/>
-          <p:cNvSpPr/>
-          <p:nvPr/>
-        </p:nvSpPr>
-        <p:spPr>
-          <a:xfrm>
-            <a:off x="548640" y="1783080"/>
-            <a:ext cx="11064240" cy="0"/>
-          </a:xfrm>
-          <a:prstGeom prst="line">
-            <a:avLst/>
-          </a:prstGeom>
-          <a:noFill/>
-          <a:ln w="9525">
-            <a:solidFill>
-              <a:srgbClr val="CBD5E1"/>
-            </a:solidFill>
-            <a:prstDash val="solid"/>
-          </a:ln>
-        </p:spPr>
-      </p:sp>
-      <p:sp>
-        <p:nvSpPr>
-          <p:cNvPr id="9" name="Text 7"/>
-          <p:cNvSpPr txBox="1"/>
-          <p:nvPr/>
-        </p:nvSpPr>
-        <p:spPr>
-          <a:xfrm>
-            <a:off x="548640" y="1783080"/>
-            <a:ext cx="3840480" cy="502920"/>
-          </a:xfrm>
-          <a:prstGeom prst="rect">
-            <a:avLst/>
-          </a:prstGeom>
-          <a:noFill/>
-          <a:ln/>
-        </p:spPr>
-        <p:txBody>
-          <a:bodyPr wrap="square" lIns="0" tIns="0" rIns="0" bIns="0" rtlCol="0" anchor="ctr"/>
-          <a:lstStyle/>
-          <a:p>
-            <a:pPr indent="0" marL="0">
-              <a:buNone/>
-            </a:pPr>
-            <a:r>
-              <a:rPr lang="en-US" sz="1500" b="1" dirty="0">
-                <a:solidFill>
-                  <a:srgbClr val="0B1D33"/>
-                </a:solidFill>
-                <a:latin typeface="Calibri" pitchFamily="34" charset="0"/>
-                <a:ea typeface="Calibri" pitchFamily="34" charset="-122"/>
-                <a:cs typeface="Calibri" pitchFamily="34" charset="-120"/>
-              </a:rPr>
-              <a:t>Finds personal data by itself</a:t>
-            </a:r>
-            <a:endParaRPr lang="en-US" sz="1500" dirty="0"/>
-          </a:p>
-        </p:txBody>
-      </p:sp>
-      <p:pic>
-        <p:nvPicPr>
-          <p:cNvPr id="10" name="cell 0 0" descr="MaskGuard: Finds personal data by itself: yes">    </p:cNvPr>
-          <p:cNvPicPr>
-            <a:picLocks noChangeAspect="1"/>
-          </p:cNvPicPr>
-          <p:nvPr/>
-        </p:nvPicPr>
-        <p:blipFill>
-          <a:blip r:embed="rId1"/>
-          <a:stretch>
-            <a:fillRect/>
-          </a:stretch>
-        </p:blipFill>
-        <p:spPr>
-          <a:xfrm>
-            <a:off x="5234940" y="1897380"/>
-            <a:ext cx="274320" cy="274320"/>
-          </a:xfrm>
-          <a:prstGeom prst="rect">
-            <a:avLst/>
-          </a:prstGeom>
-        </p:spPr>
-      </p:pic>
-      <p:pic>
-        <p:nvPicPr>
-          <p:cNvPr id="11" name="cell 0 1" descr="Encryption (incl. quantum-safe): Finds personal data by itself: no">    </p:cNvPr>
-          <p:cNvPicPr>
-            <a:picLocks noChangeAspect="1"/>
-          </p:cNvPicPr>
-          <p:nvPr/>
-        </p:nvPicPr>
-        <p:blipFill>
-          <a:blip r:embed="rId2"/>
-          <a:stretch>
-            <a:fillRect/>
-          </a:stretch>
-        </p:blipFill>
-        <p:spPr>
-          <a:xfrm>
-            <a:off x="7018020" y="1897380"/>
-            <a:ext cx="274320" cy="274320"/>
-          </a:xfrm>
-          <a:prstGeom prst="rect">
-            <a:avLst/>
-          </a:prstGeom>
-        </p:spPr>
-      </p:pic>
-      <p:pic>
-        <p:nvPicPr>
-          <p:cNvPr id="12" name="cell 0 2" descr="Masked copy of the database: Finds personal data by itself: no">    </p:cNvPr>
-          <p:cNvPicPr>
-            <a:picLocks noChangeAspect="1"/>
-          </p:cNvPicPr>
-          <p:nvPr/>
-        </p:nvPicPr>
-        <p:blipFill>
-          <a:blip r:embed="rId3"/>
-          <a:stretch>
-            <a:fillRect/>
-          </a:stretch>
-        </p:blipFill>
-        <p:spPr>
-          <a:xfrm>
-            <a:off x="8801100" y="1897380"/>
-            <a:ext cx="274320" cy="274320"/>
-          </a:xfrm>
-          <a:prstGeom prst="rect">
-            <a:avLst/>
-          </a:prstGeom>
-        </p:spPr>
-      </p:pic>
-      <p:pic>
-        <p:nvPicPr>
-          <p:cNvPr id="13" name="cell 0 3" descr="Screen-only masking: Finds personal data by itself: no">    </p:cNvPr>
-          <p:cNvPicPr>
-            <a:picLocks noChangeAspect="1"/>
-          </p:cNvPicPr>
-          <p:nvPr/>
-        </p:nvPicPr>
-        <p:blipFill>
-          <a:blip r:embed="rId4"/>
-          <a:stretch>
-            <a:fillRect/>
-          </a:stretch>
-        </p:blipFill>
-        <p:spPr>
-          <a:xfrm>
-            <a:off x="10584180" y="1897380"/>
-            <a:ext cx="274320" cy="274320"/>
-          </a:xfrm>
-          <a:prstGeom prst="rect">
-            <a:avLst/>
-          </a:prstGeom>
-        </p:spPr>
-      </p:pic>
-      <p:sp>
-        <p:nvSpPr>
-          <p:cNvPr id="14" name="row line 1"/>
-          <p:cNvSpPr/>
-          <p:nvPr/>
-        </p:nvSpPr>
-        <p:spPr>
-          <a:xfrm>
-            <a:off x="548640" y="2286000"/>
-            <a:ext cx="11064240" cy="0"/>
-          </a:xfrm>
-          <a:prstGeom prst="line">
-            <a:avLst/>
-          </a:prstGeom>
-          <a:noFill/>
-          <a:ln w="9525">
-            <a:solidFill>
-              <a:srgbClr val="CBD5E1"/>
-            </a:solidFill>
-            <a:prstDash val="solid"/>
-          </a:ln>
-        </p:spPr>
-      </p:sp>
-      <p:sp>
-        <p:nvSpPr>
-          <p:cNvPr id="15" name="Text 9"/>
-          <p:cNvSpPr txBox="1"/>
-          <p:nvPr/>
-        </p:nvSpPr>
-        <p:spPr>
-          <a:xfrm>
-            <a:off x="548640" y="2286000"/>
-            <a:ext cx="3840480" cy="502920"/>
-          </a:xfrm>
-          <a:prstGeom prst="rect">
-            <a:avLst/>
-          </a:prstGeom>
-          <a:noFill/>
-          <a:ln/>
-        </p:spPr>
-        <p:txBody>
-          <a:bodyPr wrap="square" lIns="0" tIns="0" rIns="0" bIns="0" rtlCol="0" anchor="ctr"/>
-          <a:lstStyle/>
-          <a:p>
-            <a:pPr indent="0" marL="0">
-              <a:buNone/>
-            </a:pPr>
-            <a:r>
-              <a:rPr lang="en-US" sz="1500" b="1" dirty="0">
-                <a:solidFill>
-                  <a:srgbClr val="0B1D33"/>
-                </a:solidFill>
-                <a:latin typeface="Calibri" pitchFamily="34" charset="0"/>
-                <a:ea typeface="Calibri" pitchFamily="34" charset="-122"/>
-                <a:cs typeface="Calibri" pitchFamily="34" charset="-120"/>
-              </a:rPr>
-              <a:t>A different view for each role</a:t>
-            </a:r>
-            <a:endParaRPr lang="en-US" sz="1500" dirty="0"/>
-          </a:p>
-        </p:txBody>
-      </p:sp>
-      <p:pic>
-        <p:nvPicPr>
-          <p:cNvPr id="16" name="cell 1 0" descr="MaskGuard: A different view for each role: yes">    </p:cNvPr>
-          <p:cNvPicPr>
-            <a:picLocks noChangeAspect="1"/>
-          </p:cNvPicPr>
-          <p:nvPr/>
-        </p:nvPicPr>
-        <p:blipFill>
-          <a:blip r:embed="rId5"/>
-          <a:stretch>
-            <a:fillRect/>
-          </a:stretch>
-        </p:blipFill>
-        <p:spPr>
-          <a:xfrm>
-            <a:off x="5234940" y="2400300"/>
-            <a:ext cx="274320" cy="274320"/>
-          </a:xfrm>
-          <a:prstGeom prst="rect">
-            <a:avLst/>
-          </a:prstGeom>
-        </p:spPr>
-      </p:pic>
-      <p:pic>
-        <p:nvPicPr>
-          <p:cNvPr id="17" name="cell 1 1" descr="Encryption (incl. quantum-safe): A different view for each role: no">    </p:cNvPr>
-          <p:cNvPicPr>
-            <a:picLocks noChangeAspect="1"/>
-          </p:cNvPicPr>
-          <p:nvPr/>
-        </p:nvPicPr>
-        <p:blipFill>
-          <a:blip r:embed="rId6"/>
-          <a:stretch>
-            <a:fillRect/>
-          </a:stretch>
-        </p:blipFill>
-        <p:spPr>
-          <a:xfrm>
-            <a:off x="7018020" y="2400300"/>
-            <a:ext cx="274320" cy="274320"/>
-          </a:xfrm>
-          <a:prstGeom prst="rect">
-            <a:avLst/>
-          </a:prstGeom>
-        </p:spPr>
-      </p:pic>
-      <p:pic>
-        <p:nvPicPr>
-          <p:cNvPr id="18" name="cell 1 2" descr="Masked copy of the database: A different view for each role: no">    </p:cNvPr>
-          <p:cNvPicPr>
-            <a:picLocks noChangeAspect="1"/>
-          </p:cNvPicPr>
-          <p:nvPr/>
-        </p:nvPicPr>
-        <p:blipFill>
-          <a:blip r:embed="rId7"/>
-          <a:stretch>
-            <a:fillRect/>
-          </a:stretch>
-        </p:blipFill>
-        <p:spPr>
-          <a:xfrm>
-            <a:off x="8801100" y="2400300"/>
-            <a:ext cx="274320" cy="274320"/>
-          </a:xfrm>
-          <a:prstGeom prst="rect">
-            <a:avLst/>
-          </a:prstGeom>
-        </p:spPr>
-      </p:pic>
-      <p:pic>
-        <p:nvPicPr>
-          <p:cNvPr id="19" name="cell 1 3" descr="Screen-only masking: A different view for each role: yes">    </p:cNvPr>
-          <p:cNvPicPr>
-            <a:picLocks noChangeAspect="1"/>
-          </p:cNvPicPr>
-          <p:nvPr/>
-        </p:nvPicPr>
-        <p:blipFill>
-          <a:blip r:embed="rId8"/>
-          <a:stretch>
-            <a:fillRect/>
-          </a:stretch>
-        </p:blipFill>
-        <p:spPr>
-          <a:xfrm>
-            <a:off x="10584180" y="2400300"/>
-            <a:ext cx="274320" cy="274320"/>
-          </a:xfrm>
-          <a:prstGeom prst="rect">
-            <a:avLst/>
-          </a:prstGeom>
-        </p:spPr>
-      </p:pic>
-      <p:sp>
-        <p:nvSpPr>
-          <p:cNvPr id="20" name="row line 2"/>
-          <p:cNvSpPr/>
-          <p:nvPr/>
-        </p:nvSpPr>
-        <p:spPr>
-          <a:xfrm>
-            <a:off x="548640" y="2788920"/>
-            <a:ext cx="11064240" cy="0"/>
-          </a:xfrm>
-          <a:prstGeom prst="line">
-            <a:avLst/>
-          </a:prstGeom>
-          <a:noFill/>
-          <a:ln w="9525">
-            <a:solidFill>
-              <a:srgbClr val="CBD5E1"/>
-            </a:solidFill>
-            <a:prstDash val="solid"/>
-          </a:ln>
-        </p:spPr>
-      </p:sp>
-      <p:sp>
-        <p:nvSpPr>
-          <p:cNvPr id="21" name="Text 11"/>
-          <p:cNvSpPr txBox="1"/>
-          <p:nvPr/>
-        </p:nvSpPr>
-        <p:spPr>
-          <a:xfrm>
-            <a:off x="548640" y="2788920"/>
-            <a:ext cx="3840480" cy="502920"/>
-          </a:xfrm>
-          <a:prstGeom prst="rect">
-            <a:avLst/>
-          </a:prstGeom>
-          <a:noFill/>
-          <a:ln/>
-        </p:spPr>
-        <p:txBody>
-          <a:bodyPr wrap="square" lIns="0" tIns="0" rIns="0" bIns="0" rtlCol="0" anchor="ctr"/>
-          <a:lstStyle/>
-          <a:p>
-            <a:pPr indent="0" marL="0">
-              <a:buNone/>
-            </a:pPr>
-            <a:r>
-              <a:rPr lang="en-US" sz="1500" b="1" dirty="0">
-                <a:solidFill>
-                  <a:srgbClr val="0B1D33"/>
-                </a:solidFill>
-                <a:latin typeface="Calibri" pitchFamily="34" charset="0"/>
-                <a:ea typeface="Calibri" pitchFamily="34" charset="-122"/>
-                <a:cs typeface="Calibri" pitchFamily="34" charset="-120"/>
-              </a:rPr>
-              <a:t>Stops guessing a value through a search</a:t>
-            </a:r>
-            <a:endParaRPr lang="en-US" sz="1500" dirty="0"/>
-          </a:p>
-        </p:txBody>
-      </p:sp>
-      <p:pic>
-        <p:nvPicPr>
-          <p:cNvPr id="22" name="cell 2 0" descr="MaskGuard: Stops guessing a value through a search: yes">    </p:cNvPr>
-          <p:cNvPicPr>
-            <a:picLocks noChangeAspect="1"/>
-          </p:cNvPicPr>
-          <p:nvPr/>
-        </p:nvPicPr>
-        <p:blipFill>
-          <a:blip r:embed="rId9"/>
-          <a:stretch>
-            <a:fillRect/>
-          </a:stretch>
-        </p:blipFill>
-        <p:spPr>
-          <a:xfrm>
-            <a:off x="5234940" y="2903220"/>
-            <a:ext cx="274320" cy="274320"/>
-          </a:xfrm>
-          <a:prstGeom prst="rect">
-            <a:avLst/>
-          </a:prstGeom>
-        </p:spPr>
-      </p:pic>
-      <p:pic>
-        <p:nvPicPr>
-          <p:cNvPr id="23" name="cell 2 1" descr="Encryption (incl. quantum-safe): Stops guessing a value through a search: no">    </p:cNvPr>
-          <p:cNvPicPr>
-            <a:picLocks noChangeAspect="1"/>
-          </p:cNvPicPr>
-          <p:nvPr/>
-        </p:nvPicPr>
-        <p:blipFill>
-          <a:blip r:embed="rId10"/>
-          <a:stretch>
-            <a:fillRect/>
-          </a:stretch>
-        </p:blipFill>
-        <p:spPr>
-          <a:xfrm>
-            <a:off x="7018020" y="2903220"/>
-            <a:ext cx="274320" cy="274320"/>
-          </a:xfrm>
-          <a:prstGeom prst="rect">
-            <a:avLst/>
-          </a:prstGeom>
-        </p:spPr>
-      </p:pic>
-      <p:pic>
-        <p:nvPicPr>
-          <p:cNvPr id="24" name="cell 2 2" descr="Masked copy of the database: Stops guessing a value through a search: yes">    </p:cNvPr>
-          <p:cNvPicPr>
-            <a:picLocks noChangeAspect="1"/>
-          </p:cNvPicPr>
-          <p:nvPr/>
-        </p:nvPicPr>
-        <p:blipFill>
-          <a:blip r:embed="rId11"/>
-          <a:stretch>
-            <a:fillRect/>
-          </a:stretch>
-        </p:blipFill>
-        <p:spPr>
-          <a:xfrm>
-            <a:off x="8801100" y="2903220"/>
-            <a:ext cx="274320" cy="274320"/>
-          </a:xfrm>
-          <a:prstGeom prst="rect">
-            <a:avLst/>
-          </a:prstGeom>
-        </p:spPr>
-      </p:pic>
-      <p:pic>
-        <p:nvPicPr>
-          <p:cNvPr id="25" name="cell 2 3" descr="Screen-only masking: Stops guessing a value through a search: no">    </p:cNvPr>
-          <p:cNvPicPr>
-            <a:picLocks noChangeAspect="1"/>
-          </p:cNvPicPr>
-          <p:nvPr/>
-        </p:nvPicPr>
-        <p:blipFill>
-          <a:blip r:embed="rId12"/>
-          <a:stretch>
-            <a:fillRect/>
-          </a:stretch>
-        </p:blipFill>
-        <p:spPr>
-          <a:xfrm>
-            <a:off x="10584180" y="2903220"/>
-            <a:ext cx="274320" cy="274320"/>
-          </a:xfrm>
-          <a:prstGeom prst="rect">
-            <a:avLst/>
-          </a:prstGeom>
-        </p:spPr>
-      </p:pic>
-      <p:sp>
-        <p:nvSpPr>
-          <p:cNvPr id="26" name="row line 3"/>
-          <p:cNvSpPr/>
-          <p:nvPr/>
-        </p:nvSpPr>
-        <p:spPr>
-          <a:xfrm>
-            <a:off x="548640" y="3291840"/>
-            <a:ext cx="11064240" cy="0"/>
-          </a:xfrm>
-          <a:prstGeom prst="line">
-            <a:avLst/>
-          </a:prstGeom>
-          <a:noFill/>
-          <a:ln w="9525">
-            <a:solidFill>
-              <a:srgbClr val="CBD5E1"/>
-            </a:solidFill>
-            <a:prstDash val="solid"/>
-          </a:ln>
-        </p:spPr>
-      </p:sp>
-      <p:sp>
-        <p:nvSpPr>
-          <p:cNvPr id="27" name="Text 13"/>
-          <p:cNvSpPr txBox="1"/>
-          <p:nvPr/>
-        </p:nvSpPr>
-        <p:spPr>
-          <a:xfrm>
-            <a:off x="548640" y="3291840"/>
-            <a:ext cx="3840480" cy="502920"/>
-          </a:xfrm>
-          <a:prstGeom prst="rect">
-            <a:avLst/>
-          </a:prstGeom>
-          <a:noFill/>
-          <a:ln/>
-        </p:spPr>
-        <p:txBody>
-          <a:bodyPr wrap="square" lIns="0" tIns="0" rIns="0" bIns="0" rtlCol="0" anchor="ctr"/>
-          <a:lstStyle/>
-          <a:p>
-            <a:pPr indent="0" marL="0">
-              <a:buNone/>
-            </a:pPr>
-            <a:r>
-              <a:rPr lang="en-US" sz="1500" b="1" dirty="0">
-                <a:solidFill>
-                  <a:srgbClr val="0B1D33"/>
-                </a:solidFill>
-                <a:latin typeface="Calibri" pitchFamily="34" charset="0"/>
-                <a:ea typeface="Calibri" pitchFamily="34" charset="-122"/>
-                <a:cs typeface="Calibri" pitchFamily="34" charset="-120"/>
-              </a:rPr>
-              <a:t>Data stays in place, never copied</a:t>
-            </a:r>
-            <a:endParaRPr lang="en-US" sz="1500" dirty="0"/>
-          </a:p>
-        </p:txBody>
-      </p:sp>
-      <p:pic>
-        <p:nvPicPr>
-          <p:cNvPr id="28" name="cell 3 0" descr="MaskGuard: Data stays in place, never copied: yes">    </p:cNvPr>
-          <p:cNvPicPr>
-            <a:picLocks noChangeAspect="1"/>
-          </p:cNvPicPr>
-          <p:nvPr/>
-        </p:nvPicPr>
-        <p:blipFill>
-          <a:blip r:embed="rId13"/>
-          <a:stretch>
-            <a:fillRect/>
-          </a:stretch>
-        </p:blipFill>
-        <p:spPr>
-          <a:xfrm>
-            <a:off x="5234940" y="3406140"/>
-            <a:ext cx="274320" cy="274320"/>
-          </a:xfrm>
-          <a:prstGeom prst="rect">
-            <a:avLst/>
-          </a:prstGeom>
-        </p:spPr>
-      </p:pic>
-      <p:pic>
-        <p:nvPicPr>
-          <p:cNvPr id="29" name="cell 3 1" descr="Encryption (incl. quantum-safe): Data stays in place, never copied: yes">    </p:cNvPr>
-          <p:cNvPicPr>
-            <a:picLocks noChangeAspect="1"/>
-          </p:cNvPicPr>
-          <p:nvPr/>
-        </p:nvPicPr>
-        <p:blipFill>
-          <a:blip r:embed="rId14"/>
-          <a:stretch>
-            <a:fillRect/>
-          </a:stretch>
-        </p:blipFill>
-        <p:spPr>
-          <a:xfrm>
-            <a:off x="7018020" y="3406140"/>
-            <a:ext cx="274320" cy="274320"/>
-          </a:xfrm>
-          <a:prstGeom prst="rect">
-            <a:avLst/>
-          </a:prstGeom>
-        </p:spPr>
-      </p:pic>
-      <p:pic>
-        <p:nvPicPr>
-          <p:cNvPr id="30" name="cell 3 2" descr="Masked copy of the database: Data stays in place, never copied: no">    </p:cNvPr>
-          <p:cNvPicPr>
-            <a:picLocks noChangeAspect="1"/>
-          </p:cNvPicPr>
-          <p:nvPr/>
-        </p:nvPicPr>
-        <p:blipFill>
-          <a:blip r:embed="rId15"/>
-          <a:stretch>
-            <a:fillRect/>
-          </a:stretch>
-        </p:blipFill>
-        <p:spPr>
-          <a:xfrm>
-            <a:off x="8801100" y="3406140"/>
-            <a:ext cx="274320" cy="274320"/>
-          </a:xfrm>
-          <a:prstGeom prst="rect">
-            <a:avLst/>
-          </a:prstGeom>
-        </p:spPr>
-      </p:pic>
-      <p:pic>
-        <p:nvPicPr>
-          <p:cNvPr id="31" name="cell 3 3" descr="Screen-only masking: Data stays in place, never copied: yes">    </p:cNvPr>
-          <p:cNvPicPr>
-            <a:picLocks noChangeAspect="1"/>
-          </p:cNvPicPr>
-          <p:nvPr/>
-        </p:nvPicPr>
-        <p:blipFill>
-          <a:blip r:embed="rId16"/>
-          <a:stretch>
-            <a:fillRect/>
-          </a:stretch>
-        </p:blipFill>
-        <p:spPr>
-          <a:xfrm>
-            <a:off x="10584180" y="3406140"/>
-            <a:ext cx="274320" cy="274320"/>
-          </a:xfrm>
-          <a:prstGeom prst="rect">
-            <a:avLst/>
-          </a:prstGeom>
-        </p:spPr>
-      </p:pic>
-      <p:sp>
-        <p:nvSpPr>
-          <p:cNvPr id="32" name="key message"/>
-          <p:cNvSpPr/>
-          <p:nvPr/>
-        </p:nvSpPr>
-        <p:spPr>
-          <a:xfrm>
-            <a:off x="548640" y="3931920"/>
-            <a:ext cx="11064240" cy="868680"/>
-          </a:xfrm>
-          <a:prstGeom prst="roundRect">
-            <a:avLst>
-              <a:gd name="adj" fmla="val 8421"/>
+              <a:gd name="adj" fmla="val 3721"/>
             </a:avLst>
           </a:prstGeom>
           <a:solidFill>
@@ -13098,63 +14253,158 @@
       </p:sp>
       <p:sp>
         <p:nvSpPr>
-          <p:cNvPr id="33" name="lock circle"/>
+          <p:cNvPr id="4" name="Text 2"/>
+          <p:cNvSpPr txBox="1"/>
+          <p:nvPr/>
+        </p:nvSpPr>
+        <p:spPr>
+          <a:xfrm>
+            <a:off x="822960" y="1399032"/>
+            <a:ext cx="3017520" cy="731520"/>
+          </a:xfrm>
+          <a:prstGeom prst="rect">
+            <a:avLst/>
+          </a:prstGeom>
+          <a:noFill/>
+          <a:ln/>
+        </p:spPr>
+        <p:txBody>
+          <a:bodyPr wrap="square" lIns="0" tIns="0" rIns="0" bIns="0" rtlCol="0" anchor="ctr"/>
+          <a:lstStyle/>
+          <a:p>
+            <a:pPr indent="0" marL="0">
+              <a:buNone/>
+            </a:pPr>
+            <a:r>
+              <a:rPr lang="en-US" sz="4000" b="1" dirty="0">
+                <a:solidFill>
+                  <a:srgbClr val="D97706"/>
+                </a:solidFill>
+                <a:latin typeface="Cambria" pitchFamily="34" charset="0"/>
+                <a:ea typeface="Cambria" pitchFamily="34" charset="-122"/>
+                <a:cs typeface="Cambria" pitchFamily="34" charset="-120"/>
+              </a:rPr>
+              <a:t>35 / 35</a:t>
+            </a:r>
+            <a:endParaRPr lang="en-US" sz="4000" dirty="0"/>
+          </a:p>
+        </p:txBody>
+      </p:sp>
+      <p:sp>
+        <p:nvSpPr>
+          <p:cNvPr id="5" name="Text 3"/>
+          <p:cNvSpPr txBox="1"/>
+          <p:nvPr/>
+        </p:nvSpPr>
+        <p:spPr>
+          <a:xfrm>
+            <a:off x="822960" y="2148840"/>
+            <a:ext cx="3063240" cy="365760"/>
+          </a:xfrm>
+          <a:prstGeom prst="rect">
+            <a:avLst/>
+          </a:prstGeom>
+          <a:noFill/>
+          <a:ln/>
+        </p:spPr>
+        <p:txBody>
+          <a:bodyPr wrap="square" lIns="0" tIns="0" rIns="0" bIns="0" rtlCol="0" anchor="ctr"/>
+          <a:lstStyle/>
+          <a:p>
+            <a:pPr indent="0" marL="0">
+              <a:buNone/>
+            </a:pPr>
+            <a:r>
+              <a:rPr lang="en-US" sz="1700" b="1" dirty="0">
+                <a:solidFill>
+                  <a:srgbClr val="FFFFFF"/>
+                </a:solidFill>
+                <a:latin typeface="Calibri" pitchFamily="34" charset="0"/>
+                <a:ea typeface="Calibri" pitchFamily="34" charset="-122"/>
+                <a:cs typeface="Calibri" pitchFamily="34" charset="-120"/>
+              </a:rPr>
+              <a:t>sensitive columns found</a:t>
+            </a:r>
+            <a:endParaRPr lang="en-US" sz="1700" dirty="0"/>
+          </a:p>
+        </p:txBody>
+      </p:sp>
+      <p:sp>
+        <p:nvSpPr>
+          <p:cNvPr id="6" name="Text 4"/>
+          <p:cNvSpPr txBox="1"/>
+          <p:nvPr/>
+        </p:nvSpPr>
+        <p:spPr>
+          <a:xfrm>
+            <a:off x="822960" y="2532888"/>
+            <a:ext cx="3063240" cy="594360"/>
+          </a:xfrm>
+          <a:prstGeom prst="rect">
+            <a:avLst/>
+          </a:prstGeom>
+          <a:noFill/>
+          <a:ln/>
+        </p:spPr>
+        <p:txBody>
+          <a:bodyPr wrap="square" lIns="0" tIns="0" rIns="0" bIns="0" rtlCol="0" anchor="t"/>
+          <a:lstStyle/>
+          <a:p>
+            <a:pPr indent="0" marL="0">
+              <a:buNone/>
+            </a:pPr>
+            <a:r>
+              <a:rPr lang="en-US" sz="1300" dirty="0">
+                <a:solidFill>
+                  <a:srgbClr val="CBD5E1"/>
+                </a:solidFill>
+                <a:latin typeface="Calibri" pitchFamily="34" charset="0"/>
+                <a:ea typeface="Calibri" pitchFamily="34" charset="-122"/>
+                <a:cs typeface="Calibri" pitchFamily="34" charset="-120"/>
+              </a:rPr>
+              <a:t>first try 22; we fixed the general causes, not the dataset</a:t>
+            </a:r>
+            <a:endParaRPr lang="en-US" sz="1300" dirty="0"/>
+          </a:p>
+        </p:txBody>
+      </p:sp>
+      <p:sp>
+        <p:nvSpPr>
+          <p:cNvPr id="7" name="proof 2"/>
           <p:cNvSpPr/>
           <p:nvPr/>
         </p:nvSpPr>
         <p:spPr>
           <a:xfrm>
-            <a:off x="731520" y="4050792"/>
-            <a:ext cx="621792" cy="621792"/>
-          </a:xfrm>
-          <a:prstGeom prst="ellipse">
-            <a:avLst/>
+            <a:off x="4297680" y="1234440"/>
+            <a:ext cx="3520440" cy="1965960"/>
+          </a:xfrm>
+          <a:prstGeom prst="roundRect">
+            <a:avLst>
+              <a:gd name="adj" fmla="val 3721"/>
+            </a:avLst>
           </a:prstGeom>
           <a:solidFill>
-            <a:srgbClr val="D97706"/>
+            <a:srgbClr val="0B1D33"/>
           </a:solidFill>
-          <a:ln w="12700">
+          <a:ln w="9525">
             <a:solidFill>
-              <a:srgbClr val="D97706"/>
+              <a:srgbClr val="0B1D33"/>
             </a:solidFill>
             <a:prstDash val="solid"/>
           </a:ln>
         </p:spPr>
       </p:sp>
-      <p:pic>
-        <p:nvPicPr>
-          <p:cNvPr id="34" name="lock icon" descr="lock">    </p:cNvPr>
-          <p:cNvPicPr>
-            <a:picLocks noChangeAspect="1"/>
-          </p:cNvPicPr>
-          <p:nvPr/>
-        </p:nvPicPr>
-        <p:blipFill>
-          <a:blip r:embed="rId17"/>
-          <a:stretch>
-            <a:fillRect/>
-          </a:stretch>
-        </p:blipFill>
-        <p:spPr>
-          <a:xfrm>
-            <a:off x="886968" y="4206240"/>
-            <a:ext cx="310896" cy="310896"/>
-          </a:xfrm>
-          <a:prstGeom prst="rect">
-            <a:avLst/>
-          </a:prstGeom>
-        </p:spPr>
-      </p:pic>
-      <p:sp>
-        <p:nvSpPr>
-          <p:cNvPr id="35" name="Text 16"/>
-          <p:cNvSpPr txBox="1"/>
-          <p:nvPr/>
-        </p:nvSpPr>
-        <p:spPr>
-          <a:xfrm>
-            <a:off x="1554480" y="3931920"/>
-            <a:ext cx="9875520" cy="868680"/>
+      <p:sp>
+        <p:nvSpPr>
+          <p:cNvPr id="8" name="Text 6"/>
+          <p:cNvSpPr txBox="1"/>
+          <p:nvPr/>
+        </p:nvSpPr>
+        <p:spPr>
+          <a:xfrm>
+            <a:off x="4572000" y="1399032"/>
+            <a:ext cx="3017520" cy="731520"/>
           </a:xfrm>
           <a:prstGeom prst="rect">
             <a:avLst/>
@@ -13170,87 +14420,112 @@
               <a:buNone/>
             </a:pPr>
             <a:r>
-              <a:rPr lang="en-US" sz="1500" b="1" dirty="0">
-                <a:solidFill>
-                  <a:srgbClr val="FFFFFF"/>
-                </a:solidFill>
-                <a:latin typeface="Calibri" pitchFamily="34" charset="0"/>
-                <a:ea typeface="Calibri" pitchFamily="34" charset="-122"/>
-                <a:cs typeface="Calibri" pitchFamily="34" charset="-120"/>
-              </a:rPr>
-              <a:t>Encryption — even quantum-safe — keeps outsiders out. </a:t>
-            </a:r>
-            <a:pPr indent="0" marL="0">
-              <a:buNone/>
-            </a:pPr>
-            <a:r>
-              <a:rPr lang="en-US" sz="1500" dirty="0">
-                <a:solidFill>
-                  <a:srgbClr val="CBD5E1"/>
-                </a:solidFill>
-                <a:latin typeface="Calibri" pitchFamily="34" charset="0"/>
-                <a:ea typeface="Calibri" pitchFamily="34" charset="-122"/>
-                <a:cs typeface="Calibri" pitchFamily="34" charset="-120"/>
-              </a:rPr>
-              <a:t>But once the bank's own app decrypts the data, every insider sees all of it. MaskGuard decides what each insider sees, so use both.</a:t>
-            </a:r>
-            <a:endParaRPr lang="en-US" sz="1500" dirty="0"/>
-          </a:p>
-        </p:txBody>
-      </p:sp>
-      <p:sp>
-        <p:nvSpPr>
-          <p:cNvPr id="36" name="Text 17"/>
-          <p:cNvSpPr txBox="1"/>
-          <p:nvPr/>
-        </p:nvSpPr>
-        <p:spPr>
-          <a:xfrm>
-            <a:off x="548640" y="4892040"/>
-            <a:ext cx="2743200" cy="274320"/>
-          </a:xfrm>
-          <a:prstGeom prst="rect">
-            <a:avLst/>
-          </a:prstGeom>
-          <a:noFill/>
-          <a:ln/>
-        </p:spPr>
-        <p:txBody>
-          <a:bodyPr wrap="square" lIns="0" tIns="0" rIns="0" bIns="0" rtlCol="0" anchor="ctr"/>
-          <a:lstStyle/>
-          <a:p>
-            <a:pPr indent="0" marL="0">
-              <a:buNone/>
-            </a:pPr>
-            <a:r>
-              <a:rPr lang="en-US" sz="1500" b="1" dirty="0">
-                <a:solidFill>
-                  <a:srgbClr val="0B1D33"/>
+              <a:rPr lang="en-US" sz="4000" b="1" dirty="0">
+                <a:solidFill>
+                  <a:srgbClr val="D97706"/>
                 </a:solidFill>
                 <a:latin typeface="Cambria" pitchFamily="34" charset="0"/>
                 <a:ea typeface="Cambria" pitchFamily="34" charset="-122"/>
                 <a:cs typeface="Cambria" pitchFamily="34" charset="-120"/>
               </a:rPr>
-              <a:t>The market</a:t>
-            </a:r>
-            <a:endParaRPr lang="en-US" sz="1500" dirty="0"/>
-          </a:p>
-        </p:txBody>
-      </p:sp>
-      <p:sp>
-        <p:nvSpPr>
-          <p:cNvPr id="37" name="market 0"/>
+              <a:t>0</a:t>
+            </a:r>
+            <a:endParaRPr lang="en-US" sz="4000" dirty="0"/>
+          </a:p>
+        </p:txBody>
+      </p:sp>
+      <p:sp>
+        <p:nvSpPr>
+          <p:cNvPr id="9" name="Text 7"/>
+          <p:cNvSpPr txBox="1"/>
+          <p:nvPr/>
+        </p:nvSpPr>
+        <p:spPr>
+          <a:xfrm>
+            <a:off x="4572000" y="2148840"/>
+            <a:ext cx="3063240" cy="365760"/>
+          </a:xfrm>
+          <a:prstGeom prst="rect">
+            <a:avLst/>
+          </a:prstGeom>
+          <a:noFill/>
+          <a:ln/>
+        </p:spPr>
+        <p:txBody>
+          <a:bodyPr wrap="square" lIns="0" tIns="0" rIns="0" bIns="0" rtlCol="0" anchor="ctr"/>
+          <a:lstStyle/>
+          <a:p>
+            <a:pPr indent="0" marL="0">
+              <a:buNone/>
+            </a:pPr>
+            <a:r>
+              <a:rPr lang="en-US" sz="1700" b="1" dirty="0">
+                <a:solidFill>
+                  <a:srgbClr val="FFFFFF"/>
+                </a:solidFill>
+                <a:latin typeface="Calibri" pitchFamily="34" charset="0"/>
+                <a:ea typeface="Calibri" pitchFamily="34" charset="-122"/>
+                <a:cs typeface="Calibri" pitchFamily="34" charset="-120"/>
+              </a:rPr>
+              <a:t>real values leaked</a:t>
+            </a:r>
+            <a:endParaRPr lang="en-US" sz="1700" dirty="0"/>
+          </a:p>
+        </p:txBody>
+      </p:sp>
+      <p:sp>
+        <p:nvSpPr>
+          <p:cNvPr id="10" name="Text 8"/>
+          <p:cNvSpPr txBox="1"/>
+          <p:nvPr/>
+        </p:nvSpPr>
+        <p:spPr>
+          <a:xfrm>
+            <a:off x="4572000" y="2532888"/>
+            <a:ext cx="3063240" cy="594360"/>
+          </a:xfrm>
+          <a:prstGeom prst="rect">
+            <a:avLst/>
+          </a:prstGeom>
+          <a:noFill/>
+          <a:ln/>
+        </p:spPr>
+        <p:txBody>
+          <a:bodyPr wrap="square" lIns="0" tIns="0" rIns="0" bIns="0" rtlCol="0" anchor="t"/>
+          <a:lstStyle/>
+          <a:p>
+            <a:pPr indent="0" marL="0">
+              <a:buNone/>
+            </a:pPr>
+            <a:r>
+              <a:rPr lang="en-US" sz="1300" dirty="0">
+                <a:solidFill>
+                  <a:srgbClr val="CBD5E1"/>
+                </a:solidFill>
+                <a:latin typeface="Calibri" pitchFamily="34" charset="0"/>
+                <a:ea typeface="Calibri" pitchFamily="34" charset="-122"/>
+                <a:cs typeface="Calibri" pitchFamily="34" charset="-120"/>
+              </a:rPr>
+              <a:t>in 13,700 masked cells, per database</a:t>
+            </a:r>
+            <a:endParaRPr lang="en-US" sz="1300" dirty="0"/>
+          </a:p>
+        </p:txBody>
+      </p:sp>
+      <p:sp>
+        <p:nvSpPr>
+          <p:cNvPr id="11" name="proof 3"/>
           <p:cNvSpPr/>
           <p:nvPr/>
         </p:nvSpPr>
         <p:spPr>
           <a:xfrm>
-            <a:off x="548640" y="5212080"/>
-            <a:ext cx="2514600" cy="896112"/>
+            <a:off x="8046720" y="1234440"/>
+            <a:ext cx="3520440" cy="1965960"/>
           </a:xfrm>
           <a:prstGeom prst="roundRect">
             <a:avLst>
-              <a:gd name="adj" fmla="val 8163"/>
+              <a:gd name="adj" fmla="val 3721"/>
             </a:avLst>
           </a:prstGeom>
           <a:solidFill>
@@ -13266,14 +14541,14 @@
       </p:sp>
       <p:sp>
         <p:nvSpPr>
-          <p:cNvPr id="38" name="Text 19"/>
-          <p:cNvSpPr txBox="1"/>
-          <p:nvPr/>
-        </p:nvSpPr>
-        <p:spPr>
-          <a:xfrm>
-            <a:off x="713232" y="5266944"/>
-            <a:ext cx="2240280" cy="411480"/>
+          <p:cNvPr id="12" name="Text 10"/>
+          <p:cNvSpPr txBox="1"/>
+          <p:nvPr/>
+        </p:nvSpPr>
+        <p:spPr>
+          <a:xfrm>
+            <a:off x="8321040" y="1399032"/>
+            <a:ext cx="3017520" cy="731520"/>
           </a:xfrm>
           <a:prstGeom prst="rect">
             <a:avLst/>
@@ -13289,7 +14564,7 @@
               <a:buNone/>
             </a:pPr>
             <a:r>
-              <a:rPr lang="en-US" sz="1900" b="1" dirty="0">
+              <a:rPr lang="en-US" sz="4000" b="1" dirty="0">
                 <a:solidFill>
                   <a:srgbClr val="0B1D33"/>
                 </a:solidFill>
@@ -13297,22 +14572,61 @@
                 <a:ea typeface="Cambria" pitchFamily="34" charset="-122"/>
                 <a:cs typeface="Cambria" pitchFamily="34" charset="-120"/>
               </a:rPr>
-              <a:t>$1.47 B → $2.6 B</a:t>
-            </a:r>
-            <a:endParaRPr lang="en-US" sz="1900" dirty="0"/>
-          </a:p>
-        </p:txBody>
-      </p:sp>
-      <p:sp>
-        <p:nvSpPr>
-          <p:cNvPr id="39" name="Text 20"/>
-          <p:cNvSpPr txBox="1"/>
-          <p:nvPr/>
-        </p:nvSpPr>
-        <p:spPr>
-          <a:xfrm>
-            <a:off x="713232" y="5669280"/>
-            <a:ext cx="2286000" cy="384048"/>
+              <a:t>0 rows</a:t>
+            </a:r>
+            <a:endParaRPr lang="en-US" sz="4000" dirty="0"/>
+          </a:p>
+        </p:txBody>
+      </p:sp>
+      <p:sp>
+        <p:nvSpPr>
+          <p:cNvPr id="13" name="Text 11"/>
+          <p:cNvSpPr txBox="1"/>
+          <p:nvPr/>
+        </p:nvSpPr>
+        <p:spPr>
+          <a:xfrm>
+            <a:off x="8321040" y="2148840"/>
+            <a:ext cx="3063240" cy="365760"/>
+          </a:xfrm>
+          <a:prstGeom prst="rect">
+            <a:avLst/>
+          </a:prstGeom>
+          <a:noFill/>
+          <a:ln/>
+        </p:spPr>
+        <p:txBody>
+          <a:bodyPr wrap="square" lIns="0" tIns="0" rIns="0" bIns="0" rtlCol="0" anchor="ctr"/>
+          <a:lstStyle/>
+          <a:p>
+            <a:pPr indent="0" marL="0">
+              <a:buNone/>
+            </a:pPr>
+            <a:r>
+              <a:rPr lang="en-US" sz="1700" b="1" dirty="0">
+                <a:solidFill>
+                  <a:srgbClr val="0B1D33"/>
+                </a:solidFill>
+                <a:latin typeface="Calibri" pitchFamily="34" charset="0"/>
+                <a:ea typeface="Calibri" pitchFamily="34" charset="-122"/>
+                <a:cs typeface="Calibri" pitchFamily="34" charset="-120"/>
+              </a:rPr>
+              <a:t>for a guessed real PAN</a:t>
+            </a:r>
+            <a:endParaRPr lang="en-US" sz="1700" dirty="0"/>
+          </a:p>
+        </p:txBody>
+      </p:sp>
+      <p:sp>
+        <p:nvSpPr>
+          <p:cNvPr id="14" name="Text 12"/>
+          <p:cNvSpPr txBox="1"/>
+          <p:nvPr/>
+        </p:nvSpPr>
+        <p:spPr>
+          <a:xfrm>
+            <a:off x="8321040" y="2532888"/>
+            <a:ext cx="3063240" cy="594360"/>
           </a:xfrm>
           <a:prstGeom prst="rect">
             <a:avLst/>
@@ -13328,34 +14642,34 @@
               <a:buNone/>
             </a:pPr>
             <a:r>
-              <a:rPr lang="en-US" sz="1200" dirty="0">
-                <a:solidFill>
-                  <a:srgbClr val="1E3A5F"/>
-                </a:solidFill>
-                <a:latin typeface="Calibri" pitchFamily="34" charset="0"/>
-                <a:ea typeface="Calibri" pitchFamily="34" charset="-122"/>
-                <a:cs typeface="Calibri" pitchFamily="34" charset="-120"/>
-              </a:rPr>
-              <a:t>data-masking market, 2025 → 2030</a:t>
-            </a:r>
-            <a:endParaRPr lang="en-US" sz="1200" dirty="0"/>
-          </a:p>
-        </p:txBody>
-      </p:sp>
-      <p:sp>
-        <p:nvSpPr>
-          <p:cNvPr id="40" name="market 1"/>
+              <a:rPr lang="en-US" sz="1300" dirty="0">
+                <a:solidFill>
+                  <a:srgbClr val="64748B"/>
+                </a:solidFill>
+                <a:latin typeface="Calibri" pitchFamily="34" charset="0"/>
+                <a:ea typeface="Calibri" pitchFamily="34" charset="-122"/>
+                <a:cs typeface="Calibri" pitchFamily="34" charset="-120"/>
+              </a:rPr>
+              <a:t>Admin finds 1 row; Support and Analyst find 0</a:t>
+            </a:r>
+            <a:endParaRPr lang="en-US" sz="1300" dirty="0"/>
+          </a:p>
+        </p:txBody>
+      </p:sp>
+      <p:sp>
+        <p:nvSpPr>
+          <p:cNvPr id="15" name="proof 4"/>
           <p:cNvSpPr/>
           <p:nvPr/>
         </p:nvSpPr>
         <p:spPr>
           <a:xfrm>
-            <a:off x="3246120" y="5212080"/>
-            <a:ext cx="2514600" cy="896112"/>
+            <a:off x="548640" y="3383280"/>
+            <a:ext cx="3520440" cy="1965960"/>
           </a:xfrm>
           <a:prstGeom prst="roundRect">
             <a:avLst>
-              <a:gd name="adj" fmla="val 8163"/>
+              <a:gd name="adj" fmla="val 3721"/>
             </a:avLst>
           </a:prstGeom>
           <a:solidFill>
@@ -13371,14 +14685,14 @@
       </p:sp>
       <p:sp>
         <p:nvSpPr>
-          <p:cNvPr id="41" name="Text 22"/>
-          <p:cNvSpPr txBox="1"/>
-          <p:nvPr/>
-        </p:nvSpPr>
-        <p:spPr>
-          <a:xfrm>
-            <a:off x="3410712" y="5266944"/>
-            <a:ext cx="2240280" cy="411480"/>
+          <p:cNvPr id="16" name="Text 14"/>
+          <p:cNvSpPr txBox="1"/>
+          <p:nvPr/>
+        </p:nvSpPr>
+        <p:spPr>
+          <a:xfrm>
+            <a:off x="822960" y="3547872"/>
+            <a:ext cx="3017520" cy="731520"/>
           </a:xfrm>
           <a:prstGeom prst="rect">
             <a:avLst/>
@@ -13394,7 +14708,7 @@
               <a:buNone/>
             </a:pPr>
             <a:r>
-              <a:rPr lang="en-US" sz="1900" b="1" dirty="0">
+              <a:rPr lang="en-US" sz="4000" b="1" dirty="0">
                 <a:solidFill>
                   <a:srgbClr val="0B1D33"/>
                 </a:solidFill>
@@ -13402,22 +14716,61 @@
                 <a:ea typeface="Cambria" pitchFamily="34" charset="-122"/>
                 <a:cs typeface="Cambria" pitchFamily="34" charset="-120"/>
               </a:rPr>
-              <a:t>May 2027</a:t>
-            </a:r>
-            <a:endParaRPr lang="en-US" sz="1900" dirty="0"/>
-          </a:p>
-        </p:txBody>
-      </p:sp>
-      <p:sp>
-        <p:nvSpPr>
-          <p:cNvPr id="42" name="Text 23"/>
-          <p:cNvSpPr txBox="1"/>
-          <p:nvPr/>
-        </p:nvSpPr>
-        <p:spPr>
-          <a:xfrm>
-            <a:off x="3410712" y="5669280"/>
-            <a:ext cx="2286000" cy="384048"/>
+              <a:t>4 / 4</a:t>
+            </a:r>
+            <a:endParaRPr lang="en-US" sz="4000" dirty="0"/>
+          </a:p>
+        </p:txBody>
+      </p:sp>
+      <p:sp>
+        <p:nvSpPr>
+          <p:cNvPr id="17" name="Text 15"/>
+          <p:cNvSpPr txBox="1"/>
+          <p:nvPr/>
+        </p:nvSpPr>
+        <p:spPr>
+          <a:xfrm>
+            <a:off x="822960" y="4297680"/>
+            <a:ext cx="3063240" cy="365760"/>
+          </a:xfrm>
+          <a:prstGeom prst="rect">
+            <a:avLst/>
+          </a:prstGeom>
+          <a:noFill/>
+          <a:ln/>
+        </p:spPr>
+        <p:txBody>
+          <a:bodyPr wrap="square" lIns="0" tIns="0" rIns="0" bIns="0" rtlCol="0" anchor="ctr"/>
+          <a:lstStyle/>
+          <a:p>
+            <a:pPr indent="0" marL="0">
+              <a:buNone/>
+            </a:pPr>
+            <a:r>
+              <a:rPr lang="en-US" sz="1700" b="1" dirty="0">
+                <a:solidFill>
+                  <a:srgbClr val="0B1D33"/>
+                </a:solidFill>
+                <a:latin typeface="Calibri" pitchFamily="34" charset="0"/>
+                <a:ea typeface="Calibri" pitchFamily="34" charset="-122"/>
+                <a:cs typeface="Calibri" pitchFamily="34" charset="-120"/>
+              </a:rPr>
+              <a:t>data changes refused</a:t>
+            </a:r>
+            <a:endParaRPr lang="en-US" sz="1700" dirty="0"/>
+          </a:p>
+        </p:txBody>
+      </p:sp>
+      <p:sp>
+        <p:nvSpPr>
+          <p:cNvPr id="18" name="Text 16"/>
+          <p:cNvSpPr txBox="1"/>
+          <p:nvPr/>
+        </p:nvSpPr>
+        <p:spPr>
+          <a:xfrm>
+            <a:off x="822960" y="4681728"/>
+            <a:ext cx="3063240" cy="594360"/>
           </a:xfrm>
           <a:prstGeom prst="rect">
             <a:avLst/>
@@ -13433,34 +14786,34 @@
               <a:buNone/>
             </a:pPr>
             <a:r>
-              <a:rPr lang="en-US" sz="1200" dirty="0">
-                <a:solidFill>
-                  <a:srgbClr val="1E3A5F"/>
-                </a:solidFill>
-                <a:latin typeface="Calibri" pitchFamily="34" charset="0"/>
-                <a:ea typeface="Calibri" pitchFamily="34" charset="-122"/>
-                <a:cs typeface="Calibri" pitchFamily="34" charset="-120"/>
-              </a:rPr>
-              <a:t>DPDP rules apply to every bank</a:t>
-            </a:r>
-            <a:endParaRPr lang="en-US" sz="1200" dirty="0"/>
-          </a:p>
-        </p:txBody>
-      </p:sp>
-      <p:sp>
-        <p:nvSpPr>
-          <p:cNvPr id="43" name="market 2"/>
+              <a:rPr lang="en-US" sz="1300" dirty="0">
+                <a:solidFill>
+                  <a:srgbClr val="64748B"/>
+                </a:solidFill>
+                <a:latin typeface="Calibri" pitchFamily="34" charset="0"/>
+                <a:ea typeface="Calibri" pitchFamily="34" charset="-122"/>
+                <a:cs typeface="Calibri" pitchFamily="34" charset="-120"/>
+              </a:rPr>
+              <a:t>UPDATE, DELETE, DROP, INSERT — for every role</a:t>
+            </a:r>
+            <a:endParaRPr lang="en-US" sz="1300" dirty="0"/>
+          </a:p>
+        </p:txBody>
+      </p:sp>
+      <p:sp>
+        <p:nvSpPr>
+          <p:cNvPr id="19" name="proof 5"/>
           <p:cNvSpPr/>
           <p:nvPr/>
         </p:nvSpPr>
         <p:spPr>
           <a:xfrm>
-            <a:off x="5943600" y="5212080"/>
-            <a:ext cx="2514600" cy="896112"/>
+            <a:off x="4297680" y="3383280"/>
+            <a:ext cx="3520440" cy="1965960"/>
           </a:xfrm>
           <a:prstGeom prst="roundRect">
             <a:avLst>
-              <a:gd name="adj" fmla="val 8163"/>
+              <a:gd name="adj" fmla="val 3721"/>
             </a:avLst>
           </a:prstGeom>
           <a:solidFill>
@@ -13476,14 +14829,14 @@
       </p:sp>
       <p:sp>
         <p:nvSpPr>
-          <p:cNvPr id="44" name="Text 25"/>
-          <p:cNvSpPr txBox="1"/>
-          <p:nvPr/>
-        </p:nvSpPr>
-        <p:spPr>
-          <a:xfrm>
-            <a:off x="6108192" y="5266944"/>
-            <a:ext cx="2240280" cy="411480"/>
+          <p:cNvPr id="20" name="Text 18"/>
+          <p:cNvSpPr txBox="1"/>
+          <p:nvPr/>
+        </p:nvSpPr>
+        <p:spPr>
+          <a:xfrm>
+            <a:off x="4572000" y="3547872"/>
+            <a:ext cx="3017520" cy="731520"/>
           </a:xfrm>
           <a:prstGeom prst="rect">
             <a:avLst/>
@@ -13499,7 +14852,7 @@
               <a:buNone/>
             </a:pPr>
             <a:r>
-              <a:rPr lang="en-US" sz="1900" b="1" dirty="0">
+              <a:rPr lang="en-US" sz="4000" b="1" dirty="0">
                 <a:solidFill>
                   <a:srgbClr val="0B1D33"/>
                 </a:solidFill>
@@ -13507,22 +14860,61 @@
                 <a:ea typeface="Cambria" pitchFamily="34" charset="-122"/>
                 <a:cs typeface="Cambria" pitchFamily="34" charset="-120"/>
               </a:rPr>
-              <a:t>Open source</a:t>
-            </a:r>
-            <a:endParaRPr lang="en-US" sz="1900" dirty="0"/>
-          </a:p>
-        </p:txBody>
-      </p:sp>
-      <p:sp>
-        <p:nvSpPr>
-          <p:cNvPr id="45" name="Text 26"/>
-          <p:cNvSpPr txBox="1"/>
-          <p:nvPr/>
-        </p:nvSpPr>
-        <p:spPr>
-          <a:xfrm>
-            <a:off x="6108192" y="5669280"/>
-            <a:ext cx="2286000" cy="384048"/>
+              <a:t>0 / 17</a:t>
+            </a:r>
+            <a:endParaRPr lang="en-US" sz="4000" dirty="0"/>
+          </a:p>
+        </p:txBody>
+      </p:sp>
+      <p:sp>
+        <p:nvSpPr>
+          <p:cNvPr id="21" name="Text 19"/>
+          <p:cNvSpPr txBox="1"/>
+          <p:nvPr/>
+        </p:nvSpPr>
+        <p:spPr>
+          <a:xfrm>
+            <a:off x="4572000" y="4297680"/>
+            <a:ext cx="3063240" cy="365760"/>
+          </a:xfrm>
+          <a:prstGeom prst="rect">
+            <a:avLst/>
+          </a:prstGeom>
+          <a:noFill/>
+          <a:ln/>
+        </p:spPr>
+        <p:txBody>
+          <a:bodyPr wrap="square" lIns="0" tIns="0" rIns="0" bIns="0" rtlCol="0" anchor="ctr"/>
+          <a:lstStyle/>
+          <a:p>
+            <a:pPr indent="0" marL="0">
+              <a:buNone/>
+            </a:pPr>
+            <a:r>
+              <a:rPr lang="en-US" sz="1700" b="1" dirty="0">
+                <a:solidFill>
+                  <a:srgbClr val="0B1D33"/>
+                </a:solidFill>
+                <a:latin typeface="Calibri" pitchFamily="34" charset="0"/>
+                <a:ea typeface="Calibri" pitchFamily="34" charset="-122"/>
+                <a:cs typeface="Calibri" pitchFamily="34" charset="-120"/>
+              </a:rPr>
+              <a:t>known attacks leak</a:t>
+            </a:r>
+            <a:endParaRPr lang="en-US" sz="1700" dirty="0"/>
+          </a:p>
+        </p:txBody>
+      </p:sp>
+      <p:sp>
+        <p:nvSpPr>
+          <p:cNvPr id="22" name="Text 20"/>
+          <p:cNvSpPr txBox="1"/>
+          <p:nvPr/>
+        </p:nvSpPr>
+        <p:spPr>
+          <a:xfrm>
+            <a:off x="4572000" y="4681728"/>
+            <a:ext cx="3063240" cy="594360"/>
           </a:xfrm>
           <a:prstGeom prst="rect">
             <a:avLst/>
@@ -13538,42 +14930,42 @@
               <a:buNone/>
             </a:pPr>
             <a:r>
-              <a:rPr lang="en-US" sz="1200" dirty="0">
-                <a:solidFill>
-                  <a:srgbClr val="1E3A5F"/>
-                </a:solidFill>
-                <a:latin typeface="Calibri" pitchFamily="34" charset="0"/>
-                <a:ea typeface="Calibri" pitchFamily="34" charset="-122"/>
-                <a:cs typeface="Calibri" pitchFamily="34" charset="-120"/>
-              </a:rPr>
-              <a:t>vs platforms at ≈ $100k–370k a year*</a:t>
-            </a:r>
-            <a:endParaRPr lang="en-US" sz="1200" dirty="0"/>
-          </a:p>
-        </p:txBody>
-      </p:sp>
-      <p:sp>
-        <p:nvSpPr>
-          <p:cNvPr id="46" name="buyers"/>
+              <a:rPr lang="en-US" sz="1300" dirty="0">
+                <a:solidFill>
+                  <a:srgbClr val="64748B"/>
+                </a:solidFill>
+                <a:latin typeface="Calibri" pitchFamily="34" charset="0"/>
+                <a:ea typeface="Calibri" pitchFamily="34" charset="-122"/>
+                <a:cs typeface="Calibri" pitchFamily="34" charset="-120"/>
+              </a:rPr>
+              <a:t>simple screen masking leaks 14 of the same 17</a:t>
+            </a:r>
+            <a:endParaRPr lang="en-US" sz="1300" dirty="0"/>
+          </a:p>
+        </p:txBody>
+      </p:sp>
+      <p:sp>
+        <p:nvSpPr>
+          <p:cNvPr id="23" name="proof 6"/>
           <p:cNvSpPr/>
           <p:nvPr/>
         </p:nvSpPr>
         <p:spPr>
           <a:xfrm>
-            <a:off x="8732520" y="4892040"/>
-            <a:ext cx="2880360" cy="1216152"/>
+            <a:off x="8046720" y="3383280"/>
+            <a:ext cx="3520440" cy="1965960"/>
           </a:xfrm>
           <a:prstGeom prst="roundRect">
             <a:avLst>
-              <a:gd name="adj" fmla="val 6015"/>
+              <a:gd name="adj" fmla="val 3721"/>
             </a:avLst>
           </a:prstGeom>
           <a:solidFill>
-            <a:srgbClr val="FDEBD0"/>
+            <a:srgbClr val="F1F5F9"/>
           </a:solidFill>
           <a:ln w="9525">
             <a:solidFill>
-              <a:srgbClr val="FDEBD0"/>
+              <a:srgbClr val="F1F5F9"/>
             </a:solidFill>
             <a:prstDash val="solid"/>
           </a:ln>
@@ -13581,14 +14973,14 @@
       </p:sp>
       <p:sp>
         <p:nvSpPr>
-          <p:cNvPr id="47" name="Text 28"/>
-          <p:cNvSpPr txBox="1"/>
-          <p:nvPr/>
-        </p:nvSpPr>
-        <p:spPr>
-          <a:xfrm>
-            <a:off x="8887968" y="4956048"/>
-            <a:ext cx="2606040" cy="274320"/>
+          <p:cNvPr id="24" name="Text 22"/>
+          <p:cNvSpPr txBox="1"/>
+          <p:nvPr/>
+        </p:nvSpPr>
+        <p:spPr>
+          <a:xfrm>
+            <a:off x="8321040" y="3547872"/>
+            <a:ext cx="3017520" cy="731520"/>
           </a:xfrm>
           <a:prstGeom prst="rect">
             <a:avLst/>
@@ -13604,95 +14996,148 @@
               <a:buNone/>
             </a:pPr>
             <a:r>
+              <a:rPr lang="en-US" sz="4000" b="1" dirty="0">
+                <a:solidFill>
+                  <a:srgbClr val="0B1D33"/>
+                </a:solidFill>
+                <a:latin typeface="Cambria" pitchFamily="34" charset="0"/>
+                <a:ea typeface="Cambria" pitchFamily="34" charset="-122"/>
+                <a:cs typeface="Cambria" pitchFamily="34" charset="-120"/>
+              </a:rPr>
+              <a:t>4–8 ms</a:t>
+            </a:r>
+            <a:endParaRPr lang="en-US" sz="4000" dirty="0"/>
+          </a:p>
+        </p:txBody>
+      </p:sp>
+      <p:sp>
+        <p:nvSpPr>
+          <p:cNvPr id="25" name="Text 23"/>
+          <p:cNvSpPr txBox="1"/>
+          <p:nvPr/>
+        </p:nvSpPr>
+        <p:spPr>
+          <a:xfrm>
+            <a:off x="8321040" y="4297680"/>
+            <a:ext cx="3063240" cy="365760"/>
+          </a:xfrm>
+          <a:prstGeom prst="rect">
+            <a:avLst/>
+          </a:prstGeom>
+          <a:noFill/>
+          <a:ln/>
+        </p:spPr>
+        <p:txBody>
+          <a:bodyPr wrap="square" lIns="0" tIns="0" rIns="0" bIns="0" rtlCol="0" anchor="ctr"/>
+          <a:lstStyle/>
+          <a:p>
+            <a:pPr indent="0" marL="0">
+              <a:buNone/>
+            </a:pPr>
+            <a:r>
+              <a:rPr lang="en-US" sz="1700" b="1" dirty="0">
+                <a:solidFill>
+                  <a:srgbClr val="0B1D33"/>
+                </a:solidFill>
+                <a:latin typeface="Calibri" pitchFamily="34" charset="0"/>
+                <a:ea typeface="Calibri" pitchFamily="34" charset="-122"/>
+                <a:cs typeface="Calibri" pitchFamily="34" charset="-120"/>
+              </a:rPr>
+              <a:t>extra time per query</a:t>
+            </a:r>
+            <a:endParaRPr lang="en-US" sz="1700" dirty="0"/>
+          </a:p>
+        </p:txBody>
+      </p:sp>
+      <p:sp>
+        <p:nvSpPr>
+          <p:cNvPr id="26" name="Text 24"/>
+          <p:cNvSpPr txBox="1"/>
+          <p:nvPr/>
+        </p:nvSpPr>
+        <p:spPr>
+          <a:xfrm>
+            <a:off x="8321040" y="4681728"/>
+            <a:ext cx="3063240" cy="594360"/>
+          </a:xfrm>
+          <a:prstGeom prst="rect">
+            <a:avLst/>
+          </a:prstGeom>
+          <a:noFill/>
+          <a:ln/>
+        </p:spPr>
+        <p:txBody>
+          <a:bodyPr wrap="square" lIns="0" tIns="0" rIns="0" bIns="0" rtlCol="0" anchor="t"/>
+          <a:lstStyle/>
+          <a:p>
+            <a:pPr indent="0" marL="0">
+              <a:buNone/>
+            </a:pPr>
+            <a:r>
+              <a:rPr lang="en-US" sz="1300" dirty="0">
+                <a:solidFill>
+                  <a:srgbClr val="64748B"/>
+                </a:solidFill>
+                <a:latin typeface="Calibri" pitchFamily="34" charset="0"/>
+                <a:ea typeface="Calibri" pitchFamily="34" charset="-122"/>
+                <a:cs typeface="Calibri" pitchFamily="34" charset="-120"/>
+              </a:rPr>
+              <a:t>from 300 to 100,000 rows (MySQL 6–22 ms)</a:t>
+            </a:r>
+            <a:endParaRPr lang="en-US" sz="1300" dirty="0"/>
+          </a:p>
+        </p:txBody>
+      </p:sp>
+      <p:sp>
+        <p:nvSpPr>
+          <p:cNvPr id="27" name="Text 25"/>
+          <p:cNvSpPr txBox="1"/>
+          <p:nvPr/>
+        </p:nvSpPr>
+        <p:spPr>
+          <a:xfrm>
+            <a:off x="548640" y="5623560"/>
+            <a:ext cx="11064240" cy="548640"/>
+          </a:xfrm>
+          <a:prstGeom prst="rect">
+            <a:avLst/>
+          </a:prstGeom>
+          <a:noFill/>
+          <a:ln/>
+        </p:spPr>
+        <p:txBody>
+          <a:bodyPr wrap="square" lIns="0" tIns="0" rIns="0" bIns="0" rtlCol="0" anchor="ctr"/>
+          <a:lstStyle/>
+          <a:p>
+            <a:pPr indent="0" marL="0">
+              <a:buNone/>
+            </a:pPr>
+            <a:r>
               <a:rPr lang="en-US" sz="1400" b="1" dirty="0">
                 <a:solidFill>
-                  <a:srgbClr val="D97706"/>
-                </a:solidFill>
-                <a:latin typeface="Calibri" pitchFamily="34" charset="0"/>
-                <a:ea typeface="Calibri" pitchFamily="34" charset="-122"/>
-                <a:cs typeface="Calibri" pitchFamily="34" charset="-120"/>
-              </a:rPr>
-              <a:t>Who buys first</a:t>
+                  <a:srgbClr val="0B1D33"/>
+                </a:solidFill>
+                <a:latin typeface="Calibri" pitchFamily="34" charset="0"/>
+                <a:ea typeface="Calibri" pitchFamily="34" charset="-122"/>
+                <a:cs typeface="Calibri" pitchFamily="34" charset="-120"/>
+              </a:rPr>
+              <a:t>Same results on SQLite, PostgreSQL 16 and MySQL 8.4</a:t>
+            </a:r>
+            <a:pPr indent="0" marL="0">
+              <a:buNone/>
+            </a:pPr>
+            <a:r>
+              <a:rPr lang="en-US" sz="1400" dirty="0">
+                <a:solidFill>
+                  <a:srgbClr val="1E3A5F"/>
+                </a:solidFill>
+                <a:latin typeface="Calibri" pitchFamily="34" charset="0"/>
+                <a:ea typeface="Calibri" pitchFamily="34" charset="-122"/>
+                <a:cs typeface="Calibri" pitchFamily="34" charset="-120"/>
+              </a:rPr>
+              <a:t>  ·  9 organiser users  ·  129,260 rows checked identical across all copies  ·  1,235 automated tests on every change</a:t>
             </a:r>
             <a:endParaRPr lang="en-US" sz="1400" dirty="0"/>
-          </a:p>
-        </p:txBody>
-      </p:sp>
-      <p:sp>
-        <p:nvSpPr>
-          <p:cNvPr id="48" name="Text 29"/>
-          <p:cNvSpPr txBox="1"/>
-          <p:nvPr/>
-        </p:nvSpPr>
-        <p:spPr>
-          <a:xfrm>
-            <a:off x="8887968" y="5239512"/>
-            <a:ext cx="2606040" cy="841248"/>
-          </a:xfrm>
-          <a:prstGeom prst="rect">
-            <a:avLst/>
-          </a:prstGeom>
-          <a:noFill/>
-          <a:ln/>
-        </p:spPr>
-        <p:txBody>
-          <a:bodyPr wrap="square" lIns="0" tIns="0" rIns="0" bIns="0" rtlCol="0" anchor="t"/>
-          <a:lstStyle/>
-          <a:p>
-            <a:pPr indent="0" marL="0">
-              <a:buNone/>
-            </a:pPr>
-            <a:r>
-              <a:rPr lang="en-US" sz="1200" dirty="0">
-                <a:solidFill>
-                  <a:srgbClr val="0B1D33"/>
-                </a:solidFill>
-                <a:latin typeface="Calibri" pitchFamily="34" charset="0"/>
-                <a:ea typeface="Calibri" pitchFamily="34" charset="-122"/>
-                <a:cs typeface="Calibri" pitchFamily="34" charset="-120"/>
-              </a:rPr>
-              <a:t>NBFCs, co-op and small finance banks, fintechs, hospitals: DPDP applies, no budget for big platforms.</a:t>
-            </a:r>
-            <a:endParaRPr lang="en-US" sz="1200" dirty="0"/>
-          </a:p>
-        </p:txBody>
-      </p:sp>
-      <p:sp>
-        <p:nvSpPr>
-          <p:cNvPr id="49" name="Text 30"/>
-          <p:cNvSpPr txBox="1"/>
-          <p:nvPr/>
-        </p:nvSpPr>
-        <p:spPr>
-          <a:xfrm>
-            <a:off x="548640" y="6181344"/>
-            <a:ext cx="11064240" cy="237744"/>
-          </a:xfrm>
-          <a:prstGeom prst="rect">
-            <a:avLst/>
-          </a:prstGeom>
-          <a:noFill/>
-          <a:ln/>
-        </p:spPr>
-        <p:txBody>
-          <a:bodyPr wrap="square" lIns="0" tIns="0" rIns="0" bIns="0" rtlCol="0" anchor="ctr"/>
-          <a:lstStyle/>
-          <a:p>
-            <a:pPr indent="0" marL="0">
-              <a:buNone/>
-            </a:pPr>
-            <a:r>
-              <a:rPr lang="en-US" sz="900" i="1" dirty="0">
-                <a:solidFill>
-                  <a:srgbClr val="64748B"/>
-                </a:solidFill>
-                <a:latin typeface="Calibri" pitchFamily="34" charset="0"/>
-                <a:ea typeface="Calibri" pitchFamily="34" charset="-122"/>
-                <a:cs typeface="Calibri" pitchFamily="34" charset="-120"/>
-              </a:rPr>
-              <a:t>* review-site estimates for Immuta / Delphix; vendors don't publish prices. Market: Knowledge Sourcing Intelligence. Other databases' built-in masking (SQL Server DDM) masks results only; Microsoft documents it doesn't stop inference.</a:t>
-            </a:r>
-            <a:endParaRPr lang="en-US" sz="900" dirty="0"/>
           </a:p>
         </p:txBody>
       </p:sp>

--- a/docs/MaskGuard_Final_Deck.pptx
+++ b/docs/MaskGuard_Final_Deck.pptx
@@ -16,9 +16,10 @@
     <p:sldId id="264" r:id="rId10"/>
     <p:sldId id="265" r:id="rId11"/>
     <p:sldId id="266" r:id="rId12"/>
+    <p:sldId id="267" r:id="rId13"/>
   </p:sldIdLst>
   <p:notesMasterIdLst>
-    <p:notesMasterId r:id="rId13"/>
+    <p:notesMasterId r:id="rId14"/>
   </p:notesMasterIdLst>
   <p:sldSz cx="12192000" cy="6858000"/>
   <p:notesSz cx="6858000" cy="12192000"/>
@@ -117,51 +118,52 @@
   <p:extLst>
     <p:ext uri="{521415D9-36F7-43E2-AB2F-B90AF26B5E84}">
       <p14:sectionLst xmlns:p14="http://schemas.microsoft.com/office/powerpoint/2010/main">
-        <p14:section name="Opening" id="{030a500b-70ff-7e6b-0776-3afb48806a4e}">
+        <p14:section name="Opening" id="{db0d81ff-e477-5100-ff5e-11baf758107e}">
           <p14:sldIdLst>
             <p14:sldId id="256"/>
           </p14:sldIdLst>
         </p14:section>
-        <p14:section name="Problem" id="{68f4963f-480e-6a8c-e047-02c35e59195b}">
+        <p14:section name="Problem" id="{68bf7980-b5b0-2dfd-af2e-adc3a86f85fd}">
           <p14:sldIdLst>
             <p14:sldId id="257"/>
           </p14:sldIdLst>
         </p14:section>
-        <p14:section name="Solution" id="{8a541209-7930-8434-96e1-d3afc8b12c3c}">
+        <p14:section name="Solution" id="{d6370bcf-110c-9485-9132-a57e61df0d98}">
           <p14:sldIdLst>
             <p14:sldId id="258"/>
           </p14:sldIdLst>
         </p14:section>
-        <p14:section name="Architecture" id="{2d0a4e69-622e-717a-9e11-db31483fafba}">
+        <p14:section name="Architecture" id="{21b3b608-98a5-fb9e-976e-ed1866a3ca21}">
           <p14:sldIdLst>
             <p14:sldId id="259"/>
           </p14:sldIdLst>
         </p14:section>
-        <p14:section name="Role of AI" id="{005a0e1c-7889-2738-5bb9-ee64eb9db89e}">
+        <p14:section name="Role of AI" id="{e7bbeedd-c636-bf28-8170-587acb00ee32}">
           <p14:sldIdLst>
             <p14:sldId id="260"/>
             <p14:sldId id="261"/>
+            <p14:sldId id="262"/>
           </p14:sldIdLst>
         </p14:section>
-        <p14:section name="Demo" id="{0b5701c3-4347-d3f0-e5d4-a65b39924727}">
+        <p14:section name="Demo" id="{d3d35cf8-5f0a-25c0-d89a-ce2c827481f2}">
           <p14:sldIdLst>
-            <p14:sldId id="262"/>
             <p14:sldId id="263"/>
-          </p14:sldIdLst>
-        </p14:section>
-        <p14:section name="Proof" id="{7f175d57-9217-7195-b4cc-03e82e8ec5fe}">
-          <p14:sldIdLst>
             <p14:sldId id="264"/>
           </p14:sldIdLst>
         </p14:section>
-        <p14:section name="Differentiators" id="{6b357692-308f-4279-9565-1c9874bc513c}">
+        <p14:section name="Proof" id="{094ea535-9a5c-116a-4a8d-7d00db825c95}">
           <p14:sldIdLst>
             <p14:sldId id="265"/>
           </p14:sldIdLst>
         </p14:section>
-        <p14:section name="Close" id="{507da476-7332-8028-9571-ae4690552630}">
+        <p14:section name="Differentiators" id="{d83a569d-10ee-9058-b534-2c401c3b1278}">
           <p14:sldIdLst>
             <p14:sldId id="266"/>
+          </p14:sldIdLst>
+        </p14:section>
+        <p14:section name="Close" id="{9f75c064-b934-4e61-e99d-65f80f44119b}">
+          <p14:sldIdLst>
+            <p14:sldId id="267"/>
           </p14:sldIdLst>
         </p14:section>
       </p14:sectionLst>
@@ -171,6 +173,344 @@
     </p:ext>
   </p:extLst>
 </p:presentation>
+</file>
+
+<file path=ppt/charts/chart1.xml><?xml version="1.0" encoding="utf-8"?>
+<c:chartSpace xmlns:c="http://schemas.openxmlformats.org/drawingml/2006/chart" xmlns:a="http://schemas.openxmlformats.org/drawingml/2006/main" xmlns:r="http://schemas.openxmlformats.org/officeDocument/2006/relationships">
+  <c:date1904 val="0"/>
+  <c:roundedCorners val="1"/>
+  <c:chart>
+    <c:title>
+      <c:tx>
+        <c:rich>
+          <a:bodyPr/>
+          <a:lstStyle/>
+          <a:p>
+            <a:pPr>
+              <a:defRPr sz="1300" b="0" i="0" u="none" strike="noStrike">
+                <a:solidFill>
+                  <a:srgbClr val="0B1D33"/>
+                </a:solidFill>
+                <a:latin typeface="+mn-lt"/>
+              </a:defRPr>
+            </a:pPr>
+            <a:r>
+              <a:rPr sz="1300" b="0" i="0" u="none" strike="noStrike">
+                <a:solidFill>
+                  <a:srgbClr val="0B1D33"/>
+                </a:solidFill>
+                <a:latin typeface="+mn-lt"/>
+              </a:rPr>
+              <a:t>F1 score (1.0 = every column right)</a:t>
+            </a:r>
+          </a:p>
+        </c:rich>
+      </c:tx>
+      <c:layout/>
+      <c:overlay val="0"/>
+    </c:title>
+    <c:autoTitleDeleted val="0"/>
+    <c:plotArea>
+      <c:layout/>
+      <c:barChart>
+        <c:barDir val="bar"/>
+        <c:grouping val="clustered"/>
+        <c:varyColors val="0"/>
+        <c:ser>
+          <c:idx val="0"/>
+          <c:order val="0"/>
+          <c:tx>
+            <c:strRef>
+              <c:f>Sheet1!$B$1</c:f>
+              <c:strCache>
+                <c:ptCount val="1"/>
+                <c:pt idx="0">
+                  <c:v>F1 score</c:v>
+                </c:pt>
+              </c:strCache>
+            </c:strRef>
+          </c:tx>
+          <c:spPr>
+            <a:solidFill>
+              <a:srgbClr val="64748B"/>
+            </a:solidFill>
+            <a:effectLst/>
+          </c:spPr>
+          <c:invertIfNegative val="0"/>
+          <c:dLbls>
+            <c:numFmt formatCode="0.000" sourceLinked="0"/>
+            <c:txPr>
+              <a:bodyPr/>
+              <a:lstStyle/>
+              <a:p>
+                <a:pPr>
+                  <a:defRPr b="0" i="0" strike="noStrike" sz="1300" u="none">
+                    <a:solidFill>
+                      <a:srgbClr val="0B1D33"/>
+                    </a:solidFill>
+                    <a:latin typeface="+mn-lt"/>
+                  </a:defRPr>
+                </a:pPr>
+              </a:p>
+            </c:txPr>
+            <c:showLegendKey val="0"/>
+            <c:showVal val="1"/>
+            <c:showCatName val="0"/>
+            <c:showSerName val="0"/>
+            <c:showPercent val="0"/>
+            <c:showBubbleSize val="0"/>
+            <c:showLeaderLines val="0"/>
+          </c:dLbls>
+          <c:dPt>
+            <c:idx val="0"/>
+            <c:invertIfNegative val="0"/>
+            <c:bubble3D val="0"/>
+            <c:spPr>
+              <a:solidFill>
+                <a:srgbClr val="64748B"/>
+              </a:solidFill>
+              <a:effectLst/>
+            </c:spPr>
+          </c:dPt>
+          <c:dPt>
+            <c:idx val="1"/>
+            <c:invertIfNegative val="0"/>
+            <c:bubble3D val="0"/>
+            <c:spPr>
+              <a:solidFill>
+                <a:srgbClr val="0B1D33"/>
+              </a:solidFill>
+              <a:effectLst/>
+            </c:spPr>
+          </c:dPt>
+          <c:dPt>
+            <c:idx val="2"/>
+            <c:invertIfNegative val="0"/>
+            <c:bubble3D val="0"/>
+            <c:spPr>
+              <a:solidFill>
+                <a:srgbClr val="0B1D33"/>
+              </a:solidFill>
+              <a:effectLst/>
+            </c:spPr>
+          </c:dPt>
+          <c:dPt>
+            <c:idx val="3"/>
+            <c:invertIfNegative val="0"/>
+            <c:bubble3D val="0"/>
+            <c:spPr>
+              <a:solidFill>
+                <a:srgbClr val="D97706"/>
+              </a:solidFill>
+              <a:effectLst/>
+            </c:spPr>
+          </c:dPt>
+          <c:dPt>
+            <c:idx val="4"/>
+            <c:invertIfNegative val="0"/>
+            <c:bubble3D val="0"/>
+            <c:spPr>
+              <a:solidFill>
+                <a:srgbClr val="D97706"/>
+              </a:solidFill>
+              <a:effectLst/>
+            </c:spPr>
+          </c:dPt>
+          <c:cat>
+            <c:multiLvlStrRef>
+              <c:f>Sheet1!$A$2:$A$6</c:f>
+              <c:multiLvlStrCache>
+                <c:ptCount val="5"/>
+                <c:lvl>
+                  <c:pt idx="0">
+                    <c:v>Benchmark · rules alone (regex + checksums)</c:v>
+                  </c:pt>
+                  <c:pt idx="1">
+                    <c:v>Benchmark · MaskGuard, 5 values a column</c:v>
+                  </c:pt>
+                  <c:pt idx="2">
+                    <c:v>Benchmark · MaskGuard, 20 values a column</c:v>
+                  </c:pt>
+                  <c:pt idx="3">
+                    <c:v>Saffron Bank · first contact, never seen</c:v>
+                  </c:pt>
+                  <c:pt idx="4">
+                    <c:v>Saffron Bank · after general fixes</c:v>
+                  </c:pt>
+                </c:lvl>
+              </c:multiLvlStrCache>
+            </c:multiLvlStrRef>
+          </c:cat>
+          <c:val>
+            <c:numRef>
+              <c:f>Sheet1!$B$2:$B$6</c:f>
+              <c:numCache>
+                <c:formatCode>General</c:formatCode>
+                <c:ptCount val="5"/>
+                <c:pt idx="0">
+                  <c:v>0.844</c:v>
+                </c:pt>
+                <c:pt idx="1">
+                  <c:v>0.968</c:v>
+                </c:pt>
+                <c:pt idx="2">
+                  <c:v>0.999</c:v>
+                </c:pt>
+                <c:pt idx="3">
+                  <c:v>0.677</c:v>
+                </c:pt>
+                <c:pt idx="4">
+                  <c:v>0.897</c:v>
+                </c:pt>
+              </c:numCache>
+            </c:numRef>
+          </c:val>
+        </c:ser>
+        <c:dLbls>
+          <c:numFmt formatCode="0.000" sourceLinked="0"/>
+          <c:txPr>
+            <a:bodyPr/>
+            <a:lstStyle/>
+            <a:p>
+              <a:pPr>
+                <a:defRPr b="0" i="0" strike="noStrike" sz="1300" u="none">
+                  <a:solidFill>
+                    <a:srgbClr val="0B1D33"/>
+                  </a:solidFill>
+                  <a:latin typeface="+mn-lt"/>
+                </a:defRPr>
+              </a:pPr>
+            </a:p>
+          </c:txPr>
+          <c:showLegendKey val="0"/>
+          <c:showVal val="1"/>
+          <c:showCatName val="0"/>
+          <c:showSerName val="0"/>
+          <c:showPercent val="0"/>
+          <c:showBubbleSize val="0"/>
+          <c:showLeaderLines val="0"/>
+        </c:dLbls>
+        <c:gapWidth val="150"/>
+        <c:overlap val="0"/>
+        <c:axId val="2094734554"/>
+        <c:axId val="2094734552"/>
+        <c:axId val="2094734556"/>
+      </c:barChart>
+      <c:catAx>
+        <c:axId val="2094734554"/>
+        <c:scaling>
+          <c:orientation val="maxMin"/>
+        </c:scaling>
+        <c:delete val="0"/>
+        <c:axPos val="l"/>
+        <c:numFmt formatCode="General" sourceLinked="1"/>
+        <c:majorTickMark val="out"/>
+        <c:minorTickMark val="none"/>
+        <c:tickLblPos val="nextTo"/>
+        <c:spPr>
+          <a:ln w="12700" cap="flat">
+            <a:solidFill>
+              <a:srgbClr val="888888"/>
+            </a:solidFill>
+            <a:prstDash val="solid"/>
+            <a:round/>
+          </a:ln>
+        </c:spPr>
+        <c:txPr>
+          <a:bodyPr/>
+          <a:lstStyle/>
+          <a:p>
+            <a:pPr>
+              <a:defRPr sz="1150" b="0" i="0" u="none" strike="noStrike">
+                <a:solidFill>
+                  <a:srgbClr val="1E3A5F"/>
+                </a:solidFill>
+                <a:latin typeface="+mn-lt"/>
+              </a:defRPr>
+            </a:pPr>
+            <a:endParaRPr lang="en-US"/>
+          </a:p>
+        </c:txPr>
+        <c:crossAx val="2094734552"/>
+        <c:crosses val="autoZero"/>
+        <c:auto val="1"/>
+        <c:lblAlgn val="ctr"/>
+        <c:noMultiLvlLbl val="1"/>
+      </c:catAx>
+      <c:valAx>
+        <c:axId val="2094734552"/>
+        <c:scaling>
+          <c:orientation val="minMax"/>
+          <c:max val="1"/>
+          <c:min val="0"/>
+        </c:scaling>
+        <c:delete val="0"/>
+        <c:axPos val="b"/>
+        <c:majorGridlines>
+          <c:spPr>
+            <a:ln w="6350" cap="flat">
+              <a:solidFill>
+                <a:srgbClr val="E2E8F0"/>
+              </a:solidFill>
+              <a:prstDash val="solid"/>
+              <a:round/>
+            </a:ln>
+          </c:spPr>
+        </c:majorGridlines>
+        <c:numFmt formatCode="0.0" sourceLinked="0"/>
+        <c:majorTickMark val="out"/>
+        <c:minorTickMark val="none"/>
+        <c:tickLblPos val="low"/>
+        <c:spPr>
+          <a:ln w="12700" cap="flat">
+            <a:solidFill>
+              <a:srgbClr val="888888"/>
+            </a:solidFill>
+            <a:prstDash val="solid"/>
+            <a:round/>
+          </a:ln>
+        </c:spPr>
+        <c:txPr>
+          <a:bodyPr/>
+          <a:lstStyle/>
+          <a:p>
+            <a:pPr>
+              <a:defRPr sz="1000" b="0" i="0" u="none" strike="noStrike">
+                <a:solidFill>
+                  <a:srgbClr val="64748B"/>
+                </a:solidFill>
+                <a:latin typeface="+mn-lt"/>
+              </a:defRPr>
+            </a:pPr>
+            <a:endParaRPr lang="en-US"/>
+          </a:p>
+        </c:txPr>
+        <c:crossAx val="2094734554"/>
+        <c:crosses val="autoZero"/>
+        <c:crossBetween val="between"/>
+      </c:valAx>
+      <c:spPr>
+        <a:noFill/>
+        <a:ln>
+          <a:noFill/>
+        </a:ln>
+        <a:effectLst/>
+      </c:spPr>
+    </c:plotArea>
+    <c:plotVisOnly val="1"/>
+    <c:dispBlanksAs val="span"/>
+  </c:chart>
+  <c:spPr>
+    <a:noFill/>
+    <a:ln>
+      <a:noFill/>
+    </a:ln>
+    <a:effectLst/>
+  </c:spPr>
+  <c:externalData r:id="rId1">
+    <c:autoUpdate val="0"/>
+  </c:externalData>
+</c:chartSpace>
 </file>
 
 <file path=ppt/notesMasters/notesMaster1.xml><?xml version="1.0" encoding="utf-8"?>
@@ -656,7 +996,7 @@
           <a:p>
             <a:r>
               <a:rPr lang="en-US" dirty="0"/>
-              <a:t>[11:00–12:00] Many teams in this problem use encryption or quantum-safe ideas. Be respectful: that work protects data from outsiders and it matters. But it answers a different question. Once the bank's own app decrypts the data, every employee sees everything. MaskGuard answers 'what should this employee see' — and it works alongside any encryption. Walk the grid by rows: only MaskGuard finds the data by itself, gives each role its own view, stops guess-the-value searches, and never copies the data. Then the market in one breath: $1.47B → $2.6B by 2030, DPDP from May 2027, and our first buyers are the banks that can't pay six figures.</a:t>
+              <a:t>[9:30–11:00 · Parameter 4: completeness — functional, not a prototype] Read the two dark tiles first: 35 of 35 found, 0 leaked. Then the four light ones in one breath. Be open about the first try: 22 of 35 — nothing leaked, unfound columns stay hidden by default — and we fixed general causes (banking abbreviations, IDs that fail their checksums), then checked the external benchmark did not get worse. Full write-up: docs/SAFFRON_VALIDATION.md.</a:t>
             </a:r>
             <a:endParaRPr lang="en-US" dirty="0"/>
           </a:p>
@@ -744,7 +1084,7 @@
           <a:p>
             <a:r>
               <a:rPr lang="en-US" dirty="0"/>
-              <a:t>[12:00–12:30] Close: what works today, the limits we state ourselves, the next 90 days. Last line, slowly: 'Finds it. Hides it. Proves it.' Then: 'Happy to take questions.'</a:t>
+              <a:t>[11:00–12:00] Many teams in this problem use encryption or quantum-safe ideas. Be respectful: that work protects data from outsiders and it matters. But it answers a different question. Once the bank's own app decrypts the data, every employee sees everything. MaskGuard answers 'what should this employee see' — and it works alongside any encryption. Walk the grid by rows: only MaskGuard finds the data by itself, gives each role its own view, stops guess-the-value searches, and never copies the data. Then the market in one breath: $1.47B → $2.6B by 2030, DPDP from May 2027, and our first buyers are the banks that can't pay six figures.</a:t>
             </a:r>
             <a:endParaRPr lang="en-US" dirty="0"/>
           </a:p>
@@ -768,6 +1108,94 @@
             <a:fld id="{F7021451-1387-4CA6-816F-3879F97B5CBC}" type="slidenum">
               <a:rPr lang="en-US"/>
               <a:t>11</a:t>
+            </a:fld>
+            <a:endParaRPr lang="en-US"/>
+          </a:p>
+        </p:txBody>
+      </p:sp>
+    </p:spTree>
+    <p:extLst>
+      <p:ext uri="{BB962C8B-B14F-4D97-AF65-F5344CB8AC3E}">
+        <p14:creationId xmlns:p14="http://schemas.microsoft.com/office/powerpoint/2010/main" val="1024086991"/>
+      </p:ext>
+    </p:extLst>
+  </p:cSld>
+  <p:clrMapOvr>
+    <a:masterClrMapping/>
+  </p:clrMapOvr>
+</p:notes>
+</file>
+
+<file path=ppt/notesSlides/notesSlide12.xml><?xml version="1.0" encoding="utf-8"?>
+<p:notes xmlns:a="http://schemas.openxmlformats.org/drawingml/2006/main" xmlns:r="http://schemas.openxmlformats.org/officeDocument/2006/relationships" xmlns:p="http://schemas.openxmlformats.org/presentationml/2006/main">
+  <p:cSld>
+    <p:spTree>
+      <p:nvGrpSpPr>
+        <p:cNvPr id="1" name=""/>
+        <p:cNvGrpSpPr/>
+        <p:nvPr/>
+      </p:nvGrpSpPr>
+      <p:grpSpPr>
+        <a:xfrm>
+          <a:off x="0" y="0"/>
+          <a:ext cx="0" cy="0"/>
+          <a:chOff x="0" y="0"/>
+          <a:chExt cx="0" cy="0"/>
+        </a:xfrm>
+      </p:grpSpPr>
+      <p:sp>
+        <p:nvSpPr>
+          <p:cNvPr id="2" name="Slide Image Placeholder 1"/>
+          <p:cNvSpPr>
+            <a:spLocks noGrp="1" noRot="1" noChangeAspect="1"/>
+          </p:cNvSpPr>
+          <p:nvPr>
+            <p:ph type="sldImg"/>
+          </p:nvPr>
+        </p:nvSpPr>
+        <p:spPr/>
+      </p:sp>
+      <p:sp>
+        <p:nvSpPr>
+          <p:cNvPr id="3" name="Notes Placeholder 2"/>
+          <p:cNvSpPr>
+            <a:spLocks noGrp="1"/>
+          </p:cNvSpPr>
+          <p:nvPr>
+            <p:ph type="body" idx="1"/>
+          </p:nvPr>
+        </p:nvSpPr>
+        <p:spPr/>
+        <p:txBody>
+          <a:bodyPr/>
+          <a:lstStyle/>
+          <a:p>
+            <a:r>
+              <a:rPr lang="en-US" dirty="0"/>
+              <a:t>[12:00–12:30] Close: what works today, the limits we state ourselves, the next 90 days. Last line, slowly: 'Finds it. Hides it. Proves it.' Then: 'Happy to take questions.'</a:t>
+            </a:r>
+            <a:endParaRPr lang="en-US" dirty="0"/>
+          </a:p>
+        </p:txBody>
+      </p:sp>
+      <p:sp>
+        <p:nvSpPr>
+          <p:cNvPr id="4" name="Slide Number Placeholder 3"/>
+          <p:cNvSpPr>
+            <a:spLocks noGrp="1"/>
+          </p:cNvSpPr>
+          <p:nvPr>
+            <p:ph type="sldNum" sz="quarter" idx="10"/>
+          </p:nvPr>
+        </p:nvSpPr>
+        <p:spPr/>
+        <p:txBody>
+          <a:bodyPr/>
+          <a:lstStyle/>
+          <a:p>
+            <a:fld id="{F7021451-1387-4CA6-816F-3879F97B5CBC}" type="slidenum">
+              <a:rPr lang="en-US"/>
+              <a:t>12</a:t>
             </a:fld>
             <a:endParaRPr lang="en-US"/>
           </a:p>
@@ -1096,7 +1524,7 @@
           <a:p>
             <a:r>
               <a:rPr lang="en-US" dirty="0"/>
-              <a:t>[4:30–6:00 · Parameter 3: role of AI — deliberate, not decorative] 'We used AI exactly where rules fail.' Point at col_7 in the screenshot: the column name says nothing, the AI read the values and said PAN. Rules first (checksums are certain), then the AI model, then a person approves. Evidence: 0.999 vs 0.844 on the external bharat-pii-bench benchmark, unseen data, misleading column names. And deliberately NOT AI: the decision of who sees what is a fixed policy — explainable and testable. We also used AI coding assistants to build faster, with every change gated by 1,235 automated tests.</a:t>
+              <a:t>[4:30–6:00 · Parameter 3: role of AI — deliberate, not decorative] 'We used AI exactly where rules fail.' Point at col_7 in the screenshot: the column name says nothing, the AI read the values and said PAN. Rules first (checksums are certain), then the AI model, then a person approves. Evidence: rules alone score 0.84 on the external benchmark's misleading-name test; with the AI model, 0.97 even with only 5 sample values. The honest real-data numbers are on the next slide. And deliberately NOT AI: the decision of who sees what is a fixed policy — explainable and testable. We also used AI coding assistants to build faster, with every change gated by 1,235 automated tests.</a:t>
             </a:r>
             <a:endParaRPr lang="en-US" dirty="0"/>
           </a:p>
@@ -1184,7 +1612,7 @@
           <a:p>
             <a:r>
               <a:rPr lang="en-US" dirty="0"/>
-              <a:t>[~1 min, right after Role of AI] Say it calmly, never mockingly: 'We looked at LLMs and quantum approaches and chose classic machine learning on purpose. A bank's customer data should never leave the bank to be classified, and the same column must always get the same answer. Our model is a 0.45 MB file, runs on a normal CPU in about 3 milliseconds a column, and scores 0.999 on an external benchmark. On quantum: we're already quantum-safe where it matters — our masking uses only symmetric cryptography, HMAC-SHA-256 and SHA-256, which quantum computers don't break the way they break RSA. And quantum machine learning hasn't beaten classical models on table data in recent benchmarks. We built what works in a bank today.' If asked about HTTPS: the TLS layer is the server's library; it can use post-quantum key exchange as a deployment setting.</a:t>
+              <a:t>[~1 min · Parameter 3/4: accuracy and baselines] Pre-empt the 'too good to be true' reaction. 'The 0.999 you may have seen is on a public synthetic benchmark — clean data, so treat it as the ceiling. Here is the harder truth. On your Saffron Bank data, the first time we ran it, it found 22 of 35 sensitive columns — F1 0.68. The misses had four causes: money columns with short names like bal and amt, account numbers that looked like plain ids, PANs with 0000 digits that fail the official check, and two address columns. Nothing leaked, because anything the AI isn't sure about stays hidden until a person approves it. We fixed those general causes — not this dataset — and re-ran the benchmark to make sure nothing got worse. Now it finds 35 of 35, with 8 false alarms on the bank's own branch details: F1 0.90.' If asked 'isn't 0.90 tuned to our data?': 'Partly, yes — the fixes were made after seeing it, which is why we show the first-contact number too, and why the safety net doesn't depend on accuracy.' Numbers: docs/SAFFRON_VALIDATION.md and docs/EVALUATION.md.</a:t>
             </a:r>
             <a:endParaRPr lang="en-US" dirty="0"/>
           </a:p>
@@ -1272,7 +1700,7 @@
           <a:p>
             <a:r>
               <a:rPr lang="en-US" dirty="0"/>
-              <a:t>[6:00–8:00 · Parameter 5: demo, part 1 — the dashboard] Live: open the Control Room, sign in as support_ravi, run the customer query in the Masking playground; show 'Why each field looks the way it does'. Sign out, sign in as analyst_kavya, run again. If the live demo stalls, this slide is the fallback — it is a real capture. Say the one-liners on the right, nothing more.</a:t>
+              <a:t>[~1 min, right after Role of AI] Say it calmly, never mockingly: 'We looked at LLMs and quantum approaches and chose classic machine learning on purpose. A bank's customer data should never leave the bank to be classified, and the same column must always get the same answer. Our model is a 0.45 MB file, runs on a normal CPU in about 3 milliseconds a column, and makes no calls outside the bank. On quantum: we're already quantum-safe where it matters — our masking uses only symmetric cryptography, HMAC-SHA-256 and SHA-256, which quantum computers don't break the way they break RSA. And quantum machine learning hasn't beaten classical models on table data in recent benchmarks. We built what works in a bank today.' If asked about HTTPS: the TLS layer is the server's library; it can use post-quantum key exchange as a deployment setting.</a:t>
             </a:r>
             <a:endParaRPr lang="en-US" dirty="0"/>
           </a:p>
@@ -1360,7 +1788,7 @@
           <a:p>
             <a:r>
               <a:rPr lang="en-US" dirty="0"/>
-              <a:t>[8:00–9:30 · Parameter 5: demo, part 2 — the command line] Live: maskguard compare with the same customer query for the three users; then, as support_ravi, search for a real PAN → 0 rows; then try an UPDATE → refused; then maskguard integrity proof. The point: the dashboard and the command line are two doors to the same engine, so the answer never differs.</a:t>
+              <a:t>[6:00–8:00 · Parameter 5: demo, part 1 — the dashboard] Live: open the Control Room, sign in as support_ravi, run the customer query in the Masking playground; show 'Why each field looks the way it does'. Sign out, sign in as analyst_kavya, run again. If the live demo stalls, this slide is the fallback — it is a real capture. Say the one-liners on the right, nothing more.</a:t>
             </a:r>
             <a:endParaRPr lang="en-US" dirty="0"/>
           </a:p>
@@ -1448,7 +1876,7 @@
           <a:p>
             <a:r>
               <a:rPr lang="en-US" dirty="0"/>
-              <a:t>[9:30–11:00 · Parameter 4: completeness — functional, not a prototype] Read the two dark tiles first: 35 of 35 found, 0 leaked. Then the four light ones in one breath. Be open about the first try: 22 of 35 — nothing leaked, unfound columns stay hidden by default — and we fixed general causes (banking abbreviations, IDs that fail their checksums), then checked the external benchmark did not get worse. Full write-up: docs/SAFFRON_VALIDATION.md.</a:t>
+              <a:t>[8:00–9:30 · Parameter 5: demo, part 2 — the command line] Live: maskguard compare with the same customer query for the three users; then, as support_ravi, search for a real PAN → 0 rows; then try an UPDATE → refused; then maskguard integrity proof. The point: the dashboard and the command line are two doors to the same engine, so the answer never differs.</a:t>
             </a:r>
             <a:endParaRPr lang="en-US" dirty="0"/>
           </a:p>
@@ -2942,7 +3370,7 @@
                 <a:ea typeface="Cambria" pitchFamily="34" charset="-122"/>
                 <a:cs typeface="Cambria" pitchFamily="34" charset="-120"/>
               </a:rPr>
-              <a:t>Why MaskGuard: what other approaches miss</a:t>
+              <a:t>Proof on the organisers' own data — on all 3 databases</a:t>
             </a:r>
             <a:endParaRPr lang="en-US" sz="3000" dirty="0"/>
           </a:p>
@@ -2950,884 +3378,18 @@
       </p:sp>
       <p:sp>
         <p:nvSpPr>
-          <p:cNvPr id="3" name="maskguard column"/>
+          <p:cNvPr id="3" name="proof 1"/>
           <p:cNvSpPr/>
           <p:nvPr/>
         </p:nvSpPr>
         <p:spPr>
           <a:xfrm>
-            <a:off x="4480560" y="1143000"/>
-            <a:ext cx="1783080" cy="2706624"/>
+            <a:off x="548640" y="1234440"/>
+            <a:ext cx="3520440" cy="1965960"/>
           </a:xfrm>
           <a:prstGeom prst="roundRect">
             <a:avLst>
-              <a:gd name="adj" fmla="val 4103"/>
-            </a:avLst>
-          </a:prstGeom>
-          <a:solidFill>
-            <a:srgbClr val="FDEBD0"/>
-          </a:solidFill>
-          <a:ln w="9525">
-            <a:solidFill>
-              <a:srgbClr val="FDEBD0"/>
-            </a:solidFill>
-            <a:prstDash val="solid"/>
-          </a:ln>
-        </p:spPr>
-      </p:sp>
-      <p:sp>
-        <p:nvSpPr>
-          <p:cNvPr id="4" name="Text 2"/>
-          <p:cNvSpPr txBox="1"/>
-          <p:nvPr/>
-        </p:nvSpPr>
-        <p:spPr>
-          <a:xfrm>
-            <a:off x="4480560" y="1179576"/>
-            <a:ext cx="1783080" cy="566928"/>
-          </a:xfrm>
-          <a:prstGeom prst="rect">
-            <a:avLst/>
-          </a:prstGeom>
-          <a:noFill/>
-          <a:ln/>
-        </p:spPr>
-        <p:txBody>
-          <a:bodyPr wrap="square" lIns="0" tIns="0" rIns="0" bIns="0" rtlCol="0" anchor="ctr"/>
-          <a:lstStyle/>
-          <a:p>
-            <a:pPr algn="ctr" indent="0" marL="0">
-              <a:buNone/>
-            </a:pPr>
-            <a:r>
-              <a:rPr lang="en-US" sz="1700" b="1" dirty="0">
-                <a:solidFill>
-                  <a:srgbClr val="D97706"/>
-                </a:solidFill>
-                <a:latin typeface="Calibri" pitchFamily="34" charset="0"/>
-                <a:ea typeface="Calibri" pitchFamily="34" charset="-122"/>
-                <a:cs typeface="Calibri" pitchFamily="34" charset="-120"/>
-              </a:rPr>
-              <a:t>MaskGuard</a:t>
-            </a:r>
-            <a:endParaRPr lang="en-US" sz="1700" dirty="0"/>
-          </a:p>
-        </p:txBody>
-      </p:sp>
-      <p:sp>
-        <p:nvSpPr>
-          <p:cNvPr id="5" name="Text 3"/>
-          <p:cNvSpPr txBox="1"/>
-          <p:nvPr/>
-        </p:nvSpPr>
-        <p:spPr>
-          <a:xfrm>
-            <a:off x="6263640" y="1179576"/>
-            <a:ext cx="1783080" cy="566928"/>
-          </a:xfrm>
-          <a:prstGeom prst="rect">
-            <a:avLst/>
-          </a:prstGeom>
-          <a:noFill/>
-          <a:ln/>
-        </p:spPr>
-        <p:txBody>
-          <a:bodyPr wrap="square" lIns="0" tIns="0" rIns="0" bIns="0" rtlCol="0" anchor="ctr"/>
-          <a:lstStyle/>
-          <a:p>
-            <a:pPr algn="ctr" indent="0" marL="0">
-              <a:buNone/>
-            </a:pPr>
-            <a:r>
-              <a:rPr lang="en-US" sz="1300" b="1" dirty="0">
-                <a:solidFill>
-                  <a:srgbClr val="1E3A5F"/>
-                </a:solidFill>
-                <a:latin typeface="Calibri" pitchFamily="34" charset="0"/>
-                <a:ea typeface="Calibri" pitchFamily="34" charset="-122"/>
-                <a:cs typeface="Calibri" pitchFamily="34" charset="-120"/>
-              </a:rPr>
-              <a:t>Encryption</a:t>
-            </a:r>
-            <a:endParaRPr lang="en-US" sz="1300" dirty="0"/>
-          </a:p>
-          <a:p>
-            <a:pPr algn="ctr" indent="0" marL="0">
-              <a:buNone/>
-            </a:pPr>
-            <a:r>
-              <a:rPr lang="en-US" sz="1300" b="1" dirty="0">
-                <a:solidFill>
-                  <a:srgbClr val="1E3A5F"/>
-                </a:solidFill>
-                <a:latin typeface="Calibri" pitchFamily="34" charset="0"/>
-                <a:ea typeface="Calibri" pitchFamily="34" charset="-122"/>
-                <a:cs typeface="Calibri" pitchFamily="34" charset="-120"/>
-              </a:rPr>
-              <a:t>(incl. quantum-safe)</a:t>
-            </a:r>
-            <a:endParaRPr lang="en-US" sz="1300" dirty="0"/>
-          </a:p>
-        </p:txBody>
-      </p:sp>
-      <p:sp>
-        <p:nvSpPr>
-          <p:cNvPr id="6" name="Text 4"/>
-          <p:cNvSpPr txBox="1"/>
-          <p:nvPr/>
-        </p:nvSpPr>
-        <p:spPr>
-          <a:xfrm>
-            <a:off x="8046720" y="1179576"/>
-            <a:ext cx="1783080" cy="566928"/>
-          </a:xfrm>
-          <a:prstGeom prst="rect">
-            <a:avLst/>
-          </a:prstGeom>
-          <a:noFill/>
-          <a:ln/>
-        </p:spPr>
-        <p:txBody>
-          <a:bodyPr wrap="square" lIns="0" tIns="0" rIns="0" bIns="0" rtlCol="0" anchor="ctr"/>
-          <a:lstStyle/>
-          <a:p>
-            <a:pPr algn="ctr" indent="0" marL="0">
-              <a:buNone/>
-            </a:pPr>
-            <a:r>
-              <a:rPr lang="en-US" sz="1300" b="1" dirty="0">
-                <a:solidFill>
-                  <a:srgbClr val="1E3A5F"/>
-                </a:solidFill>
-                <a:latin typeface="Calibri" pitchFamily="34" charset="0"/>
-                <a:ea typeface="Calibri" pitchFamily="34" charset="-122"/>
-                <a:cs typeface="Calibri" pitchFamily="34" charset="-120"/>
-              </a:rPr>
-              <a:t>Masked copy</a:t>
-            </a:r>
-            <a:endParaRPr lang="en-US" sz="1300" dirty="0"/>
-          </a:p>
-          <a:p>
-            <a:pPr algn="ctr" indent="0" marL="0">
-              <a:buNone/>
-            </a:pPr>
-            <a:r>
-              <a:rPr lang="en-US" sz="1300" b="1" dirty="0">
-                <a:solidFill>
-                  <a:srgbClr val="1E3A5F"/>
-                </a:solidFill>
-                <a:latin typeface="Calibri" pitchFamily="34" charset="0"/>
-                <a:ea typeface="Calibri" pitchFamily="34" charset="-122"/>
-                <a:cs typeface="Calibri" pitchFamily="34" charset="-120"/>
-              </a:rPr>
-              <a:t>of the database</a:t>
-            </a:r>
-            <a:endParaRPr lang="en-US" sz="1300" dirty="0"/>
-          </a:p>
-        </p:txBody>
-      </p:sp>
-      <p:sp>
-        <p:nvSpPr>
-          <p:cNvPr id="7" name="Text 5"/>
-          <p:cNvSpPr txBox="1"/>
-          <p:nvPr/>
-        </p:nvSpPr>
-        <p:spPr>
-          <a:xfrm>
-            <a:off x="9829800" y="1179576"/>
-            <a:ext cx="1783080" cy="566928"/>
-          </a:xfrm>
-          <a:prstGeom prst="rect">
-            <a:avLst/>
-          </a:prstGeom>
-          <a:noFill/>
-          <a:ln/>
-        </p:spPr>
-        <p:txBody>
-          <a:bodyPr wrap="square" lIns="0" tIns="0" rIns="0" bIns="0" rtlCol="0" anchor="ctr"/>
-          <a:lstStyle/>
-          <a:p>
-            <a:pPr algn="ctr" indent="0" marL="0">
-              <a:buNone/>
-            </a:pPr>
-            <a:r>
-              <a:rPr lang="en-US" sz="1300" b="1" dirty="0">
-                <a:solidFill>
-                  <a:srgbClr val="1E3A5F"/>
-                </a:solidFill>
-                <a:latin typeface="Calibri" pitchFamily="34" charset="0"/>
-                <a:ea typeface="Calibri" pitchFamily="34" charset="-122"/>
-                <a:cs typeface="Calibri" pitchFamily="34" charset="-120"/>
-              </a:rPr>
-              <a:t>Screen-only</a:t>
-            </a:r>
-            <a:endParaRPr lang="en-US" sz="1300" dirty="0"/>
-          </a:p>
-          <a:p>
-            <a:pPr algn="ctr" indent="0" marL="0">
-              <a:buNone/>
-            </a:pPr>
-            <a:r>
-              <a:rPr lang="en-US" sz="1300" b="1" dirty="0">
-                <a:solidFill>
-                  <a:srgbClr val="1E3A5F"/>
-                </a:solidFill>
-                <a:latin typeface="Calibri" pitchFamily="34" charset="0"/>
-                <a:ea typeface="Calibri" pitchFamily="34" charset="-122"/>
-                <a:cs typeface="Calibri" pitchFamily="34" charset="-120"/>
-              </a:rPr>
-              <a:t>masking</a:t>
-            </a:r>
-            <a:endParaRPr lang="en-US" sz="1300" dirty="0"/>
-          </a:p>
-        </p:txBody>
-      </p:sp>
-      <p:sp>
-        <p:nvSpPr>
-          <p:cNvPr id="8" name="row line 0"/>
-          <p:cNvSpPr/>
-          <p:nvPr/>
-        </p:nvSpPr>
-        <p:spPr>
-          <a:xfrm>
-            <a:off x="548640" y="1783080"/>
-            <a:ext cx="11064240" cy="0"/>
-          </a:xfrm>
-          <a:prstGeom prst="line">
-            <a:avLst/>
-          </a:prstGeom>
-          <a:noFill/>
-          <a:ln w="9525">
-            <a:solidFill>
-              <a:srgbClr val="CBD5E1"/>
-            </a:solidFill>
-            <a:prstDash val="solid"/>
-          </a:ln>
-        </p:spPr>
-      </p:sp>
-      <p:sp>
-        <p:nvSpPr>
-          <p:cNvPr id="9" name="Text 7"/>
-          <p:cNvSpPr txBox="1"/>
-          <p:nvPr/>
-        </p:nvSpPr>
-        <p:spPr>
-          <a:xfrm>
-            <a:off x="548640" y="1783080"/>
-            <a:ext cx="3840480" cy="502920"/>
-          </a:xfrm>
-          <a:prstGeom prst="rect">
-            <a:avLst/>
-          </a:prstGeom>
-          <a:noFill/>
-          <a:ln/>
-        </p:spPr>
-        <p:txBody>
-          <a:bodyPr wrap="square" lIns="0" tIns="0" rIns="0" bIns="0" rtlCol="0" anchor="ctr"/>
-          <a:lstStyle/>
-          <a:p>
-            <a:pPr indent="0" marL="0">
-              <a:buNone/>
-            </a:pPr>
-            <a:r>
-              <a:rPr lang="en-US" sz="1500" b="1" dirty="0">
-                <a:solidFill>
-                  <a:srgbClr val="0B1D33"/>
-                </a:solidFill>
-                <a:latin typeface="Calibri" pitchFamily="34" charset="0"/>
-                <a:ea typeface="Calibri" pitchFamily="34" charset="-122"/>
-                <a:cs typeface="Calibri" pitchFamily="34" charset="-120"/>
-              </a:rPr>
-              <a:t>Finds personal data by itself</a:t>
-            </a:r>
-            <a:endParaRPr lang="en-US" sz="1500" dirty="0"/>
-          </a:p>
-        </p:txBody>
-      </p:sp>
-      <p:pic>
-        <p:nvPicPr>
-          <p:cNvPr id="10" name="cell 0 0" descr="MaskGuard: Finds personal data by itself: yes">    </p:cNvPr>
-          <p:cNvPicPr>
-            <a:picLocks noChangeAspect="1"/>
-          </p:cNvPicPr>
-          <p:nvPr/>
-        </p:nvPicPr>
-        <p:blipFill>
-          <a:blip r:embed="rId1"/>
-          <a:stretch>
-            <a:fillRect/>
-          </a:stretch>
-        </p:blipFill>
-        <p:spPr>
-          <a:xfrm>
-            <a:off x="5234940" y="1897380"/>
-            <a:ext cx="274320" cy="274320"/>
-          </a:xfrm>
-          <a:prstGeom prst="rect">
-            <a:avLst/>
-          </a:prstGeom>
-        </p:spPr>
-      </p:pic>
-      <p:pic>
-        <p:nvPicPr>
-          <p:cNvPr id="11" name="cell 0 1" descr="Encryption (incl. quantum-safe): Finds personal data by itself: no">    </p:cNvPr>
-          <p:cNvPicPr>
-            <a:picLocks noChangeAspect="1"/>
-          </p:cNvPicPr>
-          <p:nvPr/>
-        </p:nvPicPr>
-        <p:blipFill>
-          <a:blip r:embed="rId2"/>
-          <a:stretch>
-            <a:fillRect/>
-          </a:stretch>
-        </p:blipFill>
-        <p:spPr>
-          <a:xfrm>
-            <a:off x="7018020" y="1897380"/>
-            <a:ext cx="274320" cy="274320"/>
-          </a:xfrm>
-          <a:prstGeom prst="rect">
-            <a:avLst/>
-          </a:prstGeom>
-        </p:spPr>
-      </p:pic>
-      <p:pic>
-        <p:nvPicPr>
-          <p:cNvPr id="12" name="cell 0 2" descr="Masked copy of the database: Finds personal data by itself: no">    </p:cNvPr>
-          <p:cNvPicPr>
-            <a:picLocks noChangeAspect="1"/>
-          </p:cNvPicPr>
-          <p:nvPr/>
-        </p:nvPicPr>
-        <p:blipFill>
-          <a:blip r:embed="rId3"/>
-          <a:stretch>
-            <a:fillRect/>
-          </a:stretch>
-        </p:blipFill>
-        <p:spPr>
-          <a:xfrm>
-            <a:off x="8801100" y="1897380"/>
-            <a:ext cx="274320" cy="274320"/>
-          </a:xfrm>
-          <a:prstGeom prst="rect">
-            <a:avLst/>
-          </a:prstGeom>
-        </p:spPr>
-      </p:pic>
-      <p:pic>
-        <p:nvPicPr>
-          <p:cNvPr id="13" name="cell 0 3" descr="Screen-only masking: Finds personal data by itself: no">    </p:cNvPr>
-          <p:cNvPicPr>
-            <a:picLocks noChangeAspect="1"/>
-          </p:cNvPicPr>
-          <p:nvPr/>
-        </p:nvPicPr>
-        <p:blipFill>
-          <a:blip r:embed="rId4"/>
-          <a:stretch>
-            <a:fillRect/>
-          </a:stretch>
-        </p:blipFill>
-        <p:spPr>
-          <a:xfrm>
-            <a:off x="10584180" y="1897380"/>
-            <a:ext cx="274320" cy="274320"/>
-          </a:xfrm>
-          <a:prstGeom prst="rect">
-            <a:avLst/>
-          </a:prstGeom>
-        </p:spPr>
-      </p:pic>
-      <p:sp>
-        <p:nvSpPr>
-          <p:cNvPr id="14" name="row line 1"/>
-          <p:cNvSpPr/>
-          <p:nvPr/>
-        </p:nvSpPr>
-        <p:spPr>
-          <a:xfrm>
-            <a:off x="548640" y="2286000"/>
-            <a:ext cx="11064240" cy="0"/>
-          </a:xfrm>
-          <a:prstGeom prst="line">
-            <a:avLst/>
-          </a:prstGeom>
-          <a:noFill/>
-          <a:ln w="9525">
-            <a:solidFill>
-              <a:srgbClr val="CBD5E1"/>
-            </a:solidFill>
-            <a:prstDash val="solid"/>
-          </a:ln>
-        </p:spPr>
-      </p:sp>
-      <p:sp>
-        <p:nvSpPr>
-          <p:cNvPr id="15" name="Text 9"/>
-          <p:cNvSpPr txBox="1"/>
-          <p:nvPr/>
-        </p:nvSpPr>
-        <p:spPr>
-          <a:xfrm>
-            <a:off x="548640" y="2286000"/>
-            <a:ext cx="3840480" cy="502920"/>
-          </a:xfrm>
-          <a:prstGeom prst="rect">
-            <a:avLst/>
-          </a:prstGeom>
-          <a:noFill/>
-          <a:ln/>
-        </p:spPr>
-        <p:txBody>
-          <a:bodyPr wrap="square" lIns="0" tIns="0" rIns="0" bIns="0" rtlCol="0" anchor="ctr"/>
-          <a:lstStyle/>
-          <a:p>
-            <a:pPr indent="0" marL="0">
-              <a:buNone/>
-            </a:pPr>
-            <a:r>
-              <a:rPr lang="en-US" sz="1500" b="1" dirty="0">
-                <a:solidFill>
-                  <a:srgbClr val="0B1D33"/>
-                </a:solidFill>
-                <a:latin typeface="Calibri" pitchFamily="34" charset="0"/>
-                <a:ea typeface="Calibri" pitchFamily="34" charset="-122"/>
-                <a:cs typeface="Calibri" pitchFamily="34" charset="-120"/>
-              </a:rPr>
-              <a:t>A different view for each role</a:t>
-            </a:r>
-            <a:endParaRPr lang="en-US" sz="1500" dirty="0"/>
-          </a:p>
-        </p:txBody>
-      </p:sp>
-      <p:pic>
-        <p:nvPicPr>
-          <p:cNvPr id="16" name="cell 1 0" descr="MaskGuard: A different view for each role: yes">    </p:cNvPr>
-          <p:cNvPicPr>
-            <a:picLocks noChangeAspect="1"/>
-          </p:cNvPicPr>
-          <p:nvPr/>
-        </p:nvPicPr>
-        <p:blipFill>
-          <a:blip r:embed="rId5"/>
-          <a:stretch>
-            <a:fillRect/>
-          </a:stretch>
-        </p:blipFill>
-        <p:spPr>
-          <a:xfrm>
-            <a:off x="5234940" y="2400300"/>
-            <a:ext cx="274320" cy="274320"/>
-          </a:xfrm>
-          <a:prstGeom prst="rect">
-            <a:avLst/>
-          </a:prstGeom>
-        </p:spPr>
-      </p:pic>
-      <p:pic>
-        <p:nvPicPr>
-          <p:cNvPr id="17" name="cell 1 1" descr="Encryption (incl. quantum-safe): A different view for each role: no">    </p:cNvPr>
-          <p:cNvPicPr>
-            <a:picLocks noChangeAspect="1"/>
-          </p:cNvPicPr>
-          <p:nvPr/>
-        </p:nvPicPr>
-        <p:blipFill>
-          <a:blip r:embed="rId6"/>
-          <a:stretch>
-            <a:fillRect/>
-          </a:stretch>
-        </p:blipFill>
-        <p:spPr>
-          <a:xfrm>
-            <a:off x="7018020" y="2400300"/>
-            <a:ext cx="274320" cy="274320"/>
-          </a:xfrm>
-          <a:prstGeom prst="rect">
-            <a:avLst/>
-          </a:prstGeom>
-        </p:spPr>
-      </p:pic>
-      <p:pic>
-        <p:nvPicPr>
-          <p:cNvPr id="18" name="cell 1 2" descr="Masked copy of the database: A different view for each role: no">    </p:cNvPr>
-          <p:cNvPicPr>
-            <a:picLocks noChangeAspect="1"/>
-          </p:cNvPicPr>
-          <p:nvPr/>
-        </p:nvPicPr>
-        <p:blipFill>
-          <a:blip r:embed="rId7"/>
-          <a:stretch>
-            <a:fillRect/>
-          </a:stretch>
-        </p:blipFill>
-        <p:spPr>
-          <a:xfrm>
-            <a:off x="8801100" y="2400300"/>
-            <a:ext cx="274320" cy="274320"/>
-          </a:xfrm>
-          <a:prstGeom prst="rect">
-            <a:avLst/>
-          </a:prstGeom>
-        </p:spPr>
-      </p:pic>
-      <p:pic>
-        <p:nvPicPr>
-          <p:cNvPr id="19" name="cell 1 3" descr="Screen-only masking: A different view for each role: yes">    </p:cNvPr>
-          <p:cNvPicPr>
-            <a:picLocks noChangeAspect="1"/>
-          </p:cNvPicPr>
-          <p:nvPr/>
-        </p:nvPicPr>
-        <p:blipFill>
-          <a:blip r:embed="rId8"/>
-          <a:stretch>
-            <a:fillRect/>
-          </a:stretch>
-        </p:blipFill>
-        <p:spPr>
-          <a:xfrm>
-            <a:off x="10584180" y="2400300"/>
-            <a:ext cx="274320" cy="274320"/>
-          </a:xfrm>
-          <a:prstGeom prst="rect">
-            <a:avLst/>
-          </a:prstGeom>
-        </p:spPr>
-      </p:pic>
-      <p:sp>
-        <p:nvSpPr>
-          <p:cNvPr id="20" name="row line 2"/>
-          <p:cNvSpPr/>
-          <p:nvPr/>
-        </p:nvSpPr>
-        <p:spPr>
-          <a:xfrm>
-            <a:off x="548640" y="2788920"/>
-            <a:ext cx="11064240" cy="0"/>
-          </a:xfrm>
-          <a:prstGeom prst="line">
-            <a:avLst/>
-          </a:prstGeom>
-          <a:noFill/>
-          <a:ln w="9525">
-            <a:solidFill>
-              <a:srgbClr val="CBD5E1"/>
-            </a:solidFill>
-            <a:prstDash val="solid"/>
-          </a:ln>
-        </p:spPr>
-      </p:sp>
-      <p:sp>
-        <p:nvSpPr>
-          <p:cNvPr id="21" name="Text 11"/>
-          <p:cNvSpPr txBox="1"/>
-          <p:nvPr/>
-        </p:nvSpPr>
-        <p:spPr>
-          <a:xfrm>
-            <a:off x="548640" y="2788920"/>
-            <a:ext cx="3840480" cy="502920"/>
-          </a:xfrm>
-          <a:prstGeom prst="rect">
-            <a:avLst/>
-          </a:prstGeom>
-          <a:noFill/>
-          <a:ln/>
-        </p:spPr>
-        <p:txBody>
-          <a:bodyPr wrap="square" lIns="0" tIns="0" rIns="0" bIns="0" rtlCol="0" anchor="ctr"/>
-          <a:lstStyle/>
-          <a:p>
-            <a:pPr indent="0" marL="0">
-              <a:buNone/>
-            </a:pPr>
-            <a:r>
-              <a:rPr lang="en-US" sz="1500" b="1" dirty="0">
-                <a:solidFill>
-                  <a:srgbClr val="0B1D33"/>
-                </a:solidFill>
-                <a:latin typeface="Calibri" pitchFamily="34" charset="0"/>
-                <a:ea typeface="Calibri" pitchFamily="34" charset="-122"/>
-                <a:cs typeface="Calibri" pitchFamily="34" charset="-120"/>
-              </a:rPr>
-              <a:t>Stops guessing a value through a search</a:t>
-            </a:r>
-            <a:endParaRPr lang="en-US" sz="1500" dirty="0"/>
-          </a:p>
-        </p:txBody>
-      </p:sp>
-      <p:pic>
-        <p:nvPicPr>
-          <p:cNvPr id="22" name="cell 2 0" descr="MaskGuard: Stops guessing a value through a search: yes">    </p:cNvPr>
-          <p:cNvPicPr>
-            <a:picLocks noChangeAspect="1"/>
-          </p:cNvPicPr>
-          <p:nvPr/>
-        </p:nvPicPr>
-        <p:blipFill>
-          <a:blip r:embed="rId9"/>
-          <a:stretch>
-            <a:fillRect/>
-          </a:stretch>
-        </p:blipFill>
-        <p:spPr>
-          <a:xfrm>
-            <a:off x="5234940" y="2903220"/>
-            <a:ext cx="274320" cy="274320"/>
-          </a:xfrm>
-          <a:prstGeom prst="rect">
-            <a:avLst/>
-          </a:prstGeom>
-        </p:spPr>
-      </p:pic>
-      <p:pic>
-        <p:nvPicPr>
-          <p:cNvPr id="23" name="cell 2 1" descr="Encryption (incl. quantum-safe): Stops guessing a value through a search: no">    </p:cNvPr>
-          <p:cNvPicPr>
-            <a:picLocks noChangeAspect="1"/>
-          </p:cNvPicPr>
-          <p:nvPr/>
-        </p:nvPicPr>
-        <p:blipFill>
-          <a:blip r:embed="rId10"/>
-          <a:stretch>
-            <a:fillRect/>
-          </a:stretch>
-        </p:blipFill>
-        <p:spPr>
-          <a:xfrm>
-            <a:off x="7018020" y="2903220"/>
-            <a:ext cx="274320" cy="274320"/>
-          </a:xfrm>
-          <a:prstGeom prst="rect">
-            <a:avLst/>
-          </a:prstGeom>
-        </p:spPr>
-      </p:pic>
-      <p:pic>
-        <p:nvPicPr>
-          <p:cNvPr id="24" name="cell 2 2" descr="Masked copy of the database: Stops guessing a value through a search: yes">    </p:cNvPr>
-          <p:cNvPicPr>
-            <a:picLocks noChangeAspect="1"/>
-          </p:cNvPicPr>
-          <p:nvPr/>
-        </p:nvPicPr>
-        <p:blipFill>
-          <a:blip r:embed="rId11"/>
-          <a:stretch>
-            <a:fillRect/>
-          </a:stretch>
-        </p:blipFill>
-        <p:spPr>
-          <a:xfrm>
-            <a:off x="8801100" y="2903220"/>
-            <a:ext cx="274320" cy="274320"/>
-          </a:xfrm>
-          <a:prstGeom prst="rect">
-            <a:avLst/>
-          </a:prstGeom>
-        </p:spPr>
-      </p:pic>
-      <p:pic>
-        <p:nvPicPr>
-          <p:cNvPr id="25" name="cell 2 3" descr="Screen-only masking: Stops guessing a value through a search: no">    </p:cNvPr>
-          <p:cNvPicPr>
-            <a:picLocks noChangeAspect="1"/>
-          </p:cNvPicPr>
-          <p:nvPr/>
-        </p:nvPicPr>
-        <p:blipFill>
-          <a:blip r:embed="rId12"/>
-          <a:stretch>
-            <a:fillRect/>
-          </a:stretch>
-        </p:blipFill>
-        <p:spPr>
-          <a:xfrm>
-            <a:off x="10584180" y="2903220"/>
-            <a:ext cx="274320" cy="274320"/>
-          </a:xfrm>
-          <a:prstGeom prst="rect">
-            <a:avLst/>
-          </a:prstGeom>
-        </p:spPr>
-      </p:pic>
-      <p:sp>
-        <p:nvSpPr>
-          <p:cNvPr id="26" name="row line 3"/>
-          <p:cNvSpPr/>
-          <p:nvPr/>
-        </p:nvSpPr>
-        <p:spPr>
-          <a:xfrm>
-            <a:off x="548640" y="3291840"/>
-            <a:ext cx="11064240" cy="0"/>
-          </a:xfrm>
-          <a:prstGeom prst="line">
-            <a:avLst/>
-          </a:prstGeom>
-          <a:noFill/>
-          <a:ln w="9525">
-            <a:solidFill>
-              <a:srgbClr val="CBD5E1"/>
-            </a:solidFill>
-            <a:prstDash val="solid"/>
-          </a:ln>
-        </p:spPr>
-      </p:sp>
-      <p:sp>
-        <p:nvSpPr>
-          <p:cNvPr id="27" name="Text 13"/>
-          <p:cNvSpPr txBox="1"/>
-          <p:nvPr/>
-        </p:nvSpPr>
-        <p:spPr>
-          <a:xfrm>
-            <a:off x="548640" y="3291840"/>
-            <a:ext cx="3840480" cy="502920"/>
-          </a:xfrm>
-          <a:prstGeom prst="rect">
-            <a:avLst/>
-          </a:prstGeom>
-          <a:noFill/>
-          <a:ln/>
-        </p:spPr>
-        <p:txBody>
-          <a:bodyPr wrap="square" lIns="0" tIns="0" rIns="0" bIns="0" rtlCol="0" anchor="ctr"/>
-          <a:lstStyle/>
-          <a:p>
-            <a:pPr indent="0" marL="0">
-              <a:buNone/>
-            </a:pPr>
-            <a:r>
-              <a:rPr lang="en-US" sz="1500" b="1" dirty="0">
-                <a:solidFill>
-                  <a:srgbClr val="0B1D33"/>
-                </a:solidFill>
-                <a:latin typeface="Calibri" pitchFamily="34" charset="0"/>
-                <a:ea typeface="Calibri" pitchFamily="34" charset="-122"/>
-                <a:cs typeface="Calibri" pitchFamily="34" charset="-120"/>
-              </a:rPr>
-              <a:t>Data stays in place, never copied</a:t>
-            </a:r>
-            <a:endParaRPr lang="en-US" sz="1500" dirty="0"/>
-          </a:p>
-        </p:txBody>
-      </p:sp>
-      <p:pic>
-        <p:nvPicPr>
-          <p:cNvPr id="28" name="cell 3 0" descr="MaskGuard: Data stays in place, never copied: yes">    </p:cNvPr>
-          <p:cNvPicPr>
-            <a:picLocks noChangeAspect="1"/>
-          </p:cNvPicPr>
-          <p:nvPr/>
-        </p:nvPicPr>
-        <p:blipFill>
-          <a:blip r:embed="rId13"/>
-          <a:stretch>
-            <a:fillRect/>
-          </a:stretch>
-        </p:blipFill>
-        <p:spPr>
-          <a:xfrm>
-            <a:off x="5234940" y="3406140"/>
-            <a:ext cx="274320" cy="274320"/>
-          </a:xfrm>
-          <a:prstGeom prst="rect">
-            <a:avLst/>
-          </a:prstGeom>
-        </p:spPr>
-      </p:pic>
-      <p:pic>
-        <p:nvPicPr>
-          <p:cNvPr id="29" name="cell 3 1" descr="Encryption (incl. quantum-safe): Data stays in place, never copied: yes">    </p:cNvPr>
-          <p:cNvPicPr>
-            <a:picLocks noChangeAspect="1"/>
-          </p:cNvPicPr>
-          <p:nvPr/>
-        </p:nvPicPr>
-        <p:blipFill>
-          <a:blip r:embed="rId14"/>
-          <a:stretch>
-            <a:fillRect/>
-          </a:stretch>
-        </p:blipFill>
-        <p:spPr>
-          <a:xfrm>
-            <a:off x="7018020" y="3406140"/>
-            <a:ext cx="274320" cy="274320"/>
-          </a:xfrm>
-          <a:prstGeom prst="rect">
-            <a:avLst/>
-          </a:prstGeom>
-        </p:spPr>
-      </p:pic>
-      <p:pic>
-        <p:nvPicPr>
-          <p:cNvPr id="30" name="cell 3 2" descr="Masked copy of the database: Data stays in place, never copied: no">    </p:cNvPr>
-          <p:cNvPicPr>
-            <a:picLocks noChangeAspect="1"/>
-          </p:cNvPicPr>
-          <p:nvPr/>
-        </p:nvPicPr>
-        <p:blipFill>
-          <a:blip r:embed="rId15"/>
-          <a:stretch>
-            <a:fillRect/>
-          </a:stretch>
-        </p:blipFill>
-        <p:spPr>
-          <a:xfrm>
-            <a:off x="8801100" y="3406140"/>
-            <a:ext cx="274320" cy="274320"/>
-          </a:xfrm>
-          <a:prstGeom prst="rect">
-            <a:avLst/>
-          </a:prstGeom>
-        </p:spPr>
-      </p:pic>
-      <p:pic>
-        <p:nvPicPr>
-          <p:cNvPr id="31" name="cell 3 3" descr="Screen-only masking: Data stays in place, never copied: yes">    </p:cNvPr>
-          <p:cNvPicPr>
-            <a:picLocks noChangeAspect="1"/>
-          </p:cNvPicPr>
-          <p:nvPr/>
-        </p:nvPicPr>
-        <p:blipFill>
-          <a:blip r:embed="rId16"/>
-          <a:stretch>
-            <a:fillRect/>
-          </a:stretch>
-        </p:blipFill>
-        <p:spPr>
-          <a:xfrm>
-            <a:off x="10584180" y="3406140"/>
-            <a:ext cx="274320" cy="274320"/>
-          </a:xfrm>
-          <a:prstGeom prst="rect">
-            <a:avLst/>
-          </a:prstGeom>
-        </p:spPr>
-      </p:pic>
-      <p:sp>
-        <p:nvSpPr>
-          <p:cNvPr id="32" name="key message"/>
-          <p:cNvSpPr/>
-          <p:nvPr/>
-        </p:nvSpPr>
-        <p:spPr>
-          <a:xfrm>
-            <a:off x="548640" y="3931920"/>
-            <a:ext cx="11064240" cy="868680"/>
-          </a:xfrm>
-          <a:prstGeom prst="roundRect">
-            <a:avLst>
-              <a:gd name="adj" fmla="val 8421"/>
+              <a:gd name="adj" fmla="val 3721"/>
             </a:avLst>
           </a:prstGeom>
           <a:solidFill>
@@ -3843,63 +3405,158 @@
       </p:sp>
       <p:sp>
         <p:nvSpPr>
-          <p:cNvPr id="33" name="lock circle"/>
+          <p:cNvPr id="4" name="Text 2"/>
+          <p:cNvSpPr txBox="1"/>
+          <p:nvPr/>
+        </p:nvSpPr>
+        <p:spPr>
+          <a:xfrm>
+            <a:off x="822960" y="1399032"/>
+            <a:ext cx="3017520" cy="731520"/>
+          </a:xfrm>
+          <a:prstGeom prst="rect">
+            <a:avLst/>
+          </a:prstGeom>
+          <a:noFill/>
+          <a:ln/>
+        </p:spPr>
+        <p:txBody>
+          <a:bodyPr wrap="square" lIns="0" tIns="0" rIns="0" bIns="0" rtlCol="0" anchor="ctr"/>
+          <a:lstStyle/>
+          <a:p>
+            <a:pPr indent="0" marL="0">
+              <a:buNone/>
+            </a:pPr>
+            <a:r>
+              <a:rPr lang="en-US" sz="4000" b="1" dirty="0">
+                <a:solidFill>
+                  <a:srgbClr val="D97706"/>
+                </a:solidFill>
+                <a:latin typeface="Cambria" pitchFamily="34" charset="0"/>
+                <a:ea typeface="Cambria" pitchFamily="34" charset="-122"/>
+                <a:cs typeface="Cambria" pitchFamily="34" charset="-120"/>
+              </a:rPr>
+              <a:t>35 / 35</a:t>
+            </a:r>
+            <a:endParaRPr lang="en-US" sz="4000" dirty="0"/>
+          </a:p>
+        </p:txBody>
+      </p:sp>
+      <p:sp>
+        <p:nvSpPr>
+          <p:cNvPr id="5" name="Text 3"/>
+          <p:cNvSpPr txBox="1"/>
+          <p:nvPr/>
+        </p:nvSpPr>
+        <p:spPr>
+          <a:xfrm>
+            <a:off x="822960" y="2148840"/>
+            <a:ext cx="3063240" cy="365760"/>
+          </a:xfrm>
+          <a:prstGeom prst="rect">
+            <a:avLst/>
+          </a:prstGeom>
+          <a:noFill/>
+          <a:ln/>
+        </p:spPr>
+        <p:txBody>
+          <a:bodyPr wrap="square" lIns="0" tIns="0" rIns="0" bIns="0" rtlCol="0" anchor="ctr"/>
+          <a:lstStyle/>
+          <a:p>
+            <a:pPr indent="0" marL="0">
+              <a:buNone/>
+            </a:pPr>
+            <a:r>
+              <a:rPr lang="en-US" sz="1700" b="1" dirty="0">
+                <a:solidFill>
+                  <a:srgbClr val="FFFFFF"/>
+                </a:solidFill>
+                <a:latin typeface="Calibri" pitchFamily="34" charset="0"/>
+                <a:ea typeface="Calibri" pitchFamily="34" charset="-122"/>
+                <a:cs typeface="Calibri" pitchFamily="34" charset="-120"/>
+              </a:rPr>
+              <a:t>sensitive columns found</a:t>
+            </a:r>
+            <a:endParaRPr lang="en-US" sz="1700" dirty="0"/>
+          </a:p>
+        </p:txBody>
+      </p:sp>
+      <p:sp>
+        <p:nvSpPr>
+          <p:cNvPr id="6" name="Text 4"/>
+          <p:cNvSpPr txBox="1"/>
+          <p:nvPr/>
+        </p:nvSpPr>
+        <p:spPr>
+          <a:xfrm>
+            <a:off x="822960" y="2532888"/>
+            <a:ext cx="3063240" cy="594360"/>
+          </a:xfrm>
+          <a:prstGeom prst="rect">
+            <a:avLst/>
+          </a:prstGeom>
+          <a:noFill/>
+          <a:ln/>
+        </p:spPr>
+        <p:txBody>
+          <a:bodyPr wrap="square" lIns="0" tIns="0" rIns="0" bIns="0" rtlCol="0" anchor="t"/>
+          <a:lstStyle/>
+          <a:p>
+            <a:pPr indent="0" marL="0">
+              <a:buNone/>
+            </a:pPr>
+            <a:r>
+              <a:rPr lang="en-US" sz="1300" dirty="0">
+                <a:solidFill>
+                  <a:srgbClr val="CBD5E1"/>
+                </a:solidFill>
+                <a:latin typeface="Calibri" pitchFamily="34" charset="0"/>
+                <a:ea typeface="Calibri" pitchFamily="34" charset="-122"/>
+                <a:cs typeface="Calibri" pitchFamily="34" charset="-120"/>
+              </a:rPr>
+              <a:t>first try 22; we fixed the general causes, not the dataset</a:t>
+            </a:r>
+            <a:endParaRPr lang="en-US" sz="1300" dirty="0"/>
+          </a:p>
+        </p:txBody>
+      </p:sp>
+      <p:sp>
+        <p:nvSpPr>
+          <p:cNvPr id="7" name="proof 2"/>
           <p:cNvSpPr/>
           <p:nvPr/>
         </p:nvSpPr>
         <p:spPr>
           <a:xfrm>
-            <a:off x="731520" y="4050792"/>
-            <a:ext cx="621792" cy="621792"/>
-          </a:xfrm>
-          <a:prstGeom prst="ellipse">
-            <a:avLst/>
+            <a:off x="4297680" y="1234440"/>
+            <a:ext cx="3520440" cy="1965960"/>
+          </a:xfrm>
+          <a:prstGeom prst="roundRect">
+            <a:avLst>
+              <a:gd name="adj" fmla="val 3721"/>
+            </a:avLst>
           </a:prstGeom>
           <a:solidFill>
-            <a:srgbClr val="D97706"/>
+            <a:srgbClr val="0B1D33"/>
           </a:solidFill>
-          <a:ln w="12700">
+          <a:ln w="9525">
             <a:solidFill>
-              <a:srgbClr val="D97706"/>
+              <a:srgbClr val="0B1D33"/>
             </a:solidFill>
             <a:prstDash val="solid"/>
           </a:ln>
         </p:spPr>
       </p:sp>
-      <p:pic>
-        <p:nvPicPr>
-          <p:cNvPr id="34" name="lock icon" descr="lock">    </p:cNvPr>
-          <p:cNvPicPr>
-            <a:picLocks noChangeAspect="1"/>
-          </p:cNvPicPr>
-          <p:nvPr/>
-        </p:nvPicPr>
-        <p:blipFill>
-          <a:blip r:embed="rId17"/>
-          <a:stretch>
-            <a:fillRect/>
-          </a:stretch>
-        </p:blipFill>
-        <p:spPr>
-          <a:xfrm>
-            <a:off x="886968" y="4206240"/>
-            <a:ext cx="310896" cy="310896"/>
-          </a:xfrm>
-          <a:prstGeom prst="rect">
-            <a:avLst/>
-          </a:prstGeom>
-        </p:spPr>
-      </p:pic>
-      <p:sp>
-        <p:nvSpPr>
-          <p:cNvPr id="35" name="Text 16"/>
-          <p:cNvSpPr txBox="1"/>
-          <p:nvPr/>
-        </p:nvSpPr>
-        <p:spPr>
-          <a:xfrm>
-            <a:off x="1554480" y="3931920"/>
-            <a:ext cx="9875520" cy="868680"/>
+      <p:sp>
+        <p:nvSpPr>
+          <p:cNvPr id="8" name="Text 6"/>
+          <p:cNvSpPr txBox="1"/>
+          <p:nvPr/>
+        </p:nvSpPr>
+        <p:spPr>
+          <a:xfrm>
+            <a:off x="4572000" y="1399032"/>
+            <a:ext cx="3017520" cy="731520"/>
           </a:xfrm>
           <a:prstGeom prst="rect">
             <a:avLst/>
@@ -3915,87 +3572,112 @@
               <a:buNone/>
             </a:pPr>
             <a:r>
-              <a:rPr lang="en-US" sz="1500" b="1" dirty="0">
-                <a:solidFill>
-                  <a:srgbClr val="FFFFFF"/>
-                </a:solidFill>
-                <a:latin typeface="Calibri" pitchFamily="34" charset="0"/>
-                <a:ea typeface="Calibri" pitchFamily="34" charset="-122"/>
-                <a:cs typeface="Calibri" pitchFamily="34" charset="-120"/>
-              </a:rPr>
-              <a:t>Encryption — even quantum-safe — keeps outsiders out. </a:t>
-            </a:r>
-            <a:pPr indent="0" marL="0">
-              <a:buNone/>
-            </a:pPr>
-            <a:r>
-              <a:rPr lang="en-US" sz="1500" dirty="0">
-                <a:solidFill>
-                  <a:srgbClr val="CBD5E1"/>
-                </a:solidFill>
-                <a:latin typeface="Calibri" pitchFamily="34" charset="0"/>
-                <a:ea typeface="Calibri" pitchFamily="34" charset="-122"/>
-                <a:cs typeface="Calibri" pitchFamily="34" charset="-120"/>
-              </a:rPr>
-              <a:t>But once the bank's own app decrypts the data, every insider sees all of it. MaskGuard decides what each insider sees, so use both.</a:t>
-            </a:r>
-            <a:endParaRPr lang="en-US" sz="1500" dirty="0"/>
-          </a:p>
-        </p:txBody>
-      </p:sp>
-      <p:sp>
-        <p:nvSpPr>
-          <p:cNvPr id="36" name="Text 17"/>
-          <p:cNvSpPr txBox="1"/>
-          <p:nvPr/>
-        </p:nvSpPr>
-        <p:spPr>
-          <a:xfrm>
-            <a:off x="548640" y="4892040"/>
-            <a:ext cx="2743200" cy="274320"/>
-          </a:xfrm>
-          <a:prstGeom prst="rect">
-            <a:avLst/>
-          </a:prstGeom>
-          <a:noFill/>
-          <a:ln/>
-        </p:spPr>
-        <p:txBody>
-          <a:bodyPr wrap="square" lIns="0" tIns="0" rIns="0" bIns="0" rtlCol="0" anchor="ctr"/>
-          <a:lstStyle/>
-          <a:p>
-            <a:pPr indent="0" marL="0">
-              <a:buNone/>
-            </a:pPr>
-            <a:r>
-              <a:rPr lang="en-US" sz="1500" b="1" dirty="0">
-                <a:solidFill>
-                  <a:srgbClr val="0B1D33"/>
+              <a:rPr lang="en-US" sz="4000" b="1" dirty="0">
+                <a:solidFill>
+                  <a:srgbClr val="D97706"/>
                 </a:solidFill>
                 <a:latin typeface="Cambria" pitchFamily="34" charset="0"/>
                 <a:ea typeface="Cambria" pitchFamily="34" charset="-122"/>
                 <a:cs typeface="Cambria" pitchFamily="34" charset="-120"/>
               </a:rPr>
-              <a:t>The market</a:t>
-            </a:r>
-            <a:endParaRPr lang="en-US" sz="1500" dirty="0"/>
-          </a:p>
-        </p:txBody>
-      </p:sp>
-      <p:sp>
-        <p:nvSpPr>
-          <p:cNvPr id="37" name="market 0"/>
+              <a:t>0</a:t>
+            </a:r>
+            <a:endParaRPr lang="en-US" sz="4000" dirty="0"/>
+          </a:p>
+        </p:txBody>
+      </p:sp>
+      <p:sp>
+        <p:nvSpPr>
+          <p:cNvPr id="9" name="Text 7"/>
+          <p:cNvSpPr txBox="1"/>
+          <p:nvPr/>
+        </p:nvSpPr>
+        <p:spPr>
+          <a:xfrm>
+            <a:off x="4572000" y="2148840"/>
+            <a:ext cx="3063240" cy="365760"/>
+          </a:xfrm>
+          <a:prstGeom prst="rect">
+            <a:avLst/>
+          </a:prstGeom>
+          <a:noFill/>
+          <a:ln/>
+        </p:spPr>
+        <p:txBody>
+          <a:bodyPr wrap="square" lIns="0" tIns="0" rIns="0" bIns="0" rtlCol="0" anchor="ctr"/>
+          <a:lstStyle/>
+          <a:p>
+            <a:pPr indent="0" marL="0">
+              <a:buNone/>
+            </a:pPr>
+            <a:r>
+              <a:rPr lang="en-US" sz="1700" b="1" dirty="0">
+                <a:solidFill>
+                  <a:srgbClr val="FFFFFF"/>
+                </a:solidFill>
+                <a:latin typeface="Calibri" pitchFamily="34" charset="0"/>
+                <a:ea typeface="Calibri" pitchFamily="34" charset="-122"/>
+                <a:cs typeface="Calibri" pitchFamily="34" charset="-120"/>
+              </a:rPr>
+              <a:t>real values leaked</a:t>
+            </a:r>
+            <a:endParaRPr lang="en-US" sz="1700" dirty="0"/>
+          </a:p>
+        </p:txBody>
+      </p:sp>
+      <p:sp>
+        <p:nvSpPr>
+          <p:cNvPr id="10" name="Text 8"/>
+          <p:cNvSpPr txBox="1"/>
+          <p:nvPr/>
+        </p:nvSpPr>
+        <p:spPr>
+          <a:xfrm>
+            <a:off x="4572000" y="2532888"/>
+            <a:ext cx="3063240" cy="594360"/>
+          </a:xfrm>
+          <a:prstGeom prst="rect">
+            <a:avLst/>
+          </a:prstGeom>
+          <a:noFill/>
+          <a:ln/>
+        </p:spPr>
+        <p:txBody>
+          <a:bodyPr wrap="square" lIns="0" tIns="0" rIns="0" bIns="0" rtlCol="0" anchor="t"/>
+          <a:lstStyle/>
+          <a:p>
+            <a:pPr indent="0" marL="0">
+              <a:buNone/>
+            </a:pPr>
+            <a:r>
+              <a:rPr lang="en-US" sz="1300" dirty="0">
+                <a:solidFill>
+                  <a:srgbClr val="CBD5E1"/>
+                </a:solidFill>
+                <a:latin typeface="Calibri" pitchFamily="34" charset="0"/>
+                <a:ea typeface="Calibri" pitchFamily="34" charset="-122"/>
+                <a:cs typeface="Calibri" pitchFamily="34" charset="-120"/>
+              </a:rPr>
+              <a:t>in 13,700 masked cells, per database</a:t>
+            </a:r>
+            <a:endParaRPr lang="en-US" sz="1300" dirty="0"/>
+          </a:p>
+        </p:txBody>
+      </p:sp>
+      <p:sp>
+        <p:nvSpPr>
+          <p:cNvPr id="11" name="proof 3"/>
           <p:cNvSpPr/>
           <p:nvPr/>
         </p:nvSpPr>
         <p:spPr>
           <a:xfrm>
-            <a:off x="548640" y="5212080"/>
-            <a:ext cx="2514600" cy="896112"/>
+            <a:off x="8046720" y="1234440"/>
+            <a:ext cx="3520440" cy="1965960"/>
           </a:xfrm>
           <a:prstGeom prst="roundRect">
             <a:avLst>
-              <a:gd name="adj" fmla="val 8163"/>
+              <a:gd name="adj" fmla="val 3721"/>
             </a:avLst>
           </a:prstGeom>
           <a:solidFill>
@@ -4011,14 +3693,14 @@
       </p:sp>
       <p:sp>
         <p:nvSpPr>
-          <p:cNvPr id="38" name="Text 19"/>
-          <p:cNvSpPr txBox="1"/>
-          <p:nvPr/>
-        </p:nvSpPr>
-        <p:spPr>
-          <a:xfrm>
-            <a:off x="713232" y="5266944"/>
-            <a:ext cx="2240280" cy="411480"/>
+          <p:cNvPr id="12" name="Text 10"/>
+          <p:cNvSpPr txBox="1"/>
+          <p:nvPr/>
+        </p:nvSpPr>
+        <p:spPr>
+          <a:xfrm>
+            <a:off x="8321040" y="1399032"/>
+            <a:ext cx="3017520" cy="731520"/>
           </a:xfrm>
           <a:prstGeom prst="rect">
             <a:avLst/>
@@ -4034,7 +3716,7 @@
               <a:buNone/>
             </a:pPr>
             <a:r>
-              <a:rPr lang="en-US" sz="1900" b="1" dirty="0">
+              <a:rPr lang="en-US" sz="4000" b="1" dirty="0">
                 <a:solidFill>
                   <a:srgbClr val="0B1D33"/>
                 </a:solidFill>
@@ -4042,22 +3724,61 @@
                 <a:ea typeface="Cambria" pitchFamily="34" charset="-122"/>
                 <a:cs typeface="Cambria" pitchFamily="34" charset="-120"/>
               </a:rPr>
-              <a:t>$1.47 B → $2.6 B</a:t>
-            </a:r>
-            <a:endParaRPr lang="en-US" sz="1900" dirty="0"/>
-          </a:p>
-        </p:txBody>
-      </p:sp>
-      <p:sp>
-        <p:nvSpPr>
-          <p:cNvPr id="39" name="Text 20"/>
-          <p:cNvSpPr txBox="1"/>
-          <p:nvPr/>
-        </p:nvSpPr>
-        <p:spPr>
-          <a:xfrm>
-            <a:off x="713232" y="5669280"/>
-            <a:ext cx="2286000" cy="384048"/>
+              <a:t>0 rows</a:t>
+            </a:r>
+            <a:endParaRPr lang="en-US" sz="4000" dirty="0"/>
+          </a:p>
+        </p:txBody>
+      </p:sp>
+      <p:sp>
+        <p:nvSpPr>
+          <p:cNvPr id="13" name="Text 11"/>
+          <p:cNvSpPr txBox="1"/>
+          <p:nvPr/>
+        </p:nvSpPr>
+        <p:spPr>
+          <a:xfrm>
+            <a:off x="8321040" y="2148840"/>
+            <a:ext cx="3063240" cy="365760"/>
+          </a:xfrm>
+          <a:prstGeom prst="rect">
+            <a:avLst/>
+          </a:prstGeom>
+          <a:noFill/>
+          <a:ln/>
+        </p:spPr>
+        <p:txBody>
+          <a:bodyPr wrap="square" lIns="0" tIns="0" rIns="0" bIns="0" rtlCol="0" anchor="ctr"/>
+          <a:lstStyle/>
+          <a:p>
+            <a:pPr indent="0" marL="0">
+              <a:buNone/>
+            </a:pPr>
+            <a:r>
+              <a:rPr lang="en-US" sz="1700" b="1" dirty="0">
+                <a:solidFill>
+                  <a:srgbClr val="0B1D33"/>
+                </a:solidFill>
+                <a:latin typeface="Calibri" pitchFamily="34" charset="0"/>
+                <a:ea typeface="Calibri" pitchFamily="34" charset="-122"/>
+                <a:cs typeface="Calibri" pitchFamily="34" charset="-120"/>
+              </a:rPr>
+              <a:t>for a guessed real PAN</a:t>
+            </a:r>
+            <a:endParaRPr lang="en-US" sz="1700" dirty="0"/>
+          </a:p>
+        </p:txBody>
+      </p:sp>
+      <p:sp>
+        <p:nvSpPr>
+          <p:cNvPr id="14" name="Text 12"/>
+          <p:cNvSpPr txBox="1"/>
+          <p:nvPr/>
+        </p:nvSpPr>
+        <p:spPr>
+          <a:xfrm>
+            <a:off x="8321040" y="2532888"/>
+            <a:ext cx="3063240" cy="594360"/>
           </a:xfrm>
           <a:prstGeom prst="rect">
             <a:avLst/>
@@ -4073,34 +3794,34 @@
               <a:buNone/>
             </a:pPr>
             <a:r>
-              <a:rPr lang="en-US" sz="1200" dirty="0">
-                <a:solidFill>
-                  <a:srgbClr val="1E3A5F"/>
-                </a:solidFill>
-                <a:latin typeface="Calibri" pitchFamily="34" charset="0"/>
-                <a:ea typeface="Calibri" pitchFamily="34" charset="-122"/>
-                <a:cs typeface="Calibri" pitchFamily="34" charset="-120"/>
-              </a:rPr>
-              <a:t>data-masking market, 2025 → 2030</a:t>
-            </a:r>
-            <a:endParaRPr lang="en-US" sz="1200" dirty="0"/>
-          </a:p>
-        </p:txBody>
-      </p:sp>
-      <p:sp>
-        <p:nvSpPr>
-          <p:cNvPr id="40" name="market 1"/>
+              <a:rPr lang="en-US" sz="1300" dirty="0">
+                <a:solidFill>
+                  <a:srgbClr val="64748B"/>
+                </a:solidFill>
+                <a:latin typeface="Calibri" pitchFamily="34" charset="0"/>
+                <a:ea typeface="Calibri" pitchFamily="34" charset="-122"/>
+                <a:cs typeface="Calibri" pitchFamily="34" charset="-120"/>
+              </a:rPr>
+              <a:t>Admin finds 1 row; Support and Analyst find 0</a:t>
+            </a:r>
+            <a:endParaRPr lang="en-US" sz="1300" dirty="0"/>
+          </a:p>
+        </p:txBody>
+      </p:sp>
+      <p:sp>
+        <p:nvSpPr>
+          <p:cNvPr id="15" name="proof 4"/>
           <p:cNvSpPr/>
           <p:nvPr/>
         </p:nvSpPr>
         <p:spPr>
           <a:xfrm>
-            <a:off x="3246120" y="5212080"/>
-            <a:ext cx="2514600" cy="896112"/>
+            <a:off x="548640" y="3383280"/>
+            <a:ext cx="3520440" cy="1965960"/>
           </a:xfrm>
           <a:prstGeom prst="roundRect">
             <a:avLst>
-              <a:gd name="adj" fmla="val 8163"/>
+              <a:gd name="adj" fmla="val 3721"/>
             </a:avLst>
           </a:prstGeom>
           <a:solidFill>
@@ -4116,14 +3837,14 @@
       </p:sp>
       <p:sp>
         <p:nvSpPr>
-          <p:cNvPr id="41" name="Text 22"/>
-          <p:cNvSpPr txBox="1"/>
-          <p:nvPr/>
-        </p:nvSpPr>
-        <p:spPr>
-          <a:xfrm>
-            <a:off x="3410712" y="5266944"/>
-            <a:ext cx="2240280" cy="411480"/>
+          <p:cNvPr id="16" name="Text 14"/>
+          <p:cNvSpPr txBox="1"/>
+          <p:nvPr/>
+        </p:nvSpPr>
+        <p:spPr>
+          <a:xfrm>
+            <a:off x="822960" y="3547872"/>
+            <a:ext cx="3017520" cy="731520"/>
           </a:xfrm>
           <a:prstGeom prst="rect">
             <a:avLst/>
@@ -4139,7 +3860,7 @@
               <a:buNone/>
             </a:pPr>
             <a:r>
-              <a:rPr lang="en-US" sz="1900" b="1" dirty="0">
+              <a:rPr lang="en-US" sz="4000" b="1" dirty="0">
                 <a:solidFill>
                   <a:srgbClr val="0B1D33"/>
                 </a:solidFill>
@@ -4147,22 +3868,61 @@
                 <a:ea typeface="Cambria" pitchFamily="34" charset="-122"/>
                 <a:cs typeface="Cambria" pitchFamily="34" charset="-120"/>
               </a:rPr>
-              <a:t>May 2027</a:t>
-            </a:r>
-            <a:endParaRPr lang="en-US" sz="1900" dirty="0"/>
-          </a:p>
-        </p:txBody>
-      </p:sp>
-      <p:sp>
-        <p:nvSpPr>
-          <p:cNvPr id="42" name="Text 23"/>
-          <p:cNvSpPr txBox="1"/>
-          <p:nvPr/>
-        </p:nvSpPr>
-        <p:spPr>
-          <a:xfrm>
-            <a:off x="3410712" y="5669280"/>
-            <a:ext cx="2286000" cy="384048"/>
+              <a:t>4 / 4</a:t>
+            </a:r>
+            <a:endParaRPr lang="en-US" sz="4000" dirty="0"/>
+          </a:p>
+        </p:txBody>
+      </p:sp>
+      <p:sp>
+        <p:nvSpPr>
+          <p:cNvPr id="17" name="Text 15"/>
+          <p:cNvSpPr txBox="1"/>
+          <p:nvPr/>
+        </p:nvSpPr>
+        <p:spPr>
+          <a:xfrm>
+            <a:off x="822960" y="4297680"/>
+            <a:ext cx="3063240" cy="365760"/>
+          </a:xfrm>
+          <a:prstGeom prst="rect">
+            <a:avLst/>
+          </a:prstGeom>
+          <a:noFill/>
+          <a:ln/>
+        </p:spPr>
+        <p:txBody>
+          <a:bodyPr wrap="square" lIns="0" tIns="0" rIns="0" bIns="0" rtlCol="0" anchor="ctr"/>
+          <a:lstStyle/>
+          <a:p>
+            <a:pPr indent="0" marL="0">
+              <a:buNone/>
+            </a:pPr>
+            <a:r>
+              <a:rPr lang="en-US" sz="1700" b="1" dirty="0">
+                <a:solidFill>
+                  <a:srgbClr val="0B1D33"/>
+                </a:solidFill>
+                <a:latin typeface="Calibri" pitchFamily="34" charset="0"/>
+                <a:ea typeface="Calibri" pitchFamily="34" charset="-122"/>
+                <a:cs typeface="Calibri" pitchFamily="34" charset="-120"/>
+              </a:rPr>
+              <a:t>data changes refused</a:t>
+            </a:r>
+            <a:endParaRPr lang="en-US" sz="1700" dirty="0"/>
+          </a:p>
+        </p:txBody>
+      </p:sp>
+      <p:sp>
+        <p:nvSpPr>
+          <p:cNvPr id="18" name="Text 16"/>
+          <p:cNvSpPr txBox="1"/>
+          <p:nvPr/>
+        </p:nvSpPr>
+        <p:spPr>
+          <a:xfrm>
+            <a:off x="822960" y="4681728"/>
+            <a:ext cx="3063240" cy="594360"/>
           </a:xfrm>
           <a:prstGeom prst="rect">
             <a:avLst/>
@@ -4178,34 +3938,34 @@
               <a:buNone/>
             </a:pPr>
             <a:r>
-              <a:rPr lang="en-US" sz="1200" dirty="0">
-                <a:solidFill>
-                  <a:srgbClr val="1E3A5F"/>
-                </a:solidFill>
-                <a:latin typeface="Calibri" pitchFamily="34" charset="0"/>
-                <a:ea typeface="Calibri" pitchFamily="34" charset="-122"/>
-                <a:cs typeface="Calibri" pitchFamily="34" charset="-120"/>
-              </a:rPr>
-              <a:t>DPDP rules apply to every bank</a:t>
-            </a:r>
-            <a:endParaRPr lang="en-US" sz="1200" dirty="0"/>
-          </a:p>
-        </p:txBody>
-      </p:sp>
-      <p:sp>
-        <p:nvSpPr>
-          <p:cNvPr id="43" name="market 2"/>
+              <a:rPr lang="en-US" sz="1300" dirty="0">
+                <a:solidFill>
+                  <a:srgbClr val="64748B"/>
+                </a:solidFill>
+                <a:latin typeface="Calibri" pitchFamily="34" charset="0"/>
+                <a:ea typeface="Calibri" pitchFamily="34" charset="-122"/>
+                <a:cs typeface="Calibri" pitchFamily="34" charset="-120"/>
+              </a:rPr>
+              <a:t>UPDATE, DELETE, DROP, INSERT — for every role</a:t>
+            </a:r>
+            <a:endParaRPr lang="en-US" sz="1300" dirty="0"/>
+          </a:p>
+        </p:txBody>
+      </p:sp>
+      <p:sp>
+        <p:nvSpPr>
+          <p:cNvPr id="19" name="proof 5"/>
           <p:cNvSpPr/>
           <p:nvPr/>
         </p:nvSpPr>
         <p:spPr>
           <a:xfrm>
-            <a:off x="5943600" y="5212080"/>
-            <a:ext cx="2514600" cy="896112"/>
+            <a:off x="4297680" y="3383280"/>
+            <a:ext cx="3520440" cy="1965960"/>
           </a:xfrm>
           <a:prstGeom prst="roundRect">
             <a:avLst>
-              <a:gd name="adj" fmla="val 8163"/>
+              <a:gd name="adj" fmla="val 3721"/>
             </a:avLst>
           </a:prstGeom>
           <a:solidFill>
@@ -4221,14 +3981,14 @@
       </p:sp>
       <p:sp>
         <p:nvSpPr>
-          <p:cNvPr id="44" name="Text 25"/>
-          <p:cNvSpPr txBox="1"/>
-          <p:nvPr/>
-        </p:nvSpPr>
-        <p:spPr>
-          <a:xfrm>
-            <a:off x="6108192" y="5266944"/>
-            <a:ext cx="2240280" cy="411480"/>
+          <p:cNvPr id="20" name="Text 18"/>
+          <p:cNvSpPr txBox="1"/>
+          <p:nvPr/>
+        </p:nvSpPr>
+        <p:spPr>
+          <a:xfrm>
+            <a:off x="4572000" y="3547872"/>
+            <a:ext cx="3017520" cy="731520"/>
           </a:xfrm>
           <a:prstGeom prst="rect">
             <a:avLst/>
@@ -4244,7 +4004,7 @@
               <a:buNone/>
             </a:pPr>
             <a:r>
-              <a:rPr lang="en-US" sz="1900" b="1" dirty="0">
+              <a:rPr lang="en-US" sz="4000" b="1" dirty="0">
                 <a:solidFill>
                   <a:srgbClr val="0B1D33"/>
                 </a:solidFill>
@@ -4252,22 +4012,61 @@
                 <a:ea typeface="Cambria" pitchFamily="34" charset="-122"/>
                 <a:cs typeface="Cambria" pitchFamily="34" charset="-120"/>
               </a:rPr>
-              <a:t>Open source</a:t>
-            </a:r>
-            <a:endParaRPr lang="en-US" sz="1900" dirty="0"/>
-          </a:p>
-        </p:txBody>
-      </p:sp>
-      <p:sp>
-        <p:nvSpPr>
-          <p:cNvPr id="45" name="Text 26"/>
-          <p:cNvSpPr txBox="1"/>
-          <p:nvPr/>
-        </p:nvSpPr>
-        <p:spPr>
-          <a:xfrm>
-            <a:off x="6108192" y="5669280"/>
-            <a:ext cx="2286000" cy="384048"/>
+              <a:t>0 / 17</a:t>
+            </a:r>
+            <a:endParaRPr lang="en-US" sz="4000" dirty="0"/>
+          </a:p>
+        </p:txBody>
+      </p:sp>
+      <p:sp>
+        <p:nvSpPr>
+          <p:cNvPr id="21" name="Text 19"/>
+          <p:cNvSpPr txBox="1"/>
+          <p:nvPr/>
+        </p:nvSpPr>
+        <p:spPr>
+          <a:xfrm>
+            <a:off x="4572000" y="4297680"/>
+            <a:ext cx="3063240" cy="365760"/>
+          </a:xfrm>
+          <a:prstGeom prst="rect">
+            <a:avLst/>
+          </a:prstGeom>
+          <a:noFill/>
+          <a:ln/>
+        </p:spPr>
+        <p:txBody>
+          <a:bodyPr wrap="square" lIns="0" tIns="0" rIns="0" bIns="0" rtlCol="0" anchor="ctr"/>
+          <a:lstStyle/>
+          <a:p>
+            <a:pPr indent="0" marL="0">
+              <a:buNone/>
+            </a:pPr>
+            <a:r>
+              <a:rPr lang="en-US" sz="1700" b="1" dirty="0">
+                <a:solidFill>
+                  <a:srgbClr val="0B1D33"/>
+                </a:solidFill>
+                <a:latin typeface="Calibri" pitchFamily="34" charset="0"/>
+                <a:ea typeface="Calibri" pitchFamily="34" charset="-122"/>
+                <a:cs typeface="Calibri" pitchFamily="34" charset="-120"/>
+              </a:rPr>
+              <a:t>known attacks leak</a:t>
+            </a:r>
+            <a:endParaRPr lang="en-US" sz="1700" dirty="0"/>
+          </a:p>
+        </p:txBody>
+      </p:sp>
+      <p:sp>
+        <p:nvSpPr>
+          <p:cNvPr id="22" name="Text 20"/>
+          <p:cNvSpPr txBox="1"/>
+          <p:nvPr/>
+        </p:nvSpPr>
+        <p:spPr>
+          <a:xfrm>
+            <a:off x="4572000" y="4681728"/>
+            <a:ext cx="3063240" cy="594360"/>
           </a:xfrm>
           <a:prstGeom prst="rect">
             <a:avLst/>
@@ -4283,42 +4082,42 @@
               <a:buNone/>
             </a:pPr>
             <a:r>
-              <a:rPr lang="en-US" sz="1200" dirty="0">
-                <a:solidFill>
-                  <a:srgbClr val="1E3A5F"/>
-                </a:solidFill>
-                <a:latin typeface="Calibri" pitchFamily="34" charset="0"/>
-                <a:ea typeface="Calibri" pitchFamily="34" charset="-122"/>
-                <a:cs typeface="Calibri" pitchFamily="34" charset="-120"/>
-              </a:rPr>
-              <a:t>vs platforms at ≈ $100k–370k a year*</a:t>
-            </a:r>
-            <a:endParaRPr lang="en-US" sz="1200" dirty="0"/>
-          </a:p>
-        </p:txBody>
-      </p:sp>
-      <p:sp>
-        <p:nvSpPr>
-          <p:cNvPr id="46" name="buyers"/>
+              <a:rPr lang="en-US" sz="1300" dirty="0">
+                <a:solidFill>
+                  <a:srgbClr val="64748B"/>
+                </a:solidFill>
+                <a:latin typeface="Calibri" pitchFamily="34" charset="0"/>
+                <a:ea typeface="Calibri" pitchFamily="34" charset="-122"/>
+                <a:cs typeface="Calibri" pitchFamily="34" charset="-120"/>
+              </a:rPr>
+              <a:t>simple screen masking leaks 14 of the same 17</a:t>
+            </a:r>
+            <a:endParaRPr lang="en-US" sz="1300" dirty="0"/>
+          </a:p>
+        </p:txBody>
+      </p:sp>
+      <p:sp>
+        <p:nvSpPr>
+          <p:cNvPr id="23" name="proof 6"/>
           <p:cNvSpPr/>
           <p:nvPr/>
         </p:nvSpPr>
         <p:spPr>
           <a:xfrm>
-            <a:off x="8732520" y="4892040"/>
-            <a:ext cx="2880360" cy="1216152"/>
+            <a:off x="8046720" y="3383280"/>
+            <a:ext cx="3520440" cy="1965960"/>
           </a:xfrm>
           <a:prstGeom prst="roundRect">
             <a:avLst>
-              <a:gd name="adj" fmla="val 6015"/>
+              <a:gd name="adj" fmla="val 3721"/>
             </a:avLst>
           </a:prstGeom>
           <a:solidFill>
-            <a:srgbClr val="FDEBD0"/>
+            <a:srgbClr val="F1F5F9"/>
           </a:solidFill>
           <a:ln w="9525">
             <a:solidFill>
-              <a:srgbClr val="FDEBD0"/>
+              <a:srgbClr val="F1F5F9"/>
             </a:solidFill>
             <a:prstDash val="solid"/>
           </a:ln>
@@ -4326,14 +4125,14 @@
       </p:sp>
       <p:sp>
         <p:nvSpPr>
-          <p:cNvPr id="47" name="Text 28"/>
-          <p:cNvSpPr txBox="1"/>
-          <p:nvPr/>
-        </p:nvSpPr>
-        <p:spPr>
-          <a:xfrm>
-            <a:off x="8887968" y="4956048"/>
-            <a:ext cx="2606040" cy="274320"/>
+          <p:cNvPr id="24" name="Text 22"/>
+          <p:cNvSpPr txBox="1"/>
+          <p:nvPr/>
+        </p:nvSpPr>
+        <p:spPr>
+          <a:xfrm>
+            <a:off x="8321040" y="3547872"/>
+            <a:ext cx="3017520" cy="731520"/>
           </a:xfrm>
           <a:prstGeom prst="rect">
             <a:avLst/>
@@ -4349,95 +4148,148 @@
               <a:buNone/>
             </a:pPr>
             <a:r>
+              <a:rPr lang="en-US" sz="4000" b="1" dirty="0">
+                <a:solidFill>
+                  <a:srgbClr val="0B1D33"/>
+                </a:solidFill>
+                <a:latin typeface="Cambria" pitchFamily="34" charset="0"/>
+                <a:ea typeface="Cambria" pitchFamily="34" charset="-122"/>
+                <a:cs typeface="Cambria" pitchFamily="34" charset="-120"/>
+              </a:rPr>
+              <a:t>4–8 ms</a:t>
+            </a:r>
+            <a:endParaRPr lang="en-US" sz="4000" dirty="0"/>
+          </a:p>
+        </p:txBody>
+      </p:sp>
+      <p:sp>
+        <p:nvSpPr>
+          <p:cNvPr id="25" name="Text 23"/>
+          <p:cNvSpPr txBox="1"/>
+          <p:nvPr/>
+        </p:nvSpPr>
+        <p:spPr>
+          <a:xfrm>
+            <a:off x="8321040" y="4297680"/>
+            <a:ext cx="3063240" cy="365760"/>
+          </a:xfrm>
+          <a:prstGeom prst="rect">
+            <a:avLst/>
+          </a:prstGeom>
+          <a:noFill/>
+          <a:ln/>
+        </p:spPr>
+        <p:txBody>
+          <a:bodyPr wrap="square" lIns="0" tIns="0" rIns="0" bIns="0" rtlCol="0" anchor="ctr"/>
+          <a:lstStyle/>
+          <a:p>
+            <a:pPr indent="0" marL="0">
+              <a:buNone/>
+            </a:pPr>
+            <a:r>
+              <a:rPr lang="en-US" sz="1700" b="1" dirty="0">
+                <a:solidFill>
+                  <a:srgbClr val="0B1D33"/>
+                </a:solidFill>
+                <a:latin typeface="Calibri" pitchFamily="34" charset="0"/>
+                <a:ea typeface="Calibri" pitchFamily="34" charset="-122"/>
+                <a:cs typeface="Calibri" pitchFamily="34" charset="-120"/>
+              </a:rPr>
+              <a:t>extra time per query</a:t>
+            </a:r>
+            <a:endParaRPr lang="en-US" sz="1700" dirty="0"/>
+          </a:p>
+        </p:txBody>
+      </p:sp>
+      <p:sp>
+        <p:nvSpPr>
+          <p:cNvPr id="26" name="Text 24"/>
+          <p:cNvSpPr txBox="1"/>
+          <p:nvPr/>
+        </p:nvSpPr>
+        <p:spPr>
+          <a:xfrm>
+            <a:off x="8321040" y="4681728"/>
+            <a:ext cx="3063240" cy="594360"/>
+          </a:xfrm>
+          <a:prstGeom prst="rect">
+            <a:avLst/>
+          </a:prstGeom>
+          <a:noFill/>
+          <a:ln/>
+        </p:spPr>
+        <p:txBody>
+          <a:bodyPr wrap="square" lIns="0" tIns="0" rIns="0" bIns="0" rtlCol="0" anchor="t"/>
+          <a:lstStyle/>
+          <a:p>
+            <a:pPr indent="0" marL="0">
+              <a:buNone/>
+            </a:pPr>
+            <a:r>
+              <a:rPr lang="en-US" sz="1300" dirty="0">
+                <a:solidFill>
+                  <a:srgbClr val="64748B"/>
+                </a:solidFill>
+                <a:latin typeface="Calibri" pitchFamily="34" charset="0"/>
+                <a:ea typeface="Calibri" pitchFamily="34" charset="-122"/>
+                <a:cs typeface="Calibri" pitchFamily="34" charset="-120"/>
+              </a:rPr>
+              <a:t>from 300 to 100,000 rows (MySQL 6–22 ms)</a:t>
+            </a:r>
+            <a:endParaRPr lang="en-US" sz="1300" dirty="0"/>
+          </a:p>
+        </p:txBody>
+      </p:sp>
+      <p:sp>
+        <p:nvSpPr>
+          <p:cNvPr id="27" name="Text 25"/>
+          <p:cNvSpPr txBox="1"/>
+          <p:nvPr/>
+        </p:nvSpPr>
+        <p:spPr>
+          <a:xfrm>
+            <a:off x="548640" y="5623560"/>
+            <a:ext cx="11064240" cy="548640"/>
+          </a:xfrm>
+          <a:prstGeom prst="rect">
+            <a:avLst/>
+          </a:prstGeom>
+          <a:noFill/>
+          <a:ln/>
+        </p:spPr>
+        <p:txBody>
+          <a:bodyPr wrap="square" lIns="0" tIns="0" rIns="0" bIns="0" rtlCol="0" anchor="ctr"/>
+          <a:lstStyle/>
+          <a:p>
+            <a:pPr indent="0" marL="0">
+              <a:buNone/>
+            </a:pPr>
+            <a:r>
               <a:rPr lang="en-US" sz="1400" b="1" dirty="0">
                 <a:solidFill>
-                  <a:srgbClr val="D97706"/>
-                </a:solidFill>
-                <a:latin typeface="Calibri" pitchFamily="34" charset="0"/>
-                <a:ea typeface="Calibri" pitchFamily="34" charset="-122"/>
-                <a:cs typeface="Calibri" pitchFamily="34" charset="-120"/>
-              </a:rPr>
-              <a:t>Who buys first</a:t>
+                  <a:srgbClr val="0B1D33"/>
+                </a:solidFill>
+                <a:latin typeface="Calibri" pitchFamily="34" charset="0"/>
+                <a:ea typeface="Calibri" pitchFamily="34" charset="-122"/>
+                <a:cs typeface="Calibri" pitchFamily="34" charset="-120"/>
+              </a:rPr>
+              <a:t>Same results on SQLite, PostgreSQL 16 and MySQL 8.4</a:t>
+            </a:r>
+            <a:pPr indent="0" marL="0">
+              <a:buNone/>
+            </a:pPr>
+            <a:r>
+              <a:rPr lang="en-US" sz="1400" dirty="0">
+                <a:solidFill>
+                  <a:srgbClr val="1E3A5F"/>
+                </a:solidFill>
+                <a:latin typeface="Calibri" pitchFamily="34" charset="0"/>
+                <a:ea typeface="Calibri" pitchFamily="34" charset="-122"/>
+                <a:cs typeface="Calibri" pitchFamily="34" charset="-120"/>
+              </a:rPr>
+              <a:t>  ·  9 organiser users  ·  129,260 rows checked identical across all copies  ·  1,235 automated tests on every change</a:t>
             </a:r>
             <a:endParaRPr lang="en-US" sz="1400" dirty="0"/>
-          </a:p>
-        </p:txBody>
-      </p:sp>
-      <p:sp>
-        <p:nvSpPr>
-          <p:cNvPr id="48" name="Text 29"/>
-          <p:cNvSpPr txBox="1"/>
-          <p:nvPr/>
-        </p:nvSpPr>
-        <p:spPr>
-          <a:xfrm>
-            <a:off x="8887968" y="5239512"/>
-            <a:ext cx="2606040" cy="841248"/>
-          </a:xfrm>
-          <a:prstGeom prst="rect">
-            <a:avLst/>
-          </a:prstGeom>
-          <a:noFill/>
-          <a:ln/>
-        </p:spPr>
-        <p:txBody>
-          <a:bodyPr wrap="square" lIns="0" tIns="0" rIns="0" bIns="0" rtlCol="0" anchor="t"/>
-          <a:lstStyle/>
-          <a:p>
-            <a:pPr indent="0" marL="0">
-              <a:buNone/>
-            </a:pPr>
-            <a:r>
-              <a:rPr lang="en-US" sz="1200" dirty="0">
-                <a:solidFill>
-                  <a:srgbClr val="0B1D33"/>
-                </a:solidFill>
-                <a:latin typeface="Calibri" pitchFamily="34" charset="0"/>
-                <a:ea typeface="Calibri" pitchFamily="34" charset="-122"/>
-                <a:cs typeface="Calibri" pitchFamily="34" charset="-120"/>
-              </a:rPr>
-              <a:t>NBFCs, co-op and small finance banks, fintechs, hospitals: DPDP applies, no budget for big platforms.</a:t>
-            </a:r>
-            <a:endParaRPr lang="en-US" sz="1200" dirty="0"/>
-          </a:p>
-        </p:txBody>
-      </p:sp>
-      <p:sp>
-        <p:nvSpPr>
-          <p:cNvPr id="49" name="Text 30"/>
-          <p:cNvSpPr txBox="1"/>
-          <p:nvPr/>
-        </p:nvSpPr>
-        <p:spPr>
-          <a:xfrm>
-            <a:off x="548640" y="6181344"/>
-            <a:ext cx="11064240" cy="237744"/>
-          </a:xfrm>
-          <a:prstGeom prst="rect">
-            <a:avLst/>
-          </a:prstGeom>
-          <a:noFill/>
-          <a:ln/>
-        </p:spPr>
-        <p:txBody>
-          <a:bodyPr wrap="square" lIns="0" tIns="0" rIns="0" bIns="0" rtlCol="0" anchor="ctr"/>
-          <a:lstStyle/>
-          <a:p>
-            <a:pPr indent="0" marL="0">
-              <a:buNone/>
-            </a:pPr>
-            <a:r>
-              <a:rPr lang="en-US" sz="900" i="1" dirty="0">
-                <a:solidFill>
-                  <a:srgbClr val="64748B"/>
-                </a:solidFill>
-                <a:latin typeface="Calibri" pitchFamily="34" charset="0"/>
-                <a:ea typeface="Calibri" pitchFamily="34" charset="-122"/>
-                <a:cs typeface="Calibri" pitchFamily="34" charset="-120"/>
-              </a:rPr>
-              <a:t>* review-site estimates for Immuta / Delphix; vendors don't publish prices. Market: Knowledge Sourcing Intelligence. Other databases' built-in masking (SQL Server DDM) masks results only; Microsoft documents it doesn't stop inference.</a:t>
-            </a:r>
-            <a:endParaRPr lang="en-US" sz="900" dirty="0"/>
           </a:p>
         </p:txBody>
       </p:sp>
@@ -4540,6 +4392,1610 @@
             <a:r>
               <a:rPr lang="en-US" sz="3000" b="1" dirty="0">
                 <a:solidFill>
+                  <a:schemeClr val="tx1"/>
+                </a:solidFill>
+                <a:latin typeface="Cambria" pitchFamily="34" charset="0"/>
+                <a:ea typeface="Cambria" pitchFamily="34" charset="-122"/>
+                <a:cs typeface="Cambria" pitchFamily="34" charset="-120"/>
+              </a:rPr>
+              <a:t>Why MaskGuard: what other approaches miss</a:t>
+            </a:r>
+            <a:endParaRPr lang="en-US" sz="3000" dirty="0"/>
+          </a:p>
+        </p:txBody>
+      </p:sp>
+      <p:sp>
+        <p:nvSpPr>
+          <p:cNvPr id="3" name="maskguard column"/>
+          <p:cNvSpPr/>
+          <p:nvPr/>
+        </p:nvSpPr>
+        <p:spPr>
+          <a:xfrm>
+            <a:off x="4480560" y="1143000"/>
+            <a:ext cx="1783080" cy="2706624"/>
+          </a:xfrm>
+          <a:prstGeom prst="roundRect">
+            <a:avLst>
+              <a:gd name="adj" fmla="val 4103"/>
+            </a:avLst>
+          </a:prstGeom>
+          <a:solidFill>
+            <a:srgbClr val="FDEBD0"/>
+          </a:solidFill>
+          <a:ln w="9525">
+            <a:solidFill>
+              <a:srgbClr val="FDEBD0"/>
+            </a:solidFill>
+            <a:prstDash val="solid"/>
+          </a:ln>
+        </p:spPr>
+      </p:sp>
+      <p:sp>
+        <p:nvSpPr>
+          <p:cNvPr id="4" name="Text 2"/>
+          <p:cNvSpPr txBox="1"/>
+          <p:nvPr/>
+        </p:nvSpPr>
+        <p:spPr>
+          <a:xfrm>
+            <a:off x="4480560" y="1179576"/>
+            <a:ext cx="1783080" cy="566928"/>
+          </a:xfrm>
+          <a:prstGeom prst="rect">
+            <a:avLst/>
+          </a:prstGeom>
+          <a:noFill/>
+          <a:ln/>
+        </p:spPr>
+        <p:txBody>
+          <a:bodyPr wrap="square" lIns="0" tIns="0" rIns="0" bIns="0" rtlCol="0" anchor="ctr"/>
+          <a:lstStyle/>
+          <a:p>
+            <a:pPr algn="ctr" indent="0" marL="0">
+              <a:buNone/>
+            </a:pPr>
+            <a:r>
+              <a:rPr lang="en-US" sz="1700" b="1" dirty="0">
+                <a:solidFill>
+                  <a:srgbClr val="D97706"/>
+                </a:solidFill>
+                <a:latin typeface="Calibri" pitchFamily="34" charset="0"/>
+                <a:ea typeface="Calibri" pitchFamily="34" charset="-122"/>
+                <a:cs typeface="Calibri" pitchFamily="34" charset="-120"/>
+              </a:rPr>
+              <a:t>MaskGuard</a:t>
+            </a:r>
+            <a:endParaRPr lang="en-US" sz="1700" dirty="0"/>
+          </a:p>
+        </p:txBody>
+      </p:sp>
+      <p:sp>
+        <p:nvSpPr>
+          <p:cNvPr id="5" name="Text 3"/>
+          <p:cNvSpPr txBox="1"/>
+          <p:nvPr/>
+        </p:nvSpPr>
+        <p:spPr>
+          <a:xfrm>
+            <a:off x="6263640" y="1179576"/>
+            <a:ext cx="1783080" cy="566928"/>
+          </a:xfrm>
+          <a:prstGeom prst="rect">
+            <a:avLst/>
+          </a:prstGeom>
+          <a:noFill/>
+          <a:ln/>
+        </p:spPr>
+        <p:txBody>
+          <a:bodyPr wrap="square" lIns="0" tIns="0" rIns="0" bIns="0" rtlCol="0" anchor="ctr"/>
+          <a:lstStyle/>
+          <a:p>
+            <a:pPr algn="ctr" indent="0" marL="0">
+              <a:buNone/>
+            </a:pPr>
+            <a:r>
+              <a:rPr lang="en-US" sz="1300" b="1" dirty="0">
+                <a:solidFill>
+                  <a:srgbClr val="1E3A5F"/>
+                </a:solidFill>
+                <a:latin typeface="Calibri" pitchFamily="34" charset="0"/>
+                <a:ea typeface="Calibri" pitchFamily="34" charset="-122"/>
+                <a:cs typeface="Calibri" pitchFamily="34" charset="-120"/>
+              </a:rPr>
+              <a:t>Encryption</a:t>
+            </a:r>
+            <a:endParaRPr lang="en-US" sz="1300" dirty="0"/>
+          </a:p>
+          <a:p>
+            <a:pPr algn="ctr" indent="0" marL="0">
+              <a:buNone/>
+            </a:pPr>
+            <a:r>
+              <a:rPr lang="en-US" sz="1300" b="1" dirty="0">
+                <a:solidFill>
+                  <a:srgbClr val="1E3A5F"/>
+                </a:solidFill>
+                <a:latin typeface="Calibri" pitchFamily="34" charset="0"/>
+                <a:ea typeface="Calibri" pitchFamily="34" charset="-122"/>
+                <a:cs typeface="Calibri" pitchFamily="34" charset="-120"/>
+              </a:rPr>
+              <a:t>(incl. quantum-safe)</a:t>
+            </a:r>
+            <a:endParaRPr lang="en-US" sz="1300" dirty="0"/>
+          </a:p>
+        </p:txBody>
+      </p:sp>
+      <p:sp>
+        <p:nvSpPr>
+          <p:cNvPr id="6" name="Text 4"/>
+          <p:cNvSpPr txBox="1"/>
+          <p:nvPr/>
+        </p:nvSpPr>
+        <p:spPr>
+          <a:xfrm>
+            <a:off x="8046720" y="1179576"/>
+            <a:ext cx="1783080" cy="566928"/>
+          </a:xfrm>
+          <a:prstGeom prst="rect">
+            <a:avLst/>
+          </a:prstGeom>
+          <a:noFill/>
+          <a:ln/>
+        </p:spPr>
+        <p:txBody>
+          <a:bodyPr wrap="square" lIns="0" tIns="0" rIns="0" bIns="0" rtlCol="0" anchor="ctr"/>
+          <a:lstStyle/>
+          <a:p>
+            <a:pPr algn="ctr" indent="0" marL="0">
+              <a:buNone/>
+            </a:pPr>
+            <a:r>
+              <a:rPr lang="en-US" sz="1300" b="1" dirty="0">
+                <a:solidFill>
+                  <a:srgbClr val="1E3A5F"/>
+                </a:solidFill>
+                <a:latin typeface="Calibri" pitchFamily="34" charset="0"/>
+                <a:ea typeface="Calibri" pitchFamily="34" charset="-122"/>
+                <a:cs typeface="Calibri" pitchFamily="34" charset="-120"/>
+              </a:rPr>
+              <a:t>Masked copy</a:t>
+            </a:r>
+            <a:endParaRPr lang="en-US" sz="1300" dirty="0"/>
+          </a:p>
+          <a:p>
+            <a:pPr algn="ctr" indent="0" marL="0">
+              <a:buNone/>
+            </a:pPr>
+            <a:r>
+              <a:rPr lang="en-US" sz="1300" b="1" dirty="0">
+                <a:solidFill>
+                  <a:srgbClr val="1E3A5F"/>
+                </a:solidFill>
+                <a:latin typeface="Calibri" pitchFamily="34" charset="0"/>
+                <a:ea typeface="Calibri" pitchFamily="34" charset="-122"/>
+                <a:cs typeface="Calibri" pitchFamily="34" charset="-120"/>
+              </a:rPr>
+              <a:t>of the database</a:t>
+            </a:r>
+            <a:endParaRPr lang="en-US" sz="1300" dirty="0"/>
+          </a:p>
+        </p:txBody>
+      </p:sp>
+      <p:sp>
+        <p:nvSpPr>
+          <p:cNvPr id="7" name="Text 5"/>
+          <p:cNvSpPr txBox="1"/>
+          <p:nvPr/>
+        </p:nvSpPr>
+        <p:spPr>
+          <a:xfrm>
+            <a:off x="9829800" y="1179576"/>
+            <a:ext cx="1783080" cy="566928"/>
+          </a:xfrm>
+          <a:prstGeom prst="rect">
+            <a:avLst/>
+          </a:prstGeom>
+          <a:noFill/>
+          <a:ln/>
+        </p:spPr>
+        <p:txBody>
+          <a:bodyPr wrap="square" lIns="0" tIns="0" rIns="0" bIns="0" rtlCol="0" anchor="ctr"/>
+          <a:lstStyle/>
+          <a:p>
+            <a:pPr algn="ctr" indent="0" marL="0">
+              <a:buNone/>
+            </a:pPr>
+            <a:r>
+              <a:rPr lang="en-US" sz="1300" b="1" dirty="0">
+                <a:solidFill>
+                  <a:srgbClr val="1E3A5F"/>
+                </a:solidFill>
+                <a:latin typeface="Calibri" pitchFamily="34" charset="0"/>
+                <a:ea typeface="Calibri" pitchFamily="34" charset="-122"/>
+                <a:cs typeface="Calibri" pitchFamily="34" charset="-120"/>
+              </a:rPr>
+              <a:t>Screen-only</a:t>
+            </a:r>
+            <a:endParaRPr lang="en-US" sz="1300" dirty="0"/>
+          </a:p>
+          <a:p>
+            <a:pPr algn="ctr" indent="0" marL="0">
+              <a:buNone/>
+            </a:pPr>
+            <a:r>
+              <a:rPr lang="en-US" sz="1300" b="1" dirty="0">
+                <a:solidFill>
+                  <a:srgbClr val="1E3A5F"/>
+                </a:solidFill>
+                <a:latin typeface="Calibri" pitchFamily="34" charset="0"/>
+                <a:ea typeface="Calibri" pitchFamily="34" charset="-122"/>
+                <a:cs typeface="Calibri" pitchFamily="34" charset="-120"/>
+              </a:rPr>
+              <a:t>masking</a:t>
+            </a:r>
+            <a:endParaRPr lang="en-US" sz="1300" dirty="0"/>
+          </a:p>
+        </p:txBody>
+      </p:sp>
+      <p:sp>
+        <p:nvSpPr>
+          <p:cNvPr id="8" name="row line 0"/>
+          <p:cNvSpPr/>
+          <p:nvPr/>
+        </p:nvSpPr>
+        <p:spPr>
+          <a:xfrm>
+            <a:off x="548640" y="1783080"/>
+            <a:ext cx="11064240" cy="0"/>
+          </a:xfrm>
+          <a:prstGeom prst="line">
+            <a:avLst/>
+          </a:prstGeom>
+          <a:noFill/>
+          <a:ln w="9525">
+            <a:solidFill>
+              <a:srgbClr val="CBD5E1"/>
+            </a:solidFill>
+            <a:prstDash val="solid"/>
+          </a:ln>
+        </p:spPr>
+      </p:sp>
+      <p:sp>
+        <p:nvSpPr>
+          <p:cNvPr id="9" name="Text 7"/>
+          <p:cNvSpPr txBox="1"/>
+          <p:nvPr/>
+        </p:nvSpPr>
+        <p:spPr>
+          <a:xfrm>
+            <a:off x="548640" y="1783080"/>
+            <a:ext cx="3840480" cy="502920"/>
+          </a:xfrm>
+          <a:prstGeom prst="rect">
+            <a:avLst/>
+          </a:prstGeom>
+          <a:noFill/>
+          <a:ln/>
+        </p:spPr>
+        <p:txBody>
+          <a:bodyPr wrap="square" lIns="0" tIns="0" rIns="0" bIns="0" rtlCol="0" anchor="ctr"/>
+          <a:lstStyle/>
+          <a:p>
+            <a:pPr indent="0" marL="0">
+              <a:buNone/>
+            </a:pPr>
+            <a:r>
+              <a:rPr lang="en-US" sz="1500" b="1" dirty="0">
+                <a:solidFill>
+                  <a:srgbClr val="0B1D33"/>
+                </a:solidFill>
+                <a:latin typeface="Calibri" pitchFamily="34" charset="0"/>
+                <a:ea typeface="Calibri" pitchFamily="34" charset="-122"/>
+                <a:cs typeface="Calibri" pitchFamily="34" charset="-120"/>
+              </a:rPr>
+              <a:t>Finds personal data by itself</a:t>
+            </a:r>
+            <a:endParaRPr lang="en-US" sz="1500" dirty="0"/>
+          </a:p>
+        </p:txBody>
+      </p:sp>
+      <p:pic>
+        <p:nvPicPr>
+          <p:cNvPr id="10" name="cell 0 0" descr="MaskGuard: Finds personal data by itself: yes">    </p:cNvPr>
+          <p:cNvPicPr>
+            <a:picLocks noChangeAspect="1"/>
+          </p:cNvPicPr>
+          <p:nvPr/>
+        </p:nvPicPr>
+        <p:blipFill>
+          <a:blip r:embed="rId1"/>
+          <a:stretch>
+            <a:fillRect/>
+          </a:stretch>
+        </p:blipFill>
+        <p:spPr>
+          <a:xfrm>
+            <a:off x="5234940" y="1897380"/>
+            <a:ext cx="274320" cy="274320"/>
+          </a:xfrm>
+          <a:prstGeom prst="rect">
+            <a:avLst/>
+          </a:prstGeom>
+        </p:spPr>
+      </p:pic>
+      <p:pic>
+        <p:nvPicPr>
+          <p:cNvPr id="11" name="cell 0 1" descr="Encryption (incl. quantum-safe): Finds personal data by itself: no">    </p:cNvPr>
+          <p:cNvPicPr>
+            <a:picLocks noChangeAspect="1"/>
+          </p:cNvPicPr>
+          <p:nvPr/>
+        </p:nvPicPr>
+        <p:blipFill>
+          <a:blip r:embed="rId2"/>
+          <a:stretch>
+            <a:fillRect/>
+          </a:stretch>
+        </p:blipFill>
+        <p:spPr>
+          <a:xfrm>
+            <a:off x="7018020" y="1897380"/>
+            <a:ext cx="274320" cy="274320"/>
+          </a:xfrm>
+          <a:prstGeom prst="rect">
+            <a:avLst/>
+          </a:prstGeom>
+        </p:spPr>
+      </p:pic>
+      <p:pic>
+        <p:nvPicPr>
+          <p:cNvPr id="12" name="cell 0 2" descr="Masked copy of the database: Finds personal data by itself: no">    </p:cNvPr>
+          <p:cNvPicPr>
+            <a:picLocks noChangeAspect="1"/>
+          </p:cNvPicPr>
+          <p:nvPr/>
+        </p:nvPicPr>
+        <p:blipFill>
+          <a:blip r:embed="rId3"/>
+          <a:stretch>
+            <a:fillRect/>
+          </a:stretch>
+        </p:blipFill>
+        <p:spPr>
+          <a:xfrm>
+            <a:off x="8801100" y="1897380"/>
+            <a:ext cx="274320" cy="274320"/>
+          </a:xfrm>
+          <a:prstGeom prst="rect">
+            <a:avLst/>
+          </a:prstGeom>
+        </p:spPr>
+      </p:pic>
+      <p:pic>
+        <p:nvPicPr>
+          <p:cNvPr id="13" name="cell 0 3" descr="Screen-only masking: Finds personal data by itself: no">    </p:cNvPr>
+          <p:cNvPicPr>
+            <a:picLocks noChangeAspect="1"/>
+          </p:cNvPicPr>
+          <p:nvPr/>
+        </p:nvPicPr>
+        <p:blipFill>
+          <a:blip r:embed="rId4"/>
+          <a:stretch>
+            <a:fillRect/>
+          </a:stretch>
+        </p:blipFill>
+        <p:spPr>
+          <a:xfrm>
+            <a:off x="10584180" y="1897380"/>
+            <a:ext cx="274320" cy="274320"/>
+          </a:xfrm>
+          <a:prstGeom prst="rect">
+            <a:avLst/>
+          </a:prstGeom>
+        </p:spPr>
+      </p:pic>
+      <p:sp>
+        <p:nvSpPr>
+          <p:cNvPr id="14" name="row line 1"/>
+          <p:cNvSpPr/>
+          <p:nvPr/>
+        </p:nvSpPr>
+        <p:spPr>
+          <a:xfrm>
+            <a:off x="548640" y="2286000"/>
+            <a:ext cx="11064240" cy="0"/>
+          </a:xfrm>
+          <a:prstGeom prst="line">
+            <a:avLst/>
+          </a:prstGeom>
+          <a:noFill/>
+          <a:ln w="9525">
+            <a:solidFill>
+              <a:srgbClr val="CBD5E1"/>
+            </a:solidFill>
+            <a:prstDash val="solid"/>
+          </a:ln>
+        </p:spPr>
+      </p:sp>
+      <p:sp>
+        <p:nvSpPr>
+          <p:cNvPr id="15" name="Text 9"/>
+          <p:cNvSpPr txBox="1"/>
+          <p:nvPr/>
+        </p:nvSpPr>
+        <p:spPr>
+          <a:xfrm>
+            <a:off x="548640" y="2286000"/>
+            <a:ext cx="3840480" cy="502920"/>
+          </a:xfrm>
+          <a:prstGeom prst="rect">
+            <a:avLst/>
+          </a:prstGeom>
+          <a:noFill/>
+          <a:ln/>
+        </p:spPr>
+        <p:txBody>
+          <a:bodyPr wrap="square" lIns="0" tIns="0" rIns="0" bIns="0" rtlCol="0" anchor="ctr"/>
+          <a:lstStyle/>
+          <a:p>
+            <a:pPr indent="0" marL="0">
+              <a:buNone/>
+            </a:pPr>
+            <a:r>
+              <a:rPr lang="en-US" sz="1500" b="1" dirty="0">
+                <a:solidFill>
+                  <a:srgbClr val="0B1D33"/>
+                </a:solidFill>
+                <a:latin typeface="Calibri" pitchFamily="34" charset="0"/>
+                <a:ea typeface="Calibri" pitchFamily="34" charset="-122"/>
+                <a:cs typeface="Calibri" pitchFamily="34" charset="-120"/>
+              </a:rPr>
+              <a:t>A different view for each role</a:t>
+            </a:r>
+            <a:endParaRPr lang="en-US" sz="1500" dirty="0"/>
+          </a:p>
+        </p:txBody>
+      </p:sp>
+      <p:pic>
+        <p:nvPicPr>
+          <p:cNvPr id="16" name="cell 1 0" descr="MaskGuard: A different view for each role: yes">    </p:cNvPr>
+          <p:cNvPicPr>
+            <a:picLocks noChangeAspect="1"/>
+          </p:cNvPicPr>
+          <p:nvPr/>
+        </p:nvPicPr>
+        <p:blipFill>
+          <a:blip r:embed="rId5"/>
+          <a:stretch>
+            <a:fillRect/>
+          </a:stretch>
+        </p:blipFill>
+        <p:spPr>
+          <a:xfrm>
+            <a:off x="5234940" y="2400300"/>
+            <a:ext cx="274320" cy="274320"/>
+          </a:xfrm>
+          <a:prstGeom prst="rect">
+            <a:avLst/>
+          </a:prstGeom>
+        </p:spPr>
+      </p:pic>
+      <p:pic>
+        <p:nvPicPr>
+          <p:cNvPr id="17" name="cell 1 1" descr="Encryption (incl. quantum-safe): A different view for each role: no">    </p:cNvPr>
+          <p:cNvPicPr>
+            <a:picLocks noChangeAspect="1"/>
+          </p:cNvPicPr>
+          <p:nvPr/>
+        </p:nvPicPr>
+        <p:blipFill>
+          <a:blip r:embed="rId6"/>
+          <a:stretch>
+            <a:fillRect/>
+          </a:stretch>
+        </p:blipFill>
+        <p:spPr>
+          <a:xfrm>
+            <a:off x="7018020" y="2400300"/>
+            <a:ext cx="274320" cy="274320"/>
+          </a:xfrm>
+          <a:prstGeom prst="rect">
+            <a:avLst/>
+          </a:prstGeom>
+        </p:spPr>
+      </p:pic>
+      <p:pic>
+        <p:nvPicPr>
+          <p:cNvPr id="18" name="cell 1 2" descr="Masked copy of the database: A different view for each role: no">    </p:cNvPr>
+          <p:cNvPicPr>
+            <a:picLocks noChangeAspect="1"/>
+          </p:cNvPicPr>
+          <p:nvPr/>
+        </p:nvPicPr>
+        <p:blipFill>
+          <a:blip r:embed="rId7"/>
+          <a:stretch>
+            <a:fillRect/>
+          </a:stretch>
+        </p:blipFill>
+        <p:spPr>
+          <a:xfrm>
+            <a:off x="8801100" y="2400300"/>
+            <a:ext cx="274320" cy="274320"/>
+          </a:xfrm>
+          <a:prstGeom prst="rect">
+            <a:avLst/>
+          </a:prstGeom>
+        </p:spPr>
+      </p:pic>
+      <p:pic>
+        <p:nvPicPr>
+          <p:cNvPr id="19" name="cell 1 3" descr="Screen-only masking: A different view for each role: yes">    </p:cNvPr>
+          <p:cNvPicPr>
+            <a:picLocks noChangeAspect="1"/>
+          </p:cNvPicPr>
+          <p:nvPr/>
+        </p:nvPicPr>
+        <p:blipFill>
+          <a:blip r:embed="rId8"/>
+          <a:stretch>
+            <a:fillRect/>
+          </a:stretch>
+        </p:blipFill>
+        <p:spPr>
+          <a:xfrm>
+            <a:off x="10584180" y="2400300"/>
+            <a:ext cx="274320" cy="274320"/>
+          </a:xfrm>
+          <a:prstGeom prst="rect">
+            <a:avLst/>
+          </a:prstGeom>
+        </p:spPr>
+      </p:pic>
+      <p:sp>
+        <p:nvSpPr>
+          <p:cNvPr id="20" name="row line 2"/>
+          <p:cNvSpPr/>
+          <p:nvPr/>
+        </p:nvSpPr>
+        <p:spPr>
+          <a:xfrm>
+            <a:off x="548640" y="2788920"/>
+            <a:ext cx="11064240" cy="0"/>
+          </a:xfrm>
+          <a:prstGeom prst="line">
+            <a:avLst/>
+          </a:prstGeom>
+          <a:noFill/>
+          <a:ln w="9525">
+            <a:solidFill>
+              <a:srgbClr val="CBD5E1"/>
+            </a:solidFill>
+            <a:prstDash val="solid"/>
+          </a:ln>
+        </p:spPr>
+      </p:sp>
+      <p:sp>
+        <p:nvSpPr>
+          <p:cNvPr id="21" name="Text 11"/>
+          <p:cNvSpPr txBox="1"/>
+          <p:nvPr/>
+        </p:nvSpPr>
+        <p:spPr>
+          <a:xfrm>
+            <a:off x="548640" y="2788920"/>
+            <a:ext cx="3840480" cy="502920"/>
+          </a:xfrm>
+          <a:prstGeom prst="rect">
+            <a:avLst/>
+          </a:prstGeom>
+          <a:noFill/>
+          <a:ln/>
+        </p:spPr>
+        <p:txBody>
+          <a:bodyPr wrap="square" lIns="0" tIns="0" rIns="0" bIns="0" rtlCol="0" anchor="ctr"/>
+          <a:lstStyle/>
+          <a:p>
+            <a:pPr indent="0" marL="0">
+              <a:buNone/>
+            </a:pPr>
+            <a:r>
+              <a:rPr lang="en-US" sz="1500" b="1" dirty="0">
+                <a:solidFill>
+                  <a:srgbClr val="0B1D33"/>
+                </a:solidFill>
+                <a:latin typeface="Calibri" pitchFamily="34" charset="0"/>
+                <a:ea typeface="Calibri" pitchFamily="34" charset="-122"/>
+                <a:cs typeface="Calibri" pitchFamily="34" charset="-120"/>
+              </a:rPr>
+              <a:t>Stops guessing a value through a search</a:t>
+            </a:r>
+            <a:endParaRPr lang="en-US" sz="1500" dirty="0"/>
+          </a:p>
+        </p:txBody>
+      </p:sp>
+      <p:pic>
+        <p:nvPicPr>
+          <p:cNvPr id="22" name="cell 2 0" descr="MaskGuard: Stops guessing a value through a search: yes">    </p:cNvPr>
+          <p:cNvPicPr>
+            <a:picLocks noChangeAspect="1"/>
+          </p:cNvPicPr>
+          <p:nvPr/>
+        </p:nvPicPr>
+        <p:blipFill>
+          <a:blip r:embed="rId9"/>
+          <a:stretch>
+            <a:fillRect/>
+          </a:stretch>
+        </p:blipFill>
+        <p:spPr>
+          <a:xfrm>
+            <a:off x="5234940" y="2903220"/>
+            <a:ext cx="274320" cy="274320"/>
+          </a:xfrm>
+          <a:prstGeom prst="rect">
+            <a:avLst/>
+          </a:prstGeom>
+        </p:spPr>
+      </p:pic>
+      <p:pic>
+        <p:nvPicPr>
+          <p:cNvPr id="23" name="cell 2 1" descr="Encryption (incl. quantum-safe): Stops guessing a value through a search: no">    </p:cNvPr>
+          <p:cNvPicPr>
+            <a:picLocks noChangeAspect="1"/>
+          </p:cNvPicPr>
+          <p:nvPr/>
+        </p:nvPicPr>
+        <p:blipFill>
+          <a:blip r:embed="rId10"/>
+          <a:stretch>
+            <a:fillRect/>
+          </a:stretch>
+        </p:blipFill>
+        <p:spPr>
+          <a:xfrm>
+            <a:off x="7018020" y="2903220"/>
+            <a:ext cx="274320" cy="274320"/>
+          </a:xfrm>
+          <a:prstGeom prst="rect">
+            <a:avLst/>
+          </a:prstGeom>
+        </p:spPr>
+      </p:pic>
+      <p:pic>
+        <p:nvPicPr>
+          <p:cNvPr id="24" name="cell 2 2" descr="Masked copy of the database: Stops guessing a value through a search: yes">    </p:cNvPr>
+          <p:cNvPicPr>
+            <a:picLocks noChangeAspect="1"/>
+          </p:cNvPicPr>
+          <p:nvPr/>
+        </p:nvPicPr>
+        <p:blipFill>
+          <a:blip r:embed="rId11"/>
+          <a:stretch>
+            <a:fillRect/>
+          </a:stretch>
+        </p:blipFill>
+        <p:spPr>
+          <a:xfrm>
+            <a:off x="8801100" y="2903220"/>
+            <a:ext cx="274320" cy="274320"/>
+          </a:xfrm>
+          <a:prstGeom prst="rect">
+            <a:avLst/>
+          </a:prstGeom>
+        </p:spPr>
+      </p:pic>
+      <p:pic>
+        <p:nvPicPr>
+          <p:cNvPr id="25" name="cell 2 3" descr="Screen-only masking: Stops guessing a value through a search: no">    </p:cNvPr>
+          <p:cNvPicPr>
+            <a:picLocks noChangeAspect="1"/>
+          </p:cNvPicPr>
+          <p:nvPr/>
+        </p:nvPicPr>
+        <p:blipFill>
+          <a:blip r:embed="rId12"/>
+          <a:stretch>
+            <a:fillRect/>
+          </a:stretch>
+        </p:blipFill>
+        <p:spPr>
+          <a:xfrm>
+            <a:off x="10584180" y="2903220"/>
+            <a:ext cx="274320" cy="274320"/>
+          </a:xfrm>
+          <a:prstGeom prst="rect">
+            <a:avLst/>
+          </a:prstGeom>
+        </p:spPr>
+      </p:pic>
+      <p:sp>
+        <p:nvSpPr>
+          <p:cNvPr id="26" name="row line 3"/>
+          <p:cNvSpPr/>
+          <p:nvPr/>
+        </p:nvSpPr>
+        <p:spPr>
+          <a:xfrm>
+            <a:off x="548640" y="3291840"/>
+            <a:ext cx="11064240" cy="0"/>
+          </a:xfrm>
+          <a:prstGeom prst="line">
+            <a:avLst/>
+          </a:prstGeom>
+          <a:noFill/>
+          <a:ln w="9525">
+            <a:solidFill>
+              <a:srgbClr val="CBD5E1"/>
+            </a:solidFill>
+            <a:prstDash val="solid"/>
+          </a:ln>
+        </p:spPr>
+      </p:sp>
+      <p:sp>
+        <p:nvSpPr>
+          <p:cNvPr id="27" name="Text 13"/>
+          <p:cNvSpPr txBox="1"/>
+          <p:nvPr/>
+        </p:nvSpPr>
+        <p:spPr>
+          <a:xfrm>
+            <a:off x="548640" y="3291840"/>
+            <a:ext cx="3840480" cy="502920"/>
+          </a:xfrm>
+          <a:prstGeom prst="rect">
+            <a:avLst/>
+          </a:prstGeom>
+          <a:noFill/>
+          <a:ln/>
+        </p:spPr>
+        <p:txBody>
+          <a:bodyPr wrap="square" lIns="0" tIns="0" rIns="0" bIns="0" rtlCol="0" anchor="ctr"/>
+          <a:lstStyle/>
+          <a:p>
+            <a:pPr indent="0" marL="0">
+              <a:buNone/>
+            </a:pPr>
+            <a:r>
+              <a:rPr lang="en-US" sz="1500" b="1" dirty="0">
+                <a:solidFill>
+                  <a:srgbClr val="0B1D33"/>
+                </a:solidFill>
+                <a:latin typeface="Calibri" pitchFamily="34" charset="0"/>
+                <a:ea typeface="Calibri" pitchFamily="34" charset="-122"/>
+                <a:cs typeface="Calibri" pitchFamily="34" charset="-120"/>
+              </a:rPr>
+              <a:t>Data stays in place, never copied</a:t>
+            </a:r>
+            <a:endParaRPr lang="en-US" sz="1500" dirty="0"/>
+          </a:p>
+        </p:txBody>
+      </p:sp>
+      <p:pic>
+        <p:nvPicPr>
+          <p:cNvPr id="28" name="cell 3 0" descr="MaskGuard: Data stays in place, never copied: yes">    </p:cNvPr>
+          <p:cNvPicPr>
+            <a:picLocks noChangeAspect="1"/>
+          </p:cNvPicPr>
+          <p:nvPr/>
+        </p:nvPicPr>
+        <p:blipFill>
+          <a:blip r:embed="rId13"/>
+          <a:stretch>
+            <a:fillRect/>
+          </a:stretch>
+        </p:blipFill>
+        <p:spPr>
+          <a:xfrm>
+            <a:off x="5234940" y="3406140"/>
+            <a:ext cx="274320" cy="274320"/>
+          </a:xfrm>
+          <a:prstGeom prst="rect">
+            <a:avLst/>
+          </a:prstGeom>
+        </p:spPr>
+      </p:pic>
+      <p:pic>
+        <p:nvPicPr>
+          <p:cNvPr id="29" name="cell 3 1" descr="Encryption (incl. quantum-safe): Data stays in place, never copied: yes">    </p:cNvPr>
+          <p:cNvPicPr>
+            <a:picLocks noChangeAspect="1"/>
+          </p:cNvPicPr>
+          <p:nvPr/>
+        </p:nvPicPr>
+        <p:blipFill>
+          <a:blip r:embed="rId14"/>
+          <a:stretch>
+            <a:fillRect/>
+          </a:stretch>
+        </p:blipFill>
+        <p:spPr>
+          <a:xfrm>
+            <a:off x="7018020" y="3406140"/>
+            <a:ext cx="274320" cy="274320"/>
+          </a:xfrm>
+          <a:prstGeom prst="rect">
+            <a:avLst/>
+          </a:prstGeom>
+        </p:spPr>
+      </p:pic>
+      <p:pic>
+        <p:nvPicPr>
+          <p:cNvPr id="30" name="cell 3 2" descr="Masked copy of the database: Data stays in place, never copied: no">    </p:cNvPr>
+          <p:cNvPicPr>
+            <a:picLocks noChangeAspect="1"/>
+          </p:cNvPicPr>
+          <p:nvPr/>
+        </p:nvPicPr>
+        <p:blipFill>
+          <a:blip r:embed="rId15"/>
+          <a:stretch>
+            <a:fillRect/>
+          </a:stretch>
+        </p:blipFill>
+        <p:spPr>
+          <a:xfrm>
+            <a:off x="8801100" y="3406140"/>
+            <a:ext cx="274320" cy="274320"/>
+          </a:xfrm>
+          <a:prstGeom prst="rect">
+            <a:avLst/>
+          </a:prstGeom>
+        </p:spPr>
+      </p:pic>
+      <p:pic>
+        <p:nvPicPr>
+          <p:cNvPr id="31" name="cell 3 3" descr="Screen-only masking: Data stays in place, never copied: yes">    </p:cNvPr>
+          <p:cNvPicPr>
+            <a:picLocks noChangeAspect="1"/>
+          </p:cNvPicPr>
+          <p:nvPr/>
+        </p:nvPicPr>
+        <p:blipFill>
+          <a:blip r:embed="rId16"/>
+          <a:stretch>
+            <a:fillRect/>
+          </a:stretch>
+        </p:blipFill>
+        <p:spPr>
+          <a:xfrm>
+            <a:off x="10584180" y="3406140"/>
+            <a:ext cx="274320" cy="274320"/>
+          </a:xfrm>
+          <a:prstGeom prst="rect">
+            <a:avLst/>
+          </a:prstGeom>
+        </p:spPr>
+      </p:pic>
+      <p:sp>
+        <p:nvSpPr>
+          <p:cNvPr id="32" name="key message"/>
+          <p:cNvSpPr/>
+          <p:nvPr/>
+        </p:nvSpPr>
+        <p:spPr>
+          <a:xfrm>
+            <a:off x="548640" y="3931920"/>
+            <a:ext cx="11064240" cy="868680"/>
+          </a:xfrm>
+          <a:prstGeom prst="roundRect">
+            <a:avLst>
+              <a:gd name="adj" fmla="val 8421"/>
+            </a:avLst>
+          </a:prstGeom>
+          <a:solidFill>
+            <a:srgbClr val="0B1D33"/>
+          </a:solidFill>
+          <a:ln w="9525">
+            <a:solidFill>
+              <a:srgbClr val="0B1D33"/>
+            </a:solidFill>
+            <a:prstDash val="solid"/>
+          </a:ln>
+        </p:spPr>
+      </p:sp>
+      <p:sp>
+        <p:nvSpPr>
+          <p:cNvPr id="33" name="lock circle"/>
+          <p:cNvSpPr/>
+          <p:nvPr/>
+        </p:nvSpPr>
+        <p:spPr>
+          <a:xfrm>
+            <a:off x="731520" y="4050792"/>
+            <a:ext cx="621792" cy="621792"/>
+          </a:xfrm>
+          <a:prstGeom prst="ellipse">
+            <a:avLst/>
+          </a:prstGeom>
+          <a:solidFill>
+            <a:srgbClr val="D97706"/>
+          </a:solidFill>
+          <a:ln w="12700">
+            <a:solidFill>
+              <a:srgbClr val="D97706"/>
+            </a:solidFill>
+            <a:prstDash val="solid"/>
+          </a:ln>
+        </p:spPr>
+      </p:sp>
+      <p:pic>
+        <p:nvPicPr>
+          <p:cNvPr id="34" name="lock icon" descr="lock">    </p:cNvPr>
+          <p:cNvPicPr>
+            <a:picLocks noChangeAspect="1"/>
+          </p:cNvPicPr>
+          <p:nvPr/>
+        </p:nvPicPr>
+        <p:blipFill>
+          <a:blip r:embed="rId17"/>
+          <a:stretch>
+            <a:fillRect/>
+          </a:stretch>
+        </p:blipFill>
+        <p:spPr>
+          <a:xfrm>
+            <a:off x="886968" y="4206240"/>
+            <a:ext cx="310896" cy="310896"/>
+          </a:xfrm>
+          <a:prstGeom prst="rect">
+            <a:avLst/>
+          </a:prstGeom>
+        </p:spPr>
+      </p:pic>
+      <p:sp>
+        <p:nvSpPr>
+          <p:cNvPr id="35" name="Text 16"/>
+          <p:cNvSpPr txBox="1"/>
+          <p:nvPr/>
+        </p:nvSpPr>
+        <p:spPr>
+          <a:xfrm>
+            <a:off x="1554480" y="3931920"/>
+            <a:ext cx="9875520" cy="868680"/>
+          </a:xfrm>
+          <a:prstGeom prst="rect">
+            <a:avLst/>
+          </a:prstGeom>
+          <a:noFill/>
+          <a:ln/>
+        </p:spPr>
+        <p:txBody>
+          <a:bodyPr wrap="square" lIns="0" tIns="0" rIns="0" bIns="0" rtlCol="0" anchor="ctr"/>
+          <a:lstStyle/>
+          <a:p>
+            <a:pPr indent="0" marL="0">
+              <a:buNone/>
+            </a:pPr>
+            <a:r>
+              <a:rPr lang="en-US" sz="1500" b="1" dirty="0">
+                <a:solidFill>
+                  <a:srgbClr val="FFFFFF"/>
+                </a:solidFill>
+                <a:latin typeface="Calibri" pitchFamily="34" charset="0"/>
+                <a:ea typeface="Calibri" pitchFamily="34" charset="-122"/>
+                <a:cs typeface="Calibri" pitchFamily="34" charset="-120"/>
+              </a:rPr>
+              <a:t>Encryption — even quantum-safe — keeps outsiders out. </a:t>
+            </a:r>
+            <a:pPr indent="0" marL="0">
+              <a:buNone/>
+            </a:pPr>
+            <a:r>
+              <a:rPr lang="en-US" sz="1500" dirty="0">
+                <a:solidFill>
+                  <a:srgbClr val="CBD5E1"/>
+                </a:solidFill>
+                <a:latin typeface="Calibri" pitchFamily="34" charset="0"/>
+                <a:ea typeface="Calibri" pitchFamily="34" charset="-122"/>
+                <a:cs typeface="Calibri" pitchFamily="34" charset="-120"/>
+              </a:rPr>
+              <a:t>But once the bank's own app decrypts the data, every insider sees all of it. MaskGuard decides what each insider sees, so use both.</a:t>
+            </a:r>
+            <a:endParaRPr lang="en-US" sz="1500" dirty="0"/>
+          </a:p>
+        </p:txBody>
+      </p:sp>
+      <p:sp>
+        <p:nvSpPr>
+          <p:cNvPr id="36" name="Text 17"/>
+          <p:cNvSpPr txBox="1"/>
+          <p:nvPr/>
+        </p:nvSpPr>
+        <p:spPr>
+          <a:xfrm>
+            <a:off x="548640" y="4892040"/>
+            <a:ext cx="2743200" cy="274320"/>
+          </a:xfrm>
+          <a:prstGeom prst="rect">
+            <a:avLst/>
+          </a:prstGeom>
+          <a:noFill/>
+          <a:ln/>
+        </p:spPr>
+        <p:txBody>
+          <a:bodyPr wrap="square" lIns="0" tIns="0" rIns="0" bIns="0" rtlCol="0" anchor="ctr"/>
+          <a:lstStyle/>
+          <a:p>
+            <a:pPr indent="0" marL="0">
+              <a:buNone/>
+            </a:pPr>
+            <a:r>
+              <a:rPr lang="en-US" sz="1500" b="1" dirty="0">
+                <a:solidFill>
+                  <a:srgbClr val="0B1D33"/>
+                </a:solidFill>
+                <a:latin typeface="Cambria" pitchFamily="34" charset="0"/>
+                <a:ea typeface="Cambria" pitchFamily="34" charset="-122"/>
+                <a:cs typeface="Cambria" pitchFamily="34" charset="-120"/>
+              </a:rPr>
+              <a:t>The market</a:t>
+            </a:r>
+            <a:endParaRPr lang="en-US" sz="1500" dirty="0"/>
+          </a:p>
+        </p:txBody>
+      </p:sp>
+      <p:sp>
+        <p:nvSpPr>
+          <p:cNvPr id="37" name="market 0"/>
+          <p:cNvSpPr/>
+          <p:nvPr/>
+        </p:nvSpPr>
+        <p:spPr>
+          <a:xfrm>
+            <a:off x="548640" y="5212080"/>
+            <a:ext cx="2514600" cy="896112"/>
+          </a:xfrm>
+          <a:prstGeom prst="roundRect">
+            <a:avLst>
+              <a:gd name="adj" fmla="val 8163"/>
+            </a:avLst>
+          </a:prstGeom>
+          <a:solidFill>
+            <a:srgbClr val="F1F5F9"/>
+          </a:solidFill>
+          <a:ln w="9525">
+            <a:solidFill>
+              <a:srgbClr val="F1F5F9"/>
+            </a:solidFill>
+            <a:prstDash val="solid"/>
+          </a:ln>
+        </p:spPr>
+      </p:sp>
+      <p:sp>
+        <p:nvSpPr>
+          <p:cNvPr id="38" name="Text 19"/>
+          <p:cNvSpPr txBox="1"/>
+          <p:nvPr/>
+        </p:nvSpPr>
+        <p:spPr>
+          <a:xfrm>
+            <a:off x="713232" y="5266944"/>
+            <a:ext cx="2240280" cy="411480"/>
+          </a:xfrm>
+          <a:prstGeom prst="rect">
+            <a:avLst/>
+          </a:prstGeom>
+          <a:noFill/>
+          <a:ln/>
+        </p:spPr>
+        <p:txBody>
+          <a:bodyPr wrap="square" lIns="0" tIns="0" rIns="0" bIns="0" rtlCol="0" anchor="ctr"/>
+          <a:lstStyle/>
+          <a:p>
+            <a:pPr indent="0" marL="0">
+              <a:buNone/>
+            </a:pPr>
+            <a:r>
+              <a:rPr lang="en-US" sz="1900" b="1" dirty="0">
+                <a:solidFill>
+                  <a:srgbClr val="0B1D33"/>
+                </a:solidFill>
+                <a:latin typeface="Cambria" pitchFamily="34" charset="0"/>
+                <a:ea typeface="Cambria" pitchFamily="34" charset="-122"/>
+                <a:cs typeface="Cambria" pitchFamily="34" charset="-120"/>
+              </a:rPr>
+              <a:t>$1.47 B → $2.6 B</a:t>
+            </a:r>
+            <a:endParaRPr lang="en-US" sz="1900" dirty="0"/>
+          </a:p>
+        </p:txBody>
+      </p:sp>
+      <p:sp>
+        <p:nvSpPr>
+          <p:cNvPr id="39" name="Text 20"/>
+          <p:cNvSpPr txBox="1"/>
+          <p:nvPr/>
+        </p:nvSpPr>
+        <p:spPr>
+          <a:xfrm>
+            <a:off x="713232" y="5669280"/>
+            <a:ext cx="2286000" cy="384048"/>
+          </a:xfrm>
+          <a:prstGeom prst="rect">
+            <a:avLst/>
+          </a:prstGeom>
+          <a:noFill/>
+          <a:ln/>
+        </p:spPr>
+        <p:txBody>
+          <a:bodyPr wrap="square" lIns="0" tIns="0" rIns="0" bIns="0" rtlCol="0" anchor="t"/>
+          <a:lstStyle/>
+          <a:p>
+            <a:pPr indent="0" marL="0">
+              <a:buNone/>
+            </a:pPr>
+            <a:r>
+              <a:rPr lang="en-US" sz="1200" dirty="0">
+                <a:solidFill>
+                  <a:srgbClr val="1E3A5F"/>
+                </a:solidFill>
+                <a:latin typeface="Calibri" pitchFamily="34" charset="0"/>
+                <a:ea typeface="Calibri" pitchFamily="34" charset="-122"/>
+                <a:cs typeface="Calibri" pitchFamily="34" charset="-120"/>
+              </a:rPr>
+              <a:t>data-masking market, 2025 → 2030</a:t>
+            </a:r>
+            <a:endParaRPr lang="en-US" sz="1200" dirty="0"/>
+          </a:p>
+        </p:txBody>
+      </p:sp>
+      <p:sp>
+        <p:nvSpPr>
+          <p:cNvPr id="40" name="market 1"/>
+          <p:cNvSpPr/>
+          <p:nvPr/>
+        </p:nvSpPr>
+        <p:spPr>
+          <a:xfrm>
+            <a:off x="3246120" y="5212080"/>
+            <a:ext cx="2514600" cy="896112"/>
+          </a:xfrm>
+          <a:prstGeom prst="roundRect">
+            <a:avLst>
+              <a:gd name="adj" fmla="val 8163"/>
+            </a:avLst>
+          </a:prstGeom>
+          <a:solidFill>
+            <a:srgbClr val="F1F5F9"/>
+          </a:solidFill>
+          <a:ln w="9525">
+            <a:solidFill>
+              <a:srgbClr val="F1F5F9"/>
+            </a:solidFill>
+            <a:prstDash val="solid"/>
+          </a:ln>
+        </p:spPr>
+      </p:sp>
+      <p:sp>
+        <p:nvSpPr>
+          <p:cNvPr id="41" name="Text 22"/>
+          <p:cNvSpPr txBox="1"/>
+          <p:nvPr/>
+        </p:nvSpPr>
+        <p:spPr>
+          <a:xfrm>
+            <a:off x="3410712" y="5266944"/>
+            <a:ext cx="2240280" cy="411480"/>
+          </a:xfrm>
+          <a:prstGeom prst="rect">
+            <a:avLst/>
+          </a:prstGeom>
+          <a:noFill/>
+          <a:ln/>
+        </p:spPr>
+        <p:txBody>
+          <a:bodyPr wrap="square" lIns="0" tIns="0" rIns="0" bIns="0" rtlCol="0" anchor="ctr"/>
+          <a:lstStyle/>
+          <a:p>
+            <a:pPr indent="0" marL="0">
+              <a:buNone/>
+            </a:pPr>
+            <a:r>
+              <a:rPr lang="en-US" sz="1900" b="1" dirty="0">
+                <a:solidFill>
+                  <a:srgbClr val="0B1D33"/>
+                </a:solidFill>
+                <a:latin typeface="Cambria" pitchFamily="34" charset="0"/>
+                <a:ea typeface="Cambria" pitchFamily="34" charset="-122"/>
+                <a:cs typeface="Cambria" pitchFamily="34" charset="-120"/>
+              </a:rPr>
+              <a:t>May 2027</a:t>
+            </a:r>
+            <a:endParaRPr lang="en-US" sz="1900" dirty="0"/>
+          </a:p>
+        </p:txBody>
+      </p:sp>
+      <p:sp>
+        <p:nvSpPr>
+          <p:cNvPr id="42" name="Text 23"/>
+          <p:cNvSpPr txBox="1"/>
+          <p:nvPr/>
+        </p:nvSpPr>
+        <p:spPr>
+          <a:xfrm>
+            <a:off x="3410712" y="5669280"/>
+            <a:ext cx="2286000" cy="384048"/>
+          </a:xfrm>
+          <a:prstGeom prst="rect">
+            <a:avLst/>
+          </a:prstGeom>
+          <a:noFill/>
+          <a:ln/>
+        </p:spPr>
+        <p:txBody>
+          <a:bodyPr wrap="square" lIns="0" tIns="0" rIns="0" bIns="0" rtlCol="0" anchor="t"/>
+          <a:lstStyle/>
+          <a:p>
+            <a:pPr indent="0" marL="0">
+              <a:buNone/>
+            </a:pPr>
+            <a:r>
+              <a:rPr lang="en-US" sz="1200" dirty="0">
+                <a:solidFill>
+                  <a:srgbClr val="1E3A5F"/>
+                </a:solidFill>
+                <a:latin typeface="Calibri" pitchFamily="34" charset="0"/>
+                <a:ea typeface="Calibri" pitchFamily="34" charset="-122"/>
+                <a:cs typeface="Calibri" pitchFamily="34" charset="-120"/>
+              </a:rPr>
+              <a:t>DPDP rules apply to every bank</a:t>
+            </a:r>
+            <a:endParaRPr lang="en-US" sz="1200" dirty="0"/>
+          </a:p>
+        </p:txBody>
+      </p:sp>
+      <p:sp>
+        <p:nvSpPr>
+          <p:cNvPr id="43" name="market 2"/>
+          <p:cNvSpPr/>
+          <p:nvPr/>
+        </p:nvSpPr>
+        <p:spPr>
+          <a:xfrm>
+            <a:off x="5943600" y="5212080"/>
+            <a:ext cx="2514600" cy="896112"/>
+          </a:xfrm>
+          <a:prstGeom prst="roundRect">
+            <a:avLst>
+              <a:gd name="adj" fmla="val 8163"/>
+            </a:avLst>
+          </a:prstGeom>
+          <a:solidFill>
+            <a:srgbClr val="F1F5F9"/>
+          </a:solidFill>
+          <a:ln w="9525">
+            <a:solidFill>
+              <a:srgbClr val="F1F5F9"/>
+            </a:solidFill>
+            <a:prstDash val="solid"/>
+          </a:ln>
+        </p:spPr>
+      </p:sp>
+      <p:sp>
+        <p:nvSpPr>
+          <p:cNvPr id="44" name="Text 25"/>
+          <p:cNvSpPr txBox="1"/>
+          <p:nvPr/>
+        </p:nvSpPr>
+        <p:spPr>
+          <a:xfrm>
+            <a:off x="6108192" y="5266944"/>
+            <a:ext cx="2240280" cy="411480"/>
+          </a:xfrm>
+          <a:prstGeom prst="rect">
+            <a:avLst/>
+          </a:prstGeom>
+          <a:noFill/>
+          <a:ln/>
+        </p:spPr>
+        <p:txBody>
+          <a:bodyPr wrap="square" lIns="0" tIns="0" rIns="0" bIns="0" rtlCol="0" anchor="ctr"/>
+          <a:lstStyle/>
+          <a:p>
+            <a:pPr indent="0" marL="0">
+              <a:buNone/>
+            </a:pPr>
+            <a:r>
+              <a:rPr lang="en-US" sz="1900" b="1" dirty="0">
+                <a:solidFill>
+                  <a:srgbClr val="0B1D33"/>
+                </a:solidFill>
+                <a:latin typeface="Cambria" pitchFamily="34" charset="0"/>
+                <a:ea typeface="Cambria" pitchFamily="34" charset="-122"/>
+                <a:cs typeface="Cambria" pitchFamily="34" charset="-120"/>
+              </a:rPr>
+              <a:t>Open source</a:t>
+            </a:r>
+            <a:endParaRPr lang="en-US" sz="1900" dirty="0"/>
+          </a:p>
+        </p:txBody>
+      </p:sp>
+      <p:sp>
+        <p:nvSpPr>
+          <p:cNvPr id="45" name="Text 26"/>
+          <p:cNvSpPr txBox="1"/>
+          <p:nvPr/>
+        </p:nvSpPr>
+        <p:spPr>
+          <a:xfrm>
+            <a:off x="6108192" y="5669280"/>
+            <a:ext cx="2286000" cy="384048"/>
+          </a:xfrm>
+          <a:prstGeom prst="rect">
+            <a:avLst/>
+          </a:prstGeom>
+          <a:noFill/>
+          <a:ln/>
+        </p:spPr>
+        <p:txBody>
+          <a:bodyPr wrap="square" lIns="0" tIns="0" rIns="0" bIns="0" rtlCol="0" anchor="t"/>
+          <a:lstStyle/>
+          <a:p>
+            <a:pPr indent="0" marL="0">
+              <a:buNone/>
+            </a:pPr>
+            <a:r>
+              <a:rPr lang="en-US" sz="1200" dirty="0">
+                <a:solidFill>
+                  <a:srgbClr val="1E3A5F"/>
+                </a:solidFill>
+                <a:latin typeface="Calibri" pitchFamily="34" charset="0"/>
+                <a:ea typeface="Calibri" pitchFamily="34" charset="-122"/>
+                <a:cs typeface="Calibri" pitchFamily="34" charset="-120"/>
+              </a:rPr>
+              <a:t>vs platforms at ≈ $100k–370k a year*</a:t>
+            </a:r>
+            <a:endParaRPr lang="en-US" sz="1200" dirty="0"/>
+          </a:p>
+        </p:txBody>
+      </p:sp>
+      <p:sp>
+        <p:nvSpPr>
+          <p:cNvPr id="46" name="buyers"/>
+          <p:cNvSpPr/>
+          <p:nvPr/>
+        </p:nvSpPr>
+        <p:spPr>
+          <a:xfrm>
+            <a:off x="8732520" y="4892040"/>
+            <a:ext cx="2880360" cy="1216152"/>
+          </a:xfrm>
+          <a:prstGeom prst="roundRect">
+            <a:avLst>
+              <a:gd name="adj" fmla="val 6015"/>
+            </a:avLst>
+          </a:prstGeom>
+          <a:solidFill>
+            <a:srgbClr val="FDEBD0"/>
+          </a:solidFill>
+          <a:ln w="9525">
+            <a:solidFill>
+              <a:srgbClr val="FDEBD0"/>
+            </a:solidFill>
+            <a:prstDash val="solid"/>
+          </a:ln>
+        </p:spPr>
+      </p:sp>
+      <p:sp>
+        <p:nvSpPr>
+          <p:cNvPr id="47" name="Text 28"/>
+          <p:cNvSpPr txBox="1"/>
+          <p:nvPr/>
+        </p:nvSpPr>
+        <p:spPr>
+          <a:xfrm>
+            <a:off x="8887968" y="4956048"/>
+            <a:ext cx="2606040" cy="274320"/>
+          </a:xfrm>
+          <a:prstGeom prst="rect">
+            <a:avLst/>
+          </a:prstGeom>
+          <a:noFill/>
+          <a:ln/>
+        </p:spPr>
+        <p:txBody>
+          <a:bodyPr wrap="square" lIns="0" tIns="0" rIns="0" bIns="0" rtlCol="0" anchor="ctr"/>
+          <a:lstStyle/>
+          <a:p>
+            <a:pPr indent="0" marL="0">
+              <a:buNone/>
+            </a:pPr>
+            <a:r>
+              <a:rPr lang="en-US" sz="1400" b="1" dirty="0">
+                <a:solidFill>
+                  <a:srgbClr val="D97706"/>
+                </a:solidFill>
+                <a:latin typeface="Calibri" pitchFamily="34" charset="0"/>
+                <a:ea typeface="Calibri" pitchFamily="34" charset="-122"/>
+                <a:cs typeface="Calibri" pitchFamily="34" charset="-120"/>
+              </a:rPr>
+              <a:t>Who buys first</a:t>
+            </a:r>
+            <a:endParaRPr lang="en-US" sz="1400" dirty="0"/>
+          </a:p>
+        </p:txBody>
+      </p:sp>
+      <p:sp>
+        <p:nvSpPr>
+          <p:cNvPr id="48" name="Text 29"/>
+          <p:cNvSpPr txBox="1"/>
+          <p:nvPr/>
+        </p:nvSpPr>
+        <p:spPr>
+          <a:xfrm>
+            <a:off x="8887968" y="5239512"/>
+            <a:ext cx="2606040" cy="841248"/>
+          </a:xfrm>
+          <a:prstGeom prst="rect">
+            <a:avLst/>
+          </a:prstGeom>
+          <a:noFill/>
+          <a:ln/>
+        </p:spPr>
+        <p:txBody>
+          <a:bodyPr wrap="square" lIns="0" tIns="0" rIns="0" bIns="0" rtlCol="0" anchor="t"/>
+          <a:lstStyle/>
+          <a:p>
+            <a:pPr indent="0" marL="0">
+              <a:buNone/>
+            </a:pPr>
+            <a:r>
+              <a:rPr lang="en-US" sz="1200" dirty="0">
+                <a:solidFill>
+                  <a:srgbClr val="0B1D33"/>
+                </a:solidFill>
+                <a:latin typeface="Calibri" pitchFamily="34" charset="0"/>
+                <a:ea typeface="Calibri" pitchFamily="34" charset="-122"/>
+                <a:cs typeface="Calibri" pitchFamily="34" charset="-120"/>
+              </a:rPr>
+              <a:t>NBFCs, co-op and small finance banks, fintechs, hospitals: DPDP applies, no budget for big platforms.</a:t>
+            </a:r>
+            <a:endParaRPr lang="en-US" sz="1200" dirty="0"/>
+          </a:p>
+        </p:txBody>
+      </p:sp>
+      <p:sp>
+        <p:nvSpPr>
+          <p:cNvPr id="49" name="Text 30"/>
+          <p:cNvSpPr txBox="1"/>
+          <p:nvPr/>
+        </p:nvSpPr>
+        <p:spPr>
+          <a:xfrm>
+            <a:off x="548640" y="6181344"/>
+            <a:ext cx="11064240" cy="237744"/>
+          </a:xfrm>
+          <a:prstGeom prst="rect">
+            <a:avLst/>
+          </a:prstGeom>
+          <a:noFill/>
+          <a:ln/>
+        </p:spPr>
+        <p:txBody>
+          <a:bodyPr wrap="square" lIns="0" tIns="0" rIns="0" bIns="0" rtlCol="0" anchor="ctr"/>
+          <a:lstStyle/>
+          <a:p>
+            <a:pPr indent="0" marL="0">
+              <a:buNone/>
+            </a:pPr>
+            <a:r>
+              <a:rPr lang="en-US" sz="900" i="1" dirty="0">
+                <a:solidFill>
+                  <a:srgbClr val="64748B"/>
+                </a:solidFill>
+                <a:latin typeface="Calibri" pitchFamily="34" charset="0"/>
+                <a:ea typeface="Calibri" pitchFamily="34" charset="-122"/>
+                <a:cs typeface="Calibri" pitchFamily="34" charset="-120"/>
+              </a:rPr>
+              <a:t>* review-site estimates for Immuta / Delphix; vendors don't publish prices. Market: Knowledge Sourcing Intelligence. Other databases' built-in masking (SQL Server DDM) masks results only; Microsoft documents it doesn't stop inference.</a:t>
+            </a:r>
+            <a:endParaRPr lang="en-US" sz="900" dirty="0"/>
+          </a:p>
+        </p:txBody>
+      </p:sp>
+      <p:sp>
+        <p:nvSpPr>
+          <p:cNvPr id="25" name="Slide Number Placeholder 0"/>
+          <p:cNvSpPr>
+            <a:spLocks noGrp="1"/>
+          </p:cNvSpPr>
+          <p:nvPr>
+            <p:ph type="sldNum" sz="quarter" idx="4294967295"/>
+          </p:nvPr>
+        </p:nvSpPr>
+        <p:spPr>
+          <a:xfrm>
+            <a:off x="11109960" y="6446520"/>
+            <a:ext cx="548640" cy="274320"/>
+          </a:xfrm>
+          <a:prstGeom prst="rect">
+            <a:avLst/>
+          </a:prstGeom>
+          <a:extLst>
+            <a:ext uri="{C572A759-6A51-4108-AA02-DFA0A04FC94B}">
+              <ma14:wrappingTextBoxFlag xmlns:ma14="http://schemas.microsoft.com/office/mac/drawingml/2011/main" val="0"/>
+            </a:ext>
+          </a:extLst>
+        </p:spPr>
+        <p:txBody>
+          <a:bodyPr/>
+          <a:lstStyle>
+            <a:lvl1pPr>
+              <a:defRPr sz="1000">
+                <a:solidFill>
+                  <a:srgbClr val="64748B"/>
+                </a:solidFill>
+              </a:defRPr>
+            </a:lvl1pPr>
+          </a:lstStyle>
+          <a:p>
+            <a:pPr algn="r"/>
+            <a:fld id="{F7021451-1387-4CA6-816F-3879F97B5CBC}" type="slidenum">
+              <a:rPr b="0" lang="en-US"/>
+              <a:t>11</a:t>
+            </a:fld>
+            <a:endParaRPr lang="en-US"/>
+          </a:p>
+        </p:txBody>
+      </p:sp>
+    </p:spTree>
+  </p:cSld>
+  <p:clrMapOvr>
+    <a:masterClrMapping/>
+  </p:clrMapOvr>
+</p:sld>
+</file>
+
+<file path=ppt/slides/slide12.xml><?xml version="1.0" encoding="utf-8"?>
+<p:sld xmlns:a="http://schemas.openxmlformats.org/drawingml/2006/main" xmlns:r="http://schemas.openxmlformats.org/officeDocument/2006/relationships" xmlns:p="http://schemas.openxmlformats.org/presentationml/2006/main">
+  <p:cSld name="Slide 12">
+    <p:spTree>
+      <p:nvGrpSpPr>
+        <p:cNvPr id="1" name=""/>
+        <p:cNvGrpSpPr/>
+        <p:nvPr/>
+      </p:nvGrpSpPr>
+      <p:grpSpPr>
+        <a:xfrm>
+          <a:off x="0" y="0"/>
+          <a:ext cx="0" cy="0"/>
+          <a:chOff x="0" y="0"/>
+          <a:chExt cx="0" cy="0"/>
+        </a:xfrm>
+      </p:grpSpPr>
+      <p:sp>
+        <p:nvSpPr>
+          <p:cNvPr id="2" name="Text 0"/>
+          <p:cNvSpPr/>
+          <p:nvPr>
+            <p:ph idx="100" type="title" hasCustomPrompt="1"/>
+          </p:nvPr>
+        </p:nvSpPr>
+        <p:spPr>
+          <a:xfrm>
+            <a:off x="548640" y="274320"/>
+            <a:ext cx="11064240" cy="777240"/>
+          </a:xfrm>
+          <a:prstGeom prst="rect">
+            <a:avLst/>
+          </a:prstGeom>
+          <a:noFill/>
+          <a:ln/>
+        </p:spPr>
+        <p:txBody>
+          <a:bodyPr wrap="square" rtlCol="0" anchor="ctr"/>
+          <a:lstStyle/>
+          <a:p>
+            <a:pPr algn="l" indent="0" marL="0">
+              <a:buNone/>
+            </a:pPr>
+            <a:r>
+              <a:rPr lang="en-US" sz="3000" b="1" dirty="0">
+                <a:solidFill>
                   <a:schemeClr val="bg1"/>
                 </a:solidFill>
                 <a:latin typeface="Cambria" pitchFamily="34" charset="0"/>
@@ -5229,7 +6685,7 @@
             <a:pPr algn="r"/>
             <a:fld id="{F7021451-1387-4CA6-816F-3879F97B5CBC}" type="slidenum">
               <a:rPr b="0" lang="en-US"/>
-              <a:t>11</a:t>
+              <a:t>12</a:t>
             </a:fld>
             <a:endParaRPr lang="en-US"/>
           </a:p>
@@ -11324,7 +12780,7 @@
               <a:buNone/>
             </a:pPr>
             <a:r>
-              <a:rPr lang="en-US" sz="3400" b="1" dirty="0">
+              <a:rPr lang="en-US" sz="2800" b="1" dirty="0">
                 <a:solidFill>
                   <a:srgbClr val="FFFFFF"/>
                 </a:solidFill>
@@ -11332,16 +12788,16 @@
                 <a:ea typeface="Cambria" pitchFamily="34" charset="-122"/>
                 <a:cs typeface="Cambria" pitchFamily="34" charset="-120"/>
               </a:rPr>
-              <a:t>0.999</a:t>
-            </a:r>
-            <a:endParaRPr lang="en-US" sz="3400" dirty="0"/>
+              <a:t>0.84 → 0.97</a:t>
+            </a:r>
+            <a:endParaRPr lang="en-US" sz="2800" dirty="0"/>
           </a:p>
           <a:p>
             <a:pPr indent="0" marL="0">
               <a:buNone/>
             </a:pPr>
             <a:r>
-              <a:rPr lang="en-US" sz="1250" dirty="0">
+              <a:rPr lang="en-US" sz="1150" dirty="0">
                 <a:solidFill>
                   <a:srgbClr val="CBD5E1"/>
                 </a:solidFill>
@@ -11349,9 +12805,9 @@
                 <a:ea typeface="Calibri" pitchFamily="34" charset="-122"/>
                 <a:cs typeface="Calibri" pitchFamily="34" charset="-120"/>
               </a:rPr>
-              <a:t>accuracy (F1) with misleading column names, vs 0.844 for rules alone</a:t>
-            </a:r>
-            <a:endParaRPr lang="en-US" sz="3400" dirty="0"/>
+              <a:t>F1 with misleading column names: rules alone vs rules + AI, 5 sample values. Real-data numbers: next slide.</a:t>
+            </a:r>
+            <a:endParaRPr lang="en-US" sz="2800" dirty="0"/>
           </a:p>
         </p:txBody>
       </p:sp>
@@ -11499,34 +12955,224 @@
                 <a:ea typeface="Cambria" pitchFamily="34" charset="-122"/>
                 <a:cs typeface="Cambria" pitchFamily="34" charset="-120"/>
               </a:rPr>
-              <a:t>No LLM, no quantum: classic ML that is quantum-safe</a:t>
+              <a:t>How accurate is the AI? Honest numbers, easy test to hard</a:t>
             </a:r>
             <a:endParaRPr lang="en-US" sz="3000" dirty="0"/>
           </a:p>
         </p:txBody>
       </p:sp>
-      <p:sp>
-        <p:nvSpPr>
-          <p:cNvPr id="3" name="maskguard column"/>
+      <p:graphicFrame>
+        <p:nvGraphicFramePr>
+          <p:cNvPr id="3" name="accuracy chart" descr=""/>
+          <p:cNvGraphicFramePr/>
+          <p:nvPr/>
+        </p:nvGraphicFramePr>
+        <p:xfrm>
+          <a:off x="548640" y="1188720"/>
+          <a:ext cx="6400800" cy="3794760"/>
+        </p:xfrm>
+        <a:graphic xmlns:a="http://schemas.openxmlformats.org/drawingml/2006/main">
+          <a:graphicData uri="http://schemas.openxmlformats.org/drawingml/2006/chart">
+            <c:chart xmlns:c="http://schemas.openxmlformats.org/drawingml/2006/chart" r:id="rId1"/>
+          </a:graphicData>
+        </a:graphic>
+      </p:graphicFrame>
+      <p:sp>
+        <p:nvSpPr>
+          <p:cNvPr id="4" name="Text 1"/>
+          <p:cNvSpPr txBox="1"/>
+          <p:nvPr/>
+        </p:nvSpPr>
+        <p:spPr>
+          <a:xfrm>
+            <a:off x="548640" y="5029200"/>
+            <a:ext cx="6309360" cy="1188720"/>
+          </a:xfrm>
+          <a:prstGeom prst="rect">
+            <a:avLst/>
+          </a:prstGeom>
+          <a:noFill/>
+          <a:ln/>
+        </p:spPr>
+        <p:txBody>
+          <a:bodyPr wrap="square" lIns="0" tIns="0" rIns="0" bIns="0" rtlCol="0" anchor="t"/>
+          <a:lstStyle/>
+          <a:p>
+            <a:pPr indent="0" marL="0">
+              <a:spcAft>
+                <a:spcPts val="400"/>
+              </a:spcAft>
+              <a:buNone/>
+            </a:pPr>
+            <a:r>
+              <a:rPr lang="en-US" sz="1250" b="1" dirty="0">
+                <a:solidFill>
+                  <a:srgbClr val="0B1D33"/>
+                </a:solidFill>
+                <a:latin typeface="Calibri" pitchFamily="34" charset="0"/>
+                <a:ea typeface="Calibri" pitchFamily="34" charset="-122"/>
+                <a:cs typeface="Calibri" pitchFamily="34" charset="-120"/>
+              </a:rPr>
+              <a:t>Grey + navy: </a:t>
+            </a:r>
+            <a:pPr indent="0" marL="0">
+              <a:spcAft>
+                <a:spcPts val="400"/>
+              </a:spcAft>
+              <a:buNone/>
+            </a:pPr>
+            <a:r>
+              <a:rPr lang="en-US" sz="1250" dirty="0">
+                <a:solidFill>
+                  <a:srgbClr val="1E3A5F"/>
+                </a:solidFill>
+                <a:latin typeface="Calibri" pitchFamily="34" charset="0"/>
+                <a:ea typeface="Calibri" pitchFamily="34" charset="-122"/>
+                <a:cs typeface="Calibri" pitchFamily="34" charset="-120"/>
+              </a:rPr>
+              <a:t>public benchmark (bharat-pii-bench), synthetic columns with misleading names, data the model never trained on. Clean, so read it as the upper bound.</a:t>
+            </a:r>
+            <a:endParaRPr lang="en-US" sz="1250" dirty="0"/>
+          </a:p>
+          <a:p>
+            <a:pPr indent="0" marL="0">
+              <a:spcAft>
+                <a:spcPts val="400"/>
+              </a:spcAft>
+              <a:buNone/>
+            </a:pPr>
+            <a:r>
+              <a:rPr lang="en-US" sz="1250" b="1" dirty="0">
+                <a:solidFill>
+                  <a:srgbClr val="D97706"/>
+                </a:solidFill>
+                <a:latin typeface="Calibri" pitchFamily="34" charset="0"/>
+                <a:ea typeface="Calibri" pitchFamily="34" charset="-122"/>
+                <a:cs typeface="Calibri" pitchFamily="34" charset="-120"/>
+              </a:rPr>
+              <a:t>Saffron: </a:t>
+            </a:r>
+            <a:pPr indent="0" marL="0">
+              <a:spcAft>
+                <a:spcPts val="400"/>
+              </a:spcAft>
+              <a:buNone/>
+            </a:pPr>
+            <a:r>
+              <a:rPr lang="en-US" sz="1250" dirty="0">
+                <a:solidFill>
+                  <a:srgbClr val="1E3A5F"/>
+                </a:solidFill>
+                <a:latin typeface="Calibri" pitchFamily="34" charset="0"/>
+                <a:ea typeface="Calibri" pitchFamily="34" charset="-122"/>
+                <a:cs typeface="Calibri" pitchFamily="34" charset="-120"/>
+              </a:rPr>
+              <a:t>the organisers' Saffron Bank data, 120 real-shaped columns.</a:t>
+            </a:r>
+            <a:endParaRPr lang="en-US" sz="1250" dirty="0"/>
+          </a:p>
+        </p:txBody>
+      </p:sp>
+      <p:sp>
+        <p:nvSpPr>
+          <p:cNvPr id="5" name="Text 2"/>
+          <p:cNvSpPr txBox="1"/>
+          <p:nvPr/>
+        </p:nvSpPr>
+        <p:spPr>
+          <a:xfrm>
+            <a:off x="7178040" y="1188720"/>
+            <a:ext cx="4434840" cy="365760"/>
+          </a:xfrm>
+          <a:prstGeom prst="rect">
+            <a:avLst/>
+          </a:prstGeom>
+          <a:noFill/>
+          <a:ln/>
+        </p:spPr>
+        <p:txBody>
+          <a:bodyPr wrap="square" lIns="0" tIns="0" rIns="0" bIns="0" rtlCol="0" anchor="ctr"/>
+          <a:lstStyle/>
+          <a:p>
+            <a:pPr indent="0" marL="0">
+              <a:buNone/>
+            </a:pPr>
+            <a:r>
+              <a:rPr lang="en-US" sz="1600" b="1" dirty="0">
+                <a:solidFill>
+                  <a:srgbClr val="0B1D33"/>
+                </a:solidFill>
+                <a:latin typeface="Cambria" pitchFamily="34" charset="0"/>
+                <a:ea typeface="Cambria" pitchFamily="34" charset="-122"/>
+                <a:cs typeface="Cambria" pitchFamily="34" charset="-120"/>
+              </a:rPr>
+              <a:t>First contact with the organisers' data</a:t>
+            </a:r>
+            <a:endParaRPr lang="en-US" sz="1600" dirty="0"/>
+          </a:p>
+        </p:txBody>
+      </p:sp>
+      <p:sp>
+        <p:nvSpPr>
+          <p:cNvPr id="6" name="Text 3"/>
+          <p:cNvSpPr txBox="1"/>
+          <p:nvPr/>
+        </p:nvSpPr>
+        <p:spPr>
+          <a:xfrm>
+            <a:off x="7178040" y="1554480"/>
+            <a:ext cx="4434840" cy="274320"/>
+          </a:xfrm>
+          <a:prstGeom prst="rect">
+            <a:avLst/>
+          </a:prstGeom>
+          <a:noFill/>
+          <a:ln/>
+        </p:spPr>
+        <p:txBody>
+          <a:bodyPr wrap="square" lIns="0" tIns="0" rIns="0" bIns="0" rtlCol="0" anchor="ctr"/>
+          <a:lstStyle/>
+          <a:p>
+            <a:pPr indent="0" marL="0">
+              <a:buNone/>
+            </a:pPr>
+            <a:r>
+              <a:rPr lang="en-US" sz="1250" dirty="0">
+                <a:solidFill>
+                  <a:srgbClr val="64748B"/>
+                </a:solidFill>
+                <a:latin typeface="Calibri" pitchFamily="34" charset="0"/>
+                <a:ea typeface="Calibri" pitchFamily="34" charset="-122"/>
+                <a:cs typeface="Calibri" pitchFamily="34" charset="-120"/>
+              </a:rPr>
+              <a:t>found 22 of 35 sensitive columns (precision 0.73 · recall 0.63)</a:t>
+            </a:r>
+            <a:endParaRPr lang="en-US" sz="1250" dirty="0"/>
+          </a:p>
+        </p:txBody>
+      </p:sp>
+      <p:sp>
+        <p:nvSpPr>
+          <p:cNvPr id="7" name="miss 0"/>
           <p:cNvSpPr/>
           <p:nvPr/>
         </p:nvSpPr>
         <p:spPr>
           <a:xfrm>
-            <a:off x="4297680" y="1188720"/>
-            <a:ext cx="1463040" cy="2770632"/>
+            <a:off x="7178040" y="1920240"/>
+            <a:ext cx="4434840" cy="475488"/>
           </a:xfrm>
           <a:prstGeom prst="roundRect">
             <a:avLst>
-              <a:gd name="adj" fmla="val 5000"/>
+              <a:gd name="adj" fmla="val 15385"/>
             </a:avLst>
           </a:prstGeom>
           <a:solidFill>
-            <a:srgbClr val="FDEBD0"/>
+            <a:srgbClr val="F1F5F9"/>
           </a:solidFill>
           <a:ln w="9525">
             <a:solidFill>
-              <a:srgbClr val="FDEBD0"/>
+              <a:srgbClr val="F1F5F9"/>
             </a:solidFill>
             <a:prstDash val="solid"/>
           </a:ln>
@@ -11534,14 +13180,14 @@
       </p:sp>
       <p:sp>
         <p:nvSpPr>
-          <p:cNvPr id="4" name="Text 2"/>
-          <p:cNvSpPr txBox="1"/>
-          <p:nvPr/>
-        </p:nvSpPr>
-        <p:spPr>
-          <a:xfrm>
-            <a:off x="4297680" y="1225296"/>
-            <a:ext cx="1463040" cy="585216"/>
+          <p:cNvPr id="8" name="Text 5"/>
+          <p:cNvSpPr txBox="1"/>
+          <p:nvPr/>
+        </p:nvSpPr>
+        <p:spPr>
+          <a:xfrm>
+            <a:off x="7287768" y="1920240"/>
+            <a:ext cx="411480" cy="475488"/>
           </a:xfrm>
           <a:prstGeom prst="rect">
             <a:avLst/>
@@ -11557,47 +13203,30 @@
               <a:buNone/>
             </a:pPr>
             <a:r>
-              <a:rPr lang="en-US" sz="1400" b="1" dirty="0">
+              <a:rPr lang="en-US" sz="2000" b="1" dirty="0">
                 <a:solidFill>
                   <a:srgbClr val="D97706"/>
                 </a:solidFill>
-                <a:latin typeface="Calibri" pitchFamily="34" charset="0"/>
-                <a:ea typeface="Calibri" pitchFamily="34" charset="-122"/>
-                <a:cs typeface="Calibri" pitchFamily="34" charset="-120"/>
-              </a:rPr>
-              <a:t>MaskGuard</a:t>
-            </a:r>
-            <a:endParaRPr lang="en-US" sz="1400" dirty="0"/>
-          </a:p>
-          <a:p>
-            <a:pPr algn="ctr" indent="0" marL="0">
-              <a:buNone/>
-            </a:pPr>
-            <a:r>
-              <a:rPr lang="en-US" sz="1400" b="1" dirty="0">
-                <a:solidFill>
-                  <a:srgbClr val="D97706"/>
-                </a:solidFill>
-                <a:latin typeface="Calibri" pitchFamily="34" charset="0"/>
-                <a:ea typeface="Calibri" pitchFamily="34" charset="-122"/>
-                <a:cs typeface="Calibri" pitchFamily="34" charset="-120"/>
-              </a:rPr>
-              <a:t>LightGBM + rules</a:t>
-            </a:r>
-            <a:endParaRPr lang="en-US" sz="1400" dirty="0"/>
-          </a:p>
-        </p:txBody>
-      </p:sp>
-      <p:sp>
-        <p:nvSpPr>
-          <p:cNvPr id="5" name="Text 3"/>
-          <p:cNvSpPr txBox="1"/>
-          <p:nvPr/>
-        </p:nvSpPr>
-        <p:spPr>
-          <a:xfrm>
-            <a:off x="5760720" y="1225296"/>
-            <a:ext cx="1463040" cy="585216"/>
+                <a:latin typeface="Cambria" pitchFamily="34" charset="0"/>
+                <a:ea typeface="Cambria" pitchFamily="34" charset="-122"/>
+                <a:cs typeface="Cambria" pitchFamily="34" charset="-120"/>
+              </a:rPr>
+              <a:t>6</a:t>
+            </a:r>
+            <a:endParaRPr lang="en-US" sz="2000" dirty="0"/>
+          </a:p>
+        </p:txBody>
+      </p:sp>
+      <p:sp>
+        <p:nvSpPr>
+          <p:cNvPr id="9" name="Text 6"/>
+          <p:cNvSpPr txBox="1"/>
+          <p:nvPr/>
+        </p:nvSpPr>
+        <p:spPr>
+          <a:xfrm>
+            <a:off x="7772400" y="1920240"/>
+            <a:ext cx="3749040" cy="475488"/>
           </a:xfrm>
           <a:prstGeom prst="rect">
             <a:avLst/>
@@ -11609,115 +13238,60 @@
           <a:bodyPr wrap="square" lIns="0" tIns="0" rIns="0" bIns="0" rtlCol="0" anchor="ctr"/>
           <a:lstStyle/>
           <a:p>
-            <a:pPr algn="ctr" indent="0" marL="0">
-              <a:buNone/>
-            </a:pPr>
-            <a:r>
-              <a:rPr lang="en-US" sz="1250" b="1" dirty="0">
-                <a:solidFill>
-                  <a:srgbClr val="1E3A5F"/>
-                </a:solidFill>
-                <a:latin typeface="Calibri" pitchFamily="34" charset="0"/>
-                <a:ea typeface="Calibri" pitchFamily="34" charset="-122"/>
-                <a:cs typeface="Calibri" pitchFamily="34" charset="-120"/>
-              </a:rPr>
-              <a:t>LLM-based</a:t>
-            </a:r>
-            <a:endParaRPr lang="en-US" sz="1250" dirty="0"/>
-          </a:p>
-          <a:p>
-            <a:pPr algn="ctr" indent="0" marL="0">
-              <a:buNone/>
-            </a:pPr>
-            <a:r>
-              <a:rPr lang="en-US" sz="1250" b="1" dirty="0">
-                <a:solidFill>
-                  <a:srgbClr val="1E3A5F"/>
-                </a:solidFill>
-                <a:latin typeface="Calibri" pitchFamily="34" charset="0"/>
-                <a:ea typeface="Calibri" pitchFamily="34" charset="-122"/>
-                <a:cs typeface="Calibri" pitchFamily="34" charset="-120"/>
-              </a:rPr>
-              <a:t>detection</a:t>
-            </a:r>
-            <a:endParaRPr lang="en-US" sz="1250" dirty="0"/>
-          </a:p>
-        </p:txBody>
-      </p:sp>
-      <p:sp>
-        <p:nvSpPr>
-          <p:cNvPr id="6" name="Text 4"/>
-          <p:cNvSpPr txBox="1"/>
-          <p:nvPr/>
-        </p:nvSpPr>
-        <p:spPr>
-          <a:xfrm>
-            <a:off x="7223760" y="1225296"/>
-            <a:ext cx="1463040" cy="585216"/>
-          </a:xfrm>
-          <a:prstGeom prst="rect">
-            <a:avLst/>
-          </a:prstGeom>
-          <a:noFill/>
-          <a:ln/>
-        </p:spPr>
-        <p:txBody>
-          <a:bodyPr wrap="square" lIns="0" tIns="0" rIns="0" bIns="0" rtlCol="0" anchor="ctr"/>
-          <a:lstStyle/>
-          <a:p>
-            <a:pPr algn="ctr" indent="0" marL="0">
-              <a:buNone/>
-            </a:pPr>
-            <a:r>
-              <a:rPr lang="en-US" sz="1250" b="1" dirty="0">
-                <a:solidFill>
-                  <a:srgbClr val="1E3A5F"/>
-                </a:solidFill>
-                <a:latin typeface="Calibri" pitchFamily="34" charset="0"/>
-                <a:ea typeface="Calibri" pitchFamily="34" charset="-122"/>
-                <a:cs typeface="Calibri" pitchFamily="34" charset="-120"/>
-              </a:rPr>
-              <a:t>Quantum ML</a:t>
-            </a:r>
-            <a:endParaRPr lang="en-US" sz="1250" dirty="0"/>
-          </a:p>
-          <a:p>
-            <a:pPr algn="ctr" indent="0" marL="0">
-              <a:buNone/>
-            </a:pPr>
-            <a:r>
-              <a:rPr lang="en-US" sz="1250" b="1" dirty="0">
-                <a:solidFill>
-                  <a:srgbClr val="1E3A5F"/>
-                </a:solidFill>
-                <a:latin typeface="Calibri" pitchFamily="34" charset="0"/>
-                <a:ea typeface="Calibri" pitchFamily="34" charset="-122"/>
-                <a:cs typeface="Calibri" pitchFamily="34" charset="-120"/>
-              </a:rPr>
-              <a:t>detection</a:t>
-            </a:r>
-            <a:endParaRPr lang="en-US" sz="1250" dirty="0"/>
-          </a:p>
-        </p:txBody>
-      </p:sp>
-      <p:sp>
-        <p:nvSpPr>
-          <p:cNvPr id="7" name="q row line 0"/>
+            <a:pPr indent="0" marL="0">
+              <a:buNone/>
+            </a:pPr>
+            <a:r>
+              <a:rPr lang="en-US" sz="1300" b="1" dirty="0">
+                <a:solidFill>
+                  <a:srgbClr val="0B1D33"/>
+                </a:solidFill>
+                <a:latin typeface="Calibri" pitchFamily="34" charset="0"/>
+                <a:ea typeface="Calibri" pitchFamily="34" charset="-122"/>
+                <a:cs typeface="Calibri" pitchFamily="34" charset="-120"/>
+              </a:rPr>
+              <a:t>money and credit score with short names</a:t>
+            </a:r>
+            <a:pPr indent="0" marL="0">
+              <a:buNone/>
+            </a:pPr>
+            <a:r>
+              <a:rPr lang="en-US" sz="1300" dirty="0">
+                <a:solidFill>
+                  <a:srgbClr val="64748B"/>
+                </a:solidFill>
+                <a:latin typeface="Calibri" pitchFamily="34" charset="0"/>
+                <a:ea typeface="Calibri" pitchFamily="34" charset="-122"/>
+                <a:cs typeface="Calibri" pitchFamily="34" charset="-120"/>
+              </a:rPr>
+              <a:t>  ·  bal, amt, limit</a:t>
+            </a:r>
+            <a:endParaRPr lang="en-US" sz="1300" dirty="0"/>
+          </a:p>
+        </p:txBody>
+      </p:sp>
+      <p:sp>
+        <p:nvSpPr>
+          <p:cNvPr id="10" name="miss 1"/>
           <p:cNvSpPr/>
           <p:nvPr/>
         </p:nvSpPr>
         <p:spPr>
           <a:xfrm>
-            <a:off x="548640" y="1847088"/>
-            <a:ext cx="8138160" cy="0"/>
-          </a:xfrm>
-          <a:prstGeom prst="line">
-            <a:avLst/>
-          </a:prstGeom>
-          <a:noFill/>
+            <a:off x="7178040" y="2468880"/>
+            <a:ext cx="4434840" cy="475488"/>
+          </a:xfrm>
+          <a:prstGeom prst="roundRect">
+            <a:avLst>
+              <a:gd name="adj" fmla="val 15385"/>
+            </a:avLst>
+          </a:prstGeom>
+          <a:solidFill>
+            <a:srgbClr val="F1F5F9"/>
+          </a:solidFill>
           <a:ln w="9525">
             <a:solidFill>
-              <a:srgbClr val="CBD5E1"/>
+              <a:srgbClr val="F1F5F9"/>
             </a:solidFill>
             <a:prstDash val="solid"/>
           </a:ln>
@@ -11725,14 +13299,14 @@
       </p:sp>
       <p:sp>
         <p:nvSpPr>
-          <p:cNvPr id="8" name="Text 6"/>
-          <p:cNvSpPr txBox="1"/>
-          <p:nvPr/>
-        </p:nvSpPr>
-        <p:spPr>
-          <a:xfrm>
-            <a:off x="548640" y="1847088"/>
-            <a:ext cx="3657600" cy="685800"/>
+          <p:cNvPr id="11" name="Text 8"/>
+          <p:cNvSpPr txBox="1"/>
+          <p:nvPr/>
+        </p:nvSpPr>
+        <p:spPr>
+          <a:xfrm>
+            <a:off x="7287768" y="2468880"/>
+            <a:ext cx="411480" cy="475488"/>
           </a:xfrm>
           <a:prstGeom prst="rect">
             <a:avLst/>
@@ -11744,11 +13318,50 @@
           <a:bodyPr wrap="square" lIns="0" tIns="0" rIns="0" bIns="0" rtlCol="0" anchor="ctr"/>
           <a:lstStyle/>
           <a:p>
+            <a:pPr algn="ctr" indent="0" marL="0">
+              <a:buNone/>
+            </a:pPr>
+            <a:r>
+              <a:rPr lang="en-US" sz="2000" b="1" dirty="0">
+                <a:solidFill>
+                  <a:srgbClr val="D97706"/>
+                </a:solidFill>
+                <a:latin typeface="Cambria" pitchFamily="34" charset="0"/>
+                <a:ea typeface="Cambria" pitchFamily="34" charset="-122"/>
+                <a:cs typeface="Cambria" pitchFamily="34" charset="-120"/>
+              </a:rPr>
+              <a:t>3</a:t>
+            </a:r>
+            <a:endParaRPr lang="en-US" sz="2000" dirty="0"/>
+          </a:p>
+        </p:txBody>
+      </p:sp>
+      <p:sp>
+        <p:nvSpPr>
+          <p:cNvPr id="12" name="Text 9"/>
+          <p:cNvSpPr txBox="1"/>
+          <p:nvPr/>
+        </p:nvSpPr>
+        <p:spPr>
+          <a:xfrm>
+            <a:off x="7772400" y="2468880"/>
+            <a:ext cx="3749040" cy="475488"/>
+          </a:xfrm>
+          <a:prstGeom prst="rect">
+            <a:avLst/>
+          </a:prstGeom>
+          <a:noFill/>
+          <a:ln/>
+        </p:spPr>
+        <p:txBody>
+          <a:bodyPr wrap="square" lIns="0" tIns="0" rIns="0" bIns="0" rtlCol="0" anchor="ctr"/>
+          <a:lstStyle/>
+          <a:p>
             <a:pPr indent="0" marL="0">
               <a:buNone/>
             </a:pPr>
             <a:r>
-              <a:rPr lang="en-US" sz="1500" b="1" dirty="0">
+              <a:rPr lang="en-US" sz="1300" b="1" dirty="0">
                 <a:solidFill>
                   <a:srgbClr val="0B1D33"/>
                 </a:solidFill>
@@ -11756,102 +13369,48 @@
                 <a:ea typeface="Calibri" pitchFamily="34" charset="-122"/>
                 <a:cs typeface="Calibri" pitchFamily="34" charset="-120"/>
               </a:rPr>
-              <a:t>Runs inside the bank, offline, on a normal CPU</a:t>
-            </a:r>
-            <a:endParaRPr lang="en-US" sz="1500" dirty="0"/>
-          </a:p>
-        </p:txBody>
-      </p:sp>
-      <p:pic>
-        <p:nvPicPr>
-          <p:cNvPr id="9" name="q cell 0 0" descr="MaskGuard LightGBM + rules: Runs inside the bank, offline, on a normal CPU: yes">    </p:cNvPr>
-          <p:cNvPicPr>
-            <a:picLocks noChangeAspect="1"/>
-          </p:cNvPicPr>
-          <p:nvPr/>
-        </p:nvPicPr>
-        <p:blipFill>
-          <a:blip r:embed="rId1"/>
-          <a:stretch>
-            <a:fillRect/>
-          </a:stretch>
-        </p:blipFill>
-        <p:spPr>
-          <a:xfrm>
-            <a:off x="4892040" y="2052828"/>
-            <a:ext cx="274320" cy="274320"/>
-          </a:xfrm>
-          <a:prstGeom prst="rect">
-            <a:avLst/>
-          </a:prstGeom>
-        </p:spPr>
-      </p:pic>
-      <p:pic>
-        <p:nvPicPr>
-          <p:cNvPr id="10" name="q cell 0 1" descr="LLM-based detection: Runs inside the bank, offline, on a normal CPU: partly">    </p:cNvPr>
-          <p:cNvPicPr>
-            <a:picLocks noChangeAspect="1"/>
-          </p:cNvPicPr>
-          <p:nvPr/>
-        </p:nvPicPr>
-        <p:blipFill>
-          <a:blip r:embed="rId2"/>
-          <a:stretch>
-            <a:fillRect/>
-          </a:stretch>
-        </p:blipFill>
-        <p:spPr>
-          <a:xfrm>
-            <a:off x="6355080" y="2052828"/>
-            <a:ext cx="274320" cy="274320"/>
-          </a:xfrm>
-          <a:prstGeom prst="rect">
-            <a:avLst/>
-          </a:prstGeom>
-        </p:spPr>
-      </p:pic>
-      <p:pic>
-        <p:nvPicPr>
-          <p:cNvPr id="11" name="q cell 0 2" descr="Quantum ML detection: Runs inside the bank, offline, on a normal CPU: partly">    </p:cNvPr>
-          <p:cNvPicPr>
-            <a:picLocks noChangeAspect="1"/>
-          </p:cNvPicPr>
-          <p:nvPr/>
-        </p:nvPicPr>
-        <p:blipFill>
-          <a:blip r:embed="rId3"/>
-          <a:stretch>
-            <a:fillRect/>
-          </a:stretch>
-        </p:blipFill>
-        <p:spPr>
-          <a:xfrm>
-            <a:off x="7818120" y="2052828"/>
-            <a:ext cx="274320" cy="274320"/>
-          </a:xfrm>
-          <a:prstGeom prst="rect">
-            <a:avLst/>
-          </a:prstGeom>
-        </p:spPr>
-      </p:pic>
-      <p:sp>
-        <p:nvSpPr>
-          <p:cNvPr id="12" name="q row line 1"/>
+              <a:t>account numbers</a:t>
+            </a:r>
+            <a:pPr indent="0" marL="0">
+              <a:buNone/>
+            </a:pPr>
+            <a:r>
+              <a:rPr lang="en-US" sz="1300" dirty="0">
+                <a:solidFill>
+                  <a:srgbClr val="64748B"/>
+                </a:solidFill>
+                <a:latin typeface="Calibri" pitchFamily="34" charset="0"/>
+                <a:ea typeface="Calibri" pitchFamily="34" charset="-122"/>
+                <a:cs typeface="Calibri" pitchFamily="34" charset="-120"/>
+              </a:rPr>
+              <a:t>  ·  looked like plain ids</a:t>
+            </a:r>
+            <a:endParaRPr lang="en-US" sz="1300" dirty="0"/>
+          </a:p>
+        </p:txBody>
+      </p:sp>
+      <p:sp>
+        <p:nvSpPr>
+          <p:cNvPr id="13" name="miss 2"/>
           <p:cNvSpPr/>
           <p:nvPr/>
         </p:nvSpPr>
         <p:spPr>
           <a:xfrm>
-            <a:off x="548640" y="2532888"/>
-            <a:ext cx="8138160" cy="0"/>
-          </a:xfrm>
-          <a:prstGeom prst="line">
-            <a:avLst/>
-          </a:prstGeom>
-          <a:noFill/>
+            <a:off x="7178040" y="3017520"/>
+            <a:ext cx="4434840" cy="475488"/>
+          </a:xfrm>
+          <a:prstGeom prst="roundRect">
+            <a:avLst>
+              <a:gd name="adj" fmla="val 15385"/>
+            </a:avLst>
+          </a:prstGeom>
+          <a:solidFill>
+            <a:srgbClr val="F1F5F9"/>
+          </a:solidFill>
           <a:ln w="9525">
             <a:solidFill>
-              <a:srgbClr val="CBD5E1"/>
+              <a:srgbClr val="F1F5F9"/>
             </a:solidFill>
             <a:prstDash val="solid"/>
           </a:ln>
@@ -11859,14 +13418,14 @@
       </p:sp>
       <p:sp>
         <p:nvSpPr>
-          <p:cNvPr id="13" name="Text 8"/>
-          <p:cNvSpPr txBox="1"/>
-          <p:nvPr/>
-        </p:nvSpPr>
-        <p:spPr>
-          <a:xfrm>
-            <a:off x="548640" y="2532888"/>
-            <a:ext cx="3657600" cy="685800"/>
+          <p:cNvPr id="14" name="Text 11"/>
+          <p:cNvSpPr txBox="1"/>
+          <p:nvPr/>
+        </p:nvSpPr>
+        <p:spPr>
+          <a:xfrm>
+            <a:off x="7287768" y="3017520"/>
+            <a:ext cx="411480" cy="475488"/>
           </a:xfrm>
           <a:prstGeom prst="rect">
             <a:avLst/>
@@ -11878,11 +13437,50 @@
           <a:bodyPr wrap="square" lIns="0" tIns="0" rIns="0" bIns="0" rtlCol="0" anchor="ctr"/>
           <a:lstStyle/>
           <a:p>
+            <a:pPr algn="ctr" indent="0" marL="0">
+              <a:buNone/>
+            </a:pPr>
+            <a:r>
+              <a:rPr lang="en-US" sz="2000" b="1" dirty="0">
+                <a:solidFill>
+                  <a:srgbClr val="D97706"/>
+                </a:solidFill>
+                <a:latin typeface="Cambria" pitchFamily="34" charset="0"/>
+                <a:ea typeface="Cambria" pitchFamily="34" charset="-122"/>
+                <a:cs typeface="Cambria" pitchFamily="34" charset="-120"/>
+              </a:rPr>
+              <a:t>2</a:t>
+            </a:r>
+            <a:endParaRPr lang="en-US" sz="2000" dirty="0"/>
+          </a:p>
+        </p:txBody>
+      </p:sp>
+      <p:sp>
+        <p:nvSpPr>
+          <p:cNvPr id="15" name="Text 12"/>
+          <p:cNvSpPr txBox="1"/>
+          <p:nvPr/>
+        </p:nvSpPr>
+        <p:spPr>
+          <a:xfrm>
+            <a:off x="7772400" y="3017520"/>
+            <a:ext cx="3749040" cy="475488"/>
+          </a:xfrm>
+          <a:prstGeom prst="rect">
+            <a:avLst/>
+          </a:prstGeom>
+          <a:noFill/>
+          <a:ln/>
+        </p:spPr>
+        <p:txBody>
+          <a:bodyPr wrap="square" lIns="0" tIns="0" rIns="0" bIns="0" rtlCol="0" anchor="ctr"/>
+          <a:lstStyle/>
+          <a:p>
             <a:pPr indent="0" marL="0">
               <a:buNone/>
             </a:pPr>
             <a:r>
-              <a:rPr lang="en-US" sz="1500" b="1" dirty="0">
+              <a:rPr lang="en-US" sz="1300" b="1" dirty="0">
                 <a:solidFill>
                   <a:srgbClr val="0B1D33"/>
                 </a:solidFill>
@@ -11890,102 +13488,48 @@
                 <a:ea typeface="Calibri" pitchFamily="34" charset="-122"/>
                 <a:cs typeface="Calibri" pitchFamily="34" charset="-120"/>
               </a:rPr>
-              <a:t>Same input, same answer, every time</a:t>
-            </a:r>
-            <a:endParaRPr lang="en-US" sz="1500" dirty="0"/>
-          </a:p>
-        </p:txBody>
-      </p:sp>
-      <p:pic>
-        <p:nvPicPr>
-          <p:cNvPr id="14" name="q cell 1 0" descr="MaskGuard LightGBM + rules: Same input, same answer, every time: yes">    </p:cNvPr>
-          <p:cNvPicPr>
-            <a:picLocks noChangeAspect="1"/>
-          </p:cNvPicPr>
-          <p:nvPr/>
-        </p:nvPicPr>
-        <p:blipFill>
-          <a:blip r:embed="rId4"/>
-          <a:stretch>
-            <a:fillRect/>
-          </a:stretch>
-        </p:blipFill>
-        <p:spPr>
-          <a:xfrm>
-            <a:off x="4892040" y="2738628"/>
-            <a:ext cx="274320" cy="274320"/>
-          </a:xfrm>
-          <a:prstGeom prst="rect">
-            <a:avLst/>
-          </a:prstGeom>
-        </p:spPr>
-      </p:pic>
-      <p:pic>
-        <p:nvPicPr>
-          <p:cNvPr id="15" name="q cell 1 1" descr="LLM-based detection: Same input, same answer, every time: no">    </p:cNvPr>
-          <p:cNvPicPr>
-            <a:picLocks noChangeAspect="1"/>
-          </p:cNvPicPr>
-          <p:nvPr/>
-        </p:nvPicPr>
-        <p:blipFill>
-          <a:blip r:embed="rId5"/>
-          <a:stretch>
-            <a:fillRect/>
-          </a:stretch>
-        </p:blipFill>
-        <p:spPr>
-          <a:xfrm>
-            <a:off x="6355080" y="2738628"/>
-            <a:ext cx="274320" cy="274320"/>
-          </a:xfrm>
-          <a:prstGeom prst="rect">
-            <a:avLst/>
-          </a:prstGeom>
-        </p:spPr>
-      </p:pic>
-      <p:pic>
-        <p:nvPicPr>
-          <p:cNvPr id="16" name="q cell 1 2" descr="Quantum ML detection: Same input, same answer, every time: partly">    </p:cNvPr>
-          <p:cNvPicPr>
-            <a:picLocks noChangeAspect="1"/>
-          </p:cNvPicPr>
-          <p:nvPr/>
-        </p:nvPicPr>
-        <p:blipFill>
-          <a:blip r:embed="rId6"/>
-          <a:stretch>
-            <a:fillRect/>
-          </a:stretch>
-        </p:blipFill>
-        <p:spPr>
-          <a:xfrm>
-            <a:off x="7818120" y="2738628"/>
-            <a:ext cx="274320" cy="274320"/>
-          </a:xfrm>
-          <a:prstGeom prst="rect">
-            <a:avLst/>
-          </a:prstGeom>
-        </p:spPr>
-      </p:pic>
-      <p:sp>
-        <p:nvSpPr>
-          <p:cNvPr id="17" name="q row line 2"/>
+              <a:t>PANs with 0000 digits</a:t>
+            </a:r>
+            <a:pPr indent="0" marL="0">
+              <a:buNone/>
+            </a:pPr>
+            <a:r>
+              <a:rPr lang="en-US" sz="1300" dirty="0">
+                <a:solidFill>
+                  <a:srgbClr val="64748B"/>
+                </a:solidFill>
+                <a:latin typeface="Calibri" pitchFamily="34" charset="0"/>
+                <a:ea typeface="Calibri" pitchFamily="34" charset="-122"/>
+                <a:cs typeface="Calibri" pitchFamily="34" charset="-120"/>
+              </a:rPr>
+              <a:t>  ·  failed the PAN check</a:t>
+            </a:r>
+            <a:endParaRPr lang="en-US" sz="1300" dirty="0"/>
+          </a:p>
+        </p:txBody>
+      </p:sp>
+      <p:sp>
+        <p:nvSpPr>
+          <p:cNvPr id="16" name="miss 3"/>
           <p:cNvSpPr/>
           <p:nvPr/>
         </p:nvSpPr>
         <p:spPr>
           <a:xfrm>
-            <a:off x="548640" y="3218688"/>
-            <a:ext cx="8138160" cy="0"/>
-          </a:xfrm>
-          <a:prstGeom prst="line">
-            <a:avLst/>
-          </a:prstGeom>
-          <a:noFill/>
+            <a:off x="7178040" y="3566160"/>
+            <a:ext cx="4434840" cy="475488"/>
+          </a:xfrm>
+          <a:prstGeom prst="roundRect">
+            <a:avLst>
+              <a:gd name="adj" fmla="val 15385"/>
+            </a:avLst>
+          </a:prstGeom>
+          <a:solidFill>
+            <a:srgbClr val="F1F5F9"/>
+          </a:solidFill>
           <a:ln w="9525">
             <a:solidFill>
-              <a:srgbClr val="CBD5E1"/>
+              <a:srgbClr val="F1F5F9"/>
             </a:solidFill>
             <a:prstDash val="solid"/>
           </a:ln>
@@ -11993,14 +13537,14 @@
       </p:sp>
       <p:sp>
         <p:nvSpPr>
-          <p:cNvPr id="18" name="Text 10"/>
-          <p:cNvSpPr txBox="1"/>
-          <p:nvPr/>
-        </p:nvSpPr>
-        <p:spPr>
-          <a:xfrm>
-            <a:off x="548640" y="3218688"/>
-            <a:ext cx="3657600" cy="685800"/>
+          <p:cNvPr id="17" name="Text 14"/>
+          <p:cNvSpPr txBox="1"/>
+          <p:nvPr/>
+        </p:nvSpPr>
+        <p:spPr>
+          <a:xfrm>
+            <a:off x="7287768" y="3566160"/>
+            <a:ext cx="411480" cy="475488"/>
           </a:xfrm>
           <a:prstGeom prst="rect">
             <a:avLst/>
@@ -12012,11 +13556,50 @@
           <a:bodyPr wrap="square" lIns="0" tIns="0" rIns="0" bIns="0" rtlCol="0" anchor="ctr"/>
           <a:lstStyle/>
           <a:p>
+            <a:pPr algn="ctr" indent="0" marL="0">
+              <a:buNone/>
+            </a:pPr>
+            <a:r>
+              <a:rPr lang="en-US" sz="2000" b="1" dirty="0">
+                <a:solidFill>
+                  <a:srgbClr val="D97706"/>
+                </a:solidFill>
+                <a:latin typeface="Cambria" pitchFamily="34" charset="0"/>
+                <a:ea typeface="Cambria" pitchFamily="34" charset="-122"/>
+                <a:cs typeface="Cambria" pitchFamily="34" charset="-120"/>
+              </a:rPr>
+              <a:t>2</a:t>
+            </a:r>
+            <a:endParaRPr lang="en-US" sz="2000" dirty="0"/>
+          </a:p>
+        </p:txBody>
+      </p:sp>
+      <p:sp>
+        <p:nvSpPr>
+          <p:cNvPr id="18" name="Text 15"/>
+          <p:cNvSpPr txBox="1"/>
+          <p:nvPr/>
+        </p:nvSpPr>
+        <p:spPr>
+          <a:xfrm>
+            <a:off x="7772400" y="3566160"/>
+            <a:ext cx="3749040" cy="475488"/>
+          </a:xfrm>
+          <a:prstGeom prst="rect">
+            <a:avLst/>
+          </a:prstGeom>
+          <a:noFill/>
+          <a:ln/>
+        </p:spPr>
+        <p:txBody>
+          <a:bodyPr wrap="square" lIns="0" tIns="0" rIns="0" bIns="0" rtlCol="0" anchor="ctr"/>
+          <a:lstStyle/>
+          <a:p>
             <a:pPr indent="0" marL="0">
               <a:buNone/>
             </a:pPr>
             <a:r>
-              <a:rPr lang="en-US" sz="1500" b="1" dirty="0">
+              <a:rPr lang="en-US" sz="1300" b="1" dirty="0">
                 <a:solidFill>
                   <a:srgbClr val="0B1D33"/>
                 </a:solidFill>
@@ -12024,94 +13607,36 @@
                 <a:ea typeface="Calibri" pitchFamily="34" charset="-122"/>
                 <a:cs typeface="Calibri" pitchFamily="34" charset="-120"/>
               </a:rPr>
-              <a:t>Milliseconds per column, no per-call cost</a:t>
-            </a:r>
-            <a:endParaRPr lang="en-US" sz="1500" dirty="0"/>
-          </a:p>
-        </p:txBody>
-      </p:sp>
-      <p:pic>
-        <p:nvPicPr>
-          <p:cNvPr id="19" name="q cell 2 0" descr="MaskGuard LightGBM + rules: Milliseconds per column, no per-call cost: yes">    </p:cNvPr>
-          <p:cNvPicPr>
-            <a:picLocks noChangeAspect="1"/>
-          </p:cNvPicPr>
-          <p:nvPr/>
-        </p:nvPicPr>
-        <p:blipFill>
-          <a:blip r:embed="rId7"/>
-          <a:stretch>
-            <a:fillRect/>
-          </a:stretch>
-        </p:blipFill>
-        <p:spPr>
-          <a:xfrm>
-            <a:off x="4892040" y="3424428"/>
-            <a:ext cx="274320" cy="274320"/>
-          </a:xfrm>
-          <a:prstGeom prst="rect">
-            <a:avLst/>
-          </a:prstGeom>
-        </p:spPr>
-      </p:pic>
-      <p:pic>
-        <p:nvPicPr>
-          <p:cNvPr id="20" name="q cell 2 1" descr="LLM-based detection: Milliseconds per column, no per-call cost: no">    </p:cNvPr>
-          <p:cNvPicPr>
-            <a:picLocks noChangeAspect="1"/>
-          </p:cNvPicPr>
-          <p:nvPr/>
-        </p:nvPicPr>
-        <p:blipFill>
-          <a:blip r:embed="rId8"/>
-          <a:stretch>
-            <a:fillRect/>
-          </a:stretch>
-        </p:blipFill>
-        <p:spPr>
-          <a:xfrm>
-            <a:off x="6355080" y="3424428"/>
-            <a:ext cx="274320" cy="274320"/>
-          </a:xfrm>
-          <a:prstGeom prst="rect">
-            <a:avLst/>
-          </a:prstGeom>
-        </p:spPr>
-      </p:pic>
-      <p:pic>
-        <p:nvPicPr>
-          <p:cNvPr id="21" name="q cell 2 2" descr="Quantum ML detection: Milliseconds per column, no per-call cost: no">    </p:cNvPr>
-          <p:cNvPicPr>
-            <a:picLocks noChangeAspect="1"/>
-          </p:cNvPicPr>
-          <p:nvPr/>
-        </p:nvPicPr>
-        <p:blipFill>
-          <a:blip r:embed="rId9"/>
-          <a:stretch>
-            <a:fillRect/>
-          </a:stretch>
-        </p:blipFill>
-        <p:spPr>
-          <a:xfrm>
-            <a:off x="7818120" y="3424428"/>
-            <a:ext cx="274320" cy="274320"/>
-          </a:xfrm>
-          <a:prstGeom prst="rect">
-            <a:avLst/>
-          </a:prstGeom>
-        </p:spPr>
-      </p:pic>
-      <p:sp>
-        <p:nvSpPr>
-          <p:cNvPr id="22" name="Text 11"/>
-          <p:cNvSpPr txBox="1"/>
-          <p:nvPr/>
-        </p:nvSpPr>
-        <p:spPr>
-          <a:xfrm>
-            <a:off x="548640" y="4014216"/>
-            <a:ext cx="8046720" cy="457200"/>
+              <a:t>addresses</a:t>
+            </a:r>
+            <a:pPr indent="0" marL="0">
+              <a:buNone/>
+            </a:pPr>
+            <a:r>
+              <a:rPr lang="en-US" sz="1300" dirty="0">
+                <a:solidFill>
+                  <a:srgbClr val="64748B"/>
+                </a:solidFill>
+                <a:latin typeface="Calibri" pitchFamily="34" charset="0"/>
+                <a:ea typeface="Calibri" pitchFamily="34" charset="-122"/>
+                <a:cs typeface="Calibri" pitchFamily="34" charset="-120"/>
+              </a:rPr>
+              <a:t>  ·  addr_line2, us_addr</a:t>
+            </a:r>
+            <a:endParaRPr lang="en-US" sz="1300" dirty="0"/>
+          </a:p>
+        </p:txBody>
+      </p:sp>
+      <p:sp>
+        <p:nvSpPr>
+          <p:cNvPr id="19" name="Text 16"/>
+          <p:cNvSpPr txBox="1"/>
+          <p:nvPr/>
+        </p:nvSpPr>
+        <p:spPr>
+          <a:xfrm>
+            <a:off x="7178040" y="4160520"/>
+            <a:ext cx="4434840" cy="548640"/>
           </a:xfrm>
           <a:prstGeom prst="rect">
             <a:avLst/>
@@ -12127,34 +13652,34 @@
               <a:buNone/>
             </a:pPr>
             <a:r>
-              <a:rPr lang="en-US" sz="1050" i="1" dirty="0">
-                <a:solidFill>
-                  <a:srgbClr val="64748B"/>
-                </a:solidFill>
-                <a:latin typeface="Calibri" pitchFamily="34" charset="0"/>
-                <a:ea typeface="Calibri" pitchFamily="34" charset="-122"/>
-                <a:cs typeface="Calibri" pitchFamily="34" charset="-120"/>
-              </a:rPr>
-              <a:t>— = partly. LLMs: only if self-hosted on the bank's own GPUs. Quantum: only as a simulation on ordinary computers (slow, and not quantum), otherwise on cloud quantum hardware with probabilistic results.</a:t>
-            </a:r>
-            <a:endParaRPr lang="en-US" sz="1050" dirty="0"/>
-          </a:p>
-        </p:txBody>
-      </p:sp>
-      <p:sp>
-        <p:nvSpPr>
-          <p:cNvPr id="23" name="ml numbers"/>
+              <a:rPr lang="en-US" sz="1250" dirty="0">
+                <a:solidFill>
+                  <a:srgbClr val="1E3A5F"/>
+                </a:solidFill>
+                <a:latin typeface="Calibri" pitchFamily="34" charset="0"/>
+                <a:ea typeface="Calibri" pitchFamily="34" charset="-122"/>
+                <a:cs typeface="Calibri" pitchFamily="34" charset="-120"/>
+              </a:rPr>
+              <a:t>+ 8 false alarms: the bank's own branch phone, email, address and IFSC. Masked, not leaked; approved in one step.</a:t>
+            </a:r>
+            <a:endParaRPr lang="en-US" sz="1250" dirty="0"/>
+          </a:p>
+        </p:txBody>
+      </p:sp>
+      <p:sp>
+        <p:nvSpPr>
+          <p:cNvPr id="20" name="no leak card"/>
           <p:cNvSpPr/>
           <p:nvPr/>
         </p:nvSpPr>
         <p:spPr>
           <a:xfrm>
-            <a:off x="8823960" y="1188720"/>
-            <a:ext cx="2788920" cy="3108960"/>
+            <a:off x="7178040" y="4800600"/>
+            <a:ext cx="4434840" cy="1417320"/>
           </a:xfrm>
           <a:prstGeom prst="roundRect">
             <a:avLst>
-              <a:gd name="adj" fmla="val 2623"/>
+              <a:gd name="adj" fmla="val 5161"/>
             </a:avLst>
           </a:prstGeom>
           <a:solidFill>
@@ -12170,428 +13695,13 @@
       </p:sp>
       <p:sp>
         <p:nvSpPr>
-          <p:cNvPr id="24" name="Text 13"/>
-          <p:cNvSpPr txBox="1"/>
-          <p:nvPr/>
-        </p:nvSpPr>
-        <p:spPr>
-          <a:xfrm>
-            <a:off x="9052560" y="1325880"/>
-            <a:ext cx="2423160" cy="457200"/>
-          </a:xfrm>
-          <a:prstGeom prst="rect">
-            <a:avLst/>
-          </a:prstGeom>
-          <a:noFill/>
-          <a:ln/>
-        </p:spPr>
-        <p:txBody>
-          <a:bodyPr wrap="square" lIns="0" tIns="0" rIns="0" bIns="0" rtlCol="0" anchor="ctr"/>
-          <a:lstStyle/>
-          <a:p>
-            <a:pPr indent="0" marL="0">
-              <a:buNone/>
-            </a:pPr>
-            <a:r>
-              <a:rPr lang="en-US" sz="2600" b="1" dirty="0">
-                <a:solidFill>
-                  <a:srgbClr val="D97706"/>
-                </a:solidFill>
-                <a:latin typeface="Cambria" pitchFamily="34" charset="0"/>
-                <a:ea typeface="Cambria" pitchFamily="34" charset="-122"/>
-                <a:cs typeface="Cambria" pitchFamily="34" charset="-120"/>
-              </a:rPr>
-              <a:t>0.999</a:t>
-            </a:r>
-            <a:endParaRPr lang="en-US" sz="2600" dirty="0"/>
-          </a:p>
-        </p:txBody>
-      </p:sp>
-      <p:sp>
-        <p:nvSpPr>
-          <p:cNvPr id="25" name="Text 14"/>
-          <p:cNvSpPr txBox="1"/>
-          <p:nvPr/>
-        </p:nvSpPr>
-        <p:spPr>
-          <a:xfrm>
-            <a:off x="9052560" y="1783080"/>
-            <a:ext cx="2423160" cy="457200"/>
-          </a:xfrm>
-          <a:prstGeom prst="rect">
-            <a:avLst/>
-          </a:prstGeom>
-          <a:noFill/>
-          <a:ln/>
-        </p:spPr>
-        <p:txBody>
-          <a:bodyPr wrap="square" lIns="0" tIns="0" rIns="0" bIns="0" rtlCol="0" anchor="t"/>
-          <a:lstStyle/>
-          <a:p>
-            <a:pPr indent="0" marL="0">
-              <a:buNone/>
-            </a:pPr>
-            <a:r>
-              <a:rPr lang="en-US" sz="1200" dirty="0">
-                <a:solidFill>
-                  <a:srgbClr val="CBD5E1"/>
-                </a:solidFill>
-                <a:latin typeface="Calibri" pitchFamily="34" charset="0"/>
-                <a:ea typeface="Calibri" pitchFamily="34" charset="-122"/>
-                <a:cs typeface="Calibri" pitchFamily="34" charset="-120"/>
-              </a:rPr>
-              <a:t>accuracy (F1) on an external benchmark, misleading names</a:t>
-            </a:r>
-            <a:endParaRPr lang="en-US" sz="1200" dirty="0"/>
-          </a:p>
-        </p:txBody>
-      </p:sp>
-      <p:sp>
-        <p:nvSpPr>
-          <p:cNvPr id="26" name="Text 15"/>
-          <p:cNvSpPr txBox="1"/>
-          <p:nvPr/>
-        </p:nvSpPr>
-        <p:spPr>
-          <a:xfrm>
-            <a:off x="9052560" y="2313432"/>
-            <a:ext cx="2423160" cy="457200"/>
-          </a:xfrm>
-          <a:prstGeom prst="rect">
-            <a:avLst/>
-          </a:prstGeom>
-          <a:noFill/>
-          <a:ln/>
-        </p:spPr>
-        <p:txBody>
-          <a:bodyPr wrap="square" lIns="0" tIns="0" rIns="0" bIns="0" rtlCol="0" anchor="ctr"/>
-          <a:lstStyle/>
-          <a:p>
-            <a:pPr indent="0" marL="0">
-              <a:buNone/>
-            </a:pPr>
-            <a:r>
-              <a:rPr lang="en-US" sz="2600" b="1" dirty="0">
-                <a:solidFill>
-                  <a:srgbClr val="FFFFFF"/>
-                </a:solidFill>
-                <a:latin typeface="Cambria" pitchFamily="34" charset="0"/>
-                <a:ea typeface="Cambria" pitchFamily="34" charset="-122"/>
-                <a:cs typeface="Cambria" pitchFamily="34" charset="-120"/>
-              </a:rPr>
-              <a:t>≈ 3 ms</a:t>
-            </a:r>
-            <a:endParaRPr lang="en-US" sz="2600" dirty="0"/>
-          </a:p>
-        </p:txBody>
-      </p:sp>
-      <p:sp>
-        <p:nvSpPr>
-          <p:cNvPr id="27" name="Text 16"/>
-          <p:cNvSpPr txBox="1"/>
-          <p:nvPr/>
-        </p:nvSpPr>
-        <p:spPr>
-          <a:xfrm>
-            <a:off x="9052560" y="2770632"/>
-            <a:ext cx="2423160" cy="457200"/>
-          </a:xfrm>
-          <a:prstGeom prst="rect">
-            <a:avLst/>
-          </a:prstGeom>
-          <a:noFill/>
-          <a:ln/>
-        </p:spPr>
-        <p:txBody>
-          <a:bodyPr wrap="square" lIns="0" tIns="0" rIns="0" bIns="0" rtlCol="0" anchor="t"/>
-          <a:lstStyle/>
-          <a:p>
-            <a:pPr indent="0" marL="0">
-              <a:buNone/>
-            </a:pPr>
-            <a:r>
-              <a:rPr lang="en-US" sz="1200" dirty="0">
-                <a:solidFill>
-                  <a:srgbClr val="CBD5E1"/>
-                </a:solidFill>
-                <a:latin typeface="Calibri" pitchFamily="34" charset="0"/>
-                <a:ea typeface="Calibri" pitchFamily="34" charset="-122"/>
-                <a:cs typeface="Calibri" pitchFamily="34" charset="-120"/>
-              </a:rPr>
-              <a:t>per column on a normal CPU (20 values)</a:t>
-            </a:r>
-            <a:endParaRPr lang="en-US" sz="1200" dirty="0"/>
-          </a:p>
-        </p:txBody>
-      </p:sp>
-      <p:sp>
-        <p:nvSpPr>
-          <p:cNvPr id="28" name="Text 17"/>
-          <p:cNvSpPr txBox="1"/>
-          <p:nvPr/>
-        </p:nvSpPr>
-        <p:spPr>
-          <a:xfrm>
-            <a:off x="9052560" y="3300984"/>
-            <a:ext cx="2423160" cy="457200"/>
-          </a:xfrm>
-          <a:prstGeom prst="rect">
-            <a:avLst/>
-          </a:prstGeom>
-          <a:noFill/>
-          <a:ln/>
-        </p:spPr>
-        <p:txBody>
-          <a:bodyPr wrap="square" lIns="0" tIns="0" rIns="0" bIns="0" rtlCol="0" anchor="ctr"/>
-          <a:lstStyle/>
-          <a:p>
-            <a:pPr indent="0" marL="0">
-              <a:buNone/>
-            </a:pPr>
-            <a:r>
-              <a:rPr lang="en-US" sz="2600" b="1" dirty="0">
-                <a:solidFill>
-                  <a:srgbClr val="FFFFFF"/>
-                </a:solidFill>
-                <a:latin typeface="Cambria" pitchFamily="34" charset="0"/>
-                <a:ea typeface="Cambria" pitchFamily="34" charset="-122"/>
-                <a:cs typeface="Cambria" pitchFamily="34" charset="-120"/>
-              </a:rPr>
-              <a:t>0.45 MB</a:t>
-            </a:r>
-            <a:endParaRPr lang="en-US" sz="2600" dirty="0"/>
-          </a:p>
-        </p:txBody>
-      </p:sp>
-      <p:sp>
-        <p:nvSpPr>
-          <p:cNvPr id="29" name="Text 18"/>
-          <p:cNvSpPr txBox="1"/>
-          <p:nvPr/>
-        </p:nvSpPr>
-        <p:spPr>
-          <a:xfrm>
-            <a:off x="9052560" y="3758184"/>
-            <a:ext cx="2423160" cy="457200"/>
-          </a:xfrm>
-          <a:prstGeom prst="rect">
-            <a:avLst/>
-          </a:prstGeom>
-          <a:noFill/>
-          <a:ln/>
-        </p:spPr>
-        <p:txBody>
-          <a:bodyPr wrap="square" lIns="0" tIns="0" rIns="0" bIns="0" rtlCol="0" anchor="t"/>
-          <a:lstStyle/>
-          <a:p>
-            <a:pPr indent="0" marL="0">
-              <a:buNone/>
-            </a:pPr>
-            <a:r>
-              <a:rPr lang="en-US" sz="1200" dirty="0">
-                <a:solidFill>
-                  <a:srgbClr val="CBD5E1"/>
-                </a:solidFill>
-                <a:latin typeface="Calibri" pitchFamily="34" charset="0"/>
-                <a:ea typeface="Calibri" pitchFamily="34" charset="-122"/>
-                <a:cs typeface="Calibri" pitchFamily="34" charset="-120"/>
-              </a:rPr>
-              <a:t>model file; no GPU, no internet</a:t>
-            </a:r>
-            <a:endParaRPr lang="en-US" sz="1200" dirty="0"/>
-          </a:p>
-        </p:txBody>
-      </p:sp>
-      <p:sp>
-        <p:nvSpPr>
-          <p:cNvPr id="30" name="quantum safe card"/>
+          <p:cNvPr id="21" name="fail closed circle"/>
           <p:cNvSpPr/>
           <p:nvPr/>
         </p:nvSpPr>
         <p:spPr>
           <a:xfrm>
-            <a:off x="548640" y="4526280"/>
-            <a:ext cx="5486400" cy="1691640"/>
-          </a:xfrm>
-          <a:prstGeom prst="roundRect">
-            <a:avLst>
-              <a:gd name="adj" fmla="val 4324"/>
-            </a:avLst>
-          </a:prstGeom>
-          <a:solidFill>
-            <a:srgbClr val="E6F4F1"/>
-          </a:solidFill>
-          <a:ln w="9525">
-            <a:solidFill>
-              <a:srgbClr val="E6F4F1"/>
-            </a:solidFill>
-            <a:prstDash val="solid"/>
-          </a:ln>
-        </p:spPr>
-      </p:sp>
-      <p:sp>
-        <p:nvSpPr>
-          <p:cNvPr id="31" name="quantum-safe circle"/>
-          <p:cNvSpPr/>
-          <p:nvPr/>
-        </p:nvSpPr>
-        <p:spPr>
-          <a:xfrm>
-            <a:off x="731520" y="4681728"/>
-            <a:ext cx="566928" cy="566928"/>
-          </a:xfrm>
-          <a:prstGeom prst="ellipse">
-            <a:avLst/>
-          </a:prstGeom>
-          <a:solidFill>
-            <a:srgbClr val="0F766E"/>
-          </a:solidFill>
-          <a:ln w="12700">
-            <a:solidFill>
-              <a:srgbClr val="0F766E"/>
-            </a:solidFill>
-            <a:prstDash val="solid"/>
-          </a:ln>
-        </p:spPr>
-      </p:sp>
-      <p:pic>
-        <p:nvPicPr>
-          <p:cNvPr id="32" name="quantum-safe icon" descr="quantum-safe">    </p:cNvPr>
-          <p:cNvPicPr>
-            <a:picLocks noChangeAspect="1"/>
-          </p:cNvPicPr>
-          <p:nvPr/>
-        </p:nvPicPr>
-        <p:blipFill>
-          <a:blip r:embed="rId10"/>
-          <a:stretch>
-            <a:fillRect/>
-          </a:stretch>
-        </p:blipFill>
-        <p:spPr>
-          <a:xfrm>
-            <a:off x="873252" y="4823460"/>
-            <a:ext cx="283464" cy="283464"/>
-          </a:xfrm>
-          <a:prstGeom prst="rect">
-            <a:avLst/>
-          </a:prstGeom>
-        </p:spPr>
-      </p:pic>
-      <p:sp>
-        <p:nvSpPr>
-          <p:cNvPr id="33" name="Text 21"/>
-          <p:cNvSpPr txBox="1"/>
-          <p:nvPr/>
-        </p:nvSpPr>
-        <p:spPr>
-          <a:xfrm>
-            <a:off x="1417320" y="4681728"/>
-            <a:ext cx="4480560" cy="457200"/>
-          </a:xfrm>
-          <a:prstGeom prst="rect">
-            <a:avLst/>
-          </a:prstGeom>
-          <a:noFill/>
-          <a:ln/>
-        </p:spPr>
-        <p:txBody>
-          <a:bodyPr wrap="square" lIns="0" tIns="0" rIns="0" bIns="0" rtlCol="0" anchor="ctr"/>
-          <a:lstStyle/>
-          <a:p>
-            <a:pPr indent="0" marL="0">
-              <a:buNone/>
-            </a:pPr>
-            <a:r>
-              <a:rPr lang="en-US" sz="1800" b="1" dirty="0">
-                <a:solidFill>
-                  <a:srgbClr val="0B1D33"/>
-                </a:solidFill>
-                <a:latin typeface="Cambria" pitchFamily="34" charset="0"/>
-                <a:ea typeface="Cambria" pitchFamily="34" charset="-122"/>
-                <a:cs typeface="Cambria" pitchFamily="34" charset="-120"/>
-              </a:rPr>
-              <a:t>Quantum-safe? Already.</a:t>
-            </a:r>
-            <a:endParaRPr lang="en-US" sz="1800" dirty="0"/>
-          </a:p>
-        </p:txBody>
-      </p:sp>
-      <p:sp>
-        <p:nvSpPr>
-          <p:cNvPr id="34" name="Text 22"/>
-          <p:cNvSpPr txBox="1"/>
-          <p:nvPr/>
-        </p:nvSpPr>
-        <p:spPr>
-          <a:xfrm>
-            <a:off x="731520" y="5257800"/>
-            <a:ext cx="5166360" cy="914400"/>
-          </a:xfrm>
-          <a:prstGeom prst="rect">
-            <a:avLst/>
-          </a:prstGeom>
-          <a:noFill/>
-          <a:ln/>
-        </p:spPr>
-        <p:txBody>
-          <a:bodyPr wrap="square" lIns="0" tIns="0" rIns="0" bIns="0" rtlCol="0" anchor="t"/>
-          <a:lstStyle/>
-          <a:p>
-            <a:pPr indent="0" marL="0">
-              <a:buNone/>
-            </a:pPr>
-            <a:r>
-              <a:rPr lang="en-US" sz="1250" dirty="0">
-                <a:solidFill>
-                  <a:srgbClr val="1E3A5F"/>
-                </a:solidFill>
-                <a:latin typeface="Calibri" pitchFamily="34" charset="0"/>
-                <a:ea typeface="Calibri" pitchFamily="34" charset="-122"/>
-                <a:cs typeface="Calibri" pitchFamily="34" charset="-120"/>
-              </a:rPr>
-              <a:t>Quantum computers break RSA and elliptic-curve keys. MaskGuard's masking uses none: codes are HMAC-SHA-256 with 256-bit keys, the audit chain is SHA-256 — symmetric primitives NIST does not schedule for retirement.</a:t>
-            </a:r>
-            <a:endParaRPr lang="en-US" sz="1250" dirty="0"/>
-          </a:p>
-        </p:txBody>
-      </p:sp>
-      <p:sp>
-        <p:nvSpPr>
-          <p:cNvPr id="35" name="quantum ml card"/>
-          <p:cNvSpPr/>
-          <p:nvPr/>
-        </p:nvSpPr>
-        <p:spPr>
-          <a:xfrm>
-            <a:off x="6263640" y="4526280"/>
-            <a:ext cx="5349240" cy="1691640"/>
-          </a:xfrm>
-          <a:prstGeom prst="roundRect">
-            <a:avLst>
-              <a:gd name="adj" fmla="val 4324"/>
-            </a:avLst>
-          </a:prstGeom>
-          <a:solidFill>
-            <a:srgbClr val="FDEBD0"/>
-          </a:solidFill>
-          <a:ln w="9525">
-            <a:solidFill>
-              <a:srgbClr val="FDEBD0"/>
-            </a:solidFill>
-            <a:prstDash val="solid"/>
-          </a:ln>
-        </p:spPr>
-      </p:sp>
-      <p:sp>
-        <p:nvSpPr>
-          <p:cNvPr id="36" name="quantum ml circle"/>
-          <p:cNvSpPr/>
-          <p:nvPr/>
-        </p:nvSpPr>
-        <p:spPr>
-          <a:xfrm>
-            <a:off x="6446520" y="4681728"/>
+            <a:off x="7360920" y="4983480"/>
             <a:ext cx="566928" cy="566928"/>
           </a:xfrm>
           <a:prstGeom prst="ellipse">
@@ -12610,21 +13720,21 @@
       </p:sp>
       <p:pic>
         <p:nvPicPr>
-          <p:cNvPr id="37" name="quantum ml icon" descr="quantum ml">    </p:cNvPr>
+          <p:cNvPr id="22" name="fail closed icon" descr="fail closed">    </p:cNvPr>
           <p:cNvPicPr>
             <a:picLocks noChangeAspect="1"/>
           </p:cNvPicPr>
           <p:nvPr/>
         </p:nvPicPr>
         <p:blipFill>
-          <a:blip r:embed="rId11"/>
+          <a:blip r:embed="rId2"/>
           <a:stretch>
             <a:fillRect/>
           </a:stretch>
         </p:blipFill>
         <p:spPr>
           <a:xfrm>
-            <a:off x="6588252" y="4823460"/>
+            <a:off x="7502652" y="5125212"/>
             <a:ext cx="283464" cy="283464"/>
           </a:xfrm>
           <a:prstGeom prst="rect">
@@ -12634,14 +13744,14 @@
       </p:pic>
       <p:sp>
         <p:nvSpPr>
-          <p:cNvPr id="38" name="Text 25"/>
-          <p:cNvSpPr txBox="1"/>
-          <p:nvPr/>
-        </p:nvSpPr>
-        <p:spPr>
-          <a:xfrm>
-            <a:off x="7132320" y="4681728"/>
-            <a:ext cx="4389120" cy="457200"/>
+          <p:cNvPr id="23" name="Text 19"/>
+          <p:cNvSpPr txBox="1"/>
+          <p:nvPr/>
+        </p:nvSpPr>
+        <p:spPr>
+          <a:xfrm>
+            <a:off x="8046720" y="4937760"/>
+            <a:ext cx="3474720" cy="411480"/>
           </a:xfrm>
           <a:prstGeom prst="rect">
             <a:avLst/>
@@ -12657,30 +13767,30 @@
               <a:buNone/>
             </a:pPr>
             <a:r>
-              <a:rPr lang="en-US" sz="1800" b="1" dirty="0">
-                <a:solidFill>
-                  <a:srgbClr val="0B1D33"/>
-                </a:solidFill>
-                <a:latin typeface="Cambria" pitchFamily="34" charset="0"/>
-                <a:ea typeface="Cambria" pitchFamily="34" charset="-122"/>
-                <a:cs typeface="Cambria" pitchFamily="34" charset="-120"/>
-              </a:rPr>
-              <a:t>Quantum ML? Not better here, yet.</a:t>
-            </a:r>
-            <a:endParaRPr lang="en-US" sz="1800" dirty="0"/>
-          </a:p>
-        </p:txBody>
-      </p:sp>
-      <p:sp>
-        <p:nvSpPr>
-          <p:cNvPr id="39" name="Text 26"/>
-          <p:cNvSpPr txBox="1"/>
-          <p:nvPr/>
-        </p:nvSpPr>
-        <p:spPr>
-          <a:xfrm>
-            <a:off x="6446520" y="5257800"/>
-            <a:ext cx="5029200" cy="914400"/>
+              <a:rPr lang="en-US" sz="1700" b="1" dirty="0">
+                <a:solidFill>
+                  <a:srgbClr val="FFFFFF"/>
+                </a:solidFill>
+                <a:latin typeface="Calibri" pitchFamily="34" charset="0"/>
+                <a:ea typeface="Calibri" pitchFamily="34" charset="-122"/>
+                <a:cs typeface="Calibri" pitchFamily="34" charset="-120"/>
+              </a:rPr>
+              <a:t>The 13 misses leaked nothing</a:t>
+            </a:r>
+            <a:endParaRPr lang="en-US" sz="1700" dirty="0"/>
+          </a:p>
+        </p:txBody>
+      </p:sp>
+      <p:sp>
+        <p:nvSpPr>
+          <p:cNvPr id="24" name="Text 20"/>
+          <p:cNvSpPr txBox="1"/>
+          <p:nvPr/>
+        </p:nvSpPr>
+        <p:spPr>
+          <a:xfrm>
+            <a:off x="8046720" y="5349240"/>
+            <a:ext cx="3429000" cy="822960"/>
           </a:xfrm>
           <a:prstGeom prst="rect">
             <a:avLst/>
@@ -12696,56 +13806,17 @@
               <a:buNone/>
             </a:pPr>
             <a:r>
-              <a:rPr lang="en-US" sz="1250" dirty="0">
-                <a:solidFill>
-                  <a:srgbClr val="1E3A5F"/>
-                </a:solidFill>
-                <a:latin typeface="Calibri" pitchFamily="34" charset="0"/>
-                <a:ea typeface="Calibri" pitchFamily="34" charset="-122"/>
-                <a:cs typeface="Calibri" pitchFamily="34" charset="-120"/>
-              </a:rPr>
-              <a:t>Recent benchmarks find quantum classifiers do not beat tuned classical models on table data, and they run on simulators or cloud hardware. We picked what works today, on the bank's own servers.</a:t>
-            </a:r>
-            <a:endParaRPr lang="en-US" sz="1250" dirty="0"/>
-          </a:p>
-        </p:txBody>
-      </p:sp>
-      <p:sp>
-        <p:nvSpPr>
-          <p:cNvPr id="40" name="Text 27"/>
-          <p:cNvSpPr txBox="1"/>
-          <p:nvPr/>
-        </p:nvSpPr>
-        <p:spPr>
-          <a:xfrm>
-            <a:off x="548640" y="6254496"/>
-            <a:ext cx="11064240" cy="182880"/>
-          </a:xfrm>
-          <a:prstGeom prst="rect">
-            <a:avLst/>
-          </a:prstGeom>
-          <a:noFill/>
-          <a:ln/>
-        </p:spPr>
-        <p:txBody>
-          <a:bodyPr wrap="square" lIns="0" tIns="0" rIns="0" bIns="0" rtlCol="0" anchor="ctr"/>
-          <a:lstStyle/>
-          <a:p>
-            <a:pPr indent="0" marL="0">
-              <a:buNone/>
-            </a:pPr>
-            <a:r>
-              <a:rPr lang="en-US" sz="900" i="1" dirty="0">
-                <a:solidFill>
-                  <a:srgbClr val="64748B"/>
-                </a:solidFill>
-                <a:latin typeface="Calibri" pitchFamily="34" charset="0"/>
-                <a:ea typeface="Calibri" pitchFamily="34" charset="-122"/>
-                <a:cs typeface="Calibri" pitchFamily="34" charset="-120"/>
-              </a:rPr>
-              <a:t>Sources: NIST IR 8547 (draft) transition plan covers public-key algorithms; Bowles, Ahmed &amp; Schuld 2024, "Better than classical?"; QSVM tabular benchmark, arXiv 2604.18837. Our numbers: docs/EVALUATION.md.</a:t>
-            </a:r>
-            <a:endParaRPr lang="en-US" sz="900" dirty="0"/>
+              <a:rPr lang="en-US" sz="1200" dirty="0">
+                <a:solidFill>
+                  <a:srgbClr val="CBD5E1"/>
+                </a:solidFill>
+                <a:latin typeface="Calibri" pitchFamily="34" charset="0"/>
+                <a:ea typeface="Calibri" pitchFamily="34" charset="-122"/>
+                <a:cs typeface="Calibri" pitchFamily="34" charset="-120"/>
+              </a:rPr>
+              <a:t>Anything the AI is unsure about stays hidden until a person approves it. We fixed the general causes, then re-checked the benchmark did not get worse.</a:t>
+            </a:r>
+            <a:endParaRPr lang="en-US" sz="1200" dirty="0"/>
           </a:p>
         </p:txBody>
       </p:sp>
@@ -12854,15 +13925,272 @@
                 <a:ea typeface="Cambria" pitchFamily="34" charset="-122"/>
                 <a:cs typeface="Cambria" pitchFamily="34" charset="-120"/>
               </a:rPr>
-              <a:t>Dashboard: one query, three organiser users</a:t>
+              <a:t>No LLM, no quantum: classic ML that is quantum-safe</a:t>
             </a:r>
             <a:endParaRPr lang="en-US" sz="3000" dirty="0"/>
+          </a:p>
+        </p:txBody>
+      </p:sp>
+      <p:sp>
+        <p:nvSpPr>
+          <p:cNvPr id="3" name="maskguard column"/>
+          <p:cNvSpPr/>
+          <p:nvPr/>
+        </p:nvSpPr>
+        <p:spPr>
+          <a:xfrm>
+            <a:off x="4297680" y="1188720"/>
+            <a:ext cx="1463040" cy="2770632"/>
+          </a:xfrm>
+          <a:prstGeom prst="roundRect">
+            <a:avLst>
+              <a:gd name="adj" fmla="val 5000"/>
+            </a:avLst>
+          </a:prstGeom>
+          <a:solidFill>
+            <a:srgbClr val="FDEBD0"/>
+          </a:solidFill>
+          <a:ln w="9525">
+            <a:solidFill>
+              <a:srgbClr val="FDEBD0"/>
+            </a:solidFill>
+            <a:prstDash val="solid"/>
+          </a:ln>
+        </p:spPr>
+      </p:sp>
+      <p:sp>
+        <p:nvSpPr>
+          <p:cNvPr id="4" name="Text 2"/>
+          <p:cNvSpPr txBox="1"/>
+          <p:nvPr/>
+        </p:nvSpPr>
+        <p:spPr>
+          <a:xfrm>
+            <a:off x="4297680" y="1225296"/>
+            <a:ext cx="1463040" cy="585216"/>
+          </a:xfrm>
+          <a:prstGeom prst="rect">
+            <a:avLst/>
+          </a:prstGeom>
+          <a:noFill/>
+          <a:ln/>
+        </p:spPr>
+        <p:txBody>
+          <a:bodyPr wrap="square" lIns="0" tIns="0" rIns="0" bIns="0" rtlCol="0" anchor="ctr"/>
+          <a:lstStyle/>
+          <a:p>
+            <a:pPr algn="ctr" indent="0" marL="0">
+              <a:buNone/>
+            </a:pPr>
+            <a:r>
+              <a:rPr lang="en-US" sz="1400" b="1" dirty="0">
+                <a:solidFill>
+                  <a:srgbClr val="D97706"/>
+                </a:solidFill>
+                <a:latin typeface="Calibri" pitchFamily="34" charset="0"/>
+                <a:ea typeface="Calibri" pitchFamily="34" charset="-122"/>
+                <a:cs typeface="Calibri" pitchFamily="34" charset="-120"/>
+              </a:rPr>
+              <a:t>MaskGuard</a:t>
+            </a:r>
+            <a:endParaRPr lang="en-US" sz="1400" dirty="0"/>
+          </a:p>
+          <a:p>
+            <a:pPr algn="ctr" indent="0" marL="0">
+              <a:buNone/>
+            </a:pPr>
+            <a:r>
+              <a:rPr lang="en-US" sz="1400" b="1" dirty="0">
+                <a:solidFill>
+                  <a:srgbClr val="D97706"/>
+                </a:solidFill>
+                <a:latin typeface="Calibri" pitchFamily="34" charset="0"/>
+                <a:ea typeface="Calibri" pitchFamily="34" charset="-122"/>
+                <a:cs typeface="Calibri" pitchFamily="34" charset="-120"/>
+              </a:rPr>
+              <a:t>LightGBM + rules</a:t>
+            </a:r>
+            <a:endParaRPr lang="en-US" sz="1400" dirty="0"/>
+          </a:p>
+        </p:txBody>
+      </p:sp>
+      <p:sp>
+        <p:nvSpPr>
+          <p:cNvPr id="5" name="Text 3"/>
+          <p:cNvSpPr txBox="1"/>
+          <p:nvPr/>
+        </p:nvSpPr>
+        <p:spPr>
+          <a:xfrm>
+            <a:off x="5760720" y="1225296"/>
+            <a:ext cx="1463040" cy="585216"/>
+          </a:xfrm>
+          <a:prstGeom prst="rect">
+            <a:avLst/>
+          </a:prstGeom>
+          <a:noFill/>
+          <a:ln/>
+        </p:spPr>
+        <p:txBody>
+          <a:bodyPr wrap="square" lIns="0" tIns="0" rIns="0" bIns="0" rtlCol="0" anchor="ctr"/>
+          <a:lstStyle/>
+          <a:p>
+            <a:pPr algn="ctr" indent="0" marL="0">
+              <a:buNone/>
+            </a:pPr>
+            <a:r>
+              <a:rPr lang="en-US" sz="1250" b="1" dirty="0">
+                <a:solidFill>
+                  <a:srgbClr val="1E3A5F"/>
+                </a:solidFill>
+                <a:latin typeface="Calibri" pitchFamily="34" charset="0"/>
+                <a:ea typeface="Calibri" pitchFamily="34" charset="-122"/>
+                <a:cs typeface="Calibri" pitchFamily="34" charset="-120"/>
+              </a:rPr>
+              <a:t>LLM-based</a:t>
+            </a:r>
+            <a:endParaRPr lang="en-US" sz="1250" dirty="0"/>
+          </a:p>
+          <a:p>
+            <a:pPr algn="ctr" indent="0" marL="0">
+              <a:buNone/>
+            </a:pPr>
+            <a:r>
+              <a:rPr lang="en-US" sz="1250" b="1" dirty="0">
+                <a:solidFill>
+                  <a:srgbClr val="1E3A5F"/>
+                </a:solidFill>
+                <a:latin typeface="Calibri" pitchFamily="34" charset="0"/>
+                <a:ea typeface="Calibri" pitchFamily="34" charset="-122"/>
+                <a:cs typeface="Calibri" pitchFamily="34" charset="-120"/>
+              </a:rPr>
+              <a:t>detection</a:t>
+            </a:r>
+            <a:endParaRPr lang="en-US" sz="1250" dirty="0"/>
+          </a:p>
+        </p:txBody>
+      </p:sp>
+      <p:sp>
+        <p:nvSpPr>
+          <p:cNvPr id="6" name="Text 4"/>
+          <p:cNvSpPr txBox="1"/>
+          <p:nvPr/>
+        </p:nvSpPr>
+        <p:spPr>
+          <a:xfrm>
+            <a:off x="7223760" y="1225296"/>
+            <a:ext cx="1463040" cy="585216"/>
+          </a:xfrm>
+          <a:prstGeom prst="rect">
+            <a:avLst/>
+          </a:prstGeom>
+          <a:noFill/>
+          <a:ln/>
+        </p:spPr>
+        <p:txBody>
+          <a:bodyPr wrap="square" lIns="0" tIns="0" rIns="0" bIns="0" rtlCol="0" anchor="ctr"/>
+          <a:lstStyle/>
+          <a:p>
+            <a:pPr algn="ctr" indent="0" marL="0">
+              <a:buNone/>
+            </a:pPr>
+            <a:r>
+              <a:rPr lang="en-US" sz="1250" b="1" dirty="0">
+                <a:solidFill>
+                  <a:srgbClr val="1E3A5F"/>
+                </a:solidFill>
+                <a:latin typeface="Calibri" pitchFamily="34" charset="0"/>
+                <a:ea typeface="Calibri" pitchFamily="34" charset="-122"/>
+                <a:cs typeface="Calibri" pitchFamily="34" charset="-120"/>
+              </a:rPr>
+              <a:t>Quantum ML</a:t>
+            </a:r>
+            <a:endParaRPr lang="en-US" sz="1250" dirty="0"/>
+          </a:p>
+          <a:p>
+            <a:pPr algn="ctr" indent="0" marL="0">
+              <a:buNone/>
+            </a:pPr>
+            <a:r>
+              <a:rPr lang="en-US" sz="1250" b="1" dirty="0">
+                <a:solidFill>
+                  <a:srgbClr val="1E3A5F"/>
+                </a:solidFill>
+                <a:latin typeface="Calibri" pitchFamily="34" charset="0"/>
+                <a:ea typeface="Calibri" pitchFamily="34" charset="-122"/>
+                <a:cs typeface="Calibri" pitchFamily="34" charset="-120"/>
+              </a:rPr>
+              <a:t>detection</a:t>
+            </a:r>
+            <a:endParaRPr lang="en-US" sz="1250" dirty="0"/>
+          </a:p>
+        </p:txBody>
+      </p:sp>
+      <p:sp>
+        <p:nvSpPr>
+          <p:cNvPr id="7" name="q row line 0"/>
+          <p:cNvSpPr/>
+          <p:nvPr/>
+        </p:nvSpPr>
+        <p:spPr>
+          <a:xfrm>
+            <a:off x="548640" y="1847088"/>
+            <a:ext cx="8138160" cy="0"/>
+          </a:xfrm>
+          <a:prstGeom prst="line">
+            <a:avLst/>
+          </a:prstGeom>
+          <a:noFill/>
+          <a:ln w="9525">
+            <a:solidFill>
+              <a:srgbClr val="CBD5E1"/>
+            </a:solidFill>
+            <a:prstDash val="solid"/>
+          </a:ln>
+        </p:spPr>
+      </p:sp>
+      <p:sp>
+        <p:nvSpPr>
+          <p:cNvPr id="8" name="Text 6"/>
+          <p:cNvSpPr txBox="1"/>
+          <p:nvPr/>
+        </p:nvSpPr>
+        <p:spPr>
+          <a:xfrm>
+            <a:off x="548640" y="1847088"/>
+            <a:ext cx="3657600" cy="685800"/>
+          </a:xfrm>
+          <a:prstGeom prst="rect">
+            <a:avLst/>
+          </a:prstGeom>
+          <a:noFill/>
+          <a:ln/>
+        </p:spPr>
+        <p:txBody>
+          <a:bodyPr wrap="square" lIns="0" tIns="0" rIns="0" bIns="0" rtlCol="0" anchor="ctr"/>
+          <a:lstStyle/>
+          <a:p>
+            <a:pPr indent="0" marL="0">
+              <a:buNone/>
+            </a:pPr>
+            <a:r>
+              <a:rPr lang="en-US" sz="1500" b="1" dirty="0">
+                <a:solidFill>
+                  <a:srgbClr val="0B1D33"/>
+                </a:solidFill>
+                <a:latin typeface="Calibri" pitchFamily="34" charset="0"/>
+                <a:ea typeface="Calibri" pitchFamily="34" charset="-122"/>
+                <a:cs typeface="Calibri" pitchFamily="34" charset="-120"/>
+              </a:rPr>
+              <a:t>Runs inside the bank, offline, on a normal CPU</a:t>
+            </a:r>
+            <a:endParaRPr lang="en-US" sz="1500" dirty="0"/>
           </a:p>
         </p:txBody>
       </p:sp>
       <p:pic>
         <p:nvPicPr>
-          <p:cNvPr id="3" name="dashboard admin_anita" descr="Control Room masking playground on Saffron Bank as admin_anita: Sees the real data. Every query is still logged.">    </p:cNvPr>
+          <p:cNvPr id="9" name="q cell 0 0" descr="MaskGuard LightGBM + rules: Runs inside the bank, offline, on a normal CPU: yes">    </p:cNvPr>
           <p:cNvPicPr>
             <a:picLocks noChangeAspect="1"/>
           </p:cNvPicPr>
@@ -12876,42 +14204,17 @@
         </p:blipFill>
         <p:spPr>
           <a:xfrm>
-            <a:off x="548640" y="1188720"/>
-            <a:ext cx="7818120" cy="1517030"/>
+            <a:off x="4892040" y="2052828"/>
+            <a:ext cx="274320" cy="274320"/>
           </a:xfrm>
           <a:prstGeom prst="rect">
             <a:avLst/>
           </a:prstGeom>
         </p:spPr>
       </p:pic>
-      <p:sp>
-        <p:nvSpPr>
-          <p:cNvPr id="4" name="admin_anita circle"/>
-          <p:cNvSpPr/>
-          <p:nvPr/>
-        </p:nvSpPr>
-        <p:spPr>
-          <a:xfrm>
-            <a:off x="8595360" y="1280160"/>
-            <a:ext cx="566928" cy="566928"/>
-          </a:xfrm>
-          <a:prstGeom prst="ellipse">
-            <a:avLst/>
-          </a:prstGeom>
-          <a:solidFill>
-            <a:srgbClr val="0B1D33"/>
-          </a:solidFill>
-          <a:ln w="12700">
-            <a:solidFill>
-              <a:srgbClr val="0B1D33"/>
-            </a:solidFill>
-            <a:prstDash val="solid"/>
-          </a:ln>
-        </p:spPr>
-      </p:sp>
       <p:pic>
         <p:nvPicPr>
-          <p:cNvPr id="5" name="admin_anita icon" descr="admin_anita">    </p:cNvPr>
+          <p:cNvPr id="10" name="q cell 0 1" descr="LLM-based detection: Runs inside the bank, offline, on a normal CPU: partly">    </p:cNvPr>
           <p:cNvPicPr>
             <a:picLocks noChangeAspect="1"/>
           </p:cNvPicPr>
@@ -12925,134 +14228,17 @@
         </p:blipFill>
         <p:spPr>
           <a:xfrm>
-            <a:off x="8737092" y="1421892"/>
-            <a:ext cx="283464" cy="283464"/>
+            <a:off x="6355080" y="2052828"/>
+            <a:ext cx="274320" cy="274320"/>
           </a:xfrm>
           <a:prstGeom prst="rect">
             <a:avLst/>
           </a:prstGeom>
         </p:spPr>
       </p:pic>
-      <p:sp>
-        <p:nvSpPr>
-          <p:cNvPr id="6" name="Text 2"/>
-          <p:cNvSpPr txBox="1"/>
-          <p:nvPr/>
-        </p:nvSpPr>
-        <p:spPr>
-          <a:xfrm>
-            <a:off x="9281160" y="1234440"/>
-            <a:ext cx="2377440" cy="329184"/>
-          </a:xfrm>
-          <a:prstGeom prst="rect">
-            <a:avLst/>
-          </a:prstGeom>
-          <a:noFill/>
-          <a:ln/>
-        </p:spPr>
-        <p:txBody>
-          <a:bodyPr wrap="square" lIns="0" tIns="0" rIns="0" bIns="0" rtlCol="0" anchor="ctr"/>
-          <a:lstStyle/>
-          <a:p>
-            <a:pPr indent="0" marL="0">
-              <a:buNone/>
-            </a:pPr>
-            <a:r>
-              <a:rPr lang="en-US" sz="1400" b="1" dirty="0">
-                <a:solidFill>
-                  <a:srgbClr val="0B1D33"/>
-                </a:solidFill>
-                <a:latin typeface="Courier New" pitchFamily="34" charset="0"/>
-                <a:ea typeface="Courier New" pitchFamily="34" charset="-122"/>
-                <a:cs typeface="Courier New" pitchFamily="34" charset="-120"/>
-              </a:rPr>
-              <a:t>admin_anita</a:t>
-            </a:r>
-            <a:endParaRPr lang="en-US" sz="1400" dirty="0"/>
-          </a:p>
-        </p:txBody>
-      </p:sp>
-      <p:sp>
-        <p:nvSpPr>
-          <p:cNvPr id="7" name="Text 3"/>
-          <p:cNvSpPr txBox="1"/>
-          <p:nvPr/>
-        </p:nvSpPr>
-        <p:spPr>
-          <a:xfrm>
-            <a:off x="9281160" y="1572768"/>
-            <a:ext cx="2377440" cy="566928"/>
-          </a:xfrm>
-          <a:prstGeom prst="rect">
-            <a:avLst/>
-          </a:prstGeom>
-          <a:noFill/>
-          <a:ln/>
-        </p:spPr>
-        <p:txBody>
-          <a:bodyPr wrap="square" lIns="0" tIns="0" rIns="0" bIns="0" rtlCol="0" anchor="t"/>
-          <a:lstStyle/>
-          <a:p>
-            <a:pPr indent="0" marL="0">
-              <a:buNone/>
-            </a:pPr>
-            <a:r>
-              <a:rPr lang="en-US" sz="1600" b="1" dirty="0">
-                <a:solidFill>
-                  <a:srgbClr val="0B1D33"/>
-                </a:solidFill>
-                <a:latin typeface="Calibri" pitchFamily="34" charset="0"/>
-                <a:ea typeface="Calibri" pitchFamily="34" charset="-122"/>
-                <a:cs typeface="Calibri" pitchFamily="34" charset="-120"/>
-              </a:rPr>
-              <a:t>Sees the real data.</a:t>
-            </a:r>
-            <a:endParaRPr lang="en-US" sz="1600" dirty="0"/>
-          </a:p>
-        </p:txBody>
-      </p:sp>
-      <p:sp>
-        <p:nvSpPr>
-          <p:cNvPr id="8" name="Text 4"/>
-          <p:cNvSpPr txBox="1"/>
-          <p:nvPr/>
-        </p:nvSpPr>
-        <p:spPr>
-          <a:xfrm>
-            <a:off x="9281160" y="1901952"/>
-            <a:ext cx="2377440" cy="685800"/>
-          </a:xfrm>
-          <a:prstGeom prst="rect">
-            <a:avLst/>
-          </a:prstGeom>
-          <a:noFill/>
-          <a:ln/>
-        </p:spPr>
-        <p:txBody>
-          <a:bodyPr wrap="square" lIns="0" tIns="0" rIns="0" bIns="0" rtlCol="0" anchor="t"/>
-          <a:lstStyle/>
-          <a:p>
-            <a:pPr indent="0" marL="0">
-              <a:buNone/>
-            </a:pPr>
-            <a:r>
-              <a:rPr lang="en-US" sz="1300" dirty="0">
-                <a:solidFill>
-                  <a:srgbClr val="1E3A5F"/>
-                </a:solidFill>
-                <a:latin typeface="Calibri" pitchFamily="34" charset="0"/>
-                <a:ea typeface="Calibri" pitchFamily="34" charset="-122"/>
-                <a:cs typeface="Calibri" pitchFamily="34" charset="-120"/>
-              </a:rPr>
-              <a:t>Every query is still logged.</a:t>
-            </a:r>
-            <a:endParaRPr lang="en-US" sz="1300" dirty="0"/>
-          </a:p>
-        </p:txBody>
-      </p:sp>
       <p:pic>
         <p:nvPicPr>
-          <p:cNvPr id="9" name="dashboard support_ravi" descr="Control Room masking playground on Saffron Bank as support_ravi: Sees only the last digits. Balances rounded down to ₹10,000.">    </p:cNvPr>
+          <p:cNvPr id="11" name="q cell 0 2" descr="Quantum ML detection: Runs inside the bank, offline, on a normal CPU: partly">    </p:cNvPr>
           <p:cNvPicPr>
             <a:picLocks noChangeAspect="1"/>
           </p:cNvPicPr>
@@ -13066,8 +14252,8 @@
         </p:blipFill>
         <p:spPr>
           <a:xfrm>
-            <a:off x="548640" y="2880360"/>
-            <a:ext cx="7818120" cy="1538701"/>
+            <a:off x="7818120" y="2052828"/>
+            <a:ext cx="274320" cy="274320"/>
           </a:xfrm>
           <a:prstGeom prst="rect">
             <a:avLst/>
@@ -13076,13 +14262,762 @@
       </p:pic>
       <p:sp>
         <p:nvSpPr>
-          <p:cNvPr id="10" name="support_ravi circle"/>
+          <p:cNvPr id="12" name="q row line 1"/>
           <p:cNvSpPr/>
           <p:nvPr/>
         </p:nvSpPr>
         <p:spPr>
           <a:xfrm>
-            <a:off x="8595360" y="2971800"/>
+            <a:off x="548640" y="2532888"/>
+            <a:ext cx="8138160" cy="0"/>
+          </a:xfrm>
+          <a:prstGeom prst="line">
+            <a:avLst/>
+          </a:prstGeom>
+          <a:noFill/>
+          <a:ln w="9525">
+            <a:solidFill>
+              <a:srgbClr val="CBD5E1"/>
+            </a:solidFill>
+            <a:prstDash val="solid"/>
+          </a:ln>
+        </p:spPr>
+      </p:sp>
+      <p:sp>
+        <p:nvSpPr>
+          <p:cNvPr id="13" name="Text 8"/>
+          <p:cNvSpPr txBox="1"/>
+          <p:nvPr/>
+        </p:nvSpPr>
+        <p:spPr>
+          <a:xfrm>
+            <a:off x="548640" y="2532888"/>
+            <a:ext cx="3657600" cy="685800"/>
+          </a:xfrm>
+          <a:prstGeom prst="rect">
+            <a:avLst/>
+          </a:prstGeom>
+          <a:noFill/>
+          <a:ln/>
+        </p:spPr>
+        <p:txBody>
+          <a:bodyPr wrap="square" lIns="0" tIns="0" rIns="0" bIns="0" rtlCol="0" anchor="ctr"/>
+          <a:lstStyle/>
+          <a:p>
+            <a:pPr indent="0" marL="0">
+              <a:buNone/>
+            </a:pPr>
+            <a:r>
+              <a:rPr lang="en-US" sz="1500" b="1" dirty="0">
+                <a:solidFill>
+                  <a:srgbClr val="0B1D33"/>
+                </a:solidFill>
+                <a:latin typeface="Calibri" pitchFamily="34" charset="0"/>
+                <a:ea typeface="Calibri" pitchFamily="34" charset="-122"/>
+                <a:cs typeface="Calibri" pitchFamily="34" charset="-120"/>
+              </a:rPr>
+              <a:t>Same input, same answer, every time</a:t>
+            </a:r>
+            <a:endParaRPr lang="en-US" sz="1500" dirty="0"/>
+          </a:p>
+        </p:txBody>
+      </p:sp>
+      <p:pic>
+        <p:nvPicPr>
+          <p:cNvPr id="14" name="q cell 1 0" descr="MaskGuard LightGBM + rules: Same input, same answer, every time: yes">    </p:cNvPr>
+          <p:cNvPicPr>
+            <a:picLocks noChangeAspect="1"/>
+          </p:cNvPicPr>
+          <p:nvPr/>
+        </p:nvPicPr>
+        <p:blipFill>
+          <a:blip r:embed="rId4"/>
+          <a:stretch>
+            <a:fillRect/>
+          </a:stretch>
+        </p:blipFill>
+        <p:spPr>
+          <a:xfrm>
+            <a:off x="4892040" y="2738628"/>
+            <a:ext cx="274320" cy="274320"/>
+          </a:xfrm>
+          <a:prstGeom prst="rect">
+            <a:avLst/>
+          </a:prstGeom>
+        </p:spPr>
+      </p:pic>
+      <p:pic>
+        <p:nvPicPr>
+          <p:cNvPr id="15" name="q cell 1 1" descr="LLM-based detection: Same input, same answer, every time: no">    </p:cNvPr>
+          <p:cNvPicPr>
+            <a:picLocks noChangeAspect="1"/>
+          </p:cNvPicPr>
+          <p:nvPr/>
+        </p:nvPicPr>
+        <p:blipFill>
+          <a:blip r:embed="rId5"/>
+          <a:stretch>
+            <a:fillRect/>
+          </a:stretch>
+        </p:blipFill>
+        <p:spPr>
+          <a:xfrm>
+            <a:off x="6355080" y="2738628"/>
+            <a:ext cx="274320" cy="274320"/>
+          </a:xfrm>
+          <a:prstGeom prst="rect">
+            <a:avLst/>
+          </a:prstGeom>
+        </p:spPr>
+      </p:pic>
+      <p:pic>
+        <p:nvPicPr>
+          <p:cNvPr id="16" name="q cell 1 2" descr="Quantum ML detection: Same input, same answer, every time: partly">    </p:cNvPr>
+          <p:cNvPicPr>
+            <a:picLocks noChangeAspect="1"/>
+          </p:cNvPicPr>
+          <p:nvPr/>
+        </p:nvPicPr>
+        <p:blipFill>
+          <a:blip r:embed="rId6"/>
+          <a:stretch>
+            <a:fillRect/>
+          </a:stretch>
+        </p:blipFill>
+        <p:spPr>
+          <a:xfrm>
+            <a:off x="7818120" y="2738628"/>
+            <a:ext cx="274320" cy="274320"/>
+          </a:xfrm>
+          <a:prstGeom prst="rect">
+            <a:avLst/>
+          </a:prstGeom>
+        </p:spPr>
+      </p:pic>
+      <p:sp>
+        <p:nvSpPr>
+          <p:cNvPr id="17" name="q row line 2"/>
+          <p:cNvSpPr/>
+          <p:nvPr/>
+        </p:nvSpPr>
+        <p:spPr>
+          <a:xfrm>
+            <a:off x="548640" y="3218688"/>
+            <a:ext cx="8138160" cy="0"/>
+          </a:xfrm>
+          <a:prstGeom prst="line">
+            <a:avLst/>
+          </a:prstGeom>
+          <a:noFill/>
+          <a:ln w="9525">
+            <a:solidFill>
+              <a:srgbClr val="CBD5E1"/>
+            </a:solidFill>
+            <a:prstDash val="solid"/>
+          </a:ln>
+        </p:spPr>
+      </p:sp>
+      <p:sp>
+        <p:nvSpPr>
+          <p:cNvPr id="18" name="Text 10"/>
+          <p:cNvSpPr txBox="1"/>
+          <p:nvPr/>
+        </p:nvSpPr>
+        <p:spPr>
+          <a:xfrm>
+            <a:off x="548640" y="3218688"/>
+            <a:ext cx="3657600" cy="685800"/>
+          </a:xfrm>
+          <a:prstGeom prst="rect">
+            <a:avLst/>
+          </a:prstGeom>
+          <a:noFill/>
+          <a:ln/>
+        </p:spPr>
+        <p:txBody>
+          <a:bodyPr wrap="square" lIns="0" tIns="0" rIns="0" bIns="0" rtlCol="0" anchor="ctr"/>
+          <a:lstStyle/>
+          <a:p>
+            <a:pPr indent="0" marL="0">
+              <a:buNone/>
+            </a:pPr>
+            <a:r>
+              <a:rPr lang="en-US" sz="1500" b="1" dirty="0">
+                <a:solidFill>
+                  <a:srgbClr val="0B1D33"/>
+                </a:solidFill>
+                <a:latin typeface="Calibri" pitchFamily="34" charset="0"/>
+                <a:ea typeface="Calibri" pitchFamily="34" charset="-122"/>
+                <a:cs typeface="Calibri" pitchFamily="34" charset="-120"/>
+              </a:rPr>
+              <a:t>Milliseconds per column, no per-call cost</a:t>
+            </a:r>
+            <a:endParaRPr lang="en-US" sz="1500" dirty="0"/>
+          </a:p>
+        </p:txBody>
+      </p:sp>
+      <p:pic>
+        <p:nvPicPr>
+          <p:cNvPr id="19" name="q cell 2 0" descr="MaskGuard LightGBM + rules: Milliseconds per column, no per-call cost: yes">    </p:cNvPr>
+          <p:cNvPicPr>
+            <a:picLocks noChangeAspect="1"/>
+          </p:cNvPicPr>
+          <p:nvPr/>
+        </p:nvPicPr>
+        <p:blipFill>
+          <a:blip r:embed="rId7"/>
+          <a:stretch>
+            <a:fillRect/>
+          </a:stretch>
+        </p:blipFill>
+        <p:spPr>
+          <a:xfrm>
+            <a:off x="4892040" y="3424428"/>
+            <a:ext cx="274320" cy="274320"/>
+          </a:xfrm>
+          <a:prstGeom prst="rect">
+            <a:avLst/>
+          </a:prstGeom>
+        </p:spPr>
+      </p:pic>
+      <p:pic>
+        <p:nvPicPr>
+          <p:cNvPr id="20" name="q cell 2 1" descr="LLM-based detection: Milliseconds per column, no per-call cost: no">    </p:cNvPr>
+          <p:cNvPicPr>
+            <a:picLocks noChangeAspect="1"/>
+          </p:cNvPicPr>
+          <p:nvPr/>
+        </p:nvPicPr>
+        <p:blipFill>
+          <a:blip r:embed="rId8"/>
+          <a:stretch>
+            <a:fillRect/>
+          </a:stretch>
+        </p:blipFill>
+        <p:spPr>
+          <a:xfrm>
+            <a:off x="6355080" y="3424428"/>
+            <a:ext cx="274320" cy="274320"/>
+          </a:xfrm>
+          <a:prstGeom prst="rect">
+            <a:avLst/>
+          </a:prstGeom>
+        </p:spPr>
+      </p:pic>
+      <p:pic>
+        <p:nvPicPr>
+          <p:cNvPr id="21" name="q cell 2 2" descr="Quantum ML detection: Milliseconds per column, no per-call cost: no">    </p:cNvPr>
+          <p:cNvPicPr>
+            <a:picLocks noChangeAspect="1"/>
+          </p:cNvPicPr>
+          <p:nvPr/>
+        </p:nvPicPr>
+        <p:blipFill>
+          <a:blip r:embed="rId9"/>
+          <a:stretch>
+            <a:fillRect/>
+          </a:stretch>
+        </p:blipFill>
+        <p:spPr>
+          <a:xfrm>
+            <a:off x="7818120" y="3424428"/>
+            <a:ext cx="274320" cy="274320"/>
+          </a:xfrm>
+          <a:prstGeom prst="rect">
+            <a:avLst/>
+          </a:prstGeom>
+        </p:spPr>
+      </p:pic>
+      <p:sp>
+        <p:nvSpPr>
+          <p:cNvPr id="22" name="Text 11"/>
+          <p:cNvSpPr txBox="1"/>
+          <p:nvPr/>
+        </p:nvSpPr>
+        <p:spPr>
+          <a:xfrm>
+            <a:off x="548640" y="4014216"/>
+            <a:ext cx="8046720" cy="457200"/>
+          </a:xfrm>
+          <a:prstGeom prst="rect">
+            <a:avLst/>
+          </a:prstGeom>
+          <a:noFill/>
+          <a:ln/>
+        </p:spPr>
+        <p:txBody>
+          <a:bodyPr wrap="square" lIns="0" tIns="0" rIns="0" bIns="0" rtlCol="0" anchor="t"/>
+          <a:lstStyle/>
+          <a:p>
+            <a:pPr indent="0" marL="0">
+              <a:buNone/>
+            </a:pPr>
+            <a:r>
+              <a:rPr lang="en-US" sz="1050" i="1" dirty="0">
+                <a:solidFill>
+                  <a:srgbClr val="64748B"/>
+                </a:solidFill>
+                <a:latin typeface="Calibri" pitchFamily="34" charset="0"/>
+                <a:ea typeface="Calibri" pitchFamily="34" charset="-122"/>
+                <a:cs typeface="Calibri" pitchFamily="34" charset="-120"/>
+              </a:rPr>
+              <a:t>— = partly. LLMs: only if self-hosted on the bank's own GPUs. Quantum: only as a simulation on ordinary computers (slow, and not quantum), otherwise on cloud quantum hardware with probabilistic results.</a:t>
+            </a:r>
+            <a:endParaRPr lang="en-US" sz="1050" dirty="0"/>
+          </a:p>
+        </p:txBody>
+      </p:sp>
+      <p:sp>
+        <p:nvSpPr>
+          <p:cNvPr id="23" name="ml numbers"/>
+          <p:cNvSpPr/>
+          <p:nvPr/>
+        </p:nvSpPr>
+        <p:spPr>
+          <a:xfrm>
+            <a:off x="8823960" y="1188720"/>
+            <a:ext cx="2788920" cy="3108960"/>
+          </a:xfrm>
+          <a:prstGeom prst="roundRect">
+            <a:avLst>
+              <a:gd name="adj" fmla="val 2623"/>
+            </a:avLst>
+          </a:prstGeom>
+          <a:solidFill>
+            <a:srgbClr val="0B1D33"/>
+          </a:solidFill>
+          <a:ln w="9525">
+            <a:solidFill>
+              <a:srgbClr val="0B1D33"/>
+            </a:solidFill>
+            <a:prstDash val="solid"/>
+          </a:ln>
+        </p:spPr>
+      </p:sp>
+      <p:sp>
+        <p:nvSpPr>
+          <p:cNvPr id="24" name="Text 13"/>
+          <p:cNvSpPr txBox="1"/>
+          <p:nvPr/>
+        </p:nvSpPr>
+        <p:spPr>
+          <a:xfrm>
+            <a:off x="9052560" y="1325880"/>
+            <a:ext cx="2423160" cy="457200"/>
+          </a:xfrm>
+          <a:prstGeom prst="rect">
+            <a:avLst/>
+          </a:prstGeom>
+          <a:noFill/>
+          <a:ln/>
+        </p:spPr>
+        <p:txBody>
+          <a:bodyPr wrap="square" lIns="0" tIns="0" rIns="0" bIns="0" rtlCol="0" anchor="ctr"/>
+          <a:lstStyle/>
+          <a:p>
+            <a:pPr indent="0" marL="0">
+              <a:buNone/>
+            </a:pPr>
+            <a:r>
+              <a:rPr lang="en-US" sz="2600" b="1" dirty="0">
+                <a:solidFill>
+                  <a:srgbClr val="D97706"/>
+                </a:solidFill>
+                <a:latin typeface="Cambria" pitchFamily="34" charset="0"/>
+                <a:ea typeface="Cambria" pitchFamily="34" charset="-122"/>
+                <a:cs typeface="Cambria" pitchFamily="34" charset="-120"/>
+              </a:rPr>
+              <a:t>0 calls</a:t>
+            </a:r>
+            <a:endParaRPr lang="en-US" sz="2600" dirty="0"/>
+          </a:p>
+        </p:txBody>
+      </p:sp>
+      <p:sp>
+        <p:nvSpPr>
+          <p:cNvPr id="25" name="Text 14"/>
+          <p:cNvSpPr txBox="1"/>
+          <p:nvPr/>
+        </p:nvSpPr>
+        <p:spPr>
+          <a:xfrm>
+            <a:off x="9052560" y="1783080"/>
+            <a:ext cx="2423160" cy="457200"/>
+          </a:xfrm>
+          <a:prstGeom prst="rect">
+            <a:avLst/>
+          </a:prstGeom>
+          <a:noFill/>
+          <a:ln/>
+        </p:spPr>
+        <p:txBody>
+          <a:bodyPr wrap="square" lIns="0" tIns="0" rIns="0" bIns="0" rtlCol="0" anchor="t"/>
+          <a:lstStyle/>
+          <a:p>
+            <a:pPr indent="0" marL="0">
+              <a:buNone/>
+            </a:pPr>
+            <a:r>
+              <a:rPr lang="en-US" sz="1200" dirty="0">
+                <a:solidFill>
+                  <a:srgbClr val="CBD5E1"/>
+                </a:solidFill>
+                <a:latin typeface="Calibri" pitchFamily="34" charset="0"/>
+                <a:ea typeface="Calibri" pitchFamily="34" charset="-122"/>
+                <a:cs typeface="Calibri" pitchFamily="34" charset="-120"/>
+              </a:rPr>
+              <a:t>to outside services: nothing leaves the bank</a:t>
+            </a:r>
+            <a:endParaRPr lang="en-US" sz="1200" dirty="0"/>
+          </a:p>
+        </p:txBody>
+      </p:sp>
+      <p:sp>
+        <p:nvSpPr>
+          <p:cNvPr id="26" name="Text 15"/>
+          <p:cNvSpPr txBox="1"/>
+          <p:nvPr/>
+        </p:nvSpPr>
+        <p:spPr>
+          <a:xfrm>
+            <a:off x="9052560" y="2313432"/>
+            <a:ext cx="2423160" cy="457200"/>
+          </a:xfrm>
+          <a:prstGeom prst="rect">
+            <a:avLst/>
+          </a:prstGeom>
+          <a:noFill/>
+          <a:ln/>
+        </p:spPr>
+        <p:txBody>
+          <a:bodyPr wrap="square" lIns="0" tIns="0" rIns="0" bIns="0" rtlCol="0" anchor="ctr"/>
+          <a:lstStyle/>
+          <a:p>
+            <a:pPr indent="0" marL="0">
+              <a:buNone/>
+            </a:pPr>
+            <a:r>
+              <a:rPr lang="en-US" sz="2600" b="1" dirty="0">
+                <a:solidFill>
+                  <a:srgbClr val="FFFFFF"/>
+                </a:solidFill>
+                <a:latin typeface="Cambria" pitchFamily="34" charset="0"/>
+                <a:ea typeface="Cambria" pitchFamily="34" charset="-122"/>
+                <a:cs typeface="Cambria" pitchFamily="34" charset="-120"/>
+              </a:rPr>
+              <a:t>≈ 3 ms</a:t>
+            </a:r>
+            <a:endParaRPr lang="en-US" sz="2600" dirty="0"/>
+          </a:p>
+        </p:txBody>
+      </p:sp>
+      <p:sp>
+        <p:nvSpPr>
+          <p:cNvPr id="27" name="Text 16"/>
+          <p:cNvSpPr txBox="1"/>
+          <p:nvPr/>
+        </p:nvSpPr>
+        <p:spPr>
+          <a:xfrm>
+            <a:off x="9052560" y="2770632"/>
+            <a:ext cx="2423160" cy="457200"/>
+          </a:xfrm>
+          <a:prstGeom prst="rect">
+            <a:avLst/>
+          </a:prstGeom>
+          <a:noFill/>
+          <a:ln/>
+        </p:spPr>
+        <p:txBody>
+          <a:bodyPr wrap="square" lIns="0" tIns="0" rIns="0" bIns="0" rtlCol="0" anchor="t"/>
+          <a:lstStyle/>
+          <a:p>
+            <a:pPr indent="0" marL="0">
+              <a:buNone/>
+            </a:pPr>
+            <a:r>
+              <a:rPr lang="en-US" sz="1200" dirty="0">
+                <a:solidFill>
+                  <a:srgbClr val="CBD5E1"/>
+                </a:solidFill>
+                <a:latin typeface="Calibri" pitchFamily="34" charset="0"/>
+                <a:ea typeface="Calibri" pitchFamily="34" charset="-122"/>
+                <a:cs typeface="Calibri" pitchFamily="34" charset="-120"/>
+              </a:rPr>
+              <a:t>per column on a normal CPU (20 values)</a:t>
+            </a:r>
+            <a:endParaRPr lang="en-US" sz="1200" dirty="0"/>
+          </a:p>
+        </p:txBody>
+      </p:sp>
+      <p:sp>
+        <p:nvSpPr>
+          <p:cNvPr id="28" name="Text 17"/>
+          <p:cNvSpPr txBox="1"/>
+          <p:nvPr/>
+        </p:nvSpPr>
+        <p:spPr>
+          <a:xfrm>
+            <a:off x="9052560" y="3300984"/>
+            <a:ext cx="2423160" cy="457200"/>
+          </a:xfrm>
+          <a:prstGeom prst="rect">
+            <a:avLst/>
+          </a:prstGeom>
+          <a:noFill/>
+          <a:ln/>
+        </p:spPr>
+        <p:txBody>
+          <a:bodyPr wrap="square" lIns="0" tIns="0" rIns="0" bIns="0" rtlCol="0" anchor="ctr"/>
+          <a:lstStyle/>
+          <a:p>
+            <a:pPr indent="0" marL="0">
+              <a:buNone/>
+            </a:pPr>
+            <a:r>
+              <a:rPr lang="en-US" sz="2600" b="1" dirty="0">
+                <a:solidFill>
+                  <a:srgbClr val="FFFFFF"/>
+                </a:solidFill>
+                <a:latin typeface="Cambria" pitchFamily="34" charset="0"/>
+                <a:ea typeface="Cambria" pitchFamily="34" charset="-122"/>
+                <a:cs typeface="Cambria" pitchFamily="34" charset="-120"/>
+              </a:rPr>
+              <a:t>0.45 MB</a:t>
+            </a:r>
+            <a:endParaRPr lang="en-US" sz="2600" dirty="0"/>
+          </a:p>
+        </p:txBody>
+      </p:sp>
+      <p:sp>
+        <p:nvSpPr>
+          <p:cNvPr id="29" name="Text 18"/>
+          <p:cNvSpPr txBox="1"/>
+          <p:nvPr/>
+        </p:nvSpPr>
+        <p:spPr>
+          <a:xfrm>
+            <a:off x="9052560" y="3758184"/>
+            <a:ext cx="2423160" cy="457200"/>
+          </a:xfrm>
+          <a:prstGeom prst="rect">
+            <a:avLst/>
+          </a:prstGeom>
+          <a:noFill/>
+          <a:ln/>
+        </p:spPr>
+        <p:txBody>
+          <a:bodyPr wrap="square" lIns="0" tIns="0" rIns="0" bIns="0" rtlCol="0" anchor="t"/>
+          <a:lstStyle/>
+          <a:p>
+            <a:pPr indent="0" marL="0">
+              <a:buNone/>
+            </a:pPr>
+            <a:r>
+              <a:rPr lang="en-US" sz="1200" dirty="0">
+                <a:solidFill>
+                  <a:srgbClr val="CBD5E1"/>
+                </a:solidFill>
+                <a:latin typeface="Calibri" pitchFamily="34" charset="0"/>
+                <a:ea typeface="Calibri" pitchFamily="34" charset="-122"/>
+                <a:cs typeface="Calibri" pitchFamily="34" charset="-120"/>
+              </a:rPr>
+              <a:t>model file; no GPU, no internet</a:t>
+            </a:r>
+            <a:endParaRPr lang="en-US" sz="1200" dirty="0"/>
+          </a:p>
+        </p:txBody>
+      </p:sp>
+      <p:sp>
+        <p:nvSpPr>
+          <p:cNvPr id="30" name="quantum safe card"/>
+          <p:cNvSpPr/>
+          <p:nvPr/>
+        </p:nvSpPr>
+        <p:spPr>
+          <a:xfrm>
+            <a:off x="548640" y="4526280"/>
+            <a:ext cx="5486400" cy="1691640"/>
+          </a:xfrm>
+          <a:prstGeom prst="roundRect">
+            <a:avLst>
+              <a:gd name="adj" fmla="val 4324"/>
+            </a:avLst>
+          </a:prstGeom>
+          <a:solidFill>
+            <a:srgbClr val="E6F4F1"/>
+          </a:solidFill>
+          <a:ln w="9525">
+            <a:solidFill>
+              <a:srgbClr val="E6F4F1"/>
+            </a:solidFill>
+            <a:prstDash val="solid"/>
+          </a:ln>
+        </p:spPr>
+      </p:sp>
+      <p:sp>
+        <p:nvSpPr>
+          <p:cNvPr id="31" name="quantum-safe circle"/>
+          <p:cNvSpPr/>
+          <p:nvPr/>
+        </p:nvSpPr>
+        <p:spPr>
+          <a:xfrm>
+            <a:off x="731520" y="4681728"/>
+            <a:ext cx="566928" cy="566928"/>
+          </a:xfrm>
+          <a:prstGeom prst="ellipse">
+            <a:avLst/>
+          </a:prstGeom>
+          <a:solidFill>
+            <a:srgbClr val="0F766E"/>
+          </a:solidFill>
+          <a:ln w="12700">
+            <a:solidFill>
+              <a:srgbClr val="0F766E"/>
+            </a:solidFill>
+            <a:prstDash val="solid"/>
+          </a:ln>
+        </p:spPr>
+      </p:sp>
+      <p:pic>
+        <p:nvPicPr>
+          <p:cNvPr id="32" name="quantum-safe icon" descr="quantum-safe">    </p:cNvPr>
+          <p:cNvPicPr>
+            <a:picLocks noChangeAspect="1"/>
+          </p:cNvPicPr>
+          <p:nvPr/>
+        </p:nvPicPr>
+        <p:blipFill>
+          <a:blip r:embed="rId10"/>
+          <a:stretch>
+            <a:fillRect/>
+          </a:stretch>
+        </p:blipFill>
+        <p:spPr>
+          <a:xfrm>
+            <a:off x="873252" y="4823460"/>
+            <a:ext cx="283464" cy="283464"/>
+          </a:xfrm>
+          <a:prstGeom prst="rect">
+            <a:avLst/>
+          </a:prstGeom>
+        </p:spPr>
+      </p:pic>
+      <p:sp>
+        <p:nvSpPr>
+          <p:cNvPr id="33" name="Text 21"/>
+          <p:cNvSpPr txBox="1"/>
+          <p:nvPr/>
+        </p:nvSpPr>
+        <p:spPr>
+          <a:xfrm>
+            <a:off x="1417320" y="4681728"/>
+            <a:ext cx="4480560" cy="457200"/>
+          </a:xfrm>
+          <a:prstGeom prst="rect">
+            <a:avLst/>
+          </a:prstGeom>
+          <a:noFill/>
+          <a:ln/>
+        </p:spPr>
+        <p:txBody>
+          <a:bodyPr wrap="square" lIns="0" tIns="0" rIns="0" bIns="0" rtlCol="0" anchor="ctr"/>
+          <a:lstStyle/>
+          <a:p>
+            <a:pPr indent="0" marL="0">
+              <a:buNone/>
+            </a:pPr>
+            <a:r>
+              <a:rPr lang="en-US" sz="1800" b="1" dirty="0">
+                <a:solidFill>
+                  <a:srgbClr val="0B1D33"/>
+                </a:solidFill>
+                <a:latin typeface="Cambria" pitchFamily="34" charset="0"/>
+                <a:ea typeface="Cambria" pitchFamily="34" charset="-122"/>
+                <a:cs typeface="Cambria" pitchFamily="34" charset="-120"/>
+              </a:rPr>
+              <a:t>Quantum-safe? Already.</a:t>
+            </a:r>
+            <a:endParaRPr lang="en-US" sz="1800" dirty="0"/>
+          </a:p>
+        </p:txBody>
+      </p:sp>
+      <p:sp>
+        <p:nvSpPr>
+          <p:cNvPr id="34" name="Text 22"/>
+          <p:cNvSpPr txBox="1"/>
+          <p:nvPr/>
+        </p:nvSpPr>
+        <p:spPr>
+          <a:xfrm>
+            <a:off x="731520" y="5257800"/>
+            <a:ext cx="5166360" cy="914400"/>
+          </a:xfrm>
+          <a:prstGeom prst="rect">
+            <a:avLst/>
+          </a:prstGeom>
+          <a:noFill/>
+          <a:ln/>
+        </p:spPr>
+        <p:txBody>
+          <a:bodyPr wrap="square" lIns="0" tIns="0" rIns="0" bIns="0" rtlCol="0" anchor="t"/>
+          <a:lstStyle/>
+          <a:p>
+            <a:pPr indent="0" marL="0">
+              <a:buNone/>
+            </a:pPr>
+            <a:r>
+              <a:rPr lang="en-US" sz="1250" dirty="0">
+                <a:solidFill>
+                  <a:srgbClr val="1E3A5F"/>
+                </a:solidFill>
+                <a:latin typeface="Calibri" pitchFamily="34" charset="0"/>
+                <a:ea typeface="Calibri" pitchFamily="34" charset="-122"/>
+                <a:cs typeface="Calibri" pitchFamily="34" charset="-120"/>
+              </a:rPr>
+              <a:t>Quantum computers break RSA and elliptic-curve keys. MaskGuard's masking uses none: codes are HMAC-SHA-256 with 256-bit keys, the audit chain is SHA-256 — symmetric primitives NIST does not schedule for retirement.</a:t>
+            </a:r>
+            <a:endParaRPr lang="en-US" sz="1250" dirty="0"/>
+          </a:p>
+        </p:txBody>
+      </p:sp>
+      <p:sp>
+        <p:nvSpPr>
+          <p:cNvPr id="35" name="quantum ml card"/>
+          <p:cNvSpPr/>
+          <p:nvPr/>
+        </p:nvSpPr>
+        <p:spPr>
+          <a:xfrm>
+            <a:off x="6263640" y="4526280"/>
+            <a:ext cx="5349240" cy="1691640"/>
+          </a:xfrm>
+          <a:prstGeom prst="roundRect">
+            <a:avLst>
+              <a:gd name="adj" fmla="val 4324"/>
+            </a:avLst>
+          </a:prstGeom>
+          <a:solidFill>
+            <a:srgbClr val="FDEBD0"/>
+          </a:solidFill>
+          <a:ln w="9525">
+            <a:solidFill>
+              <a:srgbClr val="FDEBD0"/>
+            </a:solidFill>
+            <a:prstDash val="solid"/>
+          </a:ln>
+        </p:spPr>
+      </p:sp>
+      <p:sp>
+        <p:nvSpPr>
+          <p:cNvPr id="36" name="quantum ml circle"/>
+          <p:cNvSpPr/>
+          <p:nvPr/>
+        </p:nvSpPr>
+        <p:spPr>
+          <a:xfrm>
+            <a:off x="6446520" y="4681728"/>
             <a:ext cx="566928" cy="566928"/>
           </a:xfrm>
           <a:prstGeom prst="ellipse">
@@ -13101,21 +15036,21 @@
       </p:sp>
       <p:pic>
         <p:nvPicPr>
-          <p:cNvPr id="11" name="support_ravi icon" descr="support_ravi">    </p:cNvPr>
+          <p:cNvPr id="37" name="quantum ml icon" descr="quantum ml">    </p:cNvPr>
           <p:cNvPicPr>
             <a:picLocks noChangeAspect="1"/>
           </p:cNvPicPr>
           <p:nvPr/>
         </p:nvPicPr>
         <p:blipFill>
-          <a:blip r:embed="rId4"/>
+          <a:blip r:embed="rId11"/>
           <a:stretch>
             <a:fillRect/>
           </a:stretch>
         </p:blipFill>
         <p:spPr>
           <a:xfrm>
-            <a:off x="8737092" y="3113532"/>
+            <a:off x="6588252" y="4823460"/>
             <a:ext cx="283464" cy="283464"/>
           </a:xfrm>
           <a:prstGeom prst="rect">
@@ -13125,14 +15060,14 @@
       </p:pic>
       <p:sp>
         <p:nvSpPr>
-          <p:cNvPr id="12" name="Text 6"/>
-          <p:cNvSpPr txBox="1"/>
-          <p:nvPr/>
-        </p:nvSpPr>
-        <p:spPr>
-          <a:xfrm>
-            <a:off x="9281160" y="2926080"/>
-            <a:ext cx="2377440" cy="329184"/>
+          <p:cNvPr id="38" name="Text 25"/>
+          <p:cNvSpPr txBox="1"/>
+          <p:nvPr/>
+        </p:nvSpPr>
+        <p:spPr>
+          <a:xfrm>
+            <a:off x="7132320" y="4681728"/>
+            <a:ext cx="4389120" cy="457200"/>
           </a:xfrm>
           <a:prstGeom prst="rect">
             <a:avLst/>
@@ -13148,30 +15083,30 @@
               <a:buNone/>
             </a:pPr>
             <a:r>
-              <a:rPr lang="en-US" sz="1400" b="1" dirty="0">
-                <a:solidFill>
-                  <a:srgbClr val="D97706"/>
-                </a:solidFill>
-                <a:latin typeface="Courier New" pitchFamily="34" charset="0"/>
-                <a:ea typeface="Courier New" pitchFamily="34" charset="-122"/>
-                <a:cs typeface="Courier New" pitchFamily="34" charset="-120"/>
-              </a:rPr>
-              <a:t>support_ravi</a:t>
-            </a:r>
-            <a:endParaRPr lang="en-US" sz="1400" dirty="0"/>
-          </a:p>
-        </p:txBody>
-      </p:sp>
-      <p:sp>
-        <p:nvSpPr>
-          <p:cNvPr id="13" name="Text 7"/>
-          <p:cNvSpPr txBox="1"/>
-          <p:nvPr/>
-        </p:nvSpPr>
-        <p:spPr>
-          <a:xfrm>
-            <a:off x="9281160" y="3264408"/>
-            <a:ext cx="2377440" cy="566928"/>
+              <a:rPr lang="en-US" sz="1800" b="1" dirty="0">
+                <a:solidFill>
+                  <a:srgbClr val="0B1D33"/>
+                </a:solidFill>
+                <a:latin typeface="Cambria" pitchFamily="34" charset="0"/>
+                <a:ea typeface="Cambria" pitchFamily="34" charset="-122"/>
+                <a:cs typeface="Cambria" pitchFamily="34" charset="-120"/>
+              </a:rPr>
+              <a:t>Quantum ML? Not better here, yet.</a:t>
+            </a:r>
+            <a:endParaRPr lang="en-US" sz="1800" dirty="0"/>
+          </a:p>
+        </p:txBody>
+      </p:sp>
+      <p:sp>
+        <p:nvSpPr>
+          <p:cNvPr id="39" name="Text 26"/>
+          <p:cNvSpPr txBox="1"/>
+          <p:nvPr/>
+        </p:nvSpPr>
+        <p:spPr>
+          <a:xfrm>
+            <a:off x="6446520" y="5257800"/>
+            <a:ext cx="5029200" cy="914400"/>
           </a:xfrm>
           <a:prstGeom prst="rect">
             <a:avLst/>
@@ -13187,275 +15122,46 @@
               <a:buNone/>
             </a:pPr>
             <a:r>
-              <a:rPr lang="en-US" sz="1600" b="1" dirty="0">
-                <a:solidFill>
-                  <a:srgbClr val="0B1D33"/>
-                </a:solidFill>
-                <a:latin typeface="Calibri" pitchFamily="34" charset="0"/>
-                <a:ea typeface="Calibri" pitchFamily="34" charset="-122"/>
-                <a:cs typeface="Calibri" pitchFamily="34" charset="-120"/>
-              </a:rPr>
-              <a:t>Sees only the last digits.</a:t>
-            </a:r>
-            <a:endParaRPr lang="en-US" sz="1600" dirty="0"/>
-          </a:p>
-        </p:txBody>
-      </p:sp>
-      <p:sp>
-        <p:nvSpPr>
-          <p:cNvPr id="14" name="Text 8"/>
-          <p:cNvSpPr txBox="1"/>
-          <p:nvPr/>
-        </p:nvSpPr>
-        <p:spPr>
-          <a:xfrm>
-            <a:off x="9281160" y="3593592"/>
-            <a:ext cx="2377440" cy="685800"/>
-          </a:xfrm>
-          <a:prstGeom prst="rect">
-            <a:avLst/>
-          </a:prstGeom>
-          <a:noFill/>
-          <a:ln/>
-        </p:spPr>
-        <p:txBody>
-          <a:bodyPr wrap="square" lIns="0" tIns="0" rIns="0" bIns="0" rtlCol="0" anchor="t"/>
+              <a:rPr lang="en-US" sz="1250" dirty="0">
+                <a:solidFill>
+                  <a:srgbClr val="1E3A5F"/>
+                </a:solidFill>
+                <a:latin typeface="Calibri" pitchFamily="34" charset="0"/>
+                <a:ea typeface="Calibri" pitchFamily="34" charset="-122"/>
+                <a:cs typeface="Calibri" pitchFamily="34" charset="-120"/>
+              </a:rPr>
+              <a:t>Recent benchmarks find quantum classifiers do not beat tuned classical models on table data, and they run on simulators or cloud hardware. We picked what works today, on the bank's own servers.</a:t>
+            </a:r>
+            <a:endParaRPr lang="en-US" sz="1250" dirty="0"/>
+          </a:p>
+        </p:txBody>
+      </p:sp>
+      <p:sp>
+        <p:nvSpPr>
+          <p:cNvPr id="40" name="Text 27"/>
+          <p:cNvSpPr txBox="1"/>
+          <p:nvPr/>
+        </p:nvSpPr>
+        <p:spPr>
+          <a:xfrm>
+            <a:off x="548640" y="6254496"/>
+            <a:ext cx="11064240" cy="182880"/>
+          </a:xfrm>
+          <a:prstGeom prst="rect">
+            <a:avLst/>
+          </a:prstGeom>
+          <a:noFill/>
+          <a:ln/>
+        </p:spPr>
+        <p:txBody>
+          <a:bodyPr wrap="square" lIns="0" tIns="0" rIns="0" bIns="0" rtlCol="0" anchor="ctr"/>
           <a:lstStyle/>
           <a:p>
             <a:pPr indent="0" marL="0">
               <a:buNone/>
             </a:pPr>
             <a:r>
-              <a:rPr lang="en-US" sz="1300" dirty="0">
-                <a:solidFill>
-                  <a:srgbClr val="1E3A5F"/>
-                </a:solidFill>
-                <a:latin typeface="Calibri" pitchFamily="34" charset="0"/>
-                <a:ea typeface="Calibri" pitchFamily="34" charset="-122"/>
-                <a:cs typeface="Calibri" pitchFamily="34" charset="-120"/>
-              </a:rPr>
-              <a:t>Balances rounded down to ₹10,000.</a:t>
-            </a:r>
-            <a:endParaRPr lang="en-US" sz="1300" dirty="0"/>
-          </a:p>
-        </p:txBody>
-      </p:sp>
-      <p:pic>
-        <p:nvPicPr>
-          <p:cNvPr id="15" name="dashboard analyst_kavya" descr="Control Room masking playground on Saffron Bank as analyst_kavya: Sees codes, not people. Same customer → same code, so analysis still works.">    </p:cNvPr>
-          <p:cNvPicPr>
-            <a:picLocks noChangeAspect="1"/>
-          </p:cNvPicPr>
-          <p:nvPr/>
-        </p:nvPicPr>
-        <p:blipFill>
-          <a:blip r:embed="rId5"/>
-          <a:stretch>
-            <a:fillRect/>
-          </a:stretch>
-        </p:blipFill>
-        <p:spPr>
-          <a:xfrm>
-            <a:off x="548640" y="4572000"/>
-            <a:ext cx="7818120" cy="1538701"/>
-          </a:xfrm>
-          <a:prstGeom prst="rect">
-            <a:avLst/>
-          </a:prstGeom>
-        </p:spPr>
-      </p:pic>
-      <p:sp>
-        <p:nvSpPr>
-          <p:cNvPr id="16" name="analyst_kavya circle"/>
-          <p:cNvSpPr/>
-          <p:nvPr/>
-        </p:nvSpPr>
-        <p:spPr>
-          <a:xfrm>
-            <a:off x="8595360" y="4663440"/>
-            <a:ext cx="566928" cy="566928"/>
-          </a:xfrm>
-          <a:prstGeom prst="ellipse">
-            <a:avLst/>
-          </a:prstGeom>
-          <a:solidFill>
-            <a:srgbClr val="0F766E"/>
-          </a:solidFill>
-          <a:ln w="12700">
-            <a:solidFill>
-              <a:srgbClr val="0F766E"/>
-            </a:solidFill>
-            <a:prstDash val="solid"/>
-          </a:ln>
-        </p:spPr>
-      </p:sp>
-      <p:pic>
-        <p:nvPicPr>
-          <p:cNvPr id="17" name="analyst_kavya icon" descr="analyst_kavya">    </p:cNvPr>
-          <p:cNvPicPr>
-            <a:picLocks noChangeAspect="1"/>
-          </p:cNvPicPr>
-          <p:nvPr/>
-        </p:nvPicPr>
-        <p:blipFill>
-          <a:blip r:embed="rId6"/>
-          <a:stretch>
-            <a:fillRect/>
-          </a:stretch>
-        </p:blipFill>
-        <p:spPr>
-          <a:xfrm>
-            <a:off x="8737092" y="4805172"/>
-            <a:ext cx="283464" cy="283464"/>
-          </a:xfrm>
-          <a:prstGeom prst="rect">
-            <a:avLst/>
-          </a:prstGeom>
-        </p:spPr>
-      </p:pic>
-      <p:sp>
-        <p:nvSpPr>
-          <p:cNvPr id="18" name="Text 10"/>
-          <p:cNvSpPr txBox="1"/>
-          <p:nvPr/>
-        </p:nvSpPr>
-        <p:spPr>
-          <a:xfrm>
-            <a:off x="9281160" y="4617720"/>
-            <a:ext cx="2377440" cy="329184"/>
-          </a:xfrm>
-          <a:prstGeom prst="rect">
-            <a:avLst/>
-          </a:prstGeom>
-          <a:noFill/>
-          <a:ln/>
-        </p:spPr>
-        <p:txBody>
-          <a:bodyPr wrap="square" lIns="0" tIns="0" rIns="0" bIns="0" rtlCol="0" anchor="ctr"/>
-          <a:lstStyle/>
-          <a:p>
-            <a:pPr indent="0" marL="0">
-              <a:buNone/>
-            </a:pPr>
-            <a:r>
-              <a:rPr lang="en-US" sz="1400" b="1" dirty="0">
-                <a:solidFill>
-                  <a:srgbClr val="0F766E"/>
-                </a:solidFill>
-                <a:latin typeface="Courier New" pitchFamily="34" charset="0"/>
-                <a:ea typeface="Courier New" pitchFamily="34" charset="-122"/>
-                <a:cs typeface="Courier New" pitchFamily="34" charset="-120"/>
-              </a:rPr>
-              <a:t>analyst_kavya</a:t>
-            </a:r>
-            <a:endParaRPr lang="en-US" sz="1400" dirty="0"/>
-          </a:p>
-        </p:txBody>
-      </p:sp>
-      <p:sp>
-        <p:nvSpPr>
-          <p:cNvPr id="19" name="Text 11"/>
-          <p:cNvSpPr txBox="1"/>
-          <p:nvPr/>
-        </p:nvSpPr>
-        <p:spPr>
-          <a:xfrm>
-            <a:off x="9281160" y="4956048"/>
-            <a:ext cx="2377440" cy="566928"/>
-          </a:xfrm>
-          <a:prstGeom prst="rect">
-            <a:avLst/>
-          </a:prstGeom>
-          <a:noFill/>
-          <a:ln/>
-        </p:spPr>
-        <p:txBody>
-          <a:bodyPr wrap="square" lIns="0" tIns="0" rIns="0" bIns="0" rtlCol="0" anchor="t"/>
-          <a:lstStyle/>
-          <a:p>
-            <a:pPr indent="0" marL="0">
-              <a:buNone/>
-            </a:pPr>
-            <a:r>
-              <a:rPr lang="en-US" sz="1600" b="1" dirty="0">
-                <a:solidFill>
-                  <a:srgbClr val="0B1D33"/>
-                </a:solidFill>
-                <a:latin typeface="Calibri" pitchFamily="34" charset="0"/>
-                <a:ea typeface="Calibri" pitchFamily="34" charset="-122"/>
-                <a:cs typeface="Calibri" pitchFamily="34" charset="-120"/>
-              </a:rPr>
-              <a:t>Sees codes, not people.</a:t>
-            </a:r>
-            <a:endParaRPr lang="en-US" sz="1600" dirty="0"/>
-          </a:p>
-        </p:txBody>
-      </p:sp>
-      <p:sp>
-        <p:nvSpPr>
-          <p:cNvPr id="20" name="Text 12"/>
-          <p:cNvSpPr txBox="1"/>
-          <p:nvPr/>
-        </p:nvSpPr>
-        <p:spPr>
-          <a:xfrm>
-            <a:off x="9281160" y="5285232"/>
-            <a:ext cx="2377440" cy="685800"/>
-          </a:xfrm>
-          <a:prstGeom prst="rect">
-            <a:avLst/>
-          </a:prstGeom>
-          <a:noFill/>
-          <a:ln/>
-        </p:spPr>
-        <p:txBody>
-          <a:bodyPr wrap="square" lIns="0" tIns="0" rIns="0" bIns="0" rtlCol="0" anchor="t"/>
-          <a:lstStyle/>
-          <a:p>
-            <a:pPr indent="0" marL="0">
-              <a:buNone/>
-            </a:pPr>
-            <a:r>
-              <a:rPr lang="en-US" sz="1300" dirty="0">
-                <a:solidFill>
-                  <a:srgbClr val="1E3A5F"/>
-                </a:solidFill>
-                <a:latin typeface="Calibri" pitchFamily="34" charset="0"/>
-                <a:ea typeface="Calibri" pitchFamily="34" charset="-122"/>
-                <a:cs typeface="Calibri" pitchFamily="34" charset="-120"/>
-              </a:rPr>
-              <a:t>Same customer → same code, so analysis still works.</a:t>
-            </a:r>
-            <a:endParaRPr lang="en-US" sz="1300" dirty="0"/>
-          </a:p>
-        </p:txBody>
-      </p:sp>
-      <p:sp>
-        <p:nvSpPr>
-          <p:cNvPr id="21" name="Text 13"/>
-          <p:cNvSpPr txBox="1"/>
-          <p:nvPr/>
-        </p:nvSpPr>
-        <p:spPr>
-          <a:xfrm>
-            <a:off x="548640" y="6199632"/>
-            <a:ext cx="11064240" cy="201168"/>
-          </a:xfrm>
-          <a:prstGeom prst="rect">
-            <a:avLst/>
-          </a:prstGeom>
-          <a:noFill/>
-          <a:ln/>
-        </p:spPr>
-        <p:txBody>
-          <a:bodyPr wrap="square" lIns="0" tIns="0" rIns="0" bIns="0" rtlCol="0" anchor="ctr"/>
-          <a:lstStyle/>
-          <a:p>
-            <a:pPr indent="0" marL="0">
-              <a:buNone/>
-            </a:pPr>
-            <a:r>
-              <a:rPr lang="en-US" sz="1000" i="1" dirty="0">
+              <a:rPr lang="en-US" sz="900" i="1" dirty="0">
                 <a:solidFill>
                   <a:srgbClr val="64748B"/>
                 </a:solidFill>
@@ -13463,9 +15169,9 @@
                 <a:ea typeface="Calibri" pitchFamily="34" charset="-122"/>
                 <a:cs typeface="Calibri" pitchFamily="34" charset="-120"/>
               </a:rPr>
-              <a:t>Real screenshots of the MaskGuard Control Room on the organisers' Saffron Bank data, logged in as users from their users.csv.</a:t>
-            </a:r>
-            <a:endParaRPr lang="en-US" sz="1000" dirty="0"/>
+              <a:t>Sources: NIST IR 8547 (draft) transition plan covers public-key algorithms; Bowles, Ahmed &amp; Schuld 2024, "Better than classical?"; QSVM tabular benchmark, arXiv 2604.18837. Our numbers: docs/EVALUATION.md.</a:t>
+            </a:r>
+            <a:endParaRPr lang="en-US" sz="900" dirty="0"/>
           </a:p>
         </p:txBody>
       </p:sp>
@@ -13574,7 +15280,7 @@
                 <a:ea typeface="Cambria" pitchFamily="34" charset="-122"/>
                 <a:cs typeface="Cambria" pitchFamily="34" charset="-120"/>
               </a:rPr>
-              <a:t>Command line: the same engine, for IT teams and automation</a:t>
+              <a:t>Dashboard: one query, three organiser users</a:t>
             </a:r>
             <a:endParaRPr lang="en-US" sz="3000" dirty="0"/>
           </a:p>
@@ -13582,7 +15288,7 @@
       </p:sp>
       <p:pic>
         <p:nvPicPr>
-          <p:cNvPr id="3" name="cli roles screenshot" descr="Real MaskGuard CLI on Saffron Bank: the same query as admin_anita, support_ravi and analyst_kavya.">    </p:cNvPr>
+          <p:cNvPr id="3" name="dashboard admin_anita" descr="Control Room masking playground on Saffron Bank as admin_anita: Sees the real data. Every query is still logged.">    </p:cNvPr>
           <p:cNvPicPr>
             <a:picLocks noChangeAspect="1"/>
           </p:cNvPicPr>
@@ -13597,7 +15303,7 @@
         <p:spPr>
           <a:xfrm>
             <a:off x="548640" y="1188720"/>
-            <a:ext cx="6766560" cy="4644350"/>
+            <a:ext cx="7818120" cy="1517030"/>
           </a:xfrm>
           <a:prstGeom prst="rect">
             <a:avLst/>
@@ -13606,24 +15312,22 @@
       </p:pic>
       <p:sp>
         <p:nvSpPr>
-          <p:cNvPr id="4" name="commands card"/>
+          <p:cNvPr id="4" name="admin_anita circle"/>
           <p:cNvSpPr/>
           <p:nvPr/>
         </p:nvSpPr>
         <p:spPr>
           <a:xfrm>
-            <a:off x="7589520" y="1188720"/>
-            <a:ext cx="4023360" cy="4644350"/>
-          </a:xfrm>
-          <a:prstGeom prst="roundRect">
-            <a:avLst>
-              <a:gd name="adj" fmla="val 1818"/>
-            </a:avLst>
+            <a:off x="8595360" y="1280160"/>
+            <a:ext cx="566928" cy="566928"/>
+          </a:xfrm>
+          <a:prstGeom prst="ellipse">
+            <a:avLst/>
           </a:prstGeom>
           <a:solidFill>
             <a:srgbClr val="0B1D33"/>
           </a:solidFill>
-          <a:ln w="9525">
+          <a:ln w="12700">
             <a:solidFill>
               <a:srgbClr val="0B1D33"/>
             </a:solidFill>
@@ -13631,16 +15335,40 @@
           </a:ln>
         </p:spPr>
       </p:sp>
-      <p:sp>
-        <p:nvSpPr>
-          <p:cNvPr id="5" name="Text 2"/>
-          <p:cNvSpPr txBox="1"/>
-          <p:nvPr/>
-        </p:nvSpPr>
-        <p:spPr>
-          <a:xfrm>
-            <a:off x="7818120" y="1325880"/>
-            <a:ext cx="3566160" cy="365760"/>
+      <p:pic>
+        <p:nvPicPr>
+          <p:cNvPr id="5" name="admin_anita icon" descr="admin_anita">    </p:cNvPr>
+          <p:cNvPicPr>
+            <a:picLocks noChangeAspect="1"/>
+          </p:cNvPicPr>
+          <p:nvPr/>
+        </p:nvPicPr>
+        <p:blipFill>
+          <a:blip r:embed="rId2"/>
+          <a:stretch>
+            <a:fillRect/>
+          </a:stretch>
+        </p:blipFill>
+        <p:spPr>
+          <a:xfrm>
+            <a:off x="8737092" y="1421892"/>
+            <a:ext cx="283464" cy="283464"/>
+          </a:xfrm>
+          <a:prstGeom prst="rect">
+            <a:avLst/>
+          </a:prstGeom>
+        </p:spPr>
+      </p:pic>
+      <p:sp>
+        <p:nvSpPr>
+          <p:cNvPr id="6" name="Text 2"/>
+          <p:cNvSpPr txBox="1"/>
+          <p:nvPr/>
+        </p:nvSpPr>
+        <p:spPr>
+          <a:xfrm>
+            <a:off x="9281160" y="1234440"/>
+            <a:ext cx="2377440" cy="329184"/>
           </a:xfrm>
           <a:prstGeom prst="rect">
             <a:avLst/>
@@ -13656,69 +15384,181 @@
               <a:buNone/>
             </a:pPr>
             <a:r>
-              <a:rPr lang="en-US" sz="1600" b="1" dirty="0">
-                <a:solidFill>
-                  <a:srgbClr val="D97706"/>
-                </a:solidFill>
-                <a:latin typeface="Calibri" pitchFamily="34" charset="0"/>
-                <a:ea typeface="Calibri" pitchFamily="34" charset="-122"/>
-                <a:cs typeface="Calibri" pitchFamily="34" charset="-120"/>
-              </a:rPr>
-              <a:t>Five commands, start to finish</a:t>
-            </a:r>
-            <a:endParaRPr lang="en-US" sz="1600" dirty="0"/>
-          </a:p>
-        </p:txBody>
-      </p:sp>
-      <p:sp>
-        <p:nvSpPr>
-          <p:cNvPr id="6" name="Text 3"/>
-          <p:cNvSpPr txBox="1"/>
-          <p:nvPr/>
-        </p:nvSpPr>
-        <p:spPr>
-          <a:xfrm>
-            <a:off x="7818120" y="1828800"/>
-            <a:ext cx="3657600" cy="329184"/>
-          </a:xfrm>
-          <a:prstGeom prst="rect">
-            <a:avLst/>
-          </a:prstGeom>
-          <a:noFill/>
-          <a:ln/>
-        </p:spPr>
-        <p:txBody>
-          <a:bodyPr wrap="square" lIns="0" tIns="0" rIns="0" bIns="0" rtlCol="0" anchor="ctr"/>
-          <a:lstStyle/>
-          <a:p>
-            <a:pPr indent="0" marL="0">
-              <a:buNone/>
-            </a:pPr>
-            <a:r>
-              <a:rPr lang="en-US" sz="1450" b="1" dirty="0">
-                <a:solidFill>
-                  <a:srgbClr val="FFFFFF"/>
+              <a:rPr lang="en-US" sz="1400" b="1" dirty="0">
+                <a:solidFill>
+                  <a:srgbClr val="0B1D33"/>
                 </a:solidFill>
                 <a:latin typeface="Courier New" pitchFamily="34" charset="0"/>
                 <a:ea typeface="Courier New" pitchFamily="34" charset="-122"/>
                 <a:cs typeface="Courier New" pitchFamily="34" charset="-120"/>
               </a:rPr>
-              <a:t>maskguard connect</a:t>
-            </a:r>
-            <a:endParaRPr lang="en-US" sz="1450" dirty="0"/>
-          </a:p>
-        </p:txBody>
-      </p:sp>
-      <p:sp>
-        <p:nvSpPr>
-          <p:cNvPr id="7" name="Text 4"/>
-          <p:cNvSpPr txBox="1"/>
-          <p:nvPr/>
-        </p:nvSpPr>
-        <p:spPr>
-          <a:xfrm>
-            <a:off x="7818120" y="2157984"/>
-            <a:ext cx="3657600" cy="329184"/>
+              <a:t>admin_anita</a:t>
+            </a:r>
+            <a:endParaRPr lang="en-US" sz="1400" dirty="0"/>
+          </a:p>
+        </p:txBody>
+      </p:sp>
+      <p:sp>
+        <p:nvSpPr>
+          <p:cNvPr id="7" name="Text 3"/>
+          <p:cNvSpPr txBox="1"/>
+          <p:nvPr/>
+        </p:nvSpPr>
+        <p:spPr>
+          <a:xfrm>
+            <a:off x="9281160" y="1572768"/>
+            <a:ext cx="2377440" cy="566928"/>
+          </a:xfrm>
+          <a:prstGeom prst="rect">
+            <a:avLst/>
+          </a:prstGeom>
+          <a:noFill/>
+          <a:ln/>
+        </p:spPr>
+        <p:txBody>
+          <a:bodyPr wrap="square" lIns="0" tIns="0" rIns="0" bIns="0" rtlCol="0" anchor="t"/>
+          <a:lstStyle/>
+          <a:p>
+            <a:pPr indent="0" marL="0">
+              <a:buNone/>
+            </a:pPr>
+            <a:r>
+              <a:rPr lang="en-US" sz="1600" b="1" dirty="0">
+                <a:solidFill>
+                  <a:srgbClr val="0B1D33"/>
+                </a:solidFill>
+                <a:latin typeface="Calibri" pitchFamily="34" charset="0"/>
+                <a:ea typeface="Calibri" pitchFamily="34" charset="-122"/>
+                <a:cs typeface="Calibri" pitchFamily="34" charset="-120"/>
+              </a:rPr>
+              <a:t>Sees the real data.</a:t>
+            </a:r>
+            <a:endParaRPr lang="en-US" sz="1600" dirty="0"/>
+          </a:p>
+        </p:txBody>
+      </p:sp>
+      <p:sp>
+        <p:nvSpPr>
+          <p:cNvPr id="8" name="Text 4"/>
+          <p:cNvSpPr txBox="1"/>
+          <p:nvPr/>
+        </p:nvSpPr>
+        <p:spPr>
+          <a:xfrm>
+            <a:off x="9281160" y="1901952"/>
+            <a:ext cx="2377440" cy="685800"/>
+          </a:xfrm>
+          <a:prstGeom prst="rect">
+            <a:avLst/>
+          </a:prstGeom>
+          <a:noFill/>
+          <a:ln/>
+        </p:spPr>
+        <p:txBody>
+          <a:bodyPr wrap="square" lIns="0" tIns="0" rIns="0" bIns="0" rtlCol="0" anchor="t"/>
+          <a:lstStyle/>
+          <a:p>
+            <a:pPr indent="0" marL="0">
+              <a:buNone/>
+            </a:pPr>
+            <a:r>
+              <a:rPr lang="en-US" sz="1300" dirty="0">
+                <a:solidFill>
+                  <a:srgbClr val="1E3A5F"/>
+                </a:solidFill>
+                <a:latin typeface="Calibri" pitchFamily="34" charset="0"/>
+                <a:ea typeface="Calibri" pitchFamily="34" charset="-122"/>
+                <a:cs typeface="Calibri" pitchFamily="34" charset="-120"/>
+              </a:rPr>
+              <a:t>Every query is still logged.</a:t>
+            </a:r>
+            <a:endParaRPr lang="en-US" sz="1300" dirty="0"/>
+          </a:p>
+        </p:txBody>
+      </p:sp>
+      <p:pic>
+        <p:nvPicPr>
+          <p:cNvPr id="9" name="dashboard support_ravi" descr="Control Room masking playground on Saffron Bank as support_ravi: Sees only the last digits. Balances rounded down to ₹10,000.">    </p:cNvPr>
+          <p:cNvPicPr>
+            <a:picLocks noChangeAspect="1"/>
+          </p:cNvPicPr>
+          <p:nvPr/>
+        </p:nvPicPr>
+        <p:blipFill>
+          <a:blip r:embed="rId3"/>
+          <a:stretch>
+            <a:fillRect/>
+          </a:stretch>
+        </p:blipFill>
+        <p:spPr>
+          <a:xfrm>
+            <a:off x="548640" y="2880360"/>
+            <a:ext cx="7818120" cy="1538701"/>
+          </a:xfrm>
+          <a:prstGeom prst="rect">
+            <a:avLst/>
+          </a:prstGeom>
+        </p:spPr>
+      </p:pic>
+      <p:sp>
+        <p:nvSpPr>
+          <p:cNvPr id="10" name="support_ravi circle"/>
+          <p:cNvSpPr/>
+          <p:nvPr/>
+        </p:nvSpPr>
+        <p:spPr>
+          <a:xfrm>
+            <a:off x="8595360" y="2971800"/>
+            <a:ext cx="566928" cy="566928"/>
+          </a:xfrm>
+          <a:prstGeom prst="ellipse">
+            <a:avLst/>
+          </a:prstGeom>
+          <a:solidFill>
+            <a:srgbClr val="D97706"/>
+          </a:solidFill>
+          <a:ln w="12700">
+            <a:solidFill>
+              <a:srgbClr val="D97706"/>
+            </a:solidFill>
+            <a:prstDash val="solid"/>
+          </a:ln>
+        </p:spPr>
+      </p:sp>
+      <p:pic>
+        <p:nvPicPr>
+          <p:cNvPr id="11" name="support_ravi icon" descr="support_ravi">    </p:cNvPr>
+          <p:cNvPicPr>
+            <a:picLocks noChangeAspect="1"/>
+          </p:cNvPicPr>
+          <p:nvPr/>
+        </p:nvPicPr>
+        <p:blipFill>
+          <a:blip r:embed="rId4"/>
+          <a:stretch>
+            <a:fillRect/>
+          </a:stretch>
+        </p:blipFill>
+        <p:spPr>
+          <a:xfrm>
+            <a:off x="8737092" y="3113532"/>
+            <a:ext cx="283464" cy="283464"/>
+          </a:xfrm>
+          <a:prstGeom prst="rect">
+            <a:avLst/>
+          </a:prstGeom>
+        </p:spPr>
+      </p:pic>
+      <p:sp>
+        <p:nvSpPr>
+          <p:cNvPr id="12" name="Text 6"/>
+          <p:cNvSpPr txBox="1"/>
+          <p:nvPr/>
+        </p:nvSpPr>
+        <p:spPr>
+          <a:xfrm>
+            <a:off x="9281160" y="2926080"/>
+            <a:ext cx="2377440" cy="329184"/>
           </a:xfrm>
           <a:prstGeom prst="rect">
             <a:avLst/>
@@ -13734,69 +15574,181 @@
               <a:buNone/>
             </a:pPr>
             <a:r>
-              <a:rPr lang="en-US" sz="1300" dirty="0">
-                <a:solidFill>
-                  <a:srgbClr val="CBD5E1"/>
-                </a:solidFill>
-                <a:latin typeface="Calibri" pitchFamily="34" charset="0"/>
-                <a:ea typeface="Calibri" pitchFamily="34" charset="-122"/>
-                <a:cs typeface="Calibri" pitchFamily="34" charset="-120"/>
-              </a:rPr>
-              <a:t>connect a database; it scans it</a:t>
-            </a:r>
-            <a:endParaRPr lang="en-US" sz="1300" dirty="0"/>
-          </a:p>
-        </p:txBody>
-      </p:sp>
-      <p:sp>
-        <p:nvSpPr>
-          <p:cNvPr id="8" name="Text 5"/>
-          <p:cNvSpPr txBox="1"/>
-          <p:nvPr/>
-        </p:nvSpPr>
-        <p:spPr>
-          <a:xfrm>
-            <a:off x="7818120" y="2606040"/>
-            <a:ext cx="3657600" cy="329184"/>
-          </a:xfrm>
-          <a:prstGeom prst="rect">
-            <a:avLst/>
-          </a:prstGeom>
-          <a:noFill/>
-          <a:ln/>
-        </p:spPr>
-        <p:txBody>
-          <a:bodyPr wrap="square" lIns="0" tIns="0" rIns="0" bIns="0" rtlCol="0" anchor="ctr"/>
-          <a:lstStyle/>
-          <a:p>
-            <a:pPr indent="0" marL="0">
-              <a:buNone/>
-            </a:pPr>
-            <a:r>
-              <a:rPr lang="en-US" sz="1450" b="1" dirty="0">
-                <a:solidFill>
-                  <a:srgbClr val="FFFFFF"/>
+              <a:rPr lang="en-US" sz="1400" b="1" dirty="0">
+                <a:solidFill>
+                  <a:srgbClr val="D97706"/>
                 </a:solidFill>
                 <a:latin typeface="Courier New" pitchFamily="34" charset="0"/>
                 <a:ea typeface="Courier New" pitchFamily="34" charset="-122"/>
                 <a:cs typeface="Courier New" pitchFamily="34" charset="-120"/>
               </a:rPr>
-              <a:t>maskguard pii approve</a:t>
-            </a:r>
-            <a:endParaRPr lang="en-US" sz="1450" dirty="0"/>
-          </a:p>
-        </p:txBody>
-      </p:sp>
-      <p:sp>
-        <p:nvSpPr>
-          <p:cNvPr id="9" name="Text 6"/>
-          <p:cNvSpPr txBox="1"/>
-          <p:nvPr/>
-        </p:nvSpPr>
-        <p:spPr>
-          <a:xfrm>
-            <a:off x="7818120" y="2935224"/>
-            <a:ext cx="3657600" cy="329184"/>
+              <a:t>support_ravi</a:t>
+            </a:r>
+            <a:endParaRPr lang="en-US" sz="1400" dirty="0"/>
+          </a:p>
+        </p:txBody>
+      </p:sp>
+      <p:sp>
+        <p:nvSpPr>
+          <p:cNvPr id="13" name="Text 7"/>
+          <p:cNvSpPr txBox="1"/>
+          <p:nvPr/>
+        </p:nvSpPr>
+        <p:spPr>
+          <a:xfrm>
+            <a:off x="9281160" y="3264408"/>
+            <a:ext cx="2377440" cy="566928"/>
+          </a:xfrm>
+          <a:prstGeom prst="rect">
+            <a:avLst/>
+          </a:prstGeom>
+          <a:noFill/>
+          <a:ln/>
+        </p:spPr>
+        <p:txBody>
+          <a:bodyPr wrap="square" lIns="0" tIns="0" rIns="0" bIns="0" rtlCol="0" anchor="t"/>
+          <a:lstStyle/>
+          <a:p>
+            <a:pPr indent="0" marL="0">
+              <a:buNone/>
+            </a:pPr>
+            <a:r>
+              <a:rPr lang="en-US" sz="1600" b="1" dirty="0">
+                <a:solidFill>
+                  <a:srgbClr val="0B1D33"/>
+                </a:solidFill>
+                <a:latin typeface="Calibri" pitchFamily="34" charset="0"/>
+                <a:ea typeface="Calibri" pitchFamily="34" charset="-122"/>
+                <a:cs typeface="Calibri" pitchFamily="34" charset="-120"/>
+              </a:rPr>
+              <a:t>Sees only the last digits.</a:t>
+            </a:r>
+            <a:endParaRPr lang="en-US" sz="1600" dirty="0"/>
+          </a:p>
+        </p:txBody>
+      </p:sp>
+      <p:sp>
+        <p:nvSpPr>
+          <p:cNvPr id="14" name="Text 8"/>
+          <p:cNvSpPr txBox="1"/>
+          <p:nvPr/>
+        </p:nvSpPr>
+        <p:spPr>
+          <a:xfrm>
+            <a:off x="9281160" y="3593592"/>
+            <a:ext cx="2377440" cy="685800"/>
+          </a:xfrm>
+          <a:prstGeom prst="rect">
+            <a:avLst/>
+          </a:prstGeom>
+          <a:noFill/>
+          <a:ln/>
+        </p:spPr>
+        <p:txBody>
+          <a:bodyPr wrap="square" lIns="0" tIns="0" rIns="0" bIns="0" rtlCol="0" anchor="t"/>
+          <a:lstStyle/>
+          <a:p>
+            <a:pPr indent="0" marL="0">
+              <a:buNone/>
+            </a:pPr>
+            <a:r>
+              <a:rPr lang="en-US" sz="1300" dirty="0">
+                <a:solidFill>
+                  <a:srgbClr val="1E3A5F"/>
+                </a:solidFill>
+                <a:latin typeface="Calibri" pitchFamily="34" charset="0"/>
+                <a:ea typeface="Calibri" pitchFamily="34" charset="-122"/>
+                <a:cs typeface="Calibri" pitchFamily="34" charset="-120"/>
+              </a:rPr>
+              <a:t>Balances rounded down to ₹10,000.</a:t>
+            </a:r>
+            <a:endParaRPr lang="en-US" sz="1300" dirty="0"/>
+          </a:p>
+        </p:txBody>
+      </p:sp>
+      <p:pic>
+        <p:nvPicPr>
+          <p:cNvPr id="15" name="dashboard analyst_kavya" descr="Control Room masking playground on Saffron Bank as analyst_kavya: Sees codes, not people. Same customer → same code, so analysis still works.">    </p:cNvPr>
+          <p:cNvPicPr>
+            <a:picLocks noChangeAspect="1"/>
+          </p:cNvPicPr>
+          <p:nvPr/>
+        </p:nvPicPr>
+        <p:blipFill>
+          <a:blip r:embed="rId5"/>
+          <a:stretch>
+            <a:fillRect/>
+          </a:stretch>
+        </p:blipFill>
+        <p:spPr>
+          <a:xfrm>
+            <a:off x="548640" y="4572000"/>
+            <a:ext cx="7818120" cy="1538701"/>
+          </a:xfrm>
+          <a:prstGeom prst="rect">
+            <a:avLst/>
+          </a:prstGeom>
+        </p:spPr>
+      </p:pic>
+      <p:sp>
+        <p:nvSpPr>
+          <p:cNvPr id="16" name="analyst_kavya circle"/>
+          <p:cNvSpPr/>
+          <p:nvPr/>
+        </p:nvSpPr>
+        <p:spPr>
+          <a:xfrm>
+            <a:off x="8595360" y="4663440"/>
+            <a:ext cx="566928" cy="566928"/>
+          </a:xfrm>
+          <a:prstGeom prst="ellipse">
+            <a:avLst/>
+          </a:prstGeom>
+          <a:solidFill>
+            <a:srgbClr val="0F766E"/>
+          </a:solidFill>
+          <a:ln w="12700">
+            <a:solidFill>
+              <a:srgbClr val="0F766E"/>
+            </a:solidFill>
+            <a:prstDash val="solid"/>
+          </a:ln>
+        </p:spPr>
+      </p:sp>
+      <p:pic>
+        <p:nvPicPr>
+          <p:cNvPr id="17" name="analyst_kavya icon" descr="analyst_kavya">    </p:cNvPr>
+          <p:cNvPicPr>
+            <a:picLocks noChangeAspect="1"/>
+          </p:cNvPicPr>
+          <p:nvPr/>
+        </p:nvPicPr>
+        <p:blipFill>
+          <a:blip r:embed="rId6"/>
+          <a:stretch>
+            <a:fillRect/>
+          </a:stretch>
+        </p:blipFill>
+        <p:spPr>
+          <a:xfrm>
+            <a:off x="8737092" y="4805172"/>
+            <a:ext cx="283464" cy="283464"/>
+          </a:xfrm>
+          <a:prstGeom prst="rect">
+            <a:avLst/>
+          </a:prstGeom>
+        </p:spPr>
+      </p:pic>
+      <p:sp>
+        <p:nvSpPr>
+          <p:cNvPr id="18" name="Text 10"/>
+          <p:cNvSpPr txBox="1"/>
+          <p:nvPr/>
+        </p:nvSpPr>
+        <p:spPr>
+          <a:xfrm>
+            <a:off x="9281160" y="4617720"/>
+            <a:ext cx="2377440" cy="329184"/>
           </a:xfrm>
           <a:prstGeom prst="rect">
             <a:avLst/>
@@ -13812,69 +15764,108 @@
               <a:buNone/>
             </a:pPr>
             <a:r>
-              <a:rPr lang="en-US" sz="1300" dirty="0">
-                <a:solidFill>
-                  <a:srgbClr val="CBD5E1"/>
-                </a:solidFill>
-                <a:latin typeface="Calibri" pitchFamily="34" charset="0"/>
-                <a:ea typeface="Calibri" pitchFamily="34" charset="-122"/>
-                <a:cs typeface="Calibri" pitchFamily="34" charset="-120"/>
-              </a:rPr>
-              <a:t>a person confirms the labels</a:t>
-            </a:r>
-            <a:endParaRPr lang="en-US" sz="1300" dirty="0"/>
-          </a:p>
-        </p:txBody>
-      </p:sp>
-      <p:sp>
-        <p:nvSpPr>
-          <p:cNvPr id="10" name="Text 7"/>
-          <p:cNvSpPr txBox="1"/>
-          <p:nvPr/>
-        </p:nvSpPr>
-        <p:spPr>
-          <a:xfrm>
-            <a:off x="7818120" y="3383280"/>
-            <a:ext cx="3657600" cy="329184"/>
-          </a:xfrm>
-          <a:prstGeom prst="rect">
-            <a:avLst/>
-          </a:prstGeom>
-          <a:noFill/>
-          <a:ln/>
-        </p:spPr>
-        <p:txBody>
-          <a:bodyPr wrap="square" lIns="0" tIns="0" rIns="0" bIns="0" rtlCol="0" anchor="ctr"/>
-          <a:lstStyle/>
-          <a:p>
-            <a:pPr indent="0" marL="0">
-              <a:buNone/>
-            </a:pPr>
-            <a:r>
-              <a:rPr lang="en-US" sz="1450" b="1" dirty="0">
-                <a:solidFill>
-                  <a:srgbClr val="FFFFFF"/>
+              <a:rPr lang="en-US" sz="1400" b="1" dirty="0">
+                <a:solidFill>
+                  <a:srgbClr val="0F766E"/>
                 </a:solidFill>
                 <a:latin typeface="Courier New" pitchFamily="34" charset="0"/>
                 <a:ea typeface="Courier New" pitchFamily="34" charset="-122"/>
                 <a:cs typeface="Courier New" pitchFamily="34" charset="-120"/>
               </a:rPr>
-              <a:t>maskguard compare</a:t>
-            </a:r>
-            <a:endParaRPr lang="en-US" sz="1450" dirty="0"/>
-          </a:p>
-        </p:txBody>
-      </p:sp>
-      <p:sp>
-        <p:nvSpPr>
-          <p:cNvPr id="11" name="Text 8"/>
-          <p:cNvSpPr txBox="1"/>
-          <p:nvPr/>
-        </p:nvSpPr>
-        <p:spPr>
-          <a:xfrm>
-            <a:off x="7818120" y="3712464"/>
-            <a:ext cx="3657600" cy="329184"/>
+              <a:t>analyst_kavya</a:t>
+            </a:r>
+            <a:endParaRPr lang="en-US" sz="1400" dirty="0"/>
+          </a:p>
+        </p:txBody>
+      </p:sp>
+      <p:sp>
+        <p:nvSpPr>
+          <p:cNvPr id="19" name="Text 11"/>
+          <p:cNvSpPr txBox="1"/>
+          <p:nvPr/>
+        </p:nvSpPr>
+        <p:spPr>
+          <a:xfrm>
+            <a:off x="9281160" y="4956048"/>
+            <a:ext cx="2377440" cy="566928"/>
+          </a:xfrm>
+          <a:prstGeom prst="rect">
+            <a:avLst/>
+          </a:prstGeom>
+          <a:noFill/>
+          <a:ln/>
+        </p:spPr>
+        <p:txBody>
+          <a:bodyPr wrap="square" lIns="0" tIns="0" rIns="0" bIns="0" rtlCol="0" anchor="t"/>
+          <a:lstStyle/>
+          <a:p>
+            <a:pPr indent="0" marL="0">
+              <a:buNone/>
+            </a:pPr>
+            <a:r>
+              <a:rPr lang="en-US" sz="1600" b="1" dirty="0">
+                <a:solidFill>
+                  <a:srgbClr val="0B1D33"/>
+                </a:solidFill>
+                <a:latin typeface="Calibri" pitchFamily="34" charset="0"/>
+                <a:ea typeface="Calibri" pitchFamily="34" charset="-122"/>
+                <a:cs typeface="Calibri" pitchFamily="34" charset="-120"/>
+              </a:rPr>
+              <a:t>Sees codes, not people.</a:t>
+            </a:r>
+            <a:endParaRPr lang="en-US" sz="1600" dirty="0"/>
+          </a:p>
+        </p:txBody>
+      </p:sp>
+      <p:sp>
+        <p:nvSpPr>
+          <p:cNvPr id="20" name="Text 12"/>
+          <p:cNvSpPr txBox="1"/>
+          <p:nvPr/>
+        </p:nvSpPr>
+        <p:spPr>
+          <a:xfrm>
+            <a:off x="9281160" y="5285232"/>
+            <a:ext cx="2377440" cy="685800"/>
+          </a:xfrm>
+          <a:prstGeom prst="rect">
+            <a:avLst/>
+          </a:prstGeom>
+          <a:noFill/>
+          <a:ln/>
+        </p:spPr>
+        <p:txBody>
+          <a:bodyPr wrap="square" lIns="0" tIns="0" rIns="0" bIns="0" rtlCol="0" anchor="t"/>
+          <a:lstStyle/>
+          <a:p>
+            <a:pPr indent="0" marL="0">
+              <a:buNone/>
+            </a:pPr>
+            <a:r>
+              <a:rPr lang="en-US" sz="1300" dirty="0">
+                <a:solidFill>
+                  <a:srgbClr val="1E3A5F"/>
+                </a:solidFill>
+                <a:latin typeface="Calibri" pitchFamily="34" charset="0"/>
+                <a:ea typeface="Calibri" pitchFamily="34" charset="-122"/>
+                <a:cs typeface="Calibri" pitchFamily="34" charset="-120"/>
+              </a:rPr>
+              <a:t>Same customer → same code, so analysis still works.</a:t>
+            </a:r>
+            <a:endParaRPr lang="en-US" sz="1300" dirty="0"/>
+          </a:p>
+        </p:txBody>
+      </p:sp>
+      <p:sp>
+        <p:nvSpPr>
+          <p:cNvPr id="21" name="Text 13"/>
+          <p:cNvSpPr txBox="1"/>
+          <p:nvPr/>
+        </p:nvSpPr>
+        <p:spPr>
+          <a:xfrm>
+            <a:off x="548640" y="6199632"/>
+            <a:ext cx="11064240" cy="201168"/>
           </a:xfrm>
           <a:prstGeom prst="rect">
             <a:avLst/>
@@ -13890,226 +15881,17 @@
               <a:buNone/>
             </a:pPr>
             <a:r>
-              <a:rPr lang="en-US" sz="1300" dirty="0">
-                <a:solidFill>
-                  <a:srgbClr val="CBD5E1"/>
-                </a:solidFill>
-                <a:latin typeface="Calibri" pitchFamily="34" charset="0"/>
-                <a:ea typeface="Calibri" pitchFamily="34" charset="-122"/>
-                <a:cs typeface="Calibri" pitchFamily="34" charset="-120"/>
-              </a:rPr>
-              <a:t>same query, roles side by side</a:t>
-            </a:r>
-            <a:endParaRPr lang="en-US" sz="1300" dirty="0"/>
-          </a:p>
-        </p:txBody>
-      </p:sp>
-      <p:sp>
-        <p:nvSpPr>
-          <p:cNvPr id="12" name="Text 9"/>
-          <p:cNvSpPr txBox="1"/>
-          <p:nvPr/>
-        </p:nvSpPr>
-        <p:spPr>
-          <a:xfrm>
-            <a:off x="7818120" y="4160520"/>
-            <a:ext cx="3657600" cy="329184"/>
-          </a:xfrm>
-          <a:prstGeom prst="rect">
-            <a:avLst/>
-          </a:prstGeom>
-          <a:noFill/>
-          <a:ln/>
-        </p:spPr>
-        <p:txBody>
-          <a:bodyPr wrap="square" lIns="0" tIns="0" rIns="0" bIns="0" rtlCol="0" anchor="ctr"/>
-          <a:lstStyle/>
-          <a:p>
-            <a:pPr indent="0" marL="0">
-              <a:buNone/>
-            </a:pPr>
-            <a:r>
-              <a:rPr lang="en-US" sz="1450" b="1" dirty="0">
-                <a:solidFill>
-                  <a:srgbClr val="FFFFFF"/>
-                </a:solidFill>
-                <a:latin typeface="Courier New" pitchFamily="34" charset="0"/>
-                <a:ea typeface="Courier New" pitchFamily="34" charset="-122"/>
-                <a:cs typeface="Courier New" pitchFamily="34" charset="-120"/>
-              </a:rPr>
-              <a:t>maskguard attack</a:t>
-            </a:r>
-            <a:endParaRPr lang="en-US" sz="1450" dirty="0"/>
-          </a:p>
-        </p:txBody>
-      </p:sp>
-      <p:sp>
-        <p:nvSpPr>
-          <p:cNvPr id="13" name="Text 10"/>
-          <p:cNvSpPr txBox="1"/>
-          <p:nvPr/>
-        </p:nvSpPr>
-        <p:spPr>
-          <a:xfrm>
-            <a:off x="7818120" y="4489704"/>
-            <a:ext cx="3657600" cy="329184"/>
-          </a:xfrm>
-          <a:prstGeom prst="rect">
-            <a:avLst/>
-          </a:prstGeom>
-          <a:noFill/>
-          <a:ln/>
-        </p:spPr>
-        <p:txBody>
-          <a:bodyPr wrap="square" lIns="0" tIns="0" rIns="0" bIns="0" rtlCol="0" anchor="ctr"/>
-          <a:lstStyle/>
-          <a:p>
-            <a:pPr indent="0" marL="0">
-              <a:buNone/>
-            </a:pPr>
-            <a:r>
-              <a:rPr lang="en-US" sz="1300" dirty="0">
-                <a:solidFill>
-                  <a:srgbClr val="CBD5E1"/>
-                </a:solidFill>
-                <a:latin typeface="Calibri" pitchFamily="34" charset="0"/>
-                <a:ea typeface="Calibri" pitchFamily="34" charset="-122"/>
-                <a:cs typeface="Calibri" pitchFamily="34" charset="-120"/>
-              </a:rPr>
-              <a:t>17 known attacks: 0 leak</a:t>
-            </a:r>
-            <a:endParaRPr lang="en-US" sz="1300" dirty="0"/>
-          </a:p>
-        </p:txBody>
-      </p:sp>
-      <p:sp>
-        <p:nvSpPr>
-          <p:cNvPr id="14" name="Text 11"/>
-          <p:cNvSpPr txBox="1"/>
-          <p:nvPr/>
-        </p:nvSpPr>
-        <p:spPr>
-          <a:xfrm>
-            <a:off x="7818120" y="4937760"/>
-            <a:ext cx="3657600" cy="329184"/>
-          </a:xfrm>
-          <a:prstGeom prst="rect">
-            <a:avLst/>
-          </a:prstGeom>
-          <a:noFill/>
-          <a:ln/>
-        </p:spPr>
-        <p:txBody>
-          <a:bodyPr wrap="square" lIns="0" tIns="0" rIns="0" bIns="0" rtlCol="0" anchor="ctr"/>
-          <a:lstStyle/>
-          <a:p>
-            <a:pPr indent="0" marL="0">
-              <a:buNone/>
-            </a:pPr>
-            <a:r>
-              <a:rPr lang="en-US" sz="1450" b="1" dirty="0">
-                <a:solidFill>
-                  <a:srgbClr val="FFFFFF"/>
-                </a:solidFill>
-                <a:latin typeface="Courier New" pitchFamily="34" charset="0"/>
-                <a:ea typeface="Courier New" pitchFamily="34" charset="-122"/>
-                <a:cs typeface="Courier New" pitchFamily="34" charset="-120"/>
-              </a:rPr>
-              <a:t>maskguard integrity proof</a:t>
-            </a:r>
-            <a:endParaRPr lang="en-US" sz="1450" dirty="0"/>
-          </a:p>
-        </p:txBody>
-      </p:sp>
-      <p:sp>
-        <p:nvSpPr>
-          <p:cNvPr id="15" name="Text 12"/>
-          <p:cNvSpPr txBox="1"/>
-          <p:nvPr/>
-        </p:nvSpPr>
-        <p:spPr>
-          <a:xfrm>
-            <a:off x="7818120" y="5266944"/>
-            <a:ext cx="3657600" cy="329184"/>
-          </a:xfrm>
-          <a:prstGeom prst="rect">
-            <a:avLst/>
-          </a:prstGeom>
-          <a:noFill/>
-          <a:ln/>
-        </p:spPr>
-        <p:txBody>
-          <a:bodyPr wrap="square" lIns="0" tIns="0" rIns="0" bIns="0" rtlCol="0" anchor="ctr"/>
-          <a:lstStyle/>
-          <a:p>
-            <a:pPr indent="0" marL="0">
-              <a:buNone/>
-            </a:pPr>
-            <a:r>
-              <a:rPr lang="en-US" sz="1300" dirty="0">
-                <a:solidFill>
-                  <a:srgbClr val="CBD5E1"/>
-                </a:solidFill>
-                <a:latin typeface="Calibri" pitchFamily="34" charset="0"/>
-                <a:ea typeface="Calibri" pitchFamily="34" charset="-122"/>
-                <a:cs typeface="Calibri" pitchFamily="34" charset="-120"/>
-              </a:rPr>
-              <a:t>data unchanged, audit intact</a:t>
-            </a:r>
-            <a:endParaRPr lang="en-US" sz="1300" dirty="0"/>
-          </a:p>
-        </p:txBody>
-      </p:sp>
-      <p:sp>
-        <p:nvSpPr>
-          <p:cNvPr id="16" name="Text 13"/>
-          <p:cNvSpPr txBox="1"/>
-          <p:nvPr/>
-        </p:nvSpPr>
-        <p:spPr>
-          <a:xfrm>
-            <a:off x="548640" y="5970230"/>
-            <a:ext cx="11064240" cy="365760"/>
-          </a:xfrm>
-          <a:prstGeom prst="rect">
-            <a:avLst/>
-          </a:prstGeom>
-          <a:noFill/>
-          <a:ln/>
-        </p:spPr>
-        <p:txBody>
-          <a:bodyPr wrap="square" lIns="0" tIns="0" rIns="0" bIns="0" rtlCol="0" anchor="ctr"/>
-          <a:lstStyle/>
-          <a:p>
-            <a:pPr indent="0" marL="0">
-              <a:buNone/>
-            </a:pPr>
-            <a:r>
-              <a:rPr lang="en-US" sz="1400" b="1" dirty="0">
-                <a:solidFill>
-                  <a:srgbClr val="0B1D33"/>
-                </a:solidFill>
-                <a:latin typeface="Calibri" pitchFamily="34" charset="0"/>
-                <a:ea typeface="Calibri" pitchFamily="34" charset="-122"/>
-                <a:cs typeface="Calibri" pitchFamily="34" charset="-120"/>
-              </a:rPr>
-              <a:t>Also: </a:t>
-            </a:r>
-            <a:pPr indent="0" marL="0">
-              <a:buNone/>
-            </a:pPr>
-            <a:r>
-              <a:rPr lang="en-US" sz="1400" dirty="0">
-                <a:solidFill>
-                  <a:srgbClr val="1E3A5F"/>
-                </a:solidFill>
-                <a:latin typeface="Calibri" pitchFamily="34" charset="0"/>
-                <a:ea typeface="Calibri" pitchFamily="34" charset="-122"/>
-                <a:cs typeface="Calibri" pitchFamily="34" charset="-120"/>
-              </a:rPr>
-              <a:t>writes are refused for every role (exit code 3) · JSON output for scripts and CI · pip install maskguard</a:t>
-            </a:r>
-            <a:endParaRPr lang="en-US" sz="1400" dirty="0"/>
+              <a:rPr lang="en-US" sz="1000" i="1" dirty="0">
+                <a:solidFill>
+                  <a:srgbClr val="64748B"/>
+                </a:solidFill>
+                <a:latin typeface="Calibri" pitchFamily="34" charset="0"/>
+                <a:ea typeface="Calibri" pitchFamily="34" charset="-122"/>
+                <a:cs typeface="Calibri" pitchFamily="34" charset="-120"/>
+              </a:rPr>
+              <a:t>Real screenshots of the MaskGuard Control Room on the organisers' Saffron Bank data, logged in as users from their users.csv.</a:t>
+            </a:r>
+            <a:endParaRPr lang="en-US" sz="1000" dirty="0"/>
           </a:p>
         </p:txBody>
       </p:sp>
@@ -14218,26 +16000,50 @@
                 <a:ea typeface="Cambria" pitchFamily="34" charset="-122"/>
                 <a:cs typeface="Cambria" pitchFamily="34" charset="-120"/>
               </a:rPr>
-              <a:t>Proof on the organisers' own data — on all 3 databases</a:t>
+              <a:t>Command line: the same engine, for IT teams and automation</a:t>
             </a:r>
             <a:endParaRPr lang="en-US" sz="3000" dirty="0"/>
           </a:p>
         </p:txBody>
       </p:sp>
-      <p:sp>
-        <p:nvSpPr>
-          <p:cNvPr id="3" name="proof 1"/>
+      <p:pic>
+        <p:nvPicPr>
+          <p:cNvPr id="3" name="cli roles screenshot" descr="Real MaskGuard CLI on Saffron Bank: the same query as admin_anita, support_ravi and analyst_kavya.">    </p:cNvPr>
+          <p:cNvPicPr>
+            <a:picLocks noChangeAspect="1"/>
+          </p:cNvPicPr>
+          <p:nvPr/>
+        </p:nvPicPr>
+        <p:blipFill>
+          <a:blip r:embed="rId1"/>
+          <a:stretch>
+            <a:fillRect/>
+          </a:stretch>
+        </p:blipFill>
+        <p:spPr>
+          <a:xfrm>
+            <a:off x="548640" y="1188720"/>
+            <a:ext cx="6766560" cy="4644350"/>
+          </a:xfrm>
+          <a:prstGeom prst="rect">
+            <a:avLst/>
+          </a:prstGeom>
+        </p:spPr>
+      </p:pic>
+      <p:sp>
+        <p:nvSpPr>
+          <p:cNvPr id="4" name="commands card"/>
           <p:cNvSpPr/>
           <p:nvPr/>
         </p:nvSpPr>
         <p:spPr>
           <a:xfrm>
-            <a:off x="548640" y="1234440"/>
-            <a:ext cx="3520440" cy="1965960"/>
+            <a:off x="7589520" y="1188720"/>
+            <a:ext cx="4023360" cy="4644350"/>
           </a:xfrm>
           <a:prstGeom prst="roundRect">
             <a:avLst>
-              <a:gd name="adj" fmla="val 3721"/>
+              <a:gd name="adj" fmla="val 1818"/>
             </a:avLst>
           </a:prstGeom>
           <a:solidFill>
@@ -14253,14 +16059,14 @@
       </p:sp>
       <p:sp>
         <p:nvSpPr>
-          <p:cNvPr id="4" name="Text 2"/>
-          <p:cNvSpPr txBox="1"/>
-          <p:nvPr/>
-        </p:nvSpPr>
-        <p:spPr>
-          <a:xfrm>
-            <a:off x="822960" y="1399032"/>
-            <a:ext cx="3017520" cy="731520"/>
+          <p:cNvPr id="5" name="Text 2"/>
+          <p:cNvSpPr txBox="1"/>
+          <p:nvPr/>
+        </p:nvSpPr>
+        <p:spPr>
+          <a:xfrm>
+            <a:off x="7818120" y="1325880"/>
+            <a:ext cx="3566160" cy="365760"/>
           </a:xfrm>
           <a:prstGeom prst="rect">
             <a:avLst/>
@@ -14276,30 +16082,30 @@
               <a:buNone/>
             </a:pPr>
             <a:r>
-              <a:rPr lang="en-US" sz="4000" b="1" dirty="0">
+              <a:rPr lang="en-US" sz="1600" b="1" dirty="0">
                 <a:solidFill>
                   <a:srgbClr val="D97706"/>
                 </a:solidFill>
-                <a:latin typeface="Cambria" pitchFamily="34" charset="0"/>
-                <a:ea typeface="Cambria" pitchFamily="34" charset="-122"/>
-                <a:cs typeface="Cambria" pitchFamily="34" charset="-120"/>
-              </a:rPr>
-              <a:t>35 / 35</a:t>
-            </a:r>
-            <a:endParaRPr lang="en-US" sz="4000" dirty="0"/>
-          </a:p>
-        </p:txBody>
-      </p:sp>
-      <p:sp>
-        <p:nvSpPr>
-          <p:cNvPr id="5" name="Text 3"/>
-          <p:cNvSpPr txBox="1"/>
-          <p:nvPr/>
-        </p:nvSpPr>
-        <p:spPr>
-          <a:xfrm>
-            <a:off x="822960" y="2148840"/>
-            <a:ext cx="3063240" cy="365760"/>
+                <a:latin typeface="Calibri" pitchFamily="34" charset="0"/>
+                <a:ea typeface="Calibri" pitchFamily="34" charset="-122"/>
+                <a:cs typeface="Calibri" pitchFamily="34" charset="-120"/>
+              </a:rPr>
+              <a:t>Five commands, start to finish</a:t>
+            </a:r>
+            <a:endParaRPr lang="en-US" sz="1600" dirty="0"/>
+          </a:p>
+        </p:txBody>
+      </p:sp>
+      <p:sp>
+        <p:nvSpPr>
+          <p:cNvPr id="6" name="Text 3"/>
+          <p:cNvSpPr txBox="1"/>
+          <p:nvPr/>
+        </p:nvSpPr>
+        <p:spPr>
+          <a:xfrm>
+            <a:off x="7818120" y="1828800"/>
+            <a:ext cx="3657600" cy="329184"/>
           </a:xfrm>
           <a:prstGeom prst="rect">
             <a:avLst/>
@@ -14315,39 +16121,39 @@
               <a:buNone/>
             </a:pPr>
             <a:r>
-              <a:rPr lang="en-US" sz="1700" b="1" dirty="0">
+              <a:rPr lang="en-US" sz="1450" b="1" dirty="0">
                 <a:solidFill>
                   <a:srgbClr val="FFFFFF"/>
                 </a:solidFill>
-                <a:latin typeface="Calibri" pitchFamily="34" charset="0"/>
-                <a:ea typeface="Calibri" pitchFamily="34" charset="-122"/>
-                <a:cs typeface="Calibri" pitchFamily="34" charset="-120"/>
-              </a:rPr>
-              <a:t>sensitive columns found</a:t>
-            </a:r>
-            <a:endParaRPr lang="en-US" sz="1700" dirty="0"/>
-          </a:p>
-        </p:txBody>
-      </p:sp>
-      <p:sp>
-        <p:nvSpPr>
-          <p:cNvPr id="6" name="Text 4"/>
-          <p:cNvSpPr txBox="1"/>
-          <p:nvPr/>
-        </p:nvSpPr>
-        <p:spPr>
-          <a:xfrm>
-            <a:off x="822960" y="2532888"/>
-            <a:ext cx="3063240" cy="594360"/>
-          </a:xfrm>
-          <a:prstGeom prst="rect">
-            <a:avLst/>
-          </a:prstGeom>
-          <a:noFill/>
-          <a:ln/>
-        </p:spPr>
-        <p:txBody>
-          <a:bodyPr wrap="square" lIns="0" tIns="0" rIns="0" bIns="0" rtlCol="0" anchor="t"/>
+                <a:latin typeface="Courier New" pitchFamily="34" charset="0"/>
+                <a:ea typeface="Courier New" pitchFamily="34" charset="-122"/>
+                <a:cs typeface="Courier New" pitchFamily="34" charset="-120"/>
+              </a:rPr>
+              <a:t>maskguard connect</a:t>
+            </a:r>
+            <a:endParaRPr lang="en-US" sz="1450" dirty="0"/>
+          </a:p>
+        </p:txBody>
+      </p:sp>
+      <p:sp>
+        <p:nvSpPr>
+          <p:cNvPr id="7" name="Text 4"/>
+          <p:cNvSpPr txBox="1"/>
+          <p:nvPr/>
+        </p:nvSpPr>
+        <p:spPr>
+          <a:xfrm>
+            <a:off x="7818120" y="2157984"/>
+            <a:ext cx="3657600" cy="329184"/>
+          </a:xfrm>
+          <a:prstGeom prst="rect">
+            <a:avLst/>
+          </a:prstGeom>
+          <a:noFill/>
+          <a:ln/>
+        </p:spPr>
+        <p:txBody>
+          <a:bodyPr wrap="square" lIns="0" tIns="0" rIns="0" bIns="0" rtlCol="0" anchor="ctr"/>
           <a:lstStyle/>
           <a:p>
             <a:pPr indent="0" marL="0">
@@ -14362,7 +16168,7 @@
                 <a:ea typeface="Calibri" pitchFamily="34" charset="-122"/>
                 <a:cs typeface="Calibri" pitchFamily="34" charset="-120"/>
               </a:rPr>
-              <a:t>first try 22; we fixed the general causes, not the dataset</a:t>
+              <a:t>connect a database; it scans it</a:t>
             </a:r>
             <a:endParaRPr lang="en-US" sz="1300" dirty="0"/>
           </a:p>
@@ -14370,41 +16176,14 @@
       </p:sp>
       <p:sp>
         <p:nvSpPr>
-          <p:cNvPr id="7" name="proof 2"/>
-          <p:cNvSpPr/>
-          <p:nvPr/>
-        </p:nvSpPr>
-        <p:spPr>
-          <a:xfrm>
-            <a:off x="4297680" y="1234440"/>
-            <a:ext cx="3520440" cy="1965960"/>
-          </a:xfrm>
-          <a:prstGeom prst="roundRect">
-            <a:avLst>
-              <a:gd name="adj" fmla="val 3721"/>
-            </a:avLst>
-          </a:prstGeom>
-          <a:solidFill>
-            <a:srgbClr val="0B1D33"/>
-          </a:solidFill>
-          <a:ln w="9525">
-            <a:solidFill>
-              <a:srgbClr val="0B1D33"/>
-            </a:solidFill>
-            <a:prstDash val="solid"/>
-          </a:ln>
-        </p:spPr>
-      </p:sp>
-      <p:sp>
-        <p:nvSpPr>
-          <p:cNvPr id="8" name="Text 6"/>
-          <p:cNvSpPr txBox="1"/>
-          <p:nvPr/>
-        </p:nvSpPr>
-        <p:spPr>
-          <a:xfrm>
-            <a:off x="4572000" y="1399032"/>
-            <a:ext cx="3017520" cy="731520"/>
+          <p:cNvPr id="8" name="Text 5"/>
+          <p:cNvSpPr txBox="1"/>
+          <p:nvPr/>
+        </p:nvSpPr>
+        <p:spPr>
+          <a:xfrm>
+            <a:off x="7818120" y="2606040"/>
+            <a:ext cx="3657600" cy="329184"/>
           </a:xfrm>
           <a:prstGeom prst="rect">
             <a:avLst/>
@@ -14420,30 +16199,30 @@
               <a:buNone/>
             </a:pPr>
             <a:r>
-              <a:rPr lang="en-US" sz="4000" b="1" dirty="0">
-                <a:solidFill>
-                  <a:srgbClr val="D97706"/>
-                </a:solidFill>
-                <a:latin typeface="Cambria" pitchFamily="34" charset="0"/>
-                <a:ea typeface="Cambria" pitchFamily="34" charset="-122"/>
-                <a:cs typeface="Cambria" pitchFamily="34" charset="-120"/>
-              </a:rPr>
-              <a:t>0</a:t>
-            </a:r>
-            <a:endParaRPr lang="en-US" sz="4000" dirty="0"/>
-          </a:p>
-        </p:txBody>
-      </p:sp>
-      <p:sp>
-        <p:nvSpPr>
-          <p:cNvPr id="9" name="Text 7"/>
-          <p:cNvSpPr txBox="1"/>
-          <p:nvPr/>
-        </p:nvSpPr>
-        <p:spPr>
-          <a:xfrm>
-            <a:off x="4572000" y="2148840"/>
-            <a:ext cx="3063240" cy="365760"/>
+              <a:rPr lang="en-US" sz="1450" b="1" dirty="0">
+                <a:solidFill>
+                  <a:srgbClr val="FFFFFF"/>
+                </a:solidFill>
+                <a:latin typeface="Courier New" pitchFamily="34" charset="0"/>
+                <a:ea typeface="Courier New" pitchFamily="34" charset="-122"/>
+                <a:cs typeface="Courier New" pitchFamily="34" charset="-120"/>
+              </a:rPr>
+              <a:t>maskguard pii approve</a:t>
+            </a:r>
+            <a:endParaRPr lang="en-US" sz="1450" dirty="0"/>
+          </a:p>
+        </p:txBody>
+      </p:sp>
+      <p:sp>
+        <p:nvSpPr>
+          <p:cNvPr id="9" name="Text 6"/>
+          <p:cNvSpPr txBox="1"/>
+          <p:nvPr/>
+        </p:nvSpPr>
+        <p:spPr>
+          <a:xfrm>
+            <a:off x="7818120" y="2935224"/>
+            <a:ext cx="3657600" cy="329184"/>
           </a:xfrm>
           <a:prstGeom prst="rect">
             <a:avLst/>
@@ -14459,39 +16238,78 @@
               <a:buNone/>
             </a:pPr>
             <a:r>
-              <a:rPr lang="en-US" sz="1700" b="1" dirty="0">
+              <a:rPr lang="en-US" sz="1300" dirty="0">
+                <a:solidFill>
+                  <a:srgbClr val="CBD5E1"/>
+                </a:solidFill>
+                <a:latin typeface="Calibri" pitchFamily="34" charset="0"/>
+                <a:ea typeface="Calibri" pitchFamily="34" charset="-122"/>
+                <a:cs typeface="Calibri" pitchFamily="34" charset="-120"/>
+              </a:rPr>
+              <a:t>a person confirms the labels</a:t>
+            </a:r>
+            <a:endParaRPr lang="en-US" sz="1300" dirty="0"/>
+          </a:p>
+        </p:txBody>
+      </p:sp>
+      <p:sp>
+        <p:nvSpPr>
+          <p:cNvPr id="10" name="Text 7"/>
+          <p:cNvSpPr txBox="1"/>
+          <p:nvPr/>
+        </p:nvSpPr>
+        <p:spPr>
+          <a:xfrm>
+            <a:off x="7818120" y="3383280"/>
+            <a:ext cx="3657600" cy="329184"/>
+          </a:xfrm>
+          <a:prstGeom prst="rect">
+            <a:avLst/>
+          </a:prstGeom>
+          <a:noFill/>
+          <a:ln/>
+        </p:spPr>
+        <p:txBody>
+          <a:bodyPr wrap="square" lIns="0" tIns="0" rIns="0" bIns="0" rtlCol="0" anchor="ctr"/>
+          <a:lstStyle/>
+          <a:p>
+            <a:pPr indent="0" marL="0">
+              <a:buNone/>
+            </a:pPr>
+            <a:r>
+              <a:rPr lang="en-US" sz="1450" b="1" dirty="0">
                 <a:solidFill>
                   <a:srgbClr val="FFFFFF"/>
                 </a:solidFill>
-                <a:latin typeface="Calibri" pitchFamily="34" charset="0"/>
-                <a:ea typeface="Calibri" pitchFamily="34" charset="-122"/>
-                <a:cs typeface="Calibri" pitchFamily="34" charset="-120"/>
-              </a:rPr>
-              <a:t>real values leaked</a:t>
-            </a:r>
-            <a:endParaRPr lang="en-US" sz="1700" dirty="0"/>
-          </a:p>
-        </p:txBody>
-      </p:sp>
-      <p:sp>
-        <p:nvSpPr>
-          <p:cNvPr id="10" name="Text 8"/>
-          <p:cNvSpPr txBox="1"/>
-          <p:nvPr/>
-        </p:nvSpPr>
-        <p:spPr>
-          <a:xfrm>
-            <a:off x="4572000" y="2532888"/>
-            <a:ext cx="3063240" cy="594360"/>
-          </a:xfrm>
-          <a:prstGeom prst="rect">
-            <a:avLst/>
-          </a:prstGeom>
-          <a:noFill/>
-          <a:ln/>
-        </p:spPr>
-        <p:txBody>
-          <a:bodyPr wrap="square" lIns="0" tIns="0" rIns="0" bIns="0" rtlCol="0" anchor="t"/>
+                <a:latin typeface="Courier New" pitchFamily="34" charset="0"/>
+                <a:ea typeface="Courier New" pitchFamily="34" charset="-122"/>
+                <a:cs typeface="Courier New" pitchFamily="34" charset="-120"/>
+              </a:rPr>
+              <a:t>maskguard compare</a:t>
+            </a:r>
+            <a:endParaRPr lang="en-US" sz="1450" dirty="0"/>
+          </a:p>
+        </p:txBody>
+      </p:sp>
+      <p:sp>
+        <p:nvSpPr>
+          <p:cNvPr id="11" name="Text 8"/>
+          <p:cNvSpPr txBox="1"/>
+          <p:nvPr/>
+        </p:nvSpPr>
+        <p:spPr>
+          <a:xfrm>
+            <a:off x="7818120" y="3712464"/>
+            <a:ext cx="3657600" cy="329184"/>
+          </a:xfrm>
+          <a:prstGeom prst="rect">
+            <a:avLst/>
+          </a:prstGeom>
+          <a:noFill/>
+          <a:ln/>
+        </p:spPr>
+        <p:txBody>
+          <a:bodyPr wrap="square" lIns="0" tIns="0" rIns="0" bIns="0" rtlCol="0" anchor="ctr"/>
           <a:lstStyle/>
           <a:p>
             <a:pPr indent="0" marL="0">
@@ -14506,7 +16324,7 @@
                 <a:ea typeface="Calibri" pitchFamily="34" charset="-122"/>
                 <a:cs typeface="Calibri" pitchFamily="34" charset="-120"/>
               </a:rPr>
-              <a:t>in 13,700 masked cells, per database</a:t>
+              <a:t>same query, roles side by side</a:t>
             </a:r>
             <a:endParaRPr lang="en-US" sz="1300" dirty="0"/>
           </a:p>
@@ -14514,41 +16332,14 @@
       </p:sp>
       <p:sp>
         <p:nvSpPr>
-          <p:cNvPr id="11" name="proof 3"/>
-          <p:cNvSpPr/>
-          <p:nvPr/>
-        </p:nvSpPr>
-        <p:spPr>
-          <a:xfrm>
-            <a:off x="8046720" y="1234440"/>
-            <a:ext cx="3520440" cy="1965960"/>
-          </a:xfrm>
-          <a:prstGeom prst="roundRect">
-            <a:avLst>
-              <a:gd name="adj" fmla="val 3721"/>
-            </a:avLst>
-          </a:prstGeom>
-          <a:solidFill>
-            <a:srgbClr val="F1F5F9"/>
-          </a:solidFill>
-          <a:ln w="9525">
-            <a:solidFill>
-              <a:srgbClr val="F1F5F9"/>
-            </a:solidFill>
-            <a:prstDash val="solid"/>
-          </a:ln>
-        </p:spPr>
-      </p:sp>
-      <p:sp>
-        <p:nvSpPr>
-          <p:cNvPr id="12" name="Text 10"/>
-          <p:cNvSpPr txBox="1"/>
-          <p:nvPr/>
-        </p:nvSpPr>
-        <p:spPr>
-          <a:xfrm>
-            <a:off x="8321040" y="1399032"/>
-            <a:ext cx="3017520" cy="731520"/>
+          <p:cNvPr id="12" name="Text 9"/>
+          <p:cNvSpPr txBox="1"/>
+          <p:nvPr/>
+        </p:nvSpPr>
+        <p:spPr>
+          <a:xfrm>
+            <a:off x="7818120" y="4160520"/>
+            <a:ext cx="3657600" cy="329184"/>
           </a:xfrm>
           <a:prstGeom prst="rect">
             <a:avLst/>
@@ -14564,569 +16355,176 @@
               <a:buNone/>
             </a:pPr>
             <a:r>
-              <a:rPr lang="en-US" sz="4000" b="1" dirty="0">
+              <a:rPr lang="en-US" sz="1450" b="1" dirty="0">
+                <a:solidFill>
+                  <a:srgbClr val="FFFFFF"/>
+                </a:solidFill>
+                <a:latin typeface="Courier New" pitchFamily="34" charset="0"/>
+                <a:ea typeface="Courier New" pitchFamily="34" charset="-122"/>
+                <a:cs typeface="Courier New" pitchFamily="34" charset="-120"/>
+              </a:rPr>
+              <a:t>maskguard attack</a:t>
+            </a:r>
+            <a:endParaRPr lang="en-US" sz="1450" dirty="0"/>
+          </a:p>
+        </p:txBody>
+      </p:sp>
+      <p:sp>
+        <p:nvSpPr>
+          <p:cNvPr id="13" name="Text 10"/>
+          <p:cNvSpPr txBox="1"/>
+          <p:nvPr/>
+        </p:nvSpPr>
+        <p:spPr>
+          <a:xfrm>
+            <a:off x="7818120" y="4489704"/>
+            <a:ext cx="3657600" cy="329184"/>
+          </a:xfrm>
+          <a:prstGeom prst="rect">
+            <a:avLst/>
+          </a:prstGeom>
+          <a:noFill/>
+          <a:ln/>
+        </p:spPr>
+        <p:txBody>
+          <a:bodyPr wrap="square" lIns="0" tIns="0" rIns="0" bIns="0" rtlCol="0" anchor="ctr"/>
+          <a:lstStyle/>
+          <a:p>
+            <a:pPr indent="0" marL="0">
+              <a:buNone/>
+            </a:pPr>
+            <a:r>
+              <a:rPr lang="en-US" sz="1300" dirty="0">
+                <a:solidFill>
+                  <a:srgbClr val="CBD5E1"/>
+                </a:solidFill>
+                <a:latin typeface="Calibri" pitchFamily="34" charset="0"/>
+                <a:ea typeface="Calibri" pitchFamily="34" charset="-122"/>
+                <a:cs typeface="Calibri" pitchFamily="34" charset="-120"/>
+              </a:rPr>
+              <a:t>17 known attacks: 0 leak</a:t>
+            </a:r>
+            <a:endParaRPr lang="en-US" sz="1300" dirty="0"/>
+          </a:p>
+        </p:txBody>
+      </p:sp>
+      <p:sp>
+        <p:nvSpPr>
+          <p:cNvPr id="14" name="Text 11"/>
+          <p:cNvSpPr txBox="1"/>
+          <p:nvPr/>
+        </p:nvSpPr>
+        <p:spPr>
+          <a:xfrm>
+            <a:off x="7818120" y="4937760"/>
+            <a:ext cx="3657600" cy="329184"/>
+          </a:xfrm>
+          <a:prstGeom prst="rect">
+            <a:avLst/>
+          </a:prstGeom>
+          <a:noFill/>
+          <a:ln/>
+        </p:spPr>
+        <p:txBody>
+          <a:bodyPr wrap="square" lIns="0" tIns="0" rIns="0" bIns="0" rtlCol="0" anchor="ctr"/>
+          <a:lstStyle/>
+          <a:p>
+            <a:pPr indent="0" marL="0">
+              <a:buNone/>
+            </a:pPr>
+            <a:r>
+              <a:rPr lang="en-US" sz="1450" b="1" dirty="0">
+                <a:solidFill>
+                  <a:srgbClr val="FFFFFF"/>
+                </a:solidFill>
+                <a:latin typeface="Courier New" pitchFamily="34" charset="0"/>
+                <a:ea typeface="Courier New" pitchFamily="34" charset="-122"/>
+                <a:cs typeface="Courier New" pitchFamily="34" charset="-120"/>
+              </a:rPr>
+              <a:t>maskguard integrity proof</a:t>
+            </a:r>
+            <a:endParaRPr lang="en-US" sz="1450" dirty="0"/>
+          </a:p>
+        </p:txBody>
+      </p:sp>
+      <p:sp>
+        <p:nvSpPr>
+          <p:cNvPr id="15" name="Text 12"/>
+          <p:cNvSpPr txBox="1"/>
+          <p:nvPr/>
+        </p:nvSpPr>
+        <p:spPr>
+          <a:xfrm>
+            <a:off x="7818120" y="5266944"/>
+            <a:ext cx="3657600" cy="329184"/>
+          </a:xfrm>
+          <a:prstGeom prst="rect">
+            <a:avLst/>
+          </a:prstGeom>
+          <a:noFill/>
+          <a:ln/>
+        </p:spPr>
+        <p:txBody>
+          <a:bodyPr wrap="square" lIns="0" tIns="0" rIns="0" bIns="0" rtlCol="0" anchor="ctr"/>
+          <a:lstStyle/>
+          <a:p>
+            <a:pPr indent="0" marL="0">
+              <a:buNone/>
+            </a:pPr>
+            <a:r>
+              <a:rPr lang="en-US" sz="1300" dirty="0">
+                <a:solidFill>
+                  <a:srgbClr val="CBD5E1"/>
+                </a:solidFill>
+                <a:latin typeface="Calibri" pitchFamily="34" charset="0"/>
+                <a:ea typeface="Calibri" pitchFamily="34" charset="-122"/>
+                <a:cs typeface="Calibri" pitchFamily="34" charset="-120"/>
+              </a:rPr>
+              <a:t>data unchanged, audit intact</a:t>
+            </a:r>
+            <a:endParaRPr lang="en-US" sz="1300" dirty="0"/>
+          </a:p>
+        </p:txBody>
+      </p:sp>
+      <p:sp>
+        <p:nvSpPr>
+          <p:cNvPr id="16" name="Text 13"/>
+          <p:cNvSpPr txBox="1"/>
+          <p:nvPr/>
+        </p:nvSpPr>
+        <p:spPr>
+          <a:xfrm>
+            <a:off x="548640" y="5970230"/>
+            <a:ext cx="11064240" cy="365760"/>
+          </a:xfrm>
+          <a:prstGeom prst="rect">
+            <a:avLst/>
+          </a:prstGeom>
+          <a:noFill/>
+          <a:ln/>
+        </p:spPr>
+        <p:txBody>
+          <a:bodyPr wrap="square" lIns="0" tIns="0" rIns="0" bIns="0" rtlCol="0" anchor="ctr"/>
+          <a:lstStyle/>
+          <a:p>
+            <a:pPr indent="0" marL="0">
+              <a:buNone/>
+            </a:pPr>
+            <a:r>
+              <a:rPr lang="en-US" sz="1400" b="1" dirty="0">
                 <a:solidFill>
                   <a:srgbClr val="0B1D33"/>
                 </a:solidFill>
-                <a:latin typeface="Cambria" pitchFamily="34" charset="0"/>
-                <a:ea typeface="Cambria" pitchFamily="34" charset="-122"/>
-                <a:cs typeface="Cambria" pitchFamily="34" charset="-120"/>
-              </a:rPr>
-              <a:t>0 rows</a:t>
-            </a:r>
-            <a:endParaRPr lang="en-US" sz="4000" dirty="0"/>
-          </a:p>
-        </p:txBody>
-      </p:sp>
-      <p:sp>
-        <p:nvSpPr>
-          <p:cNvPr id="13" name="Text 11"/>
-          <p:cNvSpPr txBox="1"/>
-          <p:nvPr/>
-        </p:nvSpPr>
-        <p:spPr>
-          <a:xfrm>
-            <a:off x="8321040" y="2148840"/>
-            <a:ext cx="3063240" cy="365760"/>
-          </a:xfrm>
-          <a:prstGeom prst="rect">
-            <a:avLst/>
-          </a:prstGeom>
-          <a:noFill/>
-          <a:ln/>
-        </p:spPr>
-        <p:txBody>
-          <a:bodyPr wrap="square" lIns="0" tIns="0" rIns="0" bIns="0" rtlCol="0" anchor="ctr"/>
-          <a:lstStyle/>
-          <a:p>
+                <a:latin typeface="Calibri" pitchFamily="34" charset="0"/>
+                <a:ea typeface="Calibri" pitchFamily="34" charset="-122"/>
+                <a:cs typeface="Calibri" pitchFamily="34" charset="-120"/>
+              </a:rPr>
+              <a:t>Also: </a:t>
+            </a:r>
             <a:pPr indent="0" marL="0">
               <a:buNone/>
             </a:pPr>
             <a:r>
-              <a:rPr lang="en-US" sz="1700" b="1" dirty="0">
-                <a:solidFill>
-                  <a:srgbClr val="0B1D33"/>
-                </a:solidFill>
-                <a:latin typeface="Calibri" pitchFamily="34" charset="0"/>
-                <a:ea typeface="Calibri" pitchFamily="34" charset="-122"/>
-                <a:cs typeface="Calibri" pitchFamily="34" charset="-120"/>
-              </a:rPr>
-              <a:t>for a guessed real PAN</a:t>
-            </a:r>
-            <a:endParaRPr lang="en-US" sz="1700" dirty="0"/>
-          </a:p>
-        </p:txBody>
-      </p:sp>
-      <p:sp>
-        <p:nvSpPr>
-          <p:cNvPr id="14" name="Text 12"/>
-          <p:cNvSpPr txBox="1"/>
-          <p:nvPr/>
-        </p:nvSpPr>
-        <p:spPr>
-          <a:xfrm>
-            <a:off x="8321040" y="2532888"/>
-            <a:ext cx="3063240" cy="594360"/>
-          </a:xfrm>
-          <a:prstGeom prst="rect">
-            <a:avLst/>
-          </a:prstGeom>
-          <a:noFill/>
-          <a:ln/>
-        </p:spPr>
-        <p:txBody>
-          <a:bodyPr wrap="square" lIns="0" tIns="0" rIns="0" bIns="0" rtlCol="0" anchor="t"/>
-          <a:lstStyle/>
-          <a:p>
-            <a:pPr indent="0" marL="0">
-              <a:buNone/>
-            </a:pPr>
-            <a:r>
-              <a:rPr lang="en-US" sz="1300" dirty="0">
-                <a:solidFill>
-                  <a:srgbClr val="64748B"/>
-                </a:solidFill>
-                <a:latin typeface="Calibri" pitchFamily="34" charset="0"/>
-                <a:ea typeface="Calibri" pitchFamily="34" charset="-122"/>
-                <a:cs typeface="Calibri" pitchFamily="34" charset="-120"/>
-              </a:rPr>
-              <a:t>Admin finds 1 row; Support and Analyst find 0</a:t>
-            </a:r>
-            <a:endParaRPr lang="en-US" sz="1300" dirty="0"/>
-          </a:p>
-        </p:txBody>
-      </p:sp>
-      <p:sp>
-        <p:nvSpPr>
-          <p:cNvPr id="15" name="proof 4"/>
-          <p:cNvSpPr/>
-          <p:nvPr/>
-        </p:nvSpPr>
-        <p:spPr>
-          <a:xfrm>
-            <a:off x="548640" y="3383280"/>
-            <a:ext cx="3520440" cy="1965960"/>
-          </a:xfrm>
-          <a:prstGeom prst="roundRect">
-            <a:avLst>
-              <a:gd name="adj" fmla="val 3721"/>
-            </a:avLst>
-          </a:prstGeom>
-          <a:solidFill>
-            <a:srgbClr val="F1F5F9"/>
-          </a:solidFill>
-          <a:ln w="9525">
-            <a:solidFill>
-              <a:srgbClr val="F1F5F9"/>
-            </a:solidFill>
-            <a:prstDash val="solid"/>
-          </a:ln>
-        </p:spPr>
-      </p:sp>
-      <p:sp>
-        <p:nvSpPr>
-          <p:cNvPr id="16" name="Text 14"/>
-          <p:cNvSpPr txBox="1"/>
-          <p:nvPr/>
-        </p:nvSpPr>
-        <p:spPr>
-          <a:xfrm>
-            <a:off x="822960" y="3547872"/>
-            <a:ext cx="3017520" cy="731520"/>
-          </a:xfrm>
-          <a:prstGeom prst="rect">
-            <a:avLst/>
-          </a:prstGeom>
-          <a:noFill/>
-          <a:ln/>
-        </p:spPr>
-        <p:txBody>
-          <a:bodyPr wrap="square" lIns="0" tIns="0" rIns="0" bIns="0" rtlCol="0" anchor="ctr"/>
-          <a:lstStyle/>
-          <a:p>
-            <a:pPr indent="0" marL="0">
-              <a:buNone/>
-            </a:pPr>
-            <a:r>
-              <a:rPr lang="en-US" sz="4000" b="1" dirty="0">
-                <a:solidFill>
-                  <a:srgbClr val="0B1D33"/>
-                </a:solidFill>
-                <a:latin typeface="Cambria" pitchFamily="34" charset="0"/>
-                <a:ea typeface="Cambria" pitchFamily="34" charset="-122"/>
-                <a:cs typeface="Cambria" pitchFamily="34" charset="-120"/>
-              </a:rPr>
-              <a:t>4 / 4</a:t>
-            </a:r>
-            <a:endParaRPr lang="en-US" sz="4000" dirty="0"/>
-          </a:p>
-        </p:txBody>
-      </p:sp>
-      <p:sp>
-        <p:nvSpPr>
-          <p:cNvPr id="17" name="Text 15"/>
-          <p:cNvSpPr txBox="1"/>
-          <p:nvPr/>
-        </p:nvSpPr>
-        <p:spPr>
-          <a:xfrm>
-            <a:off x="822960" y="4297680"/>
-            <a:ext cx="3063240" cy="365760"/>
-          </a:xfrm>
-          <a:prstGeom prst="rect">
-            <a:avLst/>
-          </a:prstGeom>
-          <a:noFill/>
-          <a:ln/>
-        </p:spPr>
-        <p:txBody>
-          <a:bodyPr wrap="square" lIns="0" tIns="0" rIns="0" bIns="0" rtlCol="0" anchor="ctr"/>
-          <a:lstStyle/>
-          <a:p>
-            <a:pPr indent="0" marL="0">
-              <a:buNone/>
-            </a:pPr>
-            <a:r>
-              <a:rPr lang="en-US" sz="1700" b="1" dirty="0">
-                <a:solidFill>
-                  <a:srgbClr val="0B1D33"/>
-                </a:solidFill>
-                <a:latin typeface="Calibri" pitchFamily="34" charset="0"/>
-                <a:ea typeface="Calibri" pitchFamily="34" charset="-122"/>
-                <a:cs typeface="Calibri" pitchFamily="34" charset="-120"/>
-              </a:rPr>
-              <a:t>data changes refused</a:t>
-            </a:r>
-            <a:endParaRPr lang="en-US" sz="1700" dirty="0"/>
-          </a:p>
-        </p:txBody>
-      </p:sp>
-      <p:sp>
-        <p:nvSpPr>
-          <p:cNvPr id="18" name="Text 16"/>
-          <p:cNvSpPr txBox="1"/>
-          <p:nvPr/>
-        </p:nvSpPr>
-        <p:spPr>
-          <a:xfrm>
-            <a:off x="822960" y="4681728"/>
-            <a:ext cx="3063240" cy="594360"/>
-          </a:xfrm>
-          <a:prstGeom prst="rect">
-            <a:avLst/>
-          </a:prstGeom>
-          <a:noFill/>
-          <a:ln/>
-        </p:spPr>
-        <p:txBody>
-          <a:bodyPr wrap="square" lIns="0" tIns="0" rIns="0" bIns="0" rtlCol="0" anchor="t"/>
-          <a:lstStyle/>
-          <a:p>
-            <a:pPr indent="0" marL="0">
-              <a:buNone/>
-            </a:pPr>
-            <a:r>
-              <a:rPr lang="en-US" sz="1300" dirty="0">
-                <a:solidFill>
-                  <a:srgbClr val="64748B"/>
-                </a:solidFill>
-                <a:latin typeface="Calibri" pitchFamily="34" charset="0"/>
-                <a:ea typeface="Calibri" pitchFamily="34" charset="-122"/>
-                <a:cs typeface="Calibri" pitchFamily="34" charset="-120"/>
-              </a:rPr>
-              <a:t>UPDATE, DELETE, DROP, INSERT — for every role</a:t>
-            </a:r>
-            <a:endParaRPr lang="en-US" sz="1300" dirty="0"/>
-          </a:p>
-        </p:txBody>
-      </p:sp>
-      <p:sp>
-        <p:nvSpPr>
-          <p:cNvPr id="19" name="proof 5"/>
-          <p:cNvSpPr/>
-          <p:nvPr/>
-        </p:nvSpPr>
-        <p:spPr>
-          <a:xfrm>
-            <a:off x="4297680" y="3383280"/>
-            <a:ext cx="3520440" cy="1965960"/>
-          </a:xfrm>
-          <a:prstGeom prst="roundRect">
-            <a:avLst>
-              <a:gd name="adj" fmla="val 3721"/>
-            </a:avLst>
-          </a:prstGeom>
-          <a:solidFill>
-            <a:srgbClr val="F1F5F9"/>
-          </a:solidFill>
-          <a:ln w="9525">
-            <a:solidFill>
-              <a:srgbClr val="F1F5F9"/>
-            </a:solidFill>
-            <a:prstDash val="solid"/>
-          </a:ln>
-        </p:spPr>
-      </p:sp>
-      <p:sp>
-        <p:nvSpPr>
-          <p:cNvPr id="20" name="Text 18"/>
-          <p:cNvSpPr txBox="1"/>
-          <p:nvPr/>
-        </p:nvSpPr>
-        <p:spPr>
-          <a:xfrm>
-            <a:off x="4572000" y="3547872"/>
-            <a:ext cx="3017520" cy="731520"/>
-          </a:xfrm>
-          <a:prstGeom prst="rect">
-            <a:avLst/>
-          </a:prstGeom>
-          <a:noFill/>
-          <a:ln/>
-        </p:spPr>
-        <p:txBody>
-          <a:bodyPr wrap="square" lIns="0" tIns="0" rIns="0" bIns="0" rtlCol="0" anchor="ctr"/>
-          <a:lstStyle/>
-          <a:p>
-            <a:pPr indent="0" marL="0">
-              <a:buNone/>
-            </a:pPr>
-            <a:r>
-              <a:rPr lang="en-US" sz="4000" b="1" dirty="0">
-                <a:solidFill>
-                  <a:srgbClr val="0B1D33"/>
-                </a:solidFill>
-                <a:latin typeface="Cambria" pitchFamily="34" charset="0"/>
-                <a:ea typeface="Cambria" pitchFamily="34" charset="-122"/>
-                <a:cs typeface="Cambria" pitchFamily="34" charset="-120"/>
-              </a:rPr>
-              <a:t>0 / 17</a:t>
-            </a:r>
-            <a:endParaRPr lang="en-US" sz="4000" dirty="0"/>
-          </a:p>
-        </p:txBody>
-      </p:sp>
-      <p:sp>
-        <p:nvSpPr>
-          <p:cNvPr id="21" name="Text 19"/>
-          <p:cNvSpPr txBox="1"/>
-          <p:nvPr/>
-        </p:nvSpPr>
-        <p:spPr>
-          <a:xfrm>
-            <a:off x="4572000" y="4297680"/>
-            <a:ext cx="3063240" cy="365760"/>
-          </a:xfrm>
-          <a:prstGeom prst="rect">
-            <a:avLst/>
-          </a:prstGeom>
-          <a:noFill/>
-          <a:ln/>
-        </p:spPr>
-        <p:txBody>
-          <a:bodyPr wrap="square" lIns="0" tIns="0" rIns="0" bIns="0" rtlCol="0" anchor="ctr"/>
-          <a:lstStyle/>
-          <a:p>
-            <a:pPr indent="0" marL="0">
-              <a:buNone/>
-            </a:pPr>
-            <a:r>
-              <a:rPr lang="en-US" sz="1700" b="1" dirty="0">
-                <a:solidFill>
-                  <a:srgbClr val="0B1D33"/>
-                </a:solidFill>
-                <a:latin typeface="Calibri" pitchFamily="34" charset="0"/>
-                <a:ea typeface="Calibri" pitchFamily="34" charset="-122"/>
-                <a:cs typeface="Calibri" pitchFamily="34" charset="-120"/>
-              </a:rPr>
-              <a:t>known attacks leak</a:t>
-            </a:r>
-            <a:endParaRPr lang="en-US" sz="1700" dirty="0"/>
-          </a:p>
-        </p:txBody>
-      </p:sp>
-      <p:sp>
-        <p:nvSpPr>
-          <p:cNvPr id="22" name="Text 20"/>
-          <p:cNvSpPr txBox="1"/>
-          <p:nvPr/>
-        </p:nvSpPr>
-        <p:spPr>
-          <a:xfrm>
-            <a:off x="4572000" y="4681728"/>
-            <a:ext cx="3063240" cy="594360"/>
-          </a:xfrm>
-          <a:prstGeom prst="rect">
-            <a:avLst/>
-          </a:prstGeom>
-          <a:noFill/>
-          <a:ln/>
-        </p:spPr>
-        <p:txBody>
-          <a:bodyPr wrap="square" lIns="0" tIns="0" rIns="0" bIns="0" rtlCol="0" anchor="t"/>
-          <a:lstStyle/>
-          <a:p>
-            <a:pPr indent="0" marL="0">
-              <a:buNone/>
-            </a:pPr>
-            <a:r>
-              <a:rPr lang="en-US" sz="1300" dirty="0">
-                <a:solidFill>
-                  <a:srgbClr val="64748B"/>
-                </a:solidFill>
-                <a:latin typeface="Calibri" pitchFamily="34" charset="0"/>
-                <a:ea typeface="Calibri" pitchFamily="34" charset="-122"/>
-                <a:cs typeface="Calibri" pitchFamily="34" charset="-120"/>
-              </a:rPr>
-              <a:t>simple screen masking leaks 14 of the same 17</a:t>
-            </a:r>
-            <a:endParaRPr lang="en-US" sz="1300" dirty="0"/>
-          </a:p>
-        </p:txBody>
-      </p:sp>
-      <p:sp>
-        <p:nvSpPr>
-          <p:cNvPr id="23" name="proof 6"/>
-          <p:cNvSpPr/>
-          <p:nvPr/>
-        </p:nvSpPr>
-        <p:spPr>
-          <a:xfrm>
-            <a:off x="8046720" y="3383280"/>
-            <a:ext cx="3520440" cy="1965960"/>
-          </a:xfrm>
-          <a:prstGeom prst="roundRect">
-            <a:avLst>
-              <a:gd name="adj" fmla="val 3721"/>
-            </a:avLst>
-          </a:prstGeom>
-          <a:solidFill>
-            <a:srgbClr val="F1F5F9"/>
-          </a:solidFill>
-          <a:ln w="9525">
-            <a:solidFill>
-              <a:srgbClr val="F1F5F9"/>
-            </a:solidFill>
-            <a:prstDash val="solid"/>
-          </a:ln>
-        </p:spPr>
-      </p:sp>
-      <p:sp>
-        <p:nvSpPr>
-          <p:cNvPr id="24" name="Text 22"/>
-          <p:cNvSpPr txBox="1"/>
-          <p:nvPr/>
-        </p:nvSpPr>
-        <p:spPr>
-          <a:xfrm>
-            <a:off x="8321040" y="3547872"/>
-            <a:ext cx="3017520" cy="731520"/>
-          </a:xfrm>
-          <a:prstGeom prst="rect">
-            <a:avLst/>
-          </a:prstGeom>
-          <a:noFill/>
-          <a:ln/>
-        </p:spPr>
-        <p:txBody>
-          <a:bodyPr wrap="square" lIns="0" tIns="0" rIns="0" bIns="0" rtlCol="0" anchor="ctr"/>
-          <a:lstStyle/>
-          <a:p>
-            <a:pPr indent="0" marL="0">
-              <a:buNone/>
-            </a:pPr>
-            <a:r>
-              <a:rPr lang="en-US" sz="4000" b="1" dirty="0">
-                <a:solidFill>
-                  <a:srgbClr val="0B1D33"/>
-                </a:solidFill>
-                <a:latin typeface="Cambria" pitchFamily="34" charset="0"/>
-                <a:ea typeface="Cambria" pitchFamily="34" charset="-122"/>
-                <a:cs typeface="Cambria" pitchFamily="34" charset="-120"/>
-              </a:rPr>
-              <a:t>4–8 ms</a:t>
-            </a:r>
-            <a:endParaRPr lang="en-US" sz="4000" dirty="0"/>
-          </a:p>
-        </p:txBody>
-      </p:sp>
-      <p:sp>
-        <p:nvSpPr>
-          <p:cNvPr id="25" name="Text 23"/>
-          <p:cNvSpPr txBox="1"/>
-          <p:nvPr/>
-        </p:nvSpPr>
-        <p:spPr>
-          <a:xfrm>
-            <a:off x="8321040" y="4297680"/>
-            <a:ext cx="3063240" cy="365760"/>
-          </a:xfrm>
-          <a:prstGeom prst="rect">
-            <a:avLst/>
-          </a:prstGeom>
-          <a:noFill/>
-          <a:ln/>
-        </p:spPr>
-        <p:txBody>
-          <a:bodyPr wrap="square" lIns="0" tIns="0" rIns="0" bIns="0" rtlCol="0" anchor="ctr"/>
-          <a:lstStyle/>
-          <a:p>
-            <a:pPr indent="0" marL="0">
-              <a:buNone/>
-            </a:pPr>
-            <a:r>
-              <a:rPr lang="en-US" sz="1700" b="1" dirty="0">
-                <a:solidFill>
-                  <a:srgbClr val="0B1D33"/>
-                </a:solidFill>
-                <a:latin typeface="Calibri" pitchFamily="34" charset="0"/>
-                <a:ea typeface="Calibri" pitchFamily="34" charset="-122"/>
-                <a:cs typeface="Calibri" pitchFamily="34" charset="-120"/>
-              </a:rPr>
-              <a:t>extra time per query</a:t>
-            </a:r>
-            <a:endParaRPr lang="en-US" sz="1700" dirty="0"/>
-          </a:p>
-        </p:txBody>
-      </p:sp>
-      <p:sp>
-        <p:nvSpPr>
-          <p:cNvPr id="26" name="Text 24"/>
-          <p:cNvSpPr txBox="1"/>
-          <p:nvPr/>
-        </p:nvSpPr>
-        <p:spPr>
-          <a:xfrm>
-            <a:off x="8321040" y="4681728"/>
-            <a:ext cx="3063240" cy="594360"/>
-          </a:xfrm>
-          <a:prstGeom prst="rect">
-            <a:avLst/>
-          </a:prstGeom>
-          <a:noFill/>
-          <a:ln/>
-        </p:spPr>
-        <p:txBody>
-          <a:bodyPr wrap="square" lIns="0" tIns="0" rIns="0" bIns="0" rtlCol="0" anchor="t"/>
-          <a:lstStyle/>
-          <a:p>
-            <a:pPr indent="0" marL="0">
-              <a:buNone/>
-            </a:pPr>
-            <a:r>
-              <a:rPr lang="en-US" sz="1300" dirty="0">
-                <a:solidFill>
-                  <a:srgbClr val="64748B"/>
-                </a:solidFill>
-                <a:latin typeface="Calibri" pitchFamily="34" charset="0"/>
-                <a:ea typeface="Calibri" pitchFamily="34" charset="-122"/>
-                <a:cs typeface="Calibri" pitchFamily="34" charset="-120"/>
-              </a:rPr>
-              <a:t>from 300 to 100,000 rows (MySQL 6–22 ms)</a:t>
-            </a:r>
-            <a:endParaRPr lang="en-US" sz="1300" dirty="0"/>
-          </a:p>
-        </p:txBody>
-      </p:sp>
-      <p:sp>
-        <p:nvSpPr>
-          <p:cNvPr id="27" name="Text 25"/>
-          <p:cNvSpPr txBox="1"/>
-          <p:nvPr/>
-        </p:nvSpPr>
-        <p:spPr>
-          <a:xfrm>
-            <a:off x="548640" y="5623560"/>
-            <a:ext cx="11064240" cy="548640"/>
-          </a:xfrm>
-          <a:prstGeom prst="rect">
-            <a:avLst/>
-          </a:prstGeom>
-          <a:noFill/>
-          <a:ln/>
-        </p:spPr>
-        <p:txBody>
-          <a:bodyPr wrap="square" lIns="0" tIns="0" rIns="0" bIns="0" rtlCol="0" anchor="ctr"/>
-          <a:lstStyle/>
-          <a:p>
-            <a:pPr indent="0" marL="0">
-              <a:buNone/>
-            </a:pPr>
-            <a:r>
-              <a:rPr lang="en-US" sz="1400" b="1" dirty="0">
-                <a:solidFill>
-                  <a:srgbClr val="0B1D33"/>
-                </a:solidFill>
-                <a:latin typeface="Calibri" pitchFamily="34" charset="0"/>
-                <a:ea typeface="Calibri" pitchFamily="34" charset="-122"/>
-                <a:cs typeface="Calibri" pitchFamily="34" charset="-120"/>
-              </a:rPr>
-              <a:t>Same results on SQLite, PostgreSQL 16 and MySQL 8.4</a:t>
-            </a:r>
-            <a:pPr indent="0" marL="0">
-              <a:buNone/>
-            </a:pPr>
-            <a:r>
               <a:rPr lang="en-US" sz="1400" dirty="0">
                 <a:solidFill>
                   <a:srgbClr val="1E3A5F"/>
@@ -15135,7 +16533,7 @@
                 <a:ea typeface="Calibri" pitchFamily="34" charset="-122"/>
                 <a:cs typeface="Calibri" pitchFamily="34" charset="-120"/>
               </a:rPr>
-              <a:t>  ·  9 organiser users  ·  129,260 rows checked identical across all copies  ·  1,235 automated tests on every change</a:t>
+              <a:t>writes are refused for every role (exit code 3) · JSON output for scripts and CI · pip install maskguard</a:t>
             </a:r>
             <a:endParaRPr lang="en-US" sz="1400" dirty="0"/>
           </a:p>

--- a/docs/MaskGuard_Final_Deck.pptx
+++ b/docs/MaskGuard_Final_Deck.pptx
@@ -118,50 +118,50 @@
   <p:extLst>
     <p:ext uri="{521415D9-36F7-43E2-AB2F-B90AF26B5E84}">
       <p14:sectionLst xmlns:p14="http://schemas.microsoft.com/office/powerpoint/2010/main">
-        <p14:section name="Opening" id="{db0d81ff-e477-5100-ff5e-11baf758107e}">
+        <p14:section name="Opening" id="{c74e0e1d-12fa-35cf-51dc-a7b55a553a42}">
           <p14:sldIdLst>
             <p14:sldId id="256"/>
           </p14:sldIdLst>
         </p14:section>
-        <p14:section name="Problem" id="{68bf7980-b5b0-2dfd-af2e-adc3a86f85fd}">
+        <p14:section name="Problem" id="{ded4ba1c-df37-f746-6ca9-2b51d3cef48b}">
           <p14:sldIdLst>
             <p14:sldId id="257"/>
           </p14:sldIdLst>
         </p14:section>
-        <p14:section name="Solution" id="{d6370bcf-110c-9485-9132-a57e61df0d98}">
+        <p14:section name="Solution" id="{52ead3ce-6a49-9d98-b5eb-872682cb4036}">
           <p14:sldIdLst>
             <p14:sldId id="258"/>
           </p14:sldIdLst>
         </p14:section>
-        <p14:section name="Architecture" id="{21b3b608-98a5-fb9e-976e-ed1866a3ca21}">
+        <p14:section name="Architecture" id="{077bea83-d7dc-ed00-fda3-7492387319d3}">
           <p14:sldIdLst>
             <p14:sldId id="259"/>
           </p14:sldIdLst>
         </p14:section>
-        <p14:section name="Role of AI" id="{e7bbeedd-c636-bf28-8170-587acb00ee32}">
+        <p14:section name="Role of AI" id="{e1c68dad-4dd3-24be-731f-40585763b60d}">
           <p14:sldIdLst>
             <p14:sldId id="260"/>
             <p14:sldId id="261"/>
             <p14:sldId id="262"/>
           </p14:sldIdLst>
         </p14:section>
-        <p14:section name="Demo" id="{d3d35cf8-5f0a-25c0-d89a-ce2c827481f2}">
+        <p14:section name="Demo" id="{88549333-3dcd-9db0-8503-bd4cf71baec3}">
           <p14:sldIdLst>
             <p14:sldId id="263"/>
             <p14:sldId id="264"/>
           </p14:sldIdLst>
         </p14:section>
-        <p14:section name="Proof" id="{094ea535-9a5c-116a-4a8d-7d00db825c95}">
+        <p14:section name="Proof" id="{01c1992f-6e66-3a2d-4c98-ee593112b3bf}">
           <p14:sldIdLst>
             <p14:sldId id="265"/>
           </p14:sldIdLst>
         </p14:section>
-        <p14:section name="Differentiators" id="{d83a569d-10ee-9058-b534-2c401c3b1278}">
+        <p14:section name="Differentiators" id="{6c0182bd-5149-fa2e-f1d2-c89e91640fba}">
           <p14:sldIdLst>
             <p14:sldId id="266"/>
           </p14:sldIdLst>
         </p14:section>
-        <p14:section name="Close" id="{9f75c064-b934-4e61-e99d-65f80f44119b}">
+        <p14:section name="Close" id="{001d4457-ee5d-3c02-bc32-441b34e85ab4}">
           <p14:sldIdLst>
             <p14:sldId id="267"/>
           </p14:sldIdLst>
@@ -1612,7 +1612,7 @@
           <a:p>
             <a:r>
               <a:rPr lang="en-US" dirty="0"/>
-              <a:t>[~1 min · Parameter 3/4: accuracy and baselines] Pre-empt the 'too good to be true' reaction. 'The 0.999 you may have seen is on a public synthetic benchmark — clean data, so treat it as the ceiling. Here is the harder truth. On your Saffron Bank data, the first time we ran it, it found 22 of 35 sensitive columns — F1 0.68. The misses had four causes: money columns with short names like bal and amt, account numbers that looked like plain ids, PANs with 0000 digits that fail the official check, and two address columns. Nothing leaked, because anything the AI isn't sure about stays hidden until a person approves it. We fixed those general causes — not this dataset — and re-ran the benchmark to make sure nothing got worse. Now it finds 35 of 35, with 8 false alarms on the bank's own branch details: F1 0.90.' If asked 'isn't 0.90 tuned to our data?': 'Partly, yes — the fixes were made after seeing it, which is why we show the first-contact number too, and why the safety net doesn't depend on accuracy.' Numbers: docs/SAFFRON_VALIDATION.md and docs/EVALUATION.md.</a:t>
+              <a:t>[~1 min · Parameter 3/4: accuracy and baselines] Pre-empt the 'too good to be true' reaction. 'The 0.999 you may have seen is on a public synthetic benchmark — clean data, so treat it as the ceiling. Here is the harder truth. On your Saffron Bank data, the first time we ran it, it found 22 of 35 sensitive columns — F1 0.68. The misses had four causes: money columns with short names like bal and amt, account numbers that looked like plain ids, PANs with 0000 digits that fail the official check, and two address columns. Nothing leaked — we checked: 0 of 1,300 real values reached Support or Analyst — because anything the AI isn't sure about stays hidden until a person approves it. One honest catch: two account-number columns were wrongly suggested as public; a reviewer who approved every suggestion blindly would have exposed them. That's fixed: a column named like a sensitive kind is never suggested public now. We fixed those general causes — not this dataset — and re-ran the benchmark to make sure nothing got worse. Now it finds 35 of 35, with 8 false alarms on the bank's own branch details: F1 0.90.' If asked 'isn't 0.90 tuned to our data?': 'Partly, yes — the fixes were made after seeing it, which is why we show the first-contact number too, and why the safety net doesn't depend on accuracy.' Numbers: docs/SAFFRON_VALIDATION.md and docs/EVALUATION.md.</a:t>
             </a:r>
             <a:endParaRPr lang="en-US" dirty="0"/>
           </a:p>
@@ -13635,8 +13635,8 @@
         </p:nvSpPr>
         <p:spPr>
           <a:xfrm>
-            <a:off x="7178040" y="4160520"/>
-            <a:ext cx="4434840" cy="548640"/>
+            <a:off x="7178040" y="4114800"/>
+            <a:ext cx="4434840" cy="502920"/>
           </a:xfrm>
           <a:prstGeom prst="rect">
             <a:avLst/>
@@ -13652,7 +13652,7 @@
               <a:buNone/>
             </a:pPr>
             <a:r>
-              <a:rPr lang="en-US" sz="1250" dirty="0">
+              <a:rPr lang="en-US" sz="1200" dirty="0">
                 <a:solidFill>
                   <a:srgbClr val="1E3A5F"/>
                 </a:solidFill>
@@ -13662,7 +13662,7 @@
               </a:rPr>
               <a:t>+ 8 false alarms: the bank's own branch phone, email, address and IFSC. Masked, not leaked; approved in one step.</a:t>
             </a:r>
-            <a:endParaRPr lang="en-US" sz="1250" dirty="0"/>
+            <a:endParaRPr lang="en-US" sz="1200" dirty="0"/>
           </a:p>
         </p:txBody>
       </p:sp>
@@ -13674,12 +13674,12 @@
         </p:nvSpPr>
         <p:spPr>
           <a:xfrm>
-            <a:off x="7178040" y="4800600"/>
-            <a:ext cx="4434840" cy="1417320"/>
+            <a:off x="7178040" y="4617720"/>
+            <a:ext cx="4434840" cy="1645920"/>
           </a:xfrm>
           <a:prstGeom prst="roundRect">
             <a:avLst>
-              <a:gd name="adj" fmla="val 5161"/>
+              <a:gd name="adj" fmla="val 4444"/>
             </a:avLst>
           </a:prstGeom>
           <a:solidFill>
@@ -13701,7 +13701,7 @@
         </p:nvSpPr>
         <p:spPr>
           <a:xfrm>
-            <a:off x="7360920" y="4983480"/>
+            <a:off x="7360920" y="4773168"/>
             <a:ext cx="566928" cy="566928"/>
           </a:xfrm>
           <a:prstGeom prst="ellipse">
@@ -13734,7 +13734,7 @@
         </p:blipFill>
         <p:spPr>
           <a:xfrm>
-            <a:off x="7502652" y="5125212"/>
+            <a:off x="7502652" y="4914900"/>
             <a:ext cx="283464" cy="283464"/>
           </a:xfrm>
           <a:prstGeom prst="rect">
@@ -13750,8 +13750,8 @@
         </p:nvSpPr>
         <p:spPr>
           <a:xfrm>
-            <a:off x="8046720" y="4937760"/>
-            <a:ext cx="3474720" cy="411480"/>
+            <a:off x="8046720" y="4727448"/>
+            <a:ext cx="3474720" cy="365760"/>
           </a:xfrm>
           <a:prstGeom prst="rect">
             <a:avLst/>
@@ -13789,8 +13789,8 @@
         </p:nvSpPr>
         <p:spPr>
           <a:xfrm>
-            <a:off x="8046720" y="5349240"/>
-            <a:ext cx="3429000" cy="822960"/>
+            <a:off x="8046720" y="5102352"/>
+            <a:ext cx="3429000" cy="1115568"/>
           </a:xfrm>
           <a:prstGeom prst="rect">
             <a:avLst/>
@@ -13803,10 +13803,13 @@
           <a:lstStyle/>
           <a:p>
             <a:pPr indent="0" marL="0">
-              <a:buNone/>
-            </a:pPr>
-            <a:r>
-              <a:rPr lang="en-US" sz="1200" dirty="0">
+              <a:spcAft>
+                <a:spcPts val="300"/>
+              </a:spcAft>
+              <a:buNone/>
+            </a:pPr>
+            <a:r>
+              <a:rPr lang="en-US" sz="1150" dirty="0">
                 <a:solidFill>
                   <a:srgbClr val="CBD5E1"/>
                 </a:solidFill>
@@ -13814,9 +13817,29 @@
                 <a:ea typeface="Calibri" pitchFamily="34" charset="-122"/>
                 <a:cs typeface="Calibri" pitchFamily="34" charset="-120"/>
               </a:rPr>
-              <a:t>Anything the AI is unsure about stays hidden until a person approves it. We fixed the general causes, then re-checked the benchmark did not get worse.</a:t>
-            </a:r>
-            <a:endParaRPr lang="en-US" sz="1200" dirty="0"/>
+              <a:t>Checked: 0 of 1,300 real values reached Support or Analyst. Unsure columns stay hidden until a person approves them.</a:t>
+            </a:r>
+            <a:endParaRPr lang="en-US" sz="1150" dirty="0"/>
+          </a:p>
+          <a:p>
+            <a:pPr indent="0" marL="0">
+              <a:spcAft>
+                <a:spcPts val="300"/>
+              </a:spcAft>
+              <a:buNone/>
+            </a:pPr>
+            <a:r>
+              <a:rPr lang="en-US" sz="1150" dirty="0">
+                <a:solidFill>
+                  <a:srgbClr val="D97706"/>
+                </a:solidFill>
+                <a:latin typeface="Calibri" pitchFamily="34" charset="0"/>
+                <a:ea typeface="Calibri" pitchFamily="34" charset="-122"/>
+                <a:cs typeface="Calibri" pitchFamily="34" charset="-120"/>
+              </a:rPr>
+              <a:t>One catch: 2 account-number columns were wrongly suggested as public; approving that blindly would have exposed them. Fixed.</a:t>
+            </a:r>
+            <a:endParaRPr lang="en-US" sz="1150" dirty="0"/>
           </a:p>
         </p:txBody>
       </p:sp>

--- a/docs/MaskGuard_Final_Deck.pptx
+++ b/docs/MaskGuard_Final_Deck.pptx
@@ -118,50 +118,50 @@
   <p:extLst>
     <p:ext uri="{521415D9-36F7-43E2-AB2F-B90AF26B5E84}">
       <p14:sectionLst xmlns:p14="http://schemas.microsoft.com/office/powerpoint/2010/main">
-        <p14:section name="Opening" id="{c74e0e1d-12fa-35cf-51dc-a7b55a553a42}">
+        <p14:section name="Opening" id="{0b08f13b-b5fe-dab8-6b4c-0b7521b23b96}">
           <p14:sldIdLst>
             <p14:sldId id="256"/>
           </p14:sldIdLst>
         </p14:section>
-        <p14:section name="Problem" id="{ded4ba1c-df37-f746-6ca9-2b51d3cef48b}">
+        <p14:section name="Problem" id="{2921d55a-92f1-0af5-42c9-5c85aa4b53ce}">
           <p14:sldIdLst>
             <p14:sldId id="257"/>
           </p14:sldIdLst>
         </p14:section>
-        <p14:section name="Solution" id="{52ead3ce-6a49-9d98-b5eb-872682cb4036}">
+        <p14:section name="Solution" id="{be59edd3-fb79-6da3-df68-82859284fceb}">
           <p14:sldIdLst>
             <p14:sldId id="258"/>
           </p14:sldIdLst>
         </p14:section>
-        <p14:section name="Architecture" id="{077bea83-d7dc-ed00-fda3-7492387319d3}">
+        <p14:section name="Architecture" id="{688be7b5-f1d4-62fe-d7a2-72e3c4f386d9}">
           <p14:sldIdLst>
             <p14:sldId id="259"/>
           </p14:sldIdLst>
         </p14:section>
-        <p14:section name="Role of AI" id="{e1c68dad-4dd3-24be-731f-40585763b60d}">
+        <p14:section name="Role of AI" id="{a014ace5-129e-788c-b3b5-26f7012d901e}">
           <p14:sldIdLst>
             <p14:sldId id="260"/>
             <p14:sldId id="261"/>
             <p14:sldId id="262"/>
           </p14:sldIdLst>
         </p14:section>
-        <p14:section name="Demo" id="{88549333-3dcd-9db0-8503-bd4cf71baec3}">
+        <p14:section name="Demo" id="{cc3a17ab-63cc-d71b-e4aa-1a46a6039df6}">
           <p14:sldIdLst>
             <p14:sldId id="263"/>
             <p14:sldId id="264"/>
           </p14:sldIdLst>
         </p14:section>
-        <p14:section name="Proof" id="{01c1992f-6e66-3a2d-4c98-ee593112b3bf}">
+        <p14:section name="Proof" id="{da9e16af-40e6-0407-be5b-d599f25a401c}">
           <p14:sldIdLst>
             <p14:sldId id="265"/>
           </p14:sldIdLst>
         </p14:section>
-        <p14:section name="Differentiators" id="{6c0182bd-5149-fa2e-f1d2-c89e91640fba}">
+        <p14:section name="Differentiators" id="{9be66c6a-1fee-efa6-ab74-d8db8d88e1bf}">
           <p14:sldIdLst>
             <p14:sldId id="266"/>
           </p14:sldIdLst>
         </p14:section>
-        <p14:section name="Close" id="{001d4457-ee5d-3c02-bc32-441b34e85ab4}">
+        <p14:section name="Close" id="{9fad1c2e-80fe-83b5-2c08-1e73ae64ac87}">
           <p14:sldIdLst>
             <p14:sldId id="267"/>
           </p14:sldIdLst>
@@ -351,7 +351,7 @@
                   <c:v>0.844</c:v>
                 </c:pt>
                 <c:pt idx="1">
-                  <c:v>0.968</c:v>
+                  <c:v>0.977</c:v>
                 </c:pt>
                 <c:pt idx="2">
                   <c:v>0.999</c:v>
@@ -360,7 +360,7 @@
                   <c:v>0.677</c:v>
                 </c:pt>
                 <c:pt idx="4">
-                  <c:v>0.897</c:v>
+                  <c:v>0.909</c:v>
                 </c:pt>
               </c:numCache>
             </c:numRef>
@@ -1524,7 +1524,7 @@
           <a:p>
             <a:r>
               <a:rPr lang="en-US" dirty="0"/>
-              <a:t>[4:30–6:00 · Parameter 3: role of AI — deliberate, not decorative] 'We used AI exactly where rules fail.' Point at col_7 in the screenshot: the column name says nothing, the AI read the values and said PAN. Rules first (checksums are certain), then the AI model, then a person approves. Evidence: rules alone score 0.84 on the external benchmark's misleading-name test; with the AI model, 0.97 even with only 5 sample values. The honest real-data numbers are on the next slide. And deliberately NOT AI: the decision of who sees what is a fixed policy — explainable and testable. We also used AI coding assistants to build faster, with every change gated by 1,235 automated tests.</a:t>
+              <a:t>[4:30–6:00 · Parameter 3: role of AI — deliberate, not decorative] 'We used AI exactly where rules fail.' Point at col_7 in the screenshot: the column name says nothing, the AI read the values and said PAN. Rules first (checksums are certain), then the AI model, then a person approves. Evidence: rules alone score 0.84 on the external benchmark's misleading-name test; with the AI model, 0.97 even with only 5 sample values. The honest real-data numbers are on the next slide. And deliberately NOT AI: the decision of who sees what is a fixed policy — explainable and testable. We also used AI coding assistants to build faster, with every change gated by 1,244 automated tests.</a:t>
             </a:r>
             <a:endParaRPr lang="en-US" dirty="0"/>
           </a:p>
@@ -1612,7 +1612,7 @@
           <a:p>
             <a:r>
               <a:rPr lang="en-US" dirty="0"/>
-              <a:t>[~1 min · Parameter 3/4: accuracy and baselines] Pre-empt the 'too good to be true' reaction. 'The 0.999 you may have seen is on a public synthetic benchmark — clean data, so treat it as the ceiling. Here is the harder truth. On your Saffron Bank data, the first time we ran it, it found 22 of 35 sensitive columns — F1 0.68. The misses had four causes: money columns with short names like bal and amt, account numbers that looked like plain ids, PANs with 0000 digits that fail the official check, and two address columns. Nothing leaked — we checked: 0 of 1,300 real values reached Support or Analyst — because anything the AI isn't sure about stays hidden until a person approves it. One honest catch: two account-number columns were wrongly suggested as public; a reviewer who approved every suggestion blindly would have exposed them. That's fixed: a column named like a sensitive kind is never suggested public now. We fixed those general causes — not this dataset — and re-ran the benchmark to make sure nothing got worse. Now it finds 35 of 35, with 8 false alarms on the bank's own branch details: F1 0.90.' If asked 'isn't 0.90 tuned to our data?': 'Partly, yes — the fixes were made after seeing it, which is why we show the first-contact number too, and why the safety net doesn't depend on accuracy.' Numbers: docs/SAFFRON_VALIDATION.md and docs/EVALUATION.md.</a:t>
+              <a:t>[~1 min · Parameter 3/4: accuracy and baselines] Pre-empt the 'too good to be true' reaction. 'The 0.999 you may have seen is on a public synthetic benchmark — clean data, so treat it as the ceiling. Here is the harder truth. On your Saffron Bank data, the first time we ran it, it found 22 of 35 sensitive columns — F1 0.68. The misses had four causes: money columns with short names like bal and amt, account numbers that looked like plain ids, PANs with 0000 digits that fail the official check, and two address columns. Nothing leaked — we checked: 0 of 1,300 real values reached Support or Analyst — because anything the AI isn't sure about stays hidden until a person approves it. One honest catch: two account-number columns were wrongly suggested as public; a reviewer who approved every suggestion blindly would have exposed them. That's fixed: a column named like a sensitive kind is never suggested public now. We fixed those general causes — not this dataset — and re-ran the benchmark to make sure nothing got worse. Now it finds 35 of 35, with 7 false alarms on the bank's own branch details: F1 0.91.' If asked 'isn't 0.90 tuned to our data?': 'Partly, yes — the fixes were made after seeing it, which is why we show the first-contact number too, and why the safety net doesn't depend on accuracy.' Numbers: docs/SAFFRON_VALIDATION.md and docs/EVALUATION.md.</a:t>
             </a:r>
             <a:endParaRPr lang="en-US" dirty="0"/>
           </a:p>
@@ -1700,7 +1700,7 @@
           <a:p>
             <a:r>
               <a:rPr lang="en-US" dirty="0"/>
-              <a:t>[~1 min, right after Role of AI] Say it calmly, never mockingly: 'We looked at LLMs and quantum approaches and chose classic machine learning on purpose. A bank's customer data should never leave the bank to be classified, and the same column must always get the same answer. Our model is a 0.45 MB file, runs on a normal CPU in about 3 milliseconds a column, and makes no calls outside the bank. On quantum: we're already quantum-safe where it matters — our masking uses only symmetric cryptography, HMAC-SHA-256 and SHA-256, which quantum computers don't break the way they break RSA. And quantum machine learning hasn't beaten classical models on table data in recent benchmarks. We built what works in a bank today.' If asked about HTTPS: the TLS layer is the server's library; it can use post-quantum key exchange as a deployment setting.</a:t>
+              <a:t>[~1 min, right after Role of AI] Say it calmly, never mockingly: 'We looked at LLMs and quantum approaches and chose classic machine learning on purpose. A bank's customer data should never leave the bank to be classified, and the same column must always get the same answer. Our model is a 0.71 MB file, runs on a normal CPU in about 3 milliseconds a column, and makes no calls outside the bank. On quantum: we're already quantum-safe where it matters — our masking uses only symmetric cryptography, HMAC-SHA-256 and SHA-256, which quantum computers don't break the way they break RSA. And quantum machine learning hasn't beaten classical models on table data in recent benchmarks. We built what works in a bank today.' If asked about HTTPS: the TLS layer is the server's library; it can use post-quantum key exchange as a deployment setting.</a:t>
             </a:r>
             <a:endParaRPr lang="en-US" dirty="0"/>
           </a:p>
@@ -4287,7 +4287,7 @@
                 <a:ea typeface="Calibri" pitchFamily="34" charset="-122"/>
                 <a:cs typeface="Calibri" pitchFamily="34" charset="-120"/>
               </a:rPr>
-              <a:t>  ·  9 organiser users  ·  129,260 rows checked identical across all copies  ·  1,235 automated tests on every change</a:t>
+              <a:t>  ·  9 organiser users  ·  129,260 rows checked identical across all copies  ·  1,244 automated tests on every change</a:t>
             </a:r>
             <a:endParaRPr lang="en-US" sz="1400" dirty="0"/>
           </a:p>
@@ -12986,7 +12986,7 @@
         <p:spPr>
           <a:xfrm>
             <a:off x="548640" y="5029200"/>
-            <a:ext cx="6309360" cy="1188720"/>
+            <a:ext cx="6309360" cy="1371600"/>
           </a:xfrm>
           <a:prstGeom prst="rect">
             <a:avLst/>
@@ -13000,12 +13000,12 @@
           <a:p>
             <a:pPr indent="0" marL="0">
               <a:spcAft>
-                <a:spcPts val="400"/>
+                <a:spcPts val="300"/>
               </a:spcAft>
               <a:buNone/>
             </a:pPr>
             <a:r>
-              <a:rPr lang="en-US" sz="1250" b="1" dirty="0">
+              <a:rPr lang="en-US" sz="1150" b="1" dirty="0">
                 <a:solidFill>
                   <a:srgbClr val="0B1D33"/>
                 </a:solidFill>
@@ -13017,12 +13017,12 @@
             </a:r>
             <a:pPr indent="0" marL="0">
               <a:spcAft>
-                <a:spcPts val="400"/>
+                <a:spcPts val="300"/>
               </a:spcAft>
               <a:buNone/>
             </a:pPr>
             <a:r>
-              <a:rPr lang="en-US" sz="1250" dirty="0">
+              <a:rPr lang="en-US" sz="1150" dirty="0">
                 <a:solidFill>
                   <a:srgbClr val="1E3A5F"/>
                 </a:solidFill>
@@ -13032,17 +13032,17 @@
               </a:rPr>
               <a:t>public benchmark (bharat-pii-bench), synthetic columns with misleading names, data the model never trained on. Clean, so read it as the upper bound.</a:t>
             </a:r>
-            <a:endParaRPr lang="en-US" sz="1250" dirty="0"/>
+            <a:endParaRPr lang="en-US" sz="1150" dirty="0"/>
           </a:p>
           <a:p>
             <a:pPr indent="0" marL="0">
               <a:spcAft>
-                <a:spcPts val="400"/>
+                <a:spcPts val="300"/>
               </a:spcAft>
               <a:buNone/>
             </a:pPr>
             <a:r>
-              <a:rPr lang="en-US" sz="1250" b="1" dirty="0">
+              <a:rPr lang="en-US" sz="1150" b="1" dirty="0">
                 <a:solidFill>
                   <a:srgbClr val="D97706"/>
                 </a:solidFill>
@@ -13054,12 +13054,12 @@
             </a:r>
             <a:pPr indent="0" marL="0">
               <a:spcAft>
-                <a:spcPts val="400"/>
+                <a:spcPts val="300"/>
               </a:spcAft>
               <a:buNone/>
             </a:pPr>
             <a:r>
-              <a:rPr lang="en-US" sz="1250" dirty="0">
+              <a:rPr lang="en-US" sz="1150" dirty="0">
                 <a:solidFill>
                   <a:srgbClr val="1E3A5F"/>
                 </a:solidFill>
@@ -13069,7 +13069,44 @@
               </a:rPr>
               <a:t>the organisers' Saffron Bank data, 120 real-shaped columns.</a:t>
             </a:r>
-            <a:endParaRPr lang="en-US" sz="1250" dirty="0"/>
+            <a:endParaRPr lang="en-US" sz="1150" dirty="0"/>
+          </a:p>
+          <a:p>
+            <a:pPr indent="0" marL="0">
+              <a:spcAft>
+                <a:spcPts val="300"/>
+              </a:spcAft>
+              <a:buNone/>
+            </a:pPr>
+            <a:r>
+              <a:rPr lang="en-US" sz="1150" b="1" dirty="0">
+                <a:solidFill>
+                  <a:srgbClr val="0B1D33"/>
+                </a:solidFill>
+                <a:latin typeface="Calibri" pitchFamily="34" charset="0"/>
+                <a:ea typeface="Calibri" pitchFamily="34" charset="-122"/>
+                <a:cs typeface="Calibri" pitchFamily="34" charset="-120"/>
+              </a:rPr>
+              <a:t>Never-trained-on public datasets: </a:t>
+            </a:r>
+            <a:pPr indent="0" marL="0">
+              <a:spcAft>
+                <a:spcPts val="300"/>
+              </a:spcAft>
+              <a:buNone/>
+            </a:pPr>
+            <a:r>
+              <a:rPr lang="en-US" sz="1150" dirty="0">
+                <a:solidFill>
+                  <a:srgbClr val="1E3A5F"/>
+                </a:solidFill>
+                <a:latin typeface="Calibri" pitchFamily="34" charset="0"/>
+                <a:ea typeface="Calibri" pitchFamily="34" charset="-122"/>
+                <a:cs typeface="Calibri" pitchFamily="34" charset="-120"/>
+              </a:rPr>
+              <a:t>94% of 5,880 PII columns protected; 91% after damaging the data 11 ways real exports are (“NULL” text, quotes, half-masked).</a:t>
+            </a:r>
+            <a:endParaRPr lang="en-US" sz="1150" dirty="0"/>
           </a:p>
         </p:txBody>
       </p:sp>
@@ -14806,7 +14843,7 @@
                 <a:ea typeface="Cambria" pitchFamily="34" charset="-122"/>
                 <a:cs typeface="Cambria" pitchFamily="34" charset="-120"/>
               </a:rPr>
-              <a:t>0.45 MB</a:t>
+              <a:t>0.71 MB</a:t>
             </a:r>
             <a:endParaRPr lang="en-US" sz="2600" dirty="0"/>
           </a:p>
